--- a/КП/Презентация/Презентация.pptx
+++ b/КП/Презентация/Презентация.pptx
@@ -15,7 +15,7 @@
     <p:sldId id="266" r:id="rId9"/>
     <p:sldId id="264" r:id="rId10"/>
     <p:sldId id="265" r:id="rId11"/>
-    <p:sldId id="257" r:id="rId12"/>
+    <p:sldId id="267" r:id="rId12"/>
   </p:sldIdLst>
   <p:sldSz cx="12192000" cy="6858000"/>
   <p:notesSz cx="6858000" cy="9144000"/>
@@ -269,7 +269,7 @@
           <a:p>
             <a:fld id="{D373FD95-13B8-4D9F-981D-7E2051AFE206}" type="datetimeFigureOut">
               <a:rPr lang="ru-RU" smtClean="0"/>
-              <a:t>26.11.2025</a:t>
+              <a:t>03.12.2025</a:t>
             </a:fld>
             <a:endParaRPr lang="ru-RU"/>
           </a:p>
@@ -479,7 +479,7 @@
           <a:p>
             <a:fld id="{D373FD95-13B8-4D9F-981D-7E2051AFE206}" type="datetimeFigureOut">
               <a:rPr lang="ru-RU" smtClean="0"/>
-              <a:t>26.11.2025</a:t>
+              <a:t>03.12.2025</a:t>
             </a:fld>
             <a:endParaRPr lang="ru-RU"/>
           </a:p>
@@ -699,7 +699,7 @@
           <a:p>
             <a:fld id="{D373FD95-13B8-4D9F-981D-7E2051AFE206}" type="datetimeFigureOut">
               <a:rPr lang="ru-RU" smtClean="0"/>
-              <a:t>26.11.2025</a:t>
+              <a:t>03.12.2025</a:t>
             </a:fld>
             <a:endParaRPr lang="ru-RU"/>
           </a:p>
@@ -909,7 +909,7 @@
           <a:p>
             <a:fld id="{D373FD95-13B8-4D9F-981D-7E2051AFE206}" type="datetimeFigureOut">
               <a:rPr lang="ru-RU" smtClean="0"/>
-              <a:t>26.11.2025</a:t>
+              <a:t>03.12.2025</a:t>
             </a:fld>
             <a:endParaRPr lang="ru-RU"/>
           </a:p>
@@ -1196,7 +1196,7 @@
           <a:p>
             <a:fld id="{D373FD95-13B8-4D9F-981D-7E2051AFE206}" type="datetimeFigureOut">
               <a:rPr lang="ru-RU" smtClean="0"/>
-              <a:t>26.11.2025</a:t>
+              <a:t>03.12.2025</a:t>
             </a:fld>
             <a:endParaRPr lang="ru-RU"/>
           </a:p>
@@ -1473,7 +1473,7 @@
           <a:p>
             <a:fld id="{D373FD95-13B8-4D9F-981D-7E2051AFE206}" type="datetimeFigureOut">
               <a:rPr lang="ru-RU" smtClean="0"/>
-              <a:t>26.11.2025</a:t>
+              <a:t>03.12.2025</a:t>
             </a:fld>
             <a:endParaRPr lang="ru-RU"/>
           </a:p>
@@ -1897,7 +1897,7 @@
           <a:p>
             <a:fld id="{D373FD95-13B8-4D9F-981D-7E2051AFE206}" type="datetimeFigureOut">
               <a:rPr lang="ru-RU" smtClean="0"/>
-              <a:t>26.11.2025</a:t>
+              <a:t>03.12.2025</a:t>
             </a:fld>
             <a:endParaRPr lang="ru-RU"/>
           </a:p>
@@ -2050,7 +2050,7 @@
           <a:p>
             <a:fld id="{D373FD95-13B8-4D9F-981D-7E2051AFE206}" type="datetimeFigureOut">
               <a:rPr lang="ru-RU" smtClean="0"/>
-              <a:t>26.11.2025</a:t>
+              <a:t>03.12.2025</a:t>
             </a:fld>
             <a:endParaRPr lang="ru-RU"/>
           </a:p>
@@ -2175,7 +2175,7 @@
           <a:p>
             <a:fld id="{D373FD95-13B8-4D9F-981D-7E2051AFE206}" type="datetimeFigureOut">
               <a:rPr lang="ru-RU" smtClean="0"/>
-              <a:t>26.11.2025</a:t>
+              <a:t>03.12.2025</a:t>
             </a:fld>
             <a:endParaRPr lang="ru-RU"/>
           </a:p>
@@ -2498,7 +2498,7 @@
           <a:p>
             <a:fld id="{D373FD95-13B8-4D9F-981D-7E2051AFE206}" type="datetimeFigureOut">
               <a:rPr lang="ru-RU" smtClean="0"/>
-              <a:t>26.11.2025</a:t>
+              <a:t>03.12.2025</a:t>
             </a:fld>
             <a:endParaRPr lang="ru-RU"/>
           </a:p>
@@ -2798,7 +2798,7 @@
           <a:p>
             <a:fld id="{D373FD95-13B8-4D9F-981D-7E2051AFE206}" type="datetimeFigureOut">
               <a:rPr lang="ru-RU" smtClean="0"/>
-              <a:t>26.11.2025</a:t>
+              <a:t>03.12.2025</a:t>
             </a:fld>
             <a:endParaRPr lang="ru-RU"/>
           </a:p>
@@ -3051,7 +3051,7 @@
           <a:p>
             <a:fld id="{D373FD95-13B8-4D9F-981D-7E2051AFE206}" type="datetimeFigureOut">
               <a:rPr lang="ru-RU" smtClean="0"/>
-              <a:t>26.11.2025</a:t>
+              <a:t>03.12.2025</a:t>
             </a:fld>
             <a:endParaRPr lang="ru-RU"/>
           </a:p>
@@ -3466,6 +3466,14 @@
 <file path=ppt/slides/slide1.xml><?xml version="1.0" encoding="utf-8"?>
 <p:sld xmlns:a="http://schemas.openxmlformats.org/drawingml/2006/main" xmlns:r="http://schemas.openxmlformats.org/officeDocument/2006/relationships" xmlns:p="http://schemas.openxmlformats.org/presentationml/2006/main">
   <p:cSld>
+    <p:bg>
+      <p:bgPr>
+        <a:solidFill>
+          <a:srgbClr val="F4F7FB"/>
+        </a:solidFill>
+        <a:effectLst/>
+      </p:bgPr>
+    </p:bg>
     <p:spTree>
       <p:nvGrpSpPr>
         <p:cNvPr id="1" name=""/>
@@ -3482,206 +3490,10 @@
       </p:grpSpPr>
       <p:sp>
         <p:nvSpPr>
-          <p:cNvPr id="2" name="Заголовок 1">
+          <p:cNvPr id="42" name="Прямоугольник 41">
             <a:extLst>
               <a:ext uri="{FF2B5EF4-FFF2-40B4-BE49-F238E27FC236}">
-                <a16:creationId xmlns:a16="http://schemas.microsoft.com/office/drawing/2014/main" id="{CBD18954-7DD0-52DE-0C60-B75A128D2E7A}"/>
-              </a:ext>
-            </a:extLst>
-          </p:cNvPr>
-          <p:cNvSpPr>
-            <a:spLocks noGrp="1"/>
-          </p:cNvSpPr>
-          <p:nvPr>
-            <p:ph type="ctrTitle"/>
-          </p:nvPr>
-        </p:nvSpPr>
-        <p:spPr>
-          <a:xfrm>
-            <a:off x="1524000" y="0"/>
-            <a:ext cx="9144000" cy="1892300"/>
-          </a:xfrm>
-        </p:spPr>
-        <p:txBody>
-          <a:bodyPr>
-            <a:normAutofit fontScale="90000"/>
-          </a:bodyPr>
-          <a:lstStyle/>
-          <a:p>
-            <a:r>
-              <a:rPr lang="ru-RU" sz="1800" dirty="0"/>
-              <a:t>ФЕДЕРАЛЬНОЕ ГОСУДАРСТВЕННОЕ БЮДЖЕТНОЕ ОБРАЗОВАТЕЛЬНОЕ</a:t>
-            </a:r>
-            <a:br>
-              <a:rPr lang="ru-RU" sz="1800" dirty="0"/>
-            </a:br>
-            <a:r>
-              <a:rPr lang="ru-RU" sz="1800" dirty="0"/>
-              <a:t>УЧРЕЖДЕНИЕ ВЫСШЕГО ОБРАЗОВАНИЯ</a:t>
-            </a:r>
-            <a:br>
-              <a:rPr lang="ru-RU" sz="1800" dirty="0"/>
-            </a:br>
-            <a:r>
-              <a:rPr lang="ru-RU" sz="1800" dirty="0"/>
-              <a:t>«САНКТ-ПЕТЕРБУРГСКИЙ ГОСУДАРСТВЕННЫЙ УНИВЕРСИТЕТ</a:t>
-            </a:r>
-            <a:br>
-              <a:rPr lang="ru-RU" sz="1800" dirty="0"/>
-            </a:br>
-            <a:r>
-              <a:rPr lang="ru-RU" sz="1800" dirty="0"/>
-              <a:t>ТЕЛЕКОММУНИКАЦИЙ ИМ. ПРОФ. М.А. БОНЧ-БРУЕВИЧА»</a:t>
-            </a:r>
-            <a:br>
-              <a:rPr lang="ru-RU" sz="1800" dirty="0"/>
-            </a:br>
-            <a:r>
-              <a:rPr lang="ru-RU" sz="1800" dirty="0"/>
-              <a:t>(СПбГУТ)</a:t>
-            </a:r>
-            <a:br>
-              <a:rPr lang="ru-RU" sz="1800" dirty="0"/>
-            </a:br>
-            <a:r>
-              <a:rPr lang="ru-RU" sz="1800" dirty="0"/>
-              <a:t>АРХАНГЕЛЬСКИЙ КОЛЛЕДЖ ТЕЛЕКОММУНИКАЦИЙ</a:t>
-            </a:r>
-            <a:br>
-              <a:rPr lang="ru-RU" sz="1800" dirty="0"/>
-            </a:br>
-            <a:r>
-              <a:rPr lang="ru-RU" sz="1800" dirty="0"/>
-              <a:t>ИМ. Б.Л. РОЗИНГА (ФИЛИАЛ) СПбГУТ</a:t>
-            </a:r>
-            <a:br>
-              <a:rPr lang="ru-RU" sz="1800" dirty="0"/>
-            </a:br>
-            <a:r>
-              <a:rPr lang="ru-RU" sz="1800" dirty="0"/>
-              <a:t>(АКТ (ф) СПбГУТ)</a:t>
-            </a:r>
-          </a:p>
-        </p:txBody>
-      </p:sp>
-      <p:sp>
-        <p:nvSpPr>
-          <p:cNvPr id="3" name="Подзаголовок 2">
-            <a:extLst>
-              <a:ext uri="{FF2B5EF4-FFF2-40B4-BE49-F238E27FC236}">
-                <a16:creationId xmlns:a16="http://schemas.microsoft.com/office/drawing/2014/main" id="{C299979F-6AA7-C464-4AF4-8E89AFD4ACCB}"/>
-              </a:ext>
-            </a:extLst>
-          </p:cNvPr>
-          <p:cNvSpPr>
-            <a:spLocks noGrp="1"/>
-          </p:cNvSpPr>
-          <p:nvPr>
-            <p:ph type="subTitle" idx="1"/>
-          </p:nvPr>
-        </p:nvSpPr>
-        <p:spPr>
-          <a:xfrm>
-            <a:off x="1524000" y="2946400"/>
-            <a:ext cx="9144000" cy="1314450"/>
-          </a:xfrm>
-        </p:spPr>
-        <p:txBody>
-          <a:bodyPr>
-            <a:normAutofit/>
-          </a:bodyPr>
-          <a:lstStyle/>
-          <a:p>
-            <a:r>
-              <a:rPr lang="ru-RU" sz="3200" dirty="0"/>
-              <a:t>КУРСОВОЙ ПРОЕКТ</a:t>
-            </a:r>
-          </a:p>
-          <a:p>
-            <a:r>
-              <a:rPr lang="ru-RU" dirty="0"/>
-              <a:t>УЧЕТ НОМЕРНОГО ФОНДА СТУДЕНЧЕСКОГО ОБЩЕЖИТИЯ</a:t>
-            </a:r>
-          </a:p>
-        </p:txBody>
-      </p:sp>
-      <p:sp>
-        <p:nvSpPr>
-          <p:cNvPr id="5" name="TextBox 4">
-            <a:extLst>
-              <a:ext uri="{FF2B5EF4-FFF2-40B4-BE49-F238E27FC236}">
-                <a16:creationId xmlns:a16="http://schemas.microsoft.com/office/drawing/2014/main" id="{C2E0749F-66FE-7897-C6CA-9AE81CDECED1}"/>
-              </a:ext>
-            </a:extLst>
-          </p:cNvPr>
-          <p:cNvSpPr txBox="1"/>
-          <p:nvPr/>
-        </p:nvSpPr>
-        <p:spPr>
-          <a:xfrm>
-            <a:off x="857250" y="5314950"/>
-            <a:ext cx="6096000" cy="646331"/>
-          </a:xfrm>
-          <a:prstGeom prst="rect">
-            <a:avLst/>
-          </a:prstGeom>
-          <a:noFill/>
-        </p:spPr>
-        <p:txBody>
-          <a:bodyPr wrap="square">
-            <a:spAutoFit/>
-          </a:bodyPr>
-          <a:lstStyle/>
-          <a:p>
-            <a:r>
-              <a:rPr lang="ru-RU" dirty="0"/>
-              <a:t>Студент группы ИСПП-11: Екимов Вячеслав Андреевич Руководитель: Маломан Юлия Сергеевна</a:t>
-            </a:r>
-          </a:p>
-        </p:txBody>
-      </p:sp>
-      <p:sp>
-        <p:nvSpPr>
-          <p:cNvPr id="7" name="TextBox 6">
-            <a:extLst>
-              <a:ext uri="{FF2B5EF4-FFF2-40B4-BE49-F238E27FC236}">
-                <a16:creationId xmlns:a16="http://schemas.microsoft.com/office/drawing/2014/main" id="{306309C8-674B-A8BA-0E7B-5BBFD76179BB}"/>
-              </a:ext>
-            </a:extLst>
-          </p:cNvPr>
-          <p:cNvSpPr txBox="1"/>
-          <p:nvPr/>
-        </p:nvSpPr>
-        <p:spPr>
-          <a:xfrm>
-            <a:off x="3048000" y="6254234"/>
-            <a:ext cx="6096000" cy="369332"/>
-          </a:xfrm>
-          <a:prstGeom prst="rect">
-            <a:avLst/>
-          </a:prstGeom>
-          <a:noFill/>
-        </p:spPr>
-        <p:txBody>
-          <a:bodyPr wrap="square">
-            <a:spAutoFit/>
-          </a:bodyPr>
-          <a:lstStyle/>
-          <a:p>
-            <a:pPr algn="ctr"/>
-            <a:r>
-              <a:rPr lang="ru-RU" dirty="0"/>
-              <a:t>Архангельск, 2024</a:t>
-            </a:r>
-          </a:p>
-        </p:txBody>
-      </p:sp>
-      <p:sp>
-        <p:nvSpPr>
-          <p:cNvPr id="8" name="Прямоугольник 7">
-            <a:extLst>
-              <a:ext uri="{FF2B5EF4-FFF2-40B4-BE49-F238E27FC236}">
-                <a16:creationId xmlns:a16="http://schemas.microsoft.com/office/drawing/2014/main" id="{2295D769-EDB4-E79B-32FE-AE12194C0972}"/>
+                <a16:creationId xmlns:a16="http://schemas.microsoft.com/office/drawing/2014/main" id="{86810730-EE25-C82A-F25F-69F64D056E84}"/>
               </a:ext>
             </a:extLst>
           </p:cNvPr>
@@ -3690,7 +3502,7 @@
         </p:nvSpPr>
         <p:spPr>
           <a:xfrm>
-            <a:off x="0" y="0"/>
+            <a:off x="-1" y="-4281"/>
             <a:ext cx="762000" cy="6858000"/>
           </a:xfrm>
           <a:prstGeom prst="rect">
@@ -3728,42 +3540,371 @@
           </a:p>
         </p:txBody>
       </p:sp>
-      <p:pic>
-        <p:nvPicPr>
-          <p:cNvPr id="18" name="Рисунок 17">
+      <p:sp>
+        <p:nvSpPr>
+          <p:cNvPr id="9" name="Прямоугольник: скругленные углы 8">
             <a:extLst>
               <a:ext uri="{FF2B5EF4-FFF2-40B4-BE49-F238E27FC236}">
-                <a16:creationId xmlns:a16="http://schemas.microsoft.com/office/drawing/2014/main" id="{99444344-D127-2955-B2D0-4C0D72F6517D}"/>
+                <a16:creationId xmlns:a16="http://schemas.microsoft.com/office/drawing/2014/main" id="{61B28579-0E83-DC4D-20CD-2F2689BCC7D2}"/>
               </a:ext>
             </a:extLst>
           </p:cNvPr>
-          <p:cNvPicPr>
-            <a:picLocks noChangeAspect="1"/>
-          </p:cNvPicPr>
+          <p:cNvSpPr/>
           <p:nvPr/>
-        </p:nvPicPr>
-        <p:blipFill>
-          <a:blip r:embed="rId2">
-            <a:extLst>
-              <a:ext uri="{28A0092B-C50C-407E-A947-70E740481C1C}">
-                <a14:useLocalDpi xmlns:a14="http://schemas.microsoft.com/office/drawing/2010/main" val="0"/>
-              </a:ext>
-            </a:extLst>
-          </a:blip>
-          <a:stretch>
-            <a:fillRect/>
-          </a:stretch>
-        </p:blipFill>
+        </p:nvSpPr>
         <p:spPr>
           <a:xfrm>
-            <a:off x="5994412" y="3327412"/>
-            <a:ext cx="203175" cy="203175"/>
+            <a:off x="1041394" y="6188619"/>
+            <a:ext cx="10960105" cy="560572"/>
+          </a:xfrm>
+          <a:prstGeom prst="roundRect">
+            <a:avLst>
+              <a:gd name="adj" fmla="val 4689"/>
+            </a:avLst>
+          </a:prstGeom>
+          <a:solidFill>
+            <a:schemeClr val="bg1"/>
+          </a:solidFill>
+          <a:ln>
+            <a:solidFill>
+              <a:schemeClr val="bg1"/>
+            </a:solidFill>
+          </a:ln>
+        </p:spPr>
+        <p:style>
+          <a:lnRef idx="2">
+            <a:schemeClr val="accent1">
+              <a:shade val="15000"/>
+            </a:schemeClr>
+          </a:lnRef>
+          <a:fillRef idx="1">
+            <a:schemeClr val="accent1"/>
+          </a:fillRef>
+          <a:effectRef idx="0">
+            <a:schemeClr val="accent1"/>
+          </a:effectRef>
+          <a:fontRef idx="minor">
+            <a:schemeClr val="lt1"/>
+          </a:fontRef>
+        </p:style>
+        <p:txBody>
+          <a:bodyPr rtlCol="0" anchor="ctr"/>
+          <a:lstStyle/>
+          <a:p>
+            <a:pPr algn="ctr"/>
+            <a:endParaRPr lang="ru-RU"/>
+          </a:p>
+        </p:txBody>
+      </p:sp>
+      <p:sp>
+        <p:nvSpPr>
+          <p:cNvPr id="6" name="Прямоугольник: скругленные углы 5">
+            <a:extLst>
+              <a:ext uri="{FF2B5EF4-FFF2-40B4-BE49-F238E27FC236}">
+                <a16:creationId xmlns:a16="http://schemas.microsoft.com/office/drawing/2014/main" id="{6B01AE6A-EB93-06DA-C4AA-74A5829AEFAB}"/>
+              </a:ext>
+            </a:extLst>
+          </p:cNvPr>
+          <p:cNvSpPr/>
+          <p:nvPr/>
+        </p:nvSpPr>
+        <p:spPr>
+          <a:xfrm>
+            <a:off x="1041394" y="2425796"/>
+            <a:ext cx="10960105" cy="1107666"/>
+          </a:xfrm>
+          <a:prstGeom prst="roundRect">
+            <a:avLst>
+              <a:gd name="adj" fmla="val 4689"/>
+            </a:avLst>
+          </a:prstGeom>
+          <a:solidFill>
+            <a:schemeClr val="bg1"/>
+          </a:solidFill>
+          <a:ln>
+            <a:solidFill>
+              <a:schemeClr val="bg1"/>
+            </a:solidFill>
+          </a:ln>
+        </p:spPr>
+        <p:style>
+          <a:lnRef idx="2">
+            <a:schemeClr val="accent1">
+              <a:shade val="15000"/>
+            </a:schemeClr>
+          </a:lnRef>
+          <a:fillRef idx="1">
+            <a:schemeClr val="accent1"/>
+          </a:fillRef>
+          <a:effectRef idx="0">
+            <a:schemeClr val="accent1"/>
+          </a:effectRef>
+          <a:fontRef idx="minor">
+            <a:schemeClr val="lt1"/>
+          </a:fontRef>
+        </p:style>
+        <p:txBody>
+          <a:bodyPr rtlCol="0" anchor="ctr"/>
+          <a:lstStyle/>
+          <a:p>
+            <a:pPr algn="ctr"/>
+            <a:endParaRPr lang="ru-RU" dirty="0"/>
+          </a:p>
+        </p:txBody>
+      </p:sp>
+      <p:sp>
+        <p:nvSpPr>
+          <p:cNvPr id="4" name="Прямоугольник: скругленные углы 3">
+            <a:extLst>
+              <a:ext uri="{FF2B5EF4-FFF2-40B4-BE49-F238E27FC236}">
+                <a16:creationId xmlns:a16="http://schemas.microsoft.com/office/drawing/2014/main" id="{29863163-E171-A978-8A22-465A8E7589A2}"/>
+              </a:ext>
+            </a:extLst>
+          </p:cNvPr>
+          <p:cNvSpPr/>
+          <p:nvPr/>
+        </p:nvSpPr>
+        <p:spPr>
+          <a:xfrm>
+            <a:off x="1041394" y="13983"/>
+            <a:ext cx="10960105" cy="2202153"/>
+          </a:xfrm>
+          <a:prstGeom prst="roundRect">
+            <a:avLst>
+              <a:gd name="adj" fmla="val 4689"/>
+            </a:avLst>
+          </a:prstGeom>
+          <a:solidFill>
+            <a:schemeClr val="bg1"/>
+          </a:solidFill>
+          <a:ln>
+            <a:solidFill>
+              <a:schemeClr val="bg1"/>
+            </a:solidFill>
+          </a:ln>
+        </p:spPr>
+        <p:style>
+          <a:lnRef idx="2">
+            <a:schemeClr val="accent1">
+              <a:shade val="15000"/>
+            </a:schemeClr>
+          </a:lnRef>
+          <a:fillRef idx="1">
+            <a:schemeClr val="accent1"/>
+          </a:fillRef>
+          <a:effectRef idx="0">
+            <a:schemeClr val="accent1"/>
+          </a:effectRef>
+          <a:fontRef idx="minor">
+            <a:schemeClr val="lt1"/>
+          </a:fontRef>
+        </p:style>
+        <p:txBody>
+          <a:bodyPr rtlCol="0" anchor="ctr"/>
+          <a:lstStyle/>
+          <a:p>
+            <a:pPr algn="ctr"/>
+            <a:endParaRPr lang="ru-RU"/>
+          </a:p>
+        </p:txBody>
+      </p:sp>
+      <p:sp>
+        <p:nvSpPr>
+          <p:cNvPr id="2" name="Заголовок 1">
+            <a:extLst>
+              <a:ext uri="{FF2B5EF4-FFF2-40B4-BE49-F238E27FC236}">
+                <a16:creationId xmlns:a16="http://schemas.microsoft.com/office/drawing/2014/main" id="{CBD18954-7DD0-52DE-0C60-B75A128D2E7A}"/>
+              </a:ext>
+            </a:extLst>
+          </p:cNvPr>
+          <p:cNvSpPr>
+            <a:spLocks noGrp="1"/>
+          </p:cNvSpPr>
+          <p:nvPr>
+            <p:ph type="ctrTitle"/>
+          </p:nvPr>
+        </p:nvSpPr>
+        <p:spPr>
+          <a:xfrm>
+            <a:off x="1949446" y="168909"/>
+            <a:ext cx="9144000" cy="1892300"/>
+          </a:xfrm>
+        </p:spPr>
+        <p:txBody>
+          <a:bodyPr>
+            <a:normAutofit fontScale="90000"/>
+          </a:bodyPr>
+          <a:lstStyle/>
+          <a:p>
+            <a:r>
+              <a:rPr lang="ru-RU" sz="1800" dirty="0">
+                <a:latin typeface="Comfortaa Medium" pitchFamily="2" charset="0"/>
+              </a:rPr>
+              <a:t>ФЕДЕРАЛЬНОЕ ГОСУДАРСТВЕННОЕ БЮДЖЕТНОЕ ОБРАЗОВАТЕЛЬНОЕ</a:t>
+            </a:r>
+            <a:br>
+              <a:rPr lang="ru-RU" sz="1800" dirty="0">
+                <a:latin typeface="Comfortaa Medium" pitchFamily="2" charset="0"/>
+              </a:rPr>
+            </a:br>
+            <a:r>
+              <a:rPr lang="ru-RU" sz="1800" dirty="0">
+                <a:latin typeface="Comfortaa Medium" pitchFamily="2" charset="0"/>
+              </a:rPr>
+              <a:t>УЧРЕЖДЕНИЕ ВЫСШЕГО ОБРАЗОВАНИЯ</a:t>
+            </a:r>
+            <a:br>
+              <a:rPr lang="ru-RU" sz="1800" dirty="0">
+                <a:latin typeface="Comfortaa Medium" pitchFamily="2" charset="0"/>
+              </a:rPr>
+            </a:br>
+            <a:r>
+              <a:rPr lang="ru-RU" sz="1800" dirty="0">
+                <a:latin typeface="Comfortaa Medium" pitchFamily="2" charset="0"/>
+              </a:rPr>
+              <a:t>«САНКТ-ПЕТЕРБУРГСКИЙ ГОСУДАРСТВЕННЫЙ УНИВЕРСИТЕТ</a:t>
+            </a:r>
+            <a:br>
+              <a:rPr lang="ru-RU" sz="1800" dirty="0">
+                <a:latin typeface="Comfortaa Medium" pitchFamily="2" charset="0"/>
+              </a:rPr>
+            </a:br>
+            <a:r>
+              <a:rPr lang="ru-RU" sz="1800" dirty="0">
+                <a:latin typeface="Comfortaa Medium" pitchFamily="2" charset="0"/>
+              </a:rPr>
+              <a:t>ТЕЛЕКОММУНИКАЦИЙ ИМ. ПРОФ. М.А. БОНЧ-БРУЕВИЧА»</a:t>
+            </a:r>
+            <a:br>
+              <a:rPr lang="ru-RU" sz="1800" dirty="0">
+                <a:latin typeface="Comfortaa Medium" pitchFamily="2" charset="0"/>
+              </a:rPr>
+            </a:br>
+            <a:r>
+              <a:rPr lang="ru-RU" sz="1800" dirty="0">
+                <a:latin typeface="Comfortaa Medium" pitchFamily="2" charset="0"/>
+              </a:rPr>
+              <a:t>(СПбГУТ)</a:t>
+            </a:r>
+            <a:br>
+              <a:rPr lang="ru-RU" sz="1800" dirty="0">
+                <a:latin typeface="Comfortaa Medium" pitchFamily="2" charset="0"/>
+              </a:rPr>
+            </a:br>
+            <a:r>
+              <a:rPr lang="ru-RU" sz="1800" dirty="0">
+                <a:latin typeface="Comfortaa Medium" pitchFamily="2" charset="0"/>
+              </a:rPr>
+              <a:t>АРХАНГЕЛЬСКИЙ КОЛЛЕДЖ ТЕЛЕКОММУНИКАЦИЙ</a:t>
+            </a:r>
+            <a:br>
+              <a:rPr lang="ru-RU" sz="1800" dirty="0">
+                <a:latin typeface="Comfortaa Medium" pitchFamily="2" charset="0"/>
+              </a:rPr>
+            </a:br>
+            <a:r>
+              <a:rPr lang="ru-RU" sz="1800" dirty="0">
+                <a:latin typeface="Comfortaa Medium" pitchFamily="2" charset="0"/>
+              </a:rPr>
+              <a:t>ИМ. Б.Л. РОЗИНГА (ФИЛИАЛ) СПбГУТ</a:t>
+            </a:r>
+            <a:br>
+              <a:rPr lang="ru-RU" sz="1800" dirty="0">
+                <a:latin typeface="Comfortaa Medium" pitchFamily="2" charset="0"/>
+              </a:rPr>
+            </a:br>
+            <a:r>
+              <a:rPr lang="ru-RU" sz="1800" dirty="0">
+                <a:latin typeface="Comfortaa Medium" pitchFamily="2" charset="0"/>
+              </a:rPr>
+              <a:t>(АКТ (ф) СПбГУТ)</a:t>
+            </a:r>
+          </a:p>
+        </p:txBody>
+      </p:sp>
+      <p:sp>
+        <p:nvSpPr>
+          <p:cNvPr id="3" name="Подзаголовок 2">
+            <a:extLst>
+              <a:ext uri="{FF2B5EF4-FFF2-40B4-BE49-F238E27FC236}">
+                <a16:creationId xmlns:a16="http://schemas.microsoft.com/office/drawing/2014/main" id="{C299979F-6AA7-C464-4AF4-8E89AFD4ACCB}"/>
+              </a:ext>
+            </a:extLst>
+          </p:cNvPr>
+          <p:cNvSpPr>
+            <a:spLocks noGrp="1"/>
+          </p:cNvSpPr>
+          <p:nvPr>
+            <p:ph type="subTitle" idx="1"/>
+          </p:nvPr>
+        </p:nvSpPr>
+        <p:spPr>
+          <a:xfrm>
+            <a:off x="1949445" y="2534539"/>
+            <a:ext cx="9144000" cy="890180"/>
+          </a:xfrm>
+        </p:spPr>
+        <p:txBody>
+          <a:bodyPr>
+            <a:normAutofit fontScale="85000" lnSpcReduction="10000"/>
+          </a:bodyPr>
+          <a:lstStyle/>
+          <a:p>
+            <a:r>
+              <a:rPr lang="ru-RU" sz="3200" dirty="0">
+                <a:latin typeface="Comfortaa Medium" pitchFamily="2" charset="0"/>
+              </a:rPr>
+              <a:t>КУРСОВОЙ ПРОЕКТ</a:t>
+            </a:r>
+          </a:p>
+          <a:p>
+            <a:r>
+              <a:rPr lang="ru-RU" dirty="0">
+                <a:latin typeface="Comfortaa Medium" pitchFamily="2" charset="0"/>
+              </a:rPr>
+              <a:t>УЧЕТ НОМЕРНОГО ФОНДА СТУДЕНЧЕСКОГО ОБЩЕЖИТИЯ</a:t>
+            </a:r>
+          </a:p>
+        </p:txBody>
+      </p:sp>
+      <p:sp>
+        <p:nvSpPr>
+          <p:cNvPr id="7" name="TextBox 6">
+            <a:extLst>
+              <a:ext uri="{FF2B5EF4-FFF2-40B4-BE49-F238E27FC236}">
+                <a16:creationId xmlns:a16="http://schemas.microsoft.com/office/drawing/2014/main" id="{306309C8-674B-A8BA-0E7B-5BBFD76179BB}"/>
+              </a:ext>
+            </a:extLst>
+          </p:cNvPr>
+          <p:cNvSpPr txBox="1"/>
+          <p:nvPr/>
+        </p:nvSpPr>
+        <p:spPr>
+          <a:xfrm>
+            <a:off x="3473446" y="6284239"/>
+            <a:ext cx="6096000" cy="369332"/>
           </a:xfrm>
           <a:prstGeom prst="rect">
             <a:avLst/>
           </a:prstGeom>
+          <a:noFill/>
         </p:spPr>
-      </p:pic>
+        <p:txBody>
+          <a:bodyPr wrap="square">
+            <a:spAutoFit/>
+          </a:bodyPr>
+          <a:lstStyle/>
+          <a:p>
+            <a:pPr algn="ctr"/>
+            <a:r>
+              <a:rPr lang="ru-RU" dirty="0">
+                <a:latin typeface="Comfortaa Medium" pitchFamily="2" charset="0"/>
+              </a:rPr>
+              <a:t>Архангельск, 2025</a:t>
+            </a:r>
+          </a:p>
+        </p:txBody>
+      </p:sp>
       <p:grpSp>
         <p:nvGrpSpPr>
           <p:cNvPr id="47" name="Группа 46">
@@ -3873,7 +4014,7 @@
               <p:nvPr/>
             </p:nvPicPr>
             <p:blipFill>
-              <a:blip r:embed="rId3">
+              <a:blip r:embed="rId2">
                 <a:extLst>
                   <a:ext uri="{28A0092B-C50C-407E-A947-70E740481C1C}">
                     <a14:useLocalDpi xmlns:a14="http://schemas.microsoft.com/office/drawing/2010/main" val="0"/>
@@ -4031,7 +4172,7 @@
             <p:nvPr/>
           </p:nvPicPr>
           <p:blipFill>
-            <a:blip r:embed="rId4">
+            <a:blip r:embed="rId3">
               <a:extLst>
                 <a:ext uri="{28A0092B-C50C-407E-A947-70E740481C1C}">
                   <a14:useLocalDpi xmlns:a14="http://schemas.microsoft.com/office/drawing/2010/main" val="0"/>
@@ -4067,7 +4208,7 @@
             <p:nvPr/>
           </p:nvPicPr>
           <p:blipFill>
-            <a:blip r:embed="rId5">
+            <a:blip r:embed="rId4">
               <a:extLst>
                 <a:ext uri="{28A0092B-C50C-407E-A947-70E740481C1C}">
                   <a14:useLocalDpi xmlns:a14="http://schemas.microsoft.com/office/drawing/2010/main" val="0"/>
@@ -4103,7 +4244,7 @@
             <p:nvPr/>
           </p:nvPicPr>
           <p:blipFill>
-            <a:blip r:embed="rId6">
+            <a:blip r:embed="rId5">
               <a:extLst>
                 <a:ext uri="{28A0092B-C50C-407E-A947-70E740481C1C}">
                   <a14:useLocalDpi xmlns:a14="http://schemas.microsoft.com/office/drawing/2010/main" val="0"/>
@@ -4139,7 +4280,7 @@
             <p:nvPr/>
           </p:nvPicPr>
           <p:blipFill>
-            <a:blip r:embed="rId7">
+            <a:blip r:embed="rId6">
               <a:extLst>
                 <a:ext uri="{28A0092B-C50C-407E-A947-70E740481C1C}">
                   <a14:useLocalDpi xmlns:a14="http://schemas.microsoft.com/office/drawing/2010/main" val="0"/>
@@ -4175,7 +4316,7 @@
             <p:nvPr/>
           </p:nvPicPr>
           <p:blipFill>
-            <a:blip r:embed="rId8">
+            <a:blip r:embed="rId7">
               <a:extLst>
                 <a:ext uri="{28A0092B-C50C-407E-A947-70E740481C1C}">
                   <a14:useLocalDpi xmlns:a14="http://schemas.microsoft.com/office/drawing/2010/main" val="0"/>
@@ -4211,7 +4352,7 @@
             <p:nvPr/>
           </p:nvPicPr>
           <p:blipFill>
-            <a:blip r:embed="rId9">
+            <a:blip r:embed="rId8">
               <a:extLst>
                 <a:ext uri="{28A0092B-C50C-407E-A947-70E740481C1C}">
                   <a14:useLocalDpi xmlns:a14="http://schemas.microsoft.com/office/drawing/2010/main" val="0"/>
@@ -4247,7 +4388,7 @@
             <p:nvPr/>
           </p:nvPicPr>
           <p:blipFill>
-            <a:blip r:embed="rId10">
+            <a:blip r:embed="rId9">
               <a:extLst>
                 <a:ext uri="{28A0092B-C50C-407E-A947-70E740481C1C}">
                   <a14:useLocalDpi xmlns:a14="http://schemas.microsoft.com/office/drawing/2010/main" val="0"/>
@@ -4283,7 +4424,7 @@
             <p:nvPr/>
           </p:nvPicPr>
           <p:blipFill>
-            <a:blip r:embed="rId11">
+            <a:blip r:embed="rId10">
               <a:extLst>
                 <a:ext uri="{28A0092B-C50C-407E-A947-70E740481C1C}">
                   <a14:useLocalDpi xmlns:a14="http://schemas.microsoft.com/office/drawing/2010/main" val="0"/>
@@ -4319,7 +4460,7 @@
             <p:nvPr/>
           </p:nvPicPr>
           <p:blipFill>
-            <a:blip r:embed="rId12">
+            <a:blip r:embed="rId11">
               <a:extLst>
                 <a:ext uri="{28A0092B-C50C-407E-A947-70E740481C1C}">
                   <a14:useLocalDpi xmlns:a14="http://schemas.microsoft.com/office/drawing/2010/main" val="0"/>
@@ -4340,6 +4481,464 @@
             </a:prstGeom>
           </p:spPr>
         </p:pic>
+      </p:grpSp>
+      <p:grpSp>
+        <p:nvGrpSpPr>
+          <p:cNvPr id="22" name="Группа 21">
+            <a:extLst>
+              <a:ext uri="{FF2B5EF4-FFF2-40B4-BE49-F238E27FC236}">
+                <a16:creationId xmlns:a16="http://schemas.microsoft.com/office/drawing/2014/main" id="{65C55BAC-EF9E-6CCB-E314-96A72DFB5AE9}"/>
+              </a:ext>
+            </a:extLst>
+          </p:cNvPr>
+          <p:cNvGrpSpPr/>
+          <p:nvPr/>
+        </p:nvGrpSpPr>
+        <p:grpSpPr>
+          <a:xfrm>
+            <a:off x="1041393" y="3810289"/>
+            <a:ext cx="10960105" cy="936757"/>
+            <a:chOff x="1041393" y="3810289"/>
+            <a:chExt cx="10960105" cy="936757"/>
+          </a:xfrm>
+        </p:grpSpPr>
+        <p:sp>
+          <p:nvSpPr>
+            <p:cNvPr id="10" name="Прямоугольник: скругленные углы 9">
+              <a:extLst>
+                <a:ext uri="{FF2B5EF4-FFF2-40B4-BE49-F238E27FC236}">
+                  <a16:creationId xmlns:a16="http://schemas.microsoft.com/office/drawing/2014/main" id="{EB65875A-32E1-2EC0-91AD-3DB6CB8EA56C}"/>
+                </a:ext>
+              </a:extLst>
+            </p:cNvPr>
+            <p:cNvSpPr/>
+            <p:nvPr/>
+          </p:nvSpPr>
+          <p:spPr>
+            <a:xfrm>
+              <a:off x="1041393" y="3810289"/>
+              <a:ext cx="10960105" cy="936757"/>
+            </a:xfrm>
+            <a:prstGeom prst="roundRect">
+              <a:avLst>
+                <a:gd name="adj" fmla="val 4689"/>
+              </a:avLst>
+            </a:prstGeom>
+            <a:solidFill>
+              <a:schemeClr val="bg1"/>
+            </a:solidFill>
+            <a:ln>
+              <a:solidFill>
+                <a:schemeClr val="bg1"/>
+              </a:solidFill>
+            </a:ln>
+          </p:spPr>
+          <p:style>
+            <a:lnRef idx="2">
+              <a:schemeClr val="accent1">
+                <a:shade val="15000"/>
+              </a:schemeClr>
+            </a:lnRef>
+            <a:fillRef idx="1">
+              <a:schemeClr val="accent1"/>
+            </a:fillRef>
+            <a:effectRef idx="0">
+              <a:schemeClr val="accent1"/>
+            </a:effectRef>
+            <a:fontRef idx="minor">
+              <a:schemeClr val="lt1"/>
+            </a:fontRef>
+          </p:style>
+          <p:txBody>
+            <a:bodyPr rtlCol="0" anchor="ctr"/>
+            <a:lstStyle/>
+            <a:p>
+              <a:pPr algn="ctr"/>
+              <a:endParaRPr lang="ru-RU" dirty="0"/>
+            </a:p>
+          </p:txBody>
+        </p:sp>
+        <p:sp>
+          <p:nvSpPr>
+            <p:cNvPr id="5" name="TextBox 4">
+              <a:extLst>
+                <a:ext uri="{FF2B5EF4-FFF2-40B4-BE49-F238E27FC236}">
+                  <a16:creationId xmlns:a16="http://schemas.microsoft.com/office/drawing/2014/main" id="{C2E0749F-66FE-7897-C6CA-9AE81CDECED1}"/>
+                </a:ext>
+              </a:extLst>
+            </p:cNvPr>
+            <p:cNvSpPr txBox="1"/>
+            <p:nvPr/>
+          </p:nvSpPr>
+          <p:spPr>
+            <a:xfrm>
+              <a:off x="1823834" y="3951615"/>
+              <a:ext cx="4272166" cy="646331"/>
+            </a:xfrm>
+            <a:prstGeom prst="rect">
+              <a:avLst/>
+            </a:prstGeom>
+            <a:noFill/>
+          </p:spPr>
+          <p:txBody>
+            <a:bodyPr wrap="square">
+              <a:spAutoFit/>
+            </a:bodyPr>
+            <a:lstStyle/>
+            <a:p>
+              <a:r>
+                <a:rPr lang="ru-RU" dirty="0">
+                  <a:latin typeface="Comfortaa Medium" pitchFamily="2" charset="0"/>
+                </a:rPr>
+                <a:t>Екимов Вячеслав Андреевич</a:t>
+              </a:r>
+            </a:p>
+            <a:p>
+              <a:r>
+                <a:rPr lang="ru-RU" dirty="0">
+                  <a:solidFill>
+                    <a:schemeClr val="tx1">
+                      <a:lumMod val="50000"/>
+                      <a:lumOff val="50000"/>
+                    </a:schemeClr>
+                  </a:solidFill>
+                  <a:latin typeface="Comfortaa Medium" pitchFamily="2" charset="0"/>
+                </a:rPr>
+                <a:t>Студент ИСПП-21</a:t>
+              </a:r>
+              <a:endParaRPr lang="en-US" dirty="0">
+                <a:latin typeface="Comfortaa Medium" pitchFamily="2" charset="0"/>
+              </a:endParaRPr>
+            </a:p>
+          </p:txBody>
+        </p:sp>
+        <p:sp>
+          <p:nvSpPr>
+            <p:cNvPr id="14" name="Овал 13">
+              <a:extLst>
+                <a:ext uri="{FF2B5EF4-FFF2-40B4-BE49-F238E27FC236}">
+                  <a16:creationId xmlns:a16="http://schemas.microsoft.com/office/drawing/2014/main" id="{B6EB8749-655F-4E01-175E-8413EA8D8460}"/>
+                </a:ext>
+              </a:extLst>
+            </p:cNvPr>
+            <p:cNvSpPr/>
+            <p:nvPr/>
+          </p:nvSpPr>
+          <p:spPr>
+            <a:xfrm>
+              <a:off x="1217220" y="3999274"/>
+              <a:ext cx="558787" cy="558787"/>
+            </a:xfrm>
+            <a:prstGeom prst="ellipse">
+              <a:avLst/>
+            </a:prstGeom>
+            <a:solidFill>
+              <a:srgbClr val="FFA726"/>
+            </a:solidFill>
+            <a:ln>
+              <a:noFill/>
+            </a:ln>
+          </p:spPr>
+          <p:style>
+            <a:lnRef idx="2">
+              <a:schemeClr val="accent1">
+                <a:shade val="15000"/>
+              </a:schemeClr>
+            </a:lnRef>
+            <a:fillRef idx="1">
+              <a:schemeClr val="accent1"/>
+            </a:fillRef>
+            <a:effectRef idx="0">
+              <a:schemeClr val="accent1"/>
+            </a:effectRef>
+            <a:fontRef idx="minor">
+              <a:schemeClr val="lt1"/>
+            </a:fontRef>
+          </p:style>
+          <p:txBody>
+            <a:bodyPr rtlCol="0" anchor="ctr"/>
+            <a:lstStyle/>
+            <a:p>
+              <a:pPr algn="ctr"/>
+              <a:endParaRPr lang="ru-RU" sz="1400" dirty="0">
+                <a:latin typeface="Bahnschrift" panose="020B0502040204020203" pitchFamily="34" charset="0"/>
+              </a:endParaRPr>
+            </a:p>
+          </p:txBody>
+        </p:sp>
+        <p:sp>
+          <p:nvSpPr>
+            <p:cNvPr id="16" name="TextBox 15">
+              <a:extLst>
+                <a:ext uri="{FF2B5EF4-FFF2-40B4-BE49-F238E27FC236}">
+                  <a16:creationId xmlns:a16="http://schemas.microsoft.com/office/drawing/2014/main" id="{248FB1EF-8C8F-AE92-D962-B4449F936EBE}"/>
+                </a:ext>
+              </a:extLst>
+            </p:cNvPr>
+            <p:cNvSpPr txBox="1"/>
+            <p:nvPr/>
+          </p:nvSpPr>
+          <p:spPr>
+            <a:xfrm>
+              <a:off x="1169392" y="4109390"/>
+              <a:ext cx="654442" cy="338554"/>
+            </a:xfrm>
+            <a:prstGeom prst="rect">
+              <a:avLst/>
+            </a:prstGeom>
+            <a:noFill/>
+          </p:spPr>
+          <p:txBody>
+            <a:bodyPr wrap="square">
+              <a:spAutoFit/>
+            </a:bodyPr>
+            <a:lstStyle/>
+            <a:p>
+              <a:pPr algn="ctr"/>
+              <a:r>
+                <a:rPr lang="ru-RU" sz="1600" dirty="0">
+                  <a:solidFill>
+                    <a:schemeClr val="bg1"/>
+                  </a:solidFill>
+                  <a:latin typeface="Comfortaa Medium" pitchFamily="2" charset="0"/>
+                </a:rPr>
+                <a:t>ЕВ</a:t>
+              </a:r>
+              <a:endParaRPr lang="ru-RU" dirty="0">
+                <a:solidFill>
+                  <a:schemeClr val="bg1"/>
+                </a:solidFill>
+                <a:latin typeface="Comfortaa Medium" pitchFamily="2" charset="0"/>
+              </a:endParaRPr>
+            </a:p>
+          </p:txBody>
+        </p:sp>
+      </p:grpSp>
+      <p:grpSp>
+        <p:nvGrpSpPr>
+          <p:cNvPr id="32" name="Группа 31">
+            <a:extLst>
+              <a:ext uri="{FF2B5EF4-FFF2-40B4-BE49-F238E27FC236}">
+                <a16:creationId xmlns:a16="http://schemas.microsoft.com/office/drawing/2014/main" id="{EE986487-9429-C499-8724-017514621CCF}"/>
+              </a:ext>
+            </a:extLst>
+          </p:cNvPr>
+          <p:cNvGrpSpPr/>
+          <p:nvPr/>
+        </p:nvGrpSpPr>
+        <p:grpSpPr>
+          <a:xfrm>
+            <a:off x="1041393" y="4984592"/>
+            <a:ext cx="10960105" cy="936757"/>
+            <a:chOff x="1041393" y="3810289"/>
+            <a:chExt cx="10960105" cy="936757"/>
+          </a:xfrm>
+        </p:grpSpPr>
+        <p:sp>
+          <p:nvSpPr>
+            <p:cNvPr id="34" name="Прямоугольник: скругленные углы 33">
+              <a:extLst>
+                <a:ext uri="{FF2B5EF4-FFF2-40B4-BE49-F238E27FC236}">
+                  <a16:creationId xmlns:a16="http://schemas.microsoft.com/office/drawing/2014/main" id="{796D25D8-227A-A5E4-C77E-300DB3445612}"/>
+                </a:ext>
+              </a:extLst>
+            </p:cNvPr>
+            <p:cNvSpPr/>
+            <p:nvPr/>
+          </p:nvSpPr>
+          <p:spPr>
+            <a:xfrm>
+              <a:off x="1041393" y="3810289"/>
+              <a:ext cx="10960105" cy="936757"/>
+            </a:xfrm>
+            <a:prstGeom prst="roundRect">
+              <a:avLst>
+                <a:gd name="adj" fmla="val 4689"/>
+              </a:avLst>
+            </a:prstGeom>
+            <a:solidFill>
+              <a:schemeClr val="bg1"/>
+            </a:solidFill>
+            <a:ln>
+              <a:solidFill>
+                <a:schemeClr val="bg1"/>
+              </a:solidFill>
+            </a:ln>
+          </p:spPr>
+          <p:style>
+            <a:lnRef idx="2">
+              <a:schemeClr val="accent1">
+                <a:shade val="15000"/>
+              </a:schemeClr>
+            </a:lnRef>
+            <a:fillRef idx="1">
+              <a:schemeClr val="accent1"/>
+            </a:fillRef>
+            <a:effectRef idx="0">
+              <a:schemeClr val="accent1"/>
+            </a:effectRef>
+            <a:fontRef idx="minor">
+              <a:schemeClr val="lt1"/>
+            </a:fontRef>
+          </p:style>
+          <p:txBody>
+            <a:bodyPr rtlCol="0" anchor="ctr"/>
+            <a:lstStyle/>
+            <a:p>
+              <a:pPr algn="ctr"/>
+              <a:endParaRPr lang="ru-RU" dirty="0"/>
+            </a:p>
+          </p:txBody>
+        </p:sp>
+        <p:sp>
+          <p:nvSpPr>
+            <p:cNvPr id="36" name="TextBox 35">
+              <a:extLst>
+                <a:ext uri="{FF2B5EF4-FFF2-40B4-BE49-F238E27FC236}">
+                  <a16:creationId xmlns:a16="http://schemas.microsoft.com/office/drawing/2014/main" id="{98235508-5A28-DD3A-F598-1FBD1167AFEB}"/>
+                </a:ext>
+              </a:extLst>
+            </p:cNvPr>
+            <p:cNvSpPr txBox="1"/>
+            <p:nvPr/>
+          </p:nvSpPr>
+          <p:spPr>
+            <a:xfrm>
+              <a:off x="1823834" y="3951615"/>
+              <a:ext cx="4272166" cy="646331"/>
+            </a:xfrm>
+            <a:prstGeom prst="rect">
+              <a:avLst/>
+            </a:prstGeom>
+            <a:noFill/>
+          </p:spPr>
+          <p:txBody>
+            <a:bodyPr wrap="square">
+              <a:spAutoFit/>
+            </a:bodyPr>
+            <a:lstStyle/>
+            <a:p>
+              <a:r>
+                <a:rPr lang="ru-RU" dirty="0">
+                  <a:latin typeface="Comfortaa Medium" pitchFamily="2" charset="0"/>
+                </a:rPr>
+                <a:t>Маломан Юлия Сергеевна</a:t>
+              </a:r>
+            </a:p>
+            <a:p>
+              <a:r>
+                <a:rPr lang="ru-RU" dirty="0">
+                  <a:solidFill>
+                    <a:schemeClr val="tx1">
+                      <a:lumMod val="50000"/>
+                      <a:lumOff val="50000"/>
+                    </a:schemeClr>
+                  </a:solidFill>
+                  <a:latin typeface="Comfortaa Medium" pitchFamily="2" charset="0"/>
+                </a:rPr>
+                <a:t>Руководитель</a:t>
+              </a:r>
+              <a:endParaRPr lang="en-US" dirty="0">
+                <a:latin typeface="Comfortaa Medium" pitchFamily="2" charset="0"/>
+              </a:endParaRPr>
+            </a:p>
+          </p:txBody>
+        </p:sp>
+        <p:sp>
+          <p:nvSpPr>
+            <p:cNvPr id="38" name="Овал 37">
+              <a:extLst>
+                <a:ext uri="{FF2B5EF4-FFF2-40B4-BE49-F238E27FC236}">
+                  <a16:creationId xmlns:a16="http://schemas.microsoft.com/office/drawing/2014/main" id="{4BC0F6A8-8849-BF83-8D56-BE8A4B580853}"/>
+                </a:ext>
+              </a:extLst>
+            </p:cNvPr>
+            <p:cNvSpPr/>
+            <p:nvPr/>
+          </p:nvSpPr>
+          <p:spPr>
+            <a:xfrm>
+              <a:off x="1217221" y="3987648"/>
+              <a:ext cx="558787" cy="558787"/>
+            </a:xfrm>
+            <a:prstGeom prst="ellipse">
+              <a:avLst/>
+            </a:prstGeom>
+            <a:solidFill>
+              <a:srgbClr val="FFA726"/>
+            </a:solidFill>
+            <a:ln>
+              <a:noFill/>
+            </a:ln>
+          </p:spPr>
+          <p:style>
+            <a:lnRef idx="2">
+              <a:schemeClr val="accent1">
+                <a:shade val="15000"/>
+              </a:schemeClr>
+            </a:lnRef>
+            <a:fillRef idx="1">
+              <a:schemeClr val="accent1"/>
+            </a:fillRef>
+            <a:effectRef idx="0">
+              <a:schemeClr val="accent1"/>
+            </a:effectRef>
+            <a:fontRef idx="minor">
+              <a:schemeClr val="lt1"/>
+            </a:fontRef>
+          </p:style>
+          <p:txBody>
+            <a:bodyPr rtlCol="0" anchor="ctr"/>
+            <a:lstStyle/>
+            <a:p>
+              <a:pPr algn="ctr"/>
+              <a:endParaRPr lang="ru-RU" sz="1400" dirty="0">
+                <a:latin typeface="Bahnschrift" panose="020B0502040204020203" pitchFamily="34" charset="0"/>
+              </a:endParaRPr>
+            </a:p>
+          </p:txBody>
+        </p:sp>
+        <p:sp>
+          <p:nvSpPr>
+            <p:cNvPr id="40" name="TextBox 39">
+              <a:extLst>
+                <a:ext uri="{FF2B5EF4-FFF2-40B4-BE49-F238E27FC236}">
+                  <a16:creationId xmlns:a16="http://schemas.microsoft.com/office/drawing/2014/main" id="{D8788DA6-AA4F-1B3F-A4DA-8D765873D255}"/>
+                </a:ext>
+              </a:extLst>
+            </p:cNvPr>
+            <p:cNvSpPr txBox="1"/>
+            <p:nvPr/>
+          </p:nvSpPr>
+          <p:spPr>
+            <a:xfrm>
+              <a:off x="1115613" y="4097764"/>
+              <a:ext cx="762000" cy="338554"/>
+            </a:xfrm>
+            <a:prstGeom prst="rect">
+              <a:avLst/>
+            </a:prstGeom>
+            <a:noFill/>
+          </p:spPr>
+          <p:txBody>
+            <a:bodyPr wrap="square">
+              <a:spAutoFit/>
+            </a:bodyPr>
+            <a:lstStyle/>
+            <a:p>
+              <a:pPr algn="ctr"/>
+              <a:r>
+                <a:rPr lang="ru-RU" sz="1600" dirty="0">
+                  <a:solidFill>
+                    <a:schemeClr val="bg1"/>
+                  </a:solidFill>
+                  <a:latin typeface="Comfortaa Medium" pitchFamily="2" charset="0"/>
+                </a:rPr>
+                <a:t>МЮ</a:t>
+              </a:r>
+            </a:p>
+          </p:txBody>
+        </p:sp>
       </p:grpSp>
     </p:spTree>
     <p:extLst>
@@ -4369,6 +4968,14 @@
 <file path=ppt/slides/slide10.xml><?xml version="1.0" encoding="utf-8"?>
 <p:sld xmlns:a="http://schemas.openxmlformats.org/drawingml/2006/main" xmlns:r="http://schemas.openxmlformats.org/officeDocument/2006/relationships" xmlns:p="http://schemas.openxmlformats.org/presentationml/2006/main">
   <p:cSld>
+    <p:bg>
+      <p:bgPr>
+        <a:solidFill>
+          <a:srgbClr val="F4F7FB"/>
+        </a:solidFill>
+        <a:effectLst/>
+      </p:bgPr>
+    </p:bg>
     <p:spTree>
       <p:nvGrpSpPr>
         <p:cNvPr id="1" name="">
@@ -4389,194 +4996,6 @@
           <a:chExt cx="0" cy="0"/>
         </a:xfrm>
       </p:grpSpPr>
-      <p:sp>
-        <p:nvSpPr>
-          <p:cNvPr id="2" name="Заголовок 1">
-            <a:extLst>
-              <a:ext uri="{FF2B5EF4-FFF2-40B4-BE49-F238E27FC236}">
-                <a16:creationId xmlns:a16="http://schemas.microsoft.com/office/drawing/2014/main" id="{BF4E2A6B-5471-F945-B0B0-3AD0B8828ECD}"/>
-              </a:ext>
-            </a:extLst>
-          </p:cNvPr>
-          <p:cNvSpPr>
-            <a:spLocks noGrp="1"/>
-          </p:cNvSpPr>
-          <p:nvPr>
-            <p:ph type="title"/>
-          </p:nvPr>
-        </p:nvSpPr>
-        <p:spPr/>
-        <p:txBody>
-          <a:bodyPr/>
-          <a:lstStyle/>
-          <a:p>
-            <a:r>
-              <a:rPr lang="ru-RU" dirty="0"/>
-              <a:t>Заключение</a:t>
-            </a:r>
-          </a:p>
-        </p:txBody>
-      </p:sp>
-      <p:sp>
-        <p:nvSpPr>
-          <p:cNvPr id="3" name="Объект 2">
-            <a:extLst>
-              <a:ext uri="{FF2B5EF4-FFF2-40B4-BE49-F238E27FC236}">
-                <a16:creationId xmlns:a16="http://schemas.microsoft.com/office/drawing/2014/main" id="{91F69130-1303-DFD5-9ABB-7CD73BC9C06D}"/>
-              </a:ext>
-            </a:extLst>
-          </p:cNvPr>
-          <p:cNvSpPr>
-            <a:spLocks noGrp="1"/>
-          </p:cNvSpPr>
-          <p:nvPr>
-            <p:ph idx="1"/>
-          </p:nvPr>
-        </p:nvSpPr>
-        <p:spPr/>
-        <p:txBody>
-          <a:bodyPr/>
-          <a:lstStyle/>
-          <a:p>
-            <a:pPr marL="0" indent="0">
-              <a:buNone/>
-            </a:pPr>
-            <a:r>
-              <a:rPr lang="ru-RU" b="1" dirty="0"/>
-              <a:t>Указываете, что поставленная цель достигнута</a:t>
-            </a:r>
-          </a:p>
-        </p:txBody>
-      </p:sp>
-      <p:sp>
-        <p:nvSpPr>
-          <p:cNvPr id="4" name="TextBox 3">
-            <a:extLst>
-              <a:ext uri="{FF2B5EF4-FFF2-40B4-BE49-F238E27FC236}">
-                <a16:creationId xmlns:a16="http://schemas.microsoft.com/office/drawing/2014/main" id="{1488A1B4-2E1C-5670-F101-894892ABA6A6}"/>
-              </a:ext>
-            </a:extLst>
-          </p:cNvPr>
-          <p:cNvSpPr txBox="1"/>
-          <p:nvPr/>
-        </p:nvSpPr>
-        <p:spPr>
-          <a:xfrm>
-            <a:off x="11117179" y="103515"/>
-            <a:ext cx="1074821" cy="523220"/>
-          </a:xfrm>
-          <a:prstGeom prst="rect">
-            <a:avLst/>
-          </a:prstGeom>
-          <a:noFill/>
-        </p:spPr>
-        <p:txBody>
-          <a:bodyPr wrap="square">
-            <a:spAutoFit/>
-          </a:bodyPr>
-          <a:lstStyle/>
-          <a:p>
-            <a:r>
-              <a:rPr lang="ru-RU" sz="2800" dirty="0"/>
-              <a:t>10/11</a:t>
-            </a:r>
-          </a:p>
-        </p:txBody>
-      </p:sp>
-      <p:pic>
-        <p:nvPicPr>
-          <p:cNvPr id="7" name="Picture 4" descr="Placeholder Image | Elementor Developers">
-            <a:extLst>
-              <a:ext uri="{FF2B5EF4-FFF2-40B4-BE49-F238E27FC236}">
-                <a16:creationId xmlns:a16="http://schemas.microsoft.com/office/drawing/2014/main" id="{8A006413-D46A-4239-2AB8-011002D947C0}"/>
-              </a:ext>
-            </a:extLst>
-          </p:cNvPr>
-          <p:cNvPicPr>
-            <a:picLocks noChangeAspect="1" noChangeArrowheads="1"/>
-          </p:cNvPicPr>
-          <p:nvPr/>
-        </p:nvPicPr>
-        <p:blipFill>
-          <a:blip r:embed="rId2">
-            <a:extLst>
-              <a:ext uri="{28A0092B-C50C-407E-A947-70E740481C1C}">
-                <a14:useLocalDpi xmlns:a14="http://schemas.microsoft.com/office/drawing/2010/main" val="0"/>
-              </a:ext>
-            </a:extLst>
-          </a:blip>
-          <a:srcRect/>
-          <a:stretch>
-            <a:fillRect/>
-          </a:stretch>
-        </p:blipFill>
-        <p:spPr bwMode="auto">
-          <a:xfrm>
-            <a:off x="838200" y="2805159"/>
-            <a:ext cx="4519863" cy="3371804"/>
-          </a:xfrm>
-          <a:prstGeom prst="rect">
-            <a:avLst/>
-          </a:prstGeom>
-          <a:noFill/>
-          <a:extLst>
-            <a:ext uri="{909E8E84-426E-40DD-AFC4-6F175D3DCCD1}">
-              <a14:hiddenFill xmlns:a14="http://schemas.microsoft.com/office/drawing/2010/main">
-                <a:solidFill>
-                  <a:srgbClr val="FFFFFF"/>
-                </a:solidFill>
-              </a14:hiddenFill>
-            </a:ext>
-          </a:extLst>
-        </p:spPr>
-      </p:pic>
-      <p:pic>
-        <p:nvPicPr>
-          <p:cNvPr id="8" name="Picture 4" descr="Placeholder Image | Elementor Developers">
-            <a:extLst>
-              <a:ext uri="{FF2B5EF4-FFF2-40B4-BE49-F238E27FC236}">
-                <a16:creationId xmlns:a16="http://schemas.microsoft.com/office/drawing/2014/main" id="{D1A9FDD9-F3E5-8322-18C8-5482920FC047}"/>
-              </a:ext>
-            </a:extLst>
-          </p:cNvPr>
-          <p:cNvPicPr>
-            <a:picLocks noChangeAspect="1" noChangeArrowheads="1"/>
-          </p:cNvPicPr>
-          <p:nvPr/>
-        </p:nvPicPr>
-        <p:blipFill>
-          <a:blip r:embed="rId2">
-            <a:extLst>
-              <a:ext uri="{28A0092B-C50C-407E-A947-70E740481C1C}">
-                <a14:useLocalDpi xmlns:a14="http://schemas.microsoft.com/office/drawing/2010/main" val="0"/>
-              </a:ext>
-            </a:extLst>
-          </a:blip>
-          <a:srcRect/>
-          <a:stretch>
-            <a:fillRect/>
-          </a:stretch>
-        </p:blipFill>
-        <p:spPr bwMode="auto">
-          <a:xfrm>
-            <a:off x="6725653" y="2805159"/>
-            <a:ext cx="4519863" cy="3371804"/>
-          </a:xfrm>
-          <a:prstGeom prst="rect">
-            <a:avLst/>
-          </a:prstGeom>
-          <a:noFill/>
-          <a:extLst>
-            <a:ext uri="{909E8E84-426E-40DD-AFC4-6F175D3DCCD1}">
-              <a14:hiddenFill xmlns:a14="http://schemas.microsoft.com/office/drawing/2010/main">
-                <a:solidFill>
-                  <a:srgbClr val="FFFFFF"/>
-                </a:solidFill>
-              </a14:hiddenFill>
-            </a:ext>
-          </a:extLst>
-        </p:spPr>
-      </p:pic>
       <p:sp>
         <p:nvSpPr>
           <p:cNvPr id="56" name="Прямоугольник 55">
@@ -4738,7 +5157,7 @@
               <p:nvPr/>
             </p:nvPicPr>
             <p:blipFill>
-              <a:blip r:embed="rId3">
+              <a:blip r:embed="rId2">
                 <a:extLst>
                   <a:ext uri="{28A0092B-C50C-407E-A947-70E740481C1C}">
                     <a14:useLocalDpi xmlns:a14="http://schemas.microsoft.com/office/drawing/2010/main" val="0"/>
@@ -4896,7 +5315,7 @@
             <p:nvPr/>
           </p:nvPicPr>
           <p:blipFill>
-            <a:blip r:embed="rId4">
+            <a:blip r:embed="rId3">
               <a:extLst>
                 <a:ext uri="{28A0092B-C50C-407E-A947-70E740481C1C}">
                   <a14:useLocalDpi xmlns:a14="http://schemas.microsoft.com/office/drawing/2010/main" val="0"/>
@@ -4932,7 +5351,7 @@
             <p:nvPr/>
           </p:nvPicPr>
           <p:blipFill>
-            <a:blip r:embed="rId5">
+            <a:blip r:embed="rId4">
               <a:extLst>
                 <a:ext uri="{28A0092B-C50C-407E-A947-70E740481C1C}">
                   <a14:useLocalDpi xmlns:a14="http://schemas.microsoft.com/office/drawing/2010/main" val="0"/>
@@ -4968,7 +5387,7 @@
             <p:nvPr/>
           </p:nvPicPr>
           <p:blipFill>
-            <a:blip r:embed="rId6">
+            <a:blip r:embed="rId5">
               <a:extLst>
                 <a:ext uri="{28A0092B-C50C-407E-A947-70E740481C1C}">
                   <a14:useLocalDpi xmlns:a14="http://schemas.microsoft.com/office/drawing/2010/main" val="0"/>
@@ -5004,7 +5423,7 @@
             <p:nvPr/>
           </p:nvPicPr>
           <p:blipFill>
-            <a:blip r:embed="rId7">
+            <a:blip r:embed="rId6">
               <a:extLst>
                 <a:ext uri="{28A0092B-C50C-407E-A947-70E740481C1C}">
                   <a14:useLocalDpi xmlns:a14="http://schemas.microsoft.com/office/drawing/2010/main" val="0"/>
@@ -5040,7 +5459,7 @@
             <p:nvPr/>
           </p:nvPicPr>
           <p:blipFill>
-            <a:blip r:embed="rId8">
+            <a:blip r:embed="rId7">
               <a:extLst>
                 <a:ext uri="{28A0092B-C50C-407E-A947-70E740481C1C}">
                   <a14:useLocalDpi xmlns:a14="http://schemas.microsoft.com/office/drawing/2010/main" val="0"/>
@@ -5076,7 +5495,7 @@
             <p:nvPr/>
           </p:nvPicPr>
           <p:blipFill>
-            <a:blip r:embed="rId9">
+            <a:blip r:embed="rId8">
               <a:extLst>
                 <a:ext uri="{28A0092B-C50C-407E-A947-70E740481C1C}">
                   <a14:useLocalDpi xmlns:a14="http://schemas.microsoft.com/office/drawing/2010/main" val="0"/>
@@ -5112,7 +5531,7 @@
             <p:nvPr/>
           </p:nvPicPr>
           <p:blipFill>
-            <a:blip r:embed="rId10">
+            <a:blip r:embed="rId9">
               <a:extLst>
                 <a:ext uri="{28A0092B-C50C-407E-A947-70E740481C1C}">
                   <a14:useLocalDpi xmlns:a14="http://schemas.microsoft.com/office/drawing/2010/main" val="0"/>
@@ -5148,7 +5567,7 @@
             <p:nvPr/>
           </p:nvPicPr>
           <p:blipFill>
-            <a:blip r:embed="rId11">
+            <a:blip r:embed="rId10">
               <a:extLst>
                 <a:ext uri="{28A0092B-C50C-407E-A947-70E740481C1C}">
                   <a14:useLocalDpi xmlns:a14="http://schemas.microsoft.com/office/drawing/2010/main" val="0"/>
@@ -5184,7 +5603,7 @@
             <p:nvPr/>
           </p:nvPicPr>
           <p:blipFill>
-            <a:blip r:embed="rId12">
+            <a:blip r:embed="rId11">
               <a:extLst>
                 <a:ext uri="{28A0092B-C50C-407E-A947-70E740481C1C}">
                   <a14:useLocalDpi xmlns:a14="http://schemas.microsoft.com/office/drawing/2010/main" val="0"/>
@@ -5206,6 +5625,157 @@
           </p:spPr>
         </p:pic>
       </p:grpSp>
+      <p:grpSp>
+        <p:nvGrpSpPr>
+          <p:cNvPr id="9" name="Группа 8">
+            <a:extLst>
+              <a:ext uri="{FF2B5EF4-FFF2-40B4-BE49-F238E27FC236}">
+                <a16:creationId xmlns:a16="http://schemas.microsoft.com/office/drawing/2014/main" id="{3AB0061F-BE6E-AE34-0B5E-F731ABC2BC85}"/>
+              </a:ext>
+            </a:extLst>
+          </p:cNvPr>
+          <p:cNvGrpSpPr/>
+          <p:nvPr/>
+        </p:nvGrpSpPr>
+        <p:grpSpPr>
+          <a:xfrm>
+            <a:off x="861468" y="106931"/>
+            <a:ext cx="11206162" cy="786262"/>
+            <a:chOff x="883444" y="90039"/>
+            <a:chExt cx="11206162" cy="786262"/>
+          </a:xfrm>
+        </p:grpSpPr>
+        <p:sp>
+          <p:nvSpPr>
+            <p:cNvPr id="10" name="Прямоугольник: скругленные углы 9">
+              <a:extLst>
+                <a:ext uri="{FF2B5EF4-FFF2-40B4-BE49-F238E27FC236}">
+                  <a16:creationId xmlns:a16="http://schemas.microsoft.com/office/drawing/2014/main" id="{90862BC6-CEE1-63FB-3A2E-3BB9920A453F}"/>
+                </a:ext>
+              </a:extLst>
+            </p:cNvPr>
+            <p:cNvSpPr/>
+            <p:nvPr/>
+          </p:nvSpPr>
+          <p:spPr>
+            <a:xfrm>
+              <a:off x="883444" y="90039"/>
+              <a:ext cx="11206162" cy="786262"/>
+            </a:xfrm>
+            <a:prstGeom prst="roundRect">
+              <a:avLst>
+                <a:gd name="adj" fmla="val 4689"/>
+              </a:avLst>
+            </a:prstGeom>
+            <a:solidFill>
+              <a:schemeClr val="bg1"/>
+            </a:solidFill>
+            <a:ln>
+              <a:solidFill>
+                <a:schemeClr val="bg1"/>
+              </a:solidFill>
+            </a:ln>
+          </p:spPr>
+          <p:style>
+            <a:lnRef idx="2">
+              <a:schemeClr val="accent1">
+                <a:shade val="15000"/>
+              </a:schemeClr>
+            </a:lnRef>
+            <a:fillRef idx="1">
+              <a:schemeClr val="accent1"/>
+            </a:fillRef>
+            <a:effectRef idx="0">
+              <a:schemeClr val="accent1"/>
+            </a:effectRef>
+            <a:fontRef idx="minor">
+              <a:schemeClr val="lt1"/>
+            </a:fontRef>
+          </p:style>
+          <p:txBody>
+            <a:bodyPr rtlCol="0" anchor="ctr"/>
+            <a:lstStyle/>
+            <a:p>
+              <a:pPr algn="ctr"/>
+              <a:endParaRPr lang="ru-RU"/>
+            </a:p>
+          </p:txBody>
+        </p:sp>
+        <p:sp>
+          <p:nvSpPr>
+            <p:cNvPr id="11" name="TextBox 10">
+              <a:extLst>
+                <a:ext uri="{FF2B5EF4-FFF2-40B4-BE49-F238E27FC236}">
+                  <a16:creationId xmlns:a16="http://schemas.microsoft.com/office/drawing/2014/main" id="{7692D4BA-6AB7-88E0-741A-61FDB63687D6}"/>
+                </a:ext>
+              </a:extLst>
+            </p:cNvPr>
+            <p:cNvSpPr txBox="1"/>
+            <p:nvPr/>
+          </p:nvSpPr>
+          <p:spPr>
+            <a:xfrm>
+              <a:off x="11013826" y="221560"/>
+              <a:ext cx="987674" cy="523220"/>
+            </a:xfrm>
+            <a:prstGeom prst="rect">
+              <a:avLst/>
+            </a:prstGeom>
+            <a:noFill/>
+          </p:spPr>
+          <p:txBody>
+            <a:bodyPr wrap="square">
+              <a:spAutoFit/>
+            </a:bodyPr>
+            <a:lstStyle/>
+            <a:p>
+              <a:r>
+                <a:rPr lang="ru-RU" sz="2800" dirty="0">
+                  <a:latin typeface="Comfortaa Medium" pitchFamily="2" charset="0"/>
+                </a:rPr>
+                <a:t>10/11</a:t>
+              </a:r>
+            </a:p>
+          </p:txBody>
+        </p:sp>
+      </p:grpSp>
+      <p:sp>
+        <p:nvSpPr>
+          <p:cNvPr id="12" name="Заголовок 1">
+            <a:extLst>
+              <a:ext uri="{FF2B5EF4-FFF2-40B4-BE49-F238E27FC236}">
+                <a16:creationId xmlns:a16="http://schemas.microsoft.com/office/drawing/2014/main" id="{0CEC60D4-0CAA-05CF-C9C5-D87E1C2CC08F}"/>
+              </a:ext>
+            </a:extLst>
+          </p:cNvPr>
+          <p:cNvSpPr>
+            <a:spLocks noGrp="1"/>
+          </p:cNvSpPr>
+          <p:nvPr>
+            <p:ph type="title"/>
+          </p:nvPr>
+        </p:nvSpPr>
+        <p:spPr>
+          <a:xfrm>
+            <a:off x="1076324" y="228389"/>
+            <a:ext cx="10066797" cy="509563"/>
+          </a:xfrm>
+        </p:spPr>
+        <p:txBody>
+          <a:bodyPr>
+            <a:noAutofit/>
+          </a:bodyPr>
+          <a:lstStyle/>
+          <a:p>
+            <a:r>
+              <a:rPr lang="ru-RU" sz="3200" dirty="0">
+                <a:latin typeface="Comfortaa Medium" pitchFamily="2" charset="0"/>
+              </a:rPr>
+              <a:t>Заключение</a:t>
+            </a:r>
+          </a:p>
+        </p:txBody>
+      </p:sp>
     </p:spTree>
     <p:extLst>
       <p:ext uri="{BB962C8B-B14F-4D97-AF65-F5344CB8AC3E}">
@@ -5234,12 +5804,20 @@
 <file path=ppt/slides/slide11.xml><?xml version="1.0" encoding="utf-8"?>
 <p:sld xmlns:a="http://schemas.openxmlformats.org/drawingml/2006/main" xmlns:r="http://schemas.openxmlformats.org/officeDocument/2006/relationships" xmlns:p="http://schemas.openxmlformats.org/presentationml/2006/main">
   <p:cSld>
+    <p:bg>
+      <p:bgPr>
+        <a:solidFill>
+          <a:srgbClr val="F4F7FB"/>
+        </a:solidFill>
+        <a:effectLst/>
+      </p:bgPr>
+    </p:bg>
     <p:spTree>
       <p:nvGrpSpPr>
         <p:cNvPr id="1" name="">
           <a:extLst>
             <a:ext uri="{FF2B5EF4-FFF2-40B4-BE49-F238E27FC236}">
-              <a16:creationId xmlns:a16="http://schemas.microsoft.com/office/drawing/2014/main" id="{6E833D51-5365-2095-2991-4C0766AD340C}"/>
+              <a16:creationId xmlns:a16="http://schemas.microsoft.com/office/drawing/2014/main" id="{883386C5-3FA0-8597-300C-56A3A49C1AE1}"/>
             </a:ext>
           </a:extLst>
         </p:cNvPr>
@@ -5256,10 +5834,230 @@
       </p:grpSpPr>
       <p:sp>
         <p:nvSpPr>
+          <p:cNvPr id="42" name="Прямоугольник 41">
+            <a:extLst>
+              <a:ext uri="{FF2B5EF4-FFF2-40B4-BE49-F238E27FC236}">
+                <a16:creationId xmlns:a16="http://schemas.microsoft.com/office/drawing/2014/main" id="{9B52B7A1-5536-3368-1FC6-FA2156E5FA99}"/>
+              </a:ext>
+            </a:extLst>
+          </p:cNvPr>
+          <p:cNvSpPr/>
+          <p:nvPr/>
+        </p:nvSpPr>
+        <p:spPr>
+          <a:xfrm>
+            <a:off x="-1" y="-4281"/>
+            <a:ext cx="762000" cy="6858000"/>
+          </a:xfrm>
+          <a:prstGeom prst="rect">
+            <a:avLst/>
+          </a:prstGeom>
+          <a:solidFill>
+            <a:srgbClr val="FFA726"/>
+          </a:solidFill>
+          <a:ln>
+            <a:noFill/>
+          </a:ln>
+        </p:spPr>
+        <p:style>
+          <a:lnRef idx="2">
+            <a:schemeClr val="accent1">
+              <a:shade val="15000"/>
+            </a:schemeClr>
+          </a:lnRef>
+          <a:fillRef idx="1">
+            <a:schemeClr val="accent1"/>
+          </a:fillRef>
+          <a:effectRef idx="0">
+            <a:schemeClr val="accent1"/>
+          </a:effectRef>
+          <a:fontRef idx="minor">
+            <a:schemeClr val="lt1"/>
+          </a:fontRef>
+        </p:style>
+        <p:txBody>
+          <a:bodyPr rtlCol="0" anchor="ctr"/>
+          <a:lstStyle/>
+          <a:p>
+            <a:pPr algn="ctr"/>
+            <a:endParaRPr lang="ru-RU"/>
+          </a:p>
+        </p:txBody>
+      </p:sp>
+      <p:sp>
+        <p:nvSpPr>
+          <p:cNvPr id="9" name="Прямоугольник: скругленные углы 8">
+            <a:extLst>
+              <a:ext uri="{FF2B5EF4-FFF2-40B4-BE49-F238E27FC236}">
+                <a16:creationId xmlns:a16="http://schemas.microsoft.com/office/drawing/2014/main" id="{9259D605-D79B-BBAF-ED9F-612B2856AA62}"/>
+              </a:ext>
+            </a:extLst>
+          </p:cNvPr>
+          <p:cNvSpPr/>
+          <p:nvPr/>
+        </p:nvSpPr>
+        <p:spPr>
+          <a:xfrm>
+            <a:off x="1041394" y="6188619"/>
+            <a:ext cx="10960105" cy="560572"/>
+          </a:xfrm>
+          <a:prstGeom prst="roundRect">
+            <a:avLst>
+              <a:gd name="adj" fmla="val 4689"/>
+            </a:avLst>
+          </a:prstGeom>
+          <a:solidFill>
+            <a:schemeClr val="bg1"/>
+          </a:solidFill>
+          <a:ln>
+            <a:solidFill>
+              <a:schemeClr val="bg1"/>
+            </a:solidFill>
+          </a:ln>
+        </p:spPr>
+        <p:style>
+          <a:lnRef idx="2">
+            <a:schemeClr val="accent1">
+              <a:shade val="15000"/>
+            </a:schemeClr>
+          </a:lnRef>
+          <a:fillRef idx="1">
+            <a:schemeClr val="accent1"/>
+          </a:fillRef>
+          <a:effectRef idx="0">
+            <a:schemeClr val="accent1"/>
+          </a:effectRef>
+          <a:fontRef idx="minor">
+            <a:schemeClr val="lt1"/>
+          </a:fontRef>
+        </p:style>
+        <p:txBody>
+          <a:bodyPr rtlCol="0" anchor="ctr"/>
+          <a:lstStyle/>
+          <a:p>
+            <a:pPr algn="ctr"/>
+            <a:endParaRPr lang="ru-RU"/>
+          </a:p>
+        </p:txBody>
+      </p:sp>
+      <p:sp>
+        <p:nvSpPr>
+          <p:cNvPr id="6" name="Прямоугольник: скругленные углы 5">
+            <a:extLst>
+              <a:ext uri="{FF2B5EF4-FFF2-40B4-BE49-F238E27FC236}">
+                <a16:creationId xmlns:a16="http://schemas.microsoft.com/office/drawing/2014/main" id="{CA8AA589-064A-6E80-6ABD-AC2FE43C0A29}"/>
+              </a:ext>
+            </a:extLst>
+          </p:cNvPr>
+          <p:cNvSpPr/>
+          <p:nvPr/>
+        </p:nvSpPr>
+        <p:spPr>
+          <a:xfrm>
+            <a:off x="1041394" y="2425796"/>
+            <a:ext cx="10960105" cy="1107666"/>
+          </a:xfrm>
+          <a:prstGeom prst="roundRect">
+            <a:avLst>
+              <a:gd name="adj" fmla="val 4689"/>
+            </a:avLst>
+          </a:prstGeom>
+          <a:solidFill>
+            <a:schemeClr val="bg1"/>
+          </a:solidFill>
+          <a:ln>
+            <a:solidFill>
+              <a:schemeClr val="bg1"/>
+            </a:solidFill>
+          </a:ln>
+        </p:spPr>
+        <p:style>
+          <a:lnRef idx="2">
+            <a:schemeClr val="accent1">
+              <a:shade val="15000"/>
+            </a:schemeClr>
+          </a:lnRef>
+          <a:fillRef idx="1">
+            <a:schemeClr val="accent1"/>
+          </a:fillRef>
+          <a:effectRef idx="0">
+            <a:schemeClr val="accent1"/>
+          </a:effectRef>
+          <a:fontRef idx="minor">
+            <a:schemeClr val="lt1"/>
+          </a:fontRef>
+        </p:style>
+        <p:txBody>
+          <a:bodyPr rtlCol="0" anchor="ctr"/>
+          <a:lstStyle/>
+          <a:p>
+            <a:pPr algn="ctr"/>
+            <a:endParaRPr lang="ru-RU" dirty="0"/>
+          </a:p>
+        </p:txBody>
+      </p:sp>
+      <p:sp>
+        <p:nvSpPr>
+          <p:cNvPr id="4" name="Прямоугольник: скругленные углы 3">
+            <a:extLst>
+              <a:ext uri="{FF2B5EF4-FFF2-40B4-BE49-F238E27FC236}">
+                <a16:creationId xmlns:a16="http://schemas.microsoft.com/office/drawing/2014/main" id="{97B9EFBB-FC6D-A943-3BD0-5C3D8EB5568E}"/>
+              </a:ext>
+            </a:extLst>
+          </p:cNvPr>
+          <p:cNvSpPr/>
+          <p:nvPr/>
+        </p:nvSpPr>
+        <p:spPr>
+          <a:xfrm>
+            <a:off x="1041394" y="13983"/>
+            <a:ext cx="10960105" cy="2202153"/>
+          </a:xfrm>
+          <a:prstGeom prst="roundRect">
+            <a:avLst>
+              <a:gd name="adj" fmla="val 4689"/>
+            </a:avLst>
+          </a:prstGeom>
+          <a:solidFill>
+            <a:schemeClr val="bg1"/>
+          </a:solidFill>
+          <a:ln>
+            <a:solidFill>
+              <a:schemeClr val="bg1"/>
+            </a:solidFill>
+          </a:ln>
+        </p:spPr>
+        <p:style>
+          <a:lnRef idx="2">
+            <a:schemeClr val="accent1">
+              <a:shade val="15000"/>
+            </a:schemeClr>
+          </a:lnRef>
+          <a:fillRef idx="1">
+            <a:schemeClr val="accent1"/>
+          </a:fillRef>
+          <a:effectRef idx="0">
+            <a:schemeClr val="accent1"/>
+          </a:effectRef>
+          <a:fontRef idx="minor">
+            <a:schemeClr val="lt1"/>
+          </a:fontRef>
+        </p:style>
+        <p:txBody>
+          <a:bodyPr rtlCol="0" anchor="ctr"/>
+          <a:lstStyle/>
+          <a:p>
+            <a:pPr algn="ctr"/>
+            <a:endParaRPr lang="ru-RU"/>
+          </a:p>
+        </p:txBody>
+      </p:sp>
+      <p:sp>
+        <p:nvSpPr>
           <p:cNvPr id="2" name="Заголовок 1">
             <a:extLst>
               <a:ext uri="{FF2B5EF4-FFF2-40B4-BE49-F238E27FC236}">
-                <a16:creationId xmlns:a16="http://schemas.microsoft.com/office/drawing/2014/main" id="{F6C94377-87FC-EBF8-BCFE-9E85807C78DC}"/>
+                <a16:creationId xmlns:a16="http://schemas.microsoft.com/office/drawing/2014/main" id="{B678B96E-7226-0466-04E1-1E93BF15EA88}"/>
               </a:ext>
             </a:extLst>
           </p:cNvPr>
@@ -5272,7 +6070,7 @@
         </p:nvSpPr>
         <p:spPr>
           <a:xfrm>
-            <a:off x="1524000" y="0"/>
+            <a:off x="1949446" y="108808"/>
             <a:ext cx="9144000" cy="1892300"/>
           </a:xfrm>
         </p:spPr>
@@ -5343,7 +6141,7 @@
           <p:cNvPr id="3" name="Подзаголовок 2">
             <a:extLst>
               <a:ext uri="{FF2B5EF4-FFF2-40B4-BE49-F238E27FC236}">
-                <a16:creationId xmlns:a16="http://schemas.microsoft.com/office/drawing/2014/main" id="{C3BCF915-7571-5D7C-4A46-9A72536CB5F3}"/>
+                <a16:creationId xmlns:a16="http://schemas.microsoft.com/office/drawing/2014/main" id="{D6A9E6E1-FD07-1FB0-597E-F06EB144640F}"/>
               </a:ext>
             </a:extLst>
           </p:cNvPr>
@@ -5356,13 +6154,13 @@
         </p:nvSpPr>
         <p:spPr>
           <a:xfrm>
-            <a:off x="1524000" y="2946400"/>
-            <a:ext cx="9144000" cy="1314450"/>
+            <a:off x="1949445" y="2534539"/>
+            <a:ext cx="9144000" cy="890180"/>
           </a:xfrm>
         </p:spPr>
         <p:txBody>
           <a:bodyPr>
-            <a:normAutofit/>
+            <a:normAutofit fontScale="92500" lnSpcReduction="10000"/>
           </a:bodyPr>
           <a:lstStyle/>
           <a:p>
@@ -5381,10 +6179,10 @@
       </p:sp>
       <p:sp>
         <p:nvSpPr>
-          <p:cNvPr id="5" name="TextBox 4">
+          <p:cNvPr id="7" name="TextBox 6">
             <a:extLst>
               <a:ext uri="{FF2B5EF4-FFF2-40B4-BE49-F238E27FC236}">
-                <a16:creationId xmlns:a16="http://schemas.microsoft.com/office/drawing/2014/main" id="{14F50514-EAC2-49DE-8C82-28538604B3CD}"/>
+                <a16:creationId xmlns:a16="http://schemas.microsoft.com/office/drawing/2014/main" id="{E70E00C9-CBE1-F8E9-855E-FC72F125048F}"/>
               </a:ext>
             </a:extLst>
           </p:cNvPr>
@@ -5393,42 +6191,7 @@
         </p:nvSpPr>
         <p:spPr>
           <a:xfrm>
-            <a:off x="857250" y="5314950"/>
-            <a:ext cx="6096000" cy="646331"/>
-          </a:xfrm>
-          <a:prstGeom prst="rect">
-            <a:avLst/>
-          </a:prstGeom>
-          <a:noFill/>
-        </p:spPr>
-        <p:txBody>
-          <a:bodyPr wrap="square">
-            <a:spAutoFit/>
-          </a:bodyPr>
-          <a:lstStyle/>
-          <a:p>
-            <a:r>
-              <a:rPr lang="ru-RU" dirty="0"/>
-              <a:t>Студент группы ИСПП-11: Екимов Вячеслав Андреевич Руководитель: Маломан Юлия Сергеевна</a:t>
-            </a:r>
-          </a:p>
-        </p:txBody>
-      </p:sp>
-      <p:sp>
-        <p:nvSpPr>
-          <p:cNvPr id="7" name="TextBox 6">
-            <a:extLst>
-              <a:ext uri="{FF2B5EF4-FFF2-40B4-BE49-F238E27FC236}">
-                <a16:creationId xmlns:a16="http://schemas.microsoft.com/office/drawing/2014/main" id="{54A46F06-1C93-AAD4-0318-4E7A56878B70}"/>
-              </a:ext>
-            </a:extLst>
-          </p:cNvPr>
-          <p:cNvSpPr txBox="1"/>
-          <p:nvPr/>
-        </p:nvSpPr>
-        <p:spPr>
-          <a:xfrm>
-            <a:off x="3048000" y="6254234"/>
+            <a:off x="3473446" y="6284239"/>
             <a:ext cx="6096000" cy="369332"/>
           </a:xfrm>
           <a:prstGeom prst="rect">
@@ -5445,69 +6208,17 @@
             <a:pPr algn="ctr"/>
             <a:r>
               <a:rPr lang="ru-RU" dirty="0"/>
-              <a:t>Архангельск, 2024</a:t>
+              <a:t>Архангельск, 2025</a:t>
             </a:r>
-          </a:p>
-        </p:txBody>
-      </p:sp>
-      <p:sp>
-        <p:nvSpPr>
-          <p:cNvPr id="6" name="Прямоугольник 5">
-            <a:extLst>
-              <a:ext uri="{FF2B5EF4-FFF2-40B4-BE49-F238E27FC236}">
-                <a16:creationId xmlns:a16="http://schemas.microsoft.com/office/drawing/2014/main" id="{00CCEA85-1D0E-8CEA-5135-314092B35169}"/>
-              </a:ext>
-            </a:extLst>
-          </p:cNvPr>
-          <p:cNvSpPr/>
-          <p:nvPr/>
-        </p:nvSpPr>
-        <p:spPr>
-          <a:xfrm>
-            <a:off x="0" y="0"/>
-            <a:ext cx="762000" cy="6858000"/>
-          </a:xfrm>
-          <a:prstGeom prst="rect">
-            <a:avLst/>
-          </a:prstGeom>
-          <a:solidFill>
-            <a:srgbClr val="FFA726"/>
-          </a:solidFill>
-          <a:ln>
-            <a:noFill/>
-          </a:ln>
-        </p:spPr>
-        <p:style>
-          <a:lnRef idx="2">
-            <a:schemeClr val="accent1">
-              <a:shade val="15000"/>
-            </a:schemeClr>
-          </a:lnRef>
-          <a:fillRef idx="1">
-            <a:schemeClr val="accent1"/>
-          </a:fillRef>
-          <a:effectRef idx="0">
-            <a:schemeClr val="accent1"/>
-          </a:effectRef>
-          <a:fontRef idx="minor">
-            <a:schemeClr val="lt1"/>
-          </a:fontRef>
-        </p:style>
-        <p:txBody>
-          <a:bodyPr rtlCol="0" anchor="ctr"/>
-          <a:lstStyle/>
-          <a:p>
-            <a:pPr algn="ctr"/>
-            <a:endParaRPr lang="ru-RU"/>
           </a:p>
         </p:txBody>
       </p:sp>
       <p:grpSp>
         <p:nvGrpSpPr>
-          <p:cNvPr id="8" name="Группа 7">
+          <p:cNvPr id="47" name="Группа 46">
             <a:extLst>
               <a:ext uri="{FF2B5EF4-FFF2-40B4-BE49-F238E27FC236}">
-                <a16:creationId xmlns:a16="http://schemas.microsoft.com/office/drawing/2014/main" id="{12F1AAC9-D749-F3AB-D14F-A5C2168C9942}"/>
+                <a16:creationId xmlns:a16="http://schemas.microsoft.com/office/drawing/2014/main" id="{47B27502-B663-3079-12C5-1C65CE1963B1}"/>
               </a:ext>
             </a:extLst>
           </p:cNvPr>
@@ -5524,10 +6235,10 @@
         </p:grpSpPr>
         <p:grpSp>
           <p:nvGrpSpPr>
-            <p:cNvPr id="9" name="Группа 8">
-              <a:extLst>
-                <a:ext uri="{FF2B5EF4-FFF2-40B4-BE49-F238E27FC236}">
-                  <a16:creationId xmlns:a16="http://schemas.microsoft.com/office/drawing/2014/main" id="{AC70C2B6-21D0-BB9C-5FB9-01FA0CABCA51}"/>
+            <p:cNvPr id="46" name="Группа 45">
+              <a:extLst>
+                <a:ext uri="{FF2B5EF4-FFF2-40B4-BE49-F238E27FC236}">
+                  <a16:creationId xmlns:a16="http://schemas.microsoft.com/office/drawing/2014/main" id="{D17199FB-3A9E-A640-B8F4-46A790585344}"/>
                 </a:ext>
               </a:extLst>
             </p:cNvPr>
@@ -5544,10 +6255,10 @@
           </p:grpSpPr>
           <p:sp>
             <p:nvSpPr>
-              <p:cNvPr id="11" name="Прямоугольник: скругленные углы 10">
+              <p:cNvPr id="21" name="Прямоугольник: скругленные углы 20">
                 <a:extLst>
                   <a:ext uri="{FF2B5EF4-FFF2-40B4-BE49-F238E27FC236}">
-                    <a16:creationId xmlns:a16="http://schemas.microsoft.com/office/drawing/2014/main" id="{E9005D79-7A12-F5D5-CAB9-12BA0350CC20}"/>
+                    <a16:creationId xmlns:a16="http://schemas.microsoft.com/office/drawing/2014/main" id="{EC2EF9F9-862D-4A5C-0171-E04C08930345}"/>
                   </a:ext>
                 </a:extLst>
               </p:cNvPr>
@@ -5598,10 +6309,10 @@
           </p:sp>
           <p:pic>
             <p:nvPicPr>
-              <p:cNvPr id="12" name="Рисунок 11">
+              <p:cNvPr id="20" name="Рисунок 19">
                 <a:extLst>
                   <a:ext uri="{FF2B5EF4-FFF2-40B4-BE49-F238E27FC236}">
-                    <a16:creationId xmlns:a16="http://schemas.microsoft.com/office/drawing/2014/main" id="{86A6297D-BB25-B38F-C063-6FFAF0EE4AD7}"/>
+                    <a16:creationId xmlns:a16="http://schemas.microsoft.com/office/drawing/2014/main" id="{759BA008-8F6A-FE25-BFDD-239F1E1D923D}"/>
                   </a:ext>
                 </a:extLst>
               </p:cNvPr>
@@ -5638,10 +6349,10 @@
         </p:grpSp>
         <p:cxnSp>
           <p:nvCxnSpPr>
-            <p:cNvPr id="10" name="Прямая соединительная линия 9">
-              <a:extLst>
-                <a:ext uri="{FF2B5EF4-FFF2-40B4-BE49-F238E27FC236}">
-                  <a16:creationId xmlns:a16="http://schemas.microsoft.com/office/drawing/2014/main" id="{73472967-55D9-8A3E-8C1E-87FA2DD488F0}"/>
+            <p:cNvPr id="23" name="Прямая соединительная линия 22">
+              <a:extLst>
+                <a:ext uri="{FF2B5EF4-FFF2-40B4-BE49-F238E27FC236}">
+                  <a16:creationId xmlns:a16="http://schemas.microsoft.com/office/drawing/2014/main" id="{FF1AA469-F92A-B293-57C5-C97B66E7C08B}"/>
                 </a:ext>
               </a:extLst>
             </p:cNvPr>
@@ -5682,10 +6393,10 @@
       </p:grpSp>
       <p:sp>
         <p:nvSpPr>
-          <p:cNvPr id="13" name="Прямоугольник: скругленные углы 12">
+          <p:cNvPr id="44" name="Прямоугольник: скругленные углы 43">
             <a:extLst>
               <a:ext uri="{FF2B5EF4-FFF2-40B4-BE49-F238E27FC236}">
-                <a16:creationId xmlns:a16="http://schemas.microsoft.com/office/drawing/2014/main" id="{E4FE6B71-460A-CC25-90BF-05B7D506866D}"/>
+                <a16:creationId xmlns:a16="http://schemas.microsoft.com/office/drawing/2014/main" id="{339DDBDB-9DAA-1C71-1501-E257B106DA01}"/>
               </a:ext>
             </a:extLst>
           </p:cNvPr>
@@ -5736,10 +6447,10 @@
       </p:sp>
       <p:grpSp>
         <p:nvGrpSpPr>
-          <p:cNvPr id="14" name="Группа 13">
+          <p:cNvPr id="45" name="Группа 44">
             <a:extLst>
               <a:ext uri="{FF2B5EF4-FFF2-40B4-BE49-F238E27FC236}">
-                <a16:creationId xmlns:a16="http://schemas.microsoft.com/office/drawing/2014/main" id="{650C7022-0BB3-D43C-4FE5-271CCAF78319}"/>
+                <a16:creationId xmlns:a16="http://schemas.microsoft.com/office/drawing/2014/main" id="{A0F0F461-4790-994C-CFB7-045969A680E7}"/>
               </a:ext>
             </a:extLst>
           </p:cNvPr>
@@ -5756,10 +6467,10 @@
         </p:grpSpPr>
         <p:pic>
           <p:nvPicPr>
-            <p:cNvPr id="15" name="Рисунок 14">
-              <a:extLst>
-                <a:ext uri="{FF2B5EF4-FFF2-40B4-BE49-F238E27FC236}">
-                  <a16:creationId xmlns:a16="http://schemas.microsoft.com/office/drawing/2014/main" id="{9528DE02-B485-5E1D-5ABB-6D335EA2906F}"/>
+            <p:cNvPr id="25" name="Рисунок 24">
+              <a:extLst>
+                <a:ext uri="{FF2B5EF4-FFF2-40B4-BE49-F238E27FC236}">
+                  <a16:creationId xmlns:a16="http://schemas.microsoft.com/office/drawing/2014/main" id="{2191808E-7114-7FC6-FC64-FDB1339E9780}"/>
                 </a:ext>
               </a:extLst>
             </p:cNvPr>
@@ -5792,10 +6503,10 @@
         </p:pic>
         <p:pic>
           <p:nvPicPr>
-            <p:cNvPr id="16" name="Рисунок 15">
-              <a:extLst>
-                <a:ext uri="{FF2B5EF4-FFF2-40B4-BE49-F238E27FC236}">
-                  <a16:creationId xmlns:a16="http://schemas.microsoft.com/office/drawing/2014/main" id="{916CF196-C513-D245-57B2-E8AC9A3E43A5}"/>
+            <p:cNvPr id="27" name="Рисунок 26">
+              <a:extLst>
+                <a:ext uri="{FF2B5EF4-FFF2-40B4-BE49-F238E27FC236}">
+                  <a16:creationId xmlns:a16="http://schemas.microsoft.com/office/drawing/2014/main" id="{4AFB919E-3F47-24C5-52A1-C33E11F4EB91}"/>
                 </a:ext>
               </a:extLst>
             </p:cNvPr>
@@ -5828,10 +6539,10 @@
         </p:pic>
         <p:pic>
           <p:nvPicPr>
-            <p:cNvPr id="17" name="Рисунок 16">
-              <a:extLst>
-                <a:ext uri="{FF2B5EF4-FFF2-40B4-BE49-F238E27FC236}">
-                  <a16:creationId xmlns:a16="http://schemas.microsoft.com/office/drawing/2014/main" id="{6402A9F6-AF5D-9F12-4691-D92C45E10DD9}"/>
+            <p:cNvPr id="31" name="Рисунок 30">
+              <a:extLst>
+                <a:ext uri="{FF2B5EF4-FFF2-40B4-BE49-F238E27FC236}">
+                  <a16:creationId xmlns:a16="http://schemas.microsoft.com/office/drawing/2014/main" id="{A62649BD-7DA2-8958-D27B-C37F56BC9CB8}"/>
                 </a:ext>
               </a:extLst>
             </p:cNvPr>
@@ -5864,10 +6575,10 @@
         </p:pic>
         <p:pic>
           <p:nvPicPr>
-            <p:cNvPr id="18" name="Рисунок 17">
-              <a:extLst>
-                <a:ext uri="{FF2B5EF4-FFF2-40B4-BE49-F238E27FC236}">
-                  <a16:creationId xmlns:a16="http://schemas.microsoft.com/office/drawing/2014/main" id="{AB929035-69DA-9E65-43F7-8CF408547626}"/>
+            <p:cNvPr id="33" name="Рисунок 32">
+              <a:extLst>
+                <a:ext uri="{FF2B5EF4-FFF2-40B4-BE49-F238E27FC236}">
+                  <a16:creationId xmlns:a16="http://schemas.microsoft.com/office/drawing/2014/main" id="{D2FF60E4-78B0-C5EB-0FBE-194038A4424F}"/>
                 </a:ext>
               </a:extLst>
             </p:cNvPr>
@@ -5900,10 +6611,10 @@
         </p:pic>
         <p:pic>
           <p:nvPicPr>
-            <p:cNvPr id="19" name="Рисунок 18">
-              <a:extLst>
-                <a:ext uri="{FF2B5EF4-FFF2-40B4-BE49-F238E27FC236}">
-                  <a16:creationId xmlns:a16="http://schemas.microsoft.com/office/drawing/2014/main" id="{D85DBEF1-59A8-DE44-E3B0-376B8B308048}"/>
+            <p:cNvPr id="35" name="Рисунок 34">
+              <a:extLst>
+                <a:ext uri="{FF2B5EF4-FFF2-40B4-BE49-F238E27FC236}">
+                  <a16:creationId xmlns:a16="http://schemas.microsoft.com/office/drawing/2014/main" id="{1EEAEB0B-2F49-2523-5CE9-92C59EC6A8E9}"/>
                 </a:ext>
               </a:extLst>
             </p:cNvPr>
@@ -5936,10 +6647,10 @@
         </p:pic>
         <p:pic>
           <p:nvPicPr>
-            <p:cNvPr id="20" name="Рисунок 19">
-              <a:extLst>
-                <a:ext uri="{FF2B5EF4-FFF2-40B4-BE49-F238E27FC236}">
-                  <a16:creationId xmlns:a16="http://schemas.microsoft.com/office/drawing/2014/main" id="{1B4AFC46-CB7F-463E-4A9F-FA5A87AC4156}"/>
+            <p:cNvPr id="37" name="Рисунок 36">
+              <a:extLst>
+                <a:ext uri="{FF2B5EF4-FFF2-40B4-BE49-F238E27FC236}">
+                  <a16:creationId xmlns:a16="http://schemas.microsoft.com/office/drawing/2014/main" id="{CE60D094-E255-D402-55C8-0412711C59D3}"/>
                 </a:ext>
               </a:extLst>
             </p:cNvPr>
@@ -5972,10 +6683,10 @@
         </p:pic>
         <p:pic>
           <p:nvPicPr>
-            <p:cNvPr id="21" name="Рисунок 20">
-              <a:extLst>
-                <a:ext uri="{FF2B5EF4-FFF2-40B4-BE49-F238E27FC236}">
-                  <a16:creationId xmlns:a16="http://schemas.microsoft.com/office/drawing/2014/main" id="{25E0C399-F820-52CC-D5EA-5C06DAD2D6E3}"/>
+            <p:cNvPr id="39" name="Рисунок 38">
+              <a:extLst>
+                <a:ext uri="{FF2B5EF4-FFF2-40B4-BE49-F238E27FC236}">
+                  <a16:creationId xmlns:a16="http://schemas.microsoft.com/office/drawing/2014/main" id="{DC2C6D25-0728-D27C-2998-8D3E6EE7A470}"/>
                 </a:ext>
               </a:extLst>
             </p:cNvPr>
@@ -6008,10 +6719,10 @@
         </p:pic>
         <p:pic>
           <p:nvPicPr>
-            <p:cNvPr id="22" name="Рисунок 21">
-              <a:extLst>
-                <a:ext uri="{FF2B5EF4-FFF2-40B4-BE49-F238E27FC236}">
-                  <a16:creationId xmlns:a16="http://schemas.microsoft.com/office/drawing/2014/main" id="{605ADABD-1D79-151C-47EA-917BBE6020BD}"/>
+            <p:cNvPr id="41" name="Рисунок 40">
+              <a:extLst>
+                <a:ext uri="{FF2B5EF4-FFF2-40B4-BE49-F238E27FC236}">
+                  <a16:creationId xmlns:a16="http://schemas.microsoft.com/office/drawing/2014/main" id="{3EC92D17-5466-BC08-7E59-BA8D63491175}"/>
                 </a:ext>
               </a:extLst>
             </p:cNvPr>
@@ -6044,10 +6755,10 @@
         </p:pic>
         <p:pic>
           <p:nvPicPr>
-            <p:cNvPr id="23" name="Рисунок 22">
-              <a:extLst>
-                <a:ext uri="{FF2B5EF4-FFF2-40B4-BE49-F238E27FC236}">
-                  <a16:creationId xmlns:a16="http://schemas.microsoft.com/office/drawing/2014/main" id="{C35963E7-47E8-EA6C-8383-BDA8E40BB332}"/>
+            <p:cNvPr id="43" name="Рисунок 42">
+              <a:extLst>
+                <a:ext uri="{FF2B5EF4-FFF2-40B4-BE49-F238E27FC236}">
+                  <a16:creationId xmlns:a16="http://schemas.microsoft.com/office/drawing/2014/main" id="{C788C27E-679F-DC50-A35D-306AF8F549DE}"/>
                 </a:ext>
               </a:extLst>
             </p:cNvPr>
@@ -6079,10 +6790,450 @@
           </p:spPr>
         </p:pic>
       </p:grpSp>
+      <p:grpSp>
+        <p:nvGrpSpPr>
+          <p:cNvPr id="22" name="Группа 21">
+            <a:extLst>
+              <a:ext uri="{FF2B5EF4-FFF2-40B4-BE49-F238E27FC236}">
+                <a16:creationId xmlns:a16="http://schemas.microsoft.com/office/drawing/2014/main" id="{45B83577-4423-EBDB-AEBA-E002CC48FAE2}"/>
+              </a:ext>
+            </a:extLst>
+          </p:cNvPr>
+          <p:cNvGrpSpPr/>
+          <p:nvPr/>
+        </p:nvGrpSpPr>
+        <p:grpSpPr>
+          <a:xfrm>
+            <a:off x="1041393" y="3810289"/>
+            <a:ext cx="10960105" cy="936757"/>
+            <a:chOff x="1041393" y="3810289"/>
+            <a:chExt cx="10960105" cy="936757"/>
+          </a:xfrm>
+        </p:grpSpPr>
+        <p:sp>
+          <p:nvSpPr>
+            <p:cNvPr id="10" name="Прямоугольник: скругленные углы 9">
+              <a:extLst>
+                <a:ext uri="{FF2B5EF4-FFF2-40B4-BE49-F238E27FC236}">
+                  <a16:creationId xmlns:a16="http://schemas.microsoft.com/office/drawing/2014/main" id="{692223D9-0EA9-7AB5-FBBE-94F3A097ACC0}"/>
+                </a:ext>
+              </a:extLst>
+            </p:cNvPr>
+            <p:cNvSpPr/>
+            <p:nvPr/>
+          </p:nvSpPr>
+          <p:spPr>
+            <a:xfrm>
+              <a:off x="1041393" y="3810289"/>
+              <a:ext cx="10960105" cy="936757"/>
+            </a:xfrm>
+            <a:prstGeom prst="roundRect">
+              <a:avLst>
+                <a:gd name="adj" fmla="val 4689"/>
+              </a:avLst>
+            </a:prstGeom>
+            <a:solidFill>
+              <a:schemeClr val="bg1"/>
+            </a:solidFill>
+            <a:ln>
+              <a:solidFill>
+                <a:schemeClr val="bg1"/>
+              </a:solidFill>
+            </a:ln>
+          </p:spPr>
+          <p:style>
+            <a:lnRef idx="2">
+              <a:schemeClr val="accent1">
+                <a:shade val="15000"/>
+              </a:schemeClr>
+            </a:lnRef>
+            <a:fillRef idx="1">
+              <a:schemeClr val="accent1"/>
+            </a:fillRef>
+            <a:effectRef idx="0">
+              <a:schemeClr val="accent1"/>
+            </a:effectRef>
+            <a:fontRef idx="minor">
+              <a:schemeClr val="lt1"/>
+            </a:fontRef>
+          </p:style>
+          <p:txBody>
+            <a:bodyPr rtlCol="0" anchor="ctr"/>
+            <a:lstStyle/>
+            <a:p>
+              <a:pPr algn="ctr"/>
+              <a:endParaRPr lang="ru-RU" dirty="0"/>
+            </a:p>
+          </p:txBody>
+        </p:sp>
+        <p:sp>
+          <p:nvSpPr>
+            <p:cNvPr id="5" name="TextBox 4">
+              <a:extLst>
+                <a:ext uri="{FF2B5EF4-FFF2-40B4-BE49-F238E27FC236}">
+                  <a16:creationId xmlns:a16="http://schemas.microsoft.com/office/drawing/2014/main" id="{90D419E4-3024-2398-CA3A-64B33290224B}"/>
+                </a:ext>
+              </a:extLst>
+            </p:cNvPr>
+            <p:cNvSpPr txBox="1"/>
+            <p:nvPr/>
+          </p:nvSpPr>
+          <p:spPr>
+            <a:xfrm>
+              <a:off x="1823834" y="3951615"/>
+              <a:ext cx="4272166" cy="646331"/>
+            </a:xfrm>
+            <a:prstGeom prst="rect">
+              <a:avLst/>
+            </a:prstGeom>
+            <a:noFill/>
+          </p:spPr>
+          <p:txBody>
+            <a:bodyPr wrap="square">
+              <a:spAutoFit/>
+            </a:bodyPr>
+            <a:lstStyle/>
+            <a:p>
+              <a:r>
+                <a:rPr lang="ru-RU" dirty="0"/>
+                <a:t>Екимов Вячеслав Андреевич</a:t>
+              </a:r>
+            </a:p>
+            <a:p>
+              <a:r>
+                <a:rPr lang="ru-RU" dirty="0">
+                  <a:solidFill>
+                    <a:schemeClr val="tx1">
+                      <a:lumMod val="50000"/>
+                      <a:lumOff val="50000"/>
+                    </a:schemeClr>
+                  </a:solidFill>
+                </a:rPr>
+                <a:t>Студент ИСПП-21</a:t>
+              </a:r>
+              <a:endParaRPr lang="en-US" dirty="0"/>
+            </a:p>
+          </p:txBody>
+        </p:sp>
+        <p:sp>
+          <p:nvSpPr>
+            <p:cNvPr id="14" name="Овал 13">
+              <a:extLst>
+                <a:ext uri="{FF2B5EF4-FFF2-40B4-BE49-F238E27FC236}">
+                  <a16:creationId xmlns:a16="http://schemas.microsoft.com/office/drawing/2014/main" id="{AADD2C1E-19DB-BFB4-4872-5BEAF8853009}"/>
+                </a:ext>
+              </a:extLst>
+            </p:cNvPr>
+            <p:cNvSpPr/>
+            <p:nvPr/>
+          </p:nvSpPr>
+          <p:spPr>
+            <a:xfrm>
+              <a:off x="1217220" y="3999274"/>
+              <a:ext cx="558787" cy="558787"/>
+            </a:xfrm>
+            <a:prstGeom prst="ellipse">
+              <a:avLst/>
+            </a:prstGeom>
+            <a:solidFill>
+              <a:srgbClr val="FFA726"/>
+            </a:solidFill>
+            <a:ln>
+              <a:noFill/>
+            </a:ln>
+          </p:spPr>
+          <p:style>
+            <a:lnRef idx="2">
+              <a:schemeClr val="accent1">
+                <a:shade val="15000"/>
+              </a:schemeClr>
+            </a:lnRef>
+            <a:fillRef idx="1">
+              <a:schemeClr val="accent1"/>
+            </a:fillRef>
+            <a:effectRef idx="0">
+              <a:schemeClr val="accent1"/>
+            </a:effectRef>
+            <a:fontRef idx="minor">
+              <a:schemeClr val="lt1"/>
+            </a:fontRef>
+          </p:style>
+          <p:txBody>
+            <a:bodyPr rtlCol="0" anchor="ctr"/>
+            <a:lstStyle/>
+            <a:p>
+              <a:pPr algn="ctr"/>
+              <a:endParaRPr lang="ru-RU" sz="1400" dirty="0">
+                <a:latin typeface="Bahnschrift" panose="020B0502040204020203" pitchFamily="34" charset="0"/>
+              </a:endParaRPr>
+            </a:p>
+          </p:txBody>
+        </p:sp>
+        <p:sp>
+          <p:nvSpPr>
+            <p:cNvPr id="16" name="TextBox 15">
+              <a:extLst>
+                <a:ext uri="{FF2B5EF4-FFF2-40B4-BE49-F238E27FC236}">
+                  <a16:creationId xmlns:a16="http://schemas.microsoft.com/office/drawing/2014/main" id="{4E4AC184-97A1-09BB-FA57-7DC4F6405745}"/>
+                </a:ext>
+              </a:extLst>
+            </p:cNvPr>
+            <p:cNvSpPr txBox="1"/>
+            <p:nvPr/>
+          </p:nvSpPr>
+          <p:spPr>
+            <a:xfrm>
+              <a:off x="1169392" y="4047835"/>
+              <a:ext cx="654442" cy="461665"/>
+            </a:xfrm>
+            <a:prstGeom prst="rect">
+              <a:avLst/>
+            </a:prstGeom>
+            <a:noFill/>
+          </p:spPr>
+          <p:txBody>
+            <a:bodyPr wrap="square">
+              <a:spAutoFit/>
+            </a:bodyPr>
+            <a:lstStyle/>
+            <a:p>
+              <a:pPr algn="ctr"/>
+              <a:r>
+                <a:rPr lang="ru-RU" sz="2400" dirty="0">
+                  <a:solidFill>
+                    <a:schemeClr val="bg1"/>
+                  </a:solidFill>
+                </a:rPr>
+                <a:t>ЕВ</a:t>
+              </a:r>
+            </a:p>
+          </p:txBody>
+        </p:sp>
+      </p:grpSp>
+      <p:grpSp>
+        <p:nvGrpSpPr>
+          <p:cNvPr id="32" name="Группа 31">
+            <a:extLst>
+              <a:ext uri="{FF2B5EF4-FFF2-40B4-BE49-F238E27FC236}">
+                <a16:creationId xmlns:a16="http://schemas.microsoft.com/office/drawing/2014/main" id="{7687226C-1213-A9AF-8E74-C06102A7EC7E}"/>
+              </a:ext>
+            </a:extLst>
+          </p:cNvPr>
+          <p:cNvGrpSpPr/>
+          <p:nvPr/>
+        </p:nvGrpSpPr>
+        <p:grpSpPr>
+          <a:xfrm>
+            <a:off x="1041393" y="4984592"/>
+            <a:ext cx="10960105" cy="936757"/>
+            <a:chOff x="1041393" y="3810289"/>
+            <a:chExt cx="10960105" cy="936757"/>
+          </a:xfrm>
+        </p:grpSpPr>
+        <p:sp>
+          <p:nvSpPr>
+            <p:cNvPr id="34" name="Прямоугольник: скругленные углы 33">
+              <a:extLst>
+                <a:ext uri="{FF2B5EF4-FFF2-40B4-BE49-F238E27FC236}">
+                  <a16:creationId xmlns:a16="http://schemas.microsoft.com/office/drawing/2014/main" id="{75955B45-9E31-2F2B-8C07-E124D54BF85E}"/>
+                </a:ext>
+              </a:extLst>
+            </p:cNvPr>
+            <p:cNvSpPr/>
+            <p:nvPr/>
+          </p:nvSpPr>
+          <p:spPr>
+            <a:xfrm>
+              <a:off x="1041393" y="3810289"/>
+              <a:ext cx="10960105" cy="936757"/>
+            </a:xfrm>
+            <a:prstGeom prst="roundRect">
+              <a:avLst>
+                <a:gd name="adj" fmla="val 4689"/>
+              </a:avLst>
+            </a:prstGeom>
+            <a:solidFill>
+              <a:schemeClr val="bg1"/>
+            </a:solidFill>
+            <a:ln>
+              <a:solidFill>
+                <a:schemeClr val="bg1"/>
+              </a:solidFill>
+            </a:ln>
+          </p:spPr>
+          <p:style>
+            <a:lnRef idx="2">
+              <a:schemeClr val="accent1">
+                <a:shade val="15000"/>
+              </a:schemeClr>
+            </a:lnRef>
+            <a:fillRef idx="1">
+              <a:schemeClr val="accent1"/>
+            </a:fillRef>
+            <a:effectRef idx="0">
+              <a:schemeClr val="accent1"/>
+            </a:effectRef>
+            <a:fontRef idx="minor">
+              <a:schemeClr val="lt1"/>
+            </a:fontRef>
+          </p:style>
+          <p:txBody>
+            <a:bodyPr rtlCol="0" anchor="ctr"/>
+            <a:lstStyle/>
+            <a:p>
+              <a:pPr algn="ctr"/>
+              <a:endParaRPr lang="ru-RU" dirty="0"/>
+            </a:p>
+          </p:txBody>
+        </p:sp>
+        <p:sp>
+          <p:nvSpPr>
+            <p:cNvPr id="36" name="TextBox 35">
+              <a:extLst>
+                <a:ext uri="{FF2B5EF4-FFF2-40B4-BE49-F238E27FC236}">
+                  <a16:creationId xmlns:a16="http://schemas.microsoft.com/office/drawing/2014/main" id="{7E7E9074-430A-933C-5DAA-0AB35224E746}"/>
+                </a:ext>
+              </a:extLst>
+            </p:cNvPr>
+            <p:cNvSpPr txBox="1"/>
+            <p:nvPr/>
+          </p:nvSpPr>
+          <p:spPr>
+            <a:xfrm>
+              <a:off x="1823834" y="3951615"/>
+              <a:ext cx="4272166" cy="646331"/>
+            </a:xfrm>
+            <a:prstGeom prst="rect">
+              <a:avLst/>
+            </a:prstGeom>
+            <a:noFill/>
+          </p:spPr>
+          <p:txBody>
+            <a:bodyPr wrap="square">
+              <a:spAutoFit/>
+            </a:bodyPr>
+            <a:lstStyle/>
+            <a:p>
+              <a:r>
+                <a:rPr lang="ru-RU" dirty="0"/>
+                <a:t>Маломан Юлия Сергеевна</a:t>
+              </a:r>
+            </a:p>
+            <a:p>
+              <a:r>
+                <a:rPr lang="ru-RU" dirty="0">
+                  <a:solidFill>
+                    <a:schemeClr val="tx1">
+                      <a:lumMod val="50000"/>
+                      <a:lumOff val="50000"/>
+                    </a:schemeClr>
+                  </a:solidFill>
+                </a:rPr>
+                <a:t>Руководитель</a:t>
+              </a:r>
+              <a:endParaRPr lang="en-US" dirty="0"/>
+            </a:p>
+          </p:txBody>
+        </p:sp>
+        <p:sp>
+          <p:nvSpPr>
+            <p:cNvPr id="38" name="Овал 37">
+              <a:extLst>
+                <a:ext uri="{FF2B5EF4-FFF2-40B4-BE49-F238E27FC236}">
+                  <a16:creationId xmlns:a16="http://schemas.microsoft.com/office/drawing/2014/main" id="{653993F3-A0E7-E989-DEEF-9F3ADA682F50}"/>
+                </a:ext>
+              </a:extLst>
+            </p:cNvPr>
+            <p:cNvSpPr/>
+            <p:nvPr/>
+          </p:nvSpPr>
+          <p:spPr>
+            <a:xfrm>
+              <a:off x="1217221" y="3987648"/>
+              <a:ext cx="558787" cy="558787"/>
+            </a:xfrm>
+            <a:prstGeom prst="ellipse">
+              <a:avLst/>
+            </a:prstGeom>
+            <a:solidFill>
+              <a:srgbClr val="FFA726"/>
+            </a:solidFill>
+            <a:ln>
+              <a:noFill/>
+            </a:ln>
+          </p:spPr>
+          <p:style>
+            <a:lnRef idx="2">
+              <a:schemeClr val="accent1">
+                <a:shade val="15000"/>
+              </a:schemeClr>
+            </a:lnRef>
+            <a:fillRef idx="1">
+              <a:schemeClr val="accent1"/>
+            </a:fillRef>
+            <a:effectRef idx="0">
+              <a:schemeClr val="accent1"/>
+            </a:effectRef>
+            <a:fontRef idx="minor">
+              <a:schemeClr val="lt1"/>
+            </a:fontRef>
+          </p:style>
+          <p:txBody>
+            <a:bodyPr rtlCol="0" anchor="ctr"/>
+            <a:lstStyle/>
+            <a:p>
+              <a:pPr algn="ctr"/>
+              <a:endParaRPr lang="ru-RU" sz="1400" dirty="0">
+                <a:latin typeface="Bahnschrift" panose="020B0502040204020203" pitchFamily="34" charset="0"/>
+              </a:endParaRPr>
+            </a:p>
+          </p:txBody>
+        </p:sp>
+        <p:sp>
+          <p:nvSpPr>
+            <p:cNvPr id="40" name="TextBox 39">
+              <a:extLst>
+                <a:ext uri="{FF2B5EF4-FFF2-40B4-BE49-F238E27FC236}">
+                  <a16:creationId xmlns:a16="http://schemas.microsoft.com/office/drawing/2014/main" id="{34405FE6-40EA-AE98-8FC5-2C272C0505A8}"/>
+                </a:ext>
+              </a:extLst>
+            </p:cNvPr>
+            <p:cNvSpPr txBox="1"/>
+            <p:nvPr/>
+          </p:nvSpPr>
+          <p:spPr>
+            <a:xfrm>
+              <a:off x="1169394" y="4066986"/>
+              <a:ext cx="654440" cy="400110"/>
+            </a:xfrm>
+            <a:prstGeom prst="rect">
+              <a:avLst/>
+            </a:prstGeom>
+            <a:noFill/>
+          </p:spPr>
+          <p:txBody>
+            <a:bodyPr wrap="square">
+              <a:spAutoFit/>
+            </a:bodyPr>
+            <a:lstStyle/>
+            <a:p>
+              <a:pPr algn="ctr"/>
+              <a:r>
+                <a:rPr lang="ru-RU" sz="2000" dirty="0">
+                  <a:solidFill>
+                    <a:schemeClr val="bg1"/>
+                  </a:solidFill>
+                </a:rPr>
+                <a:t>МЮ</a:t>
+              </a:r>
+            </a:p>
+          </p:txBody>
+        </p:sp>
+      </p:grpSp>
     </p:spTree>
     <p:extLst>
       <p:ext uri="{BB962C8B-B14F-4D97-AF65-F5344CB8AC3E}">
-        <p14:creationId xmlns:p14="http://schemas.microsoft.com/office/powerpoint/2010/main" val="4107988599"/>
+        <p14:creationId xmlns:p14="http://schemas.microsoft.com/office/powerpoint/2010/main" val="3378014085"/>
       </p:ext>
     </p:extLst>
   </p:cSld>
@@ -6107,6 +7258,14 @@
 <file path=ppt/slides/slide2.xml><?xml version="1.0" encoding="utf-8"?>
 <p:sld xmlns:a="http://schemas.openxmlformats.org/drawingml/2006/main" xmlns:r="http://schemas.openxmlformats.org/officeDocument/2006/relationships" xmlns:p="http://schemas.openxmlformats.org/presentationml/2006/main">
   <p:cSld>
+    <p:bg>
+      <p:bgPr>
+        <a:solidFill>
+          <a:srgbClr val="F4F7FB"/>
+        </a:solidFill>
+        <a:effectLst/>
+      </p:bgPr>
+    </p:bg>
     <p:spTree>
       <p:nvGrpSpPr>
         <p:cNvPr id="1" name=""/>
@@ -6121,6 +7280,120 @@
           <a:chExt cx="0" cy="0"/>
         </a:xfrm>
       </p:grpSpPr>
+      <p:grpSp>
+        <p:nvGrpSpPr>
+          <p:cNvPr id="12" name="Группа 11">
+            <a:extLst>
+              <a:ext uri="{FF2B5EF4-FFF2-40B4-BE49-F238E27FC236}">
+                <a16:creationId xmlns:a16="http://schemas.microsoft.com/office/drawing/2014/main" id="{747E1BC8-BF02-BF52-FE7B-B315998BA977}"/>
+              </a:ext>
+            </a:extLst>
+          </p:cNvPr>
+          <p:cNvGrpSpPr/>
+          <p:nvPr/>
+        </p:nvGrpSpPr>
+        <p:grpSpPr>
+          <a:xfrm>
+            <a:off x="883444" y="90039"/>
+            <a:ext cx="11206162" cy="786262"/>
+            <a:chOff x="883444" y="90039"/>
+            <a:chExt cx="11206162" cy="786262"/>
+          </a:xfrm>
+        </p:grpSpPr>
+        <p:sp>
+          <p:nvSpPr>
+            <p:cNvPr id="6" name="Прямоугольник: скругленные углы 5">
+              <a:extLst>
+                <a:ext uri="{FF2B5EF4-FFF2-40B4-BE49-F238E27FC236}">
+                  <a16:creationId xmlns:a16="http://schemas.microsoft.com/office/drawing/2014/main" id="{098A26E4-6008-04F1-A835-622B51F65FCB}"/>
+                </a:ext>
+              </a:extLst>
+            </p:cNvPr>
+            <p:cNvSpPr/>
+            <p:nvPr/>
+          </p:nvSpPr>
+          <p:spPr>
+            <a:xfrm>
+              <a:off x="883444" y="90039"/>
+              <a:ext cx="11206162" cy="786262"/>
+            </a:xfrm>
+            <a:prstGeom prst="roundRect">
+              <a:avLst>
+                <a:gd name="adj" fmla="val 4689"/>
+              </a:avLst>
+            </a:prstGeom>
+            <a:solidFill>
+              <a:schemeClr val="bg1"/>
+            </a:solidFill>
+            <a:ln>
+              <a:solidFill>
+                <a:schemeClr val="bg1"/>
+              </a:solidFill>
+            </a:ln>
+          </p:spPr>
+          <p:style>
+            <a:lnRef idx="2">
+              <a:schemeClr val="accent1">
+                <a:shade val="15000"/>
+              </a:schemeClr>
+            </a:lnRef>
+            <a:fillRef idx="1">
+              <a:schemeClr val="accent1"/>
+            </a:fillRef>
+            <a:effectRef idx="0">
+              <a:schemeClr val="accent1"/>
+            </a:effectRef>
+            <a:fontRef idx="minor">
+              <a:schemeClr val="lt1"/>
+            </a:fontRef>
+          </p:style>
+          <p:txBody>
+            <a:bodyPr rtlCol="0" anchor="ctr"/>
+            <a:lstStyle/>
+            <a:p>
+              <a:pPr algn="ctr"/>
+              <a:endParaRPr lang="ru-RU"/>
+            </a:p>
+          </p:txBody>
+        </p:sp>
+        <p:sp>
+          <p:nvSpPr>
+            <p:cNvPr id="7" name="TextBox 6">
+              <a:extLst>
+                <a:ext uri="{FF2B5EF4-FFF2-40B4-BE49-F238E27FC236}">
+                  <a16:creationId xmlns:a16="http://schemas.microsoft.com/office/drawing/2014/main" id="{162CB1CD-718C-169B-8CC7-B29262F1C4B5}"/>
+                </a:ext>
+              </a:extLst>
+            </p:cNvPr>
+            <p:cNvSpPr txBox="1"/>
+            <p:nvPr/>
+          </p:nvSpPr>
+          <p:spPr>
+            <a:xfrm>
+              <a:off x="11143122" y="221560"/>
+              <a:ext cx="858378" cy="523220"/>
+            </a:xfrm>
+            <a:prstGeom prst="rect">
+              <a:avLst/>
+            </a:prstGeom>
+            <a:noFill/>
+          </p:spPr>
+          <p:txBody>
+            <a:bodyPr wrap="square">
+              <a:spAutoFit/>
+            </a:bodyPr>
+            <a:lstStyle/>
+            <a:p>
+              <a:r>
+                <a:rPr lang="ru-RU" sz="2800" dirty="0">
+                  <a:latin typeface="Comfortaa Medium" pitchFamily="2" charset="0"/>
+                </a:rPr>
+                <a:t>2/11</a:t>
+              </a:r>
+            </a:p>
+          </p:txBody>
+        </p:sp>
+      </p:grpSp>
       <p:sp>
         <p:nvSpPr>
           <p:cNvPr id="2" name="Заголовок 1">
@@ -6137,94 +7410,23 @@
             <p:ph type="title"/>
           </p:nvPr>
         </p:nvSpPr>
-        <p:spPr/>
-        <p:txBody>
-          <a:bodyPr/>
-          <a:lstStyle/>
-          <a:p>
-            <a:r>
-              <a:rPr lang="ru-RU" dirty="0"/>
-              <a:t>Актуальность</a:t>
-            </a:r>
-          </a:p>
-        </p:txBody>
-      </p:sp>
-      <p:sp>
-        <p:nvSpPr>
-          <p:cNvPr id="3" name="Объект 2">
-            <a:extLst>
-              <a:ext uri="{FF2B5EF4-FFF2-40B4-BE49-F238E27FC236}">
-                <a16:creationId xmlns:a16="http://schemas.microsoft.com/office/drawing/2014/main" id="{88FC51AD-A158-6BFF-C5C4-5E08C228DBEA}"/>
-              </a:ext>
-            </a:extLst>
-          </p:cNvPr>
-          <p:cNvSpPr>
-            <a:spLocks noGrp="1"/>
-          </p:cNvSpPr>
-          <p:nvPr>
-            <p:ph idx="1"/>
-          </p:nvPr>
-        </p:nvSpPr>
         <p:spPr>
           <a:xfrm>
-            <a:off x="838200" y="1825625"/>
-            <a:ext cx="5257800" cy="4351338"/>
+            <a:off x="1076324" y="228389"/>
+            <a:ext cx="10066797" cy="509563"/>
           </a:xfrm>
         </p:spPr>
         <p:txBody>
-          <a:bodyPr/>
-          <a:lstStyle/>
-          <a:p>
-            <a:pPr marL="0" indent="0">
-              <a:buNone/>
-            </a:pPr>
-            <a:r>
-              <a:rPr lang="ru-RU" b="1" dirty="0"/>
-              <a:t>Зачем разрабатывается ПО? </a:t>
-            </a:r>
-          </a:p>
-          <a:p>
-            <a:endParaRPr lang="ru-RU" dirty="0"/>
-          </a:p>
-          <a:p>
-            <a:r>
-              <a:rPr lang="ru-RU" dirty="0"/>
-              <a:t>Необходимость автоматизации …такого-то процесса, Необходимость модернизации существующей системы</a:t>
-            </a:r>
-          </a:p>
-        </p:txBody>
-      </p:sp>
-      <p:sp>
-        <p:nvSpPr>
-          <p:cNvPr id="7" name="TextBox 6">
-            <a:extLst>
-              <a:ext uri="{FF2B5EF4-FFF2-40B4-BE49-F238E27FC236}">
-                <a16:creationId xmlns:a16="http://schemas.microsoft.com/office/drawing/2014/main" id="{162CB1CD-718C-169B-8CC7-B29262F1C4B5}"/>
-              </a:ext>
-            </a:extLst>
-          </p:cNvPr>
-          <p:cNvSpPr txBox="1"/>
-          <p:nvPr/>
-        </p:nvSpPr>
-        <p:spPr>
-          <a:xfrm>
-            <a:off x="11245516" y="103515"/>
-            <a:ext cx="946484" cy="523220"/>
-          </a:xfrm>
-          <a:prstGeom prst="rect">
-            <a:avLst/>
-          </a:prstGeom>
-          <a:noFill/>
-        </p:spPr>
-        <p:txBody>
-          <a:bodyPr wrap="square">
-            <a:spAutoFit/>
+          <a:bodyPr>
+            <a:noAutofit/>
           </a:bodyPr>
           <a:lstStyle/>
           <a:p>
             <a:r>
-              <a:rPr lang="ru-RU" sz="2800" dirty="0"/>
-              <a:t>2/11</a:t>
+              <a:rPr lang="ru-RU" sz="3200" dirty="0">
+                <a:latin typeface="Comfortaa Medium" pitchFamily="2" charset="0"/>
+              </a:rPr>
+              <a:t>Актуальность</a:t>
             </a:r>
           </a:p>
         </p:txBody>
@@ -6274,53 +7476,6 @@
           </a:p>
         </p:txBody>
       </p:sp>
-      <p:pic>
-        <p:nvPicPr>
-          <p:cNvPr id="1028" name="Picture 4" descr="Placeholder Image | Elementor Developers">
-            <a:extLst>
-              <a:ext uri="{FF2B5EF4-FFF2-40B4-BE49-F238E27FC236}">
-                <a16:creationId xmlns:a16="http://schemas.microsoft.com/office/drawing/2014/main" id="{0E0AD676-1D8C-7A88-DC43-2634D1666CF6}"/>
-              </a:ext>
-            </a:extLst>
-          </p:cNvPr>
-          <p:cNvPicPr>
-            <a:picLocks noChangeAspect="1" noChangeArrowheads="1"/>
-          </p:cNvPicPr>
-          <p:nvPr/>
-        </p:nvPicPr>
-        <p:blipFill>
-          <a:blip r:embed="rId2">
-            <a:extLst>
-              <a:ext uri="{28A0092B-C50C-407E-A947-70E740481C1C}">
-                <a14:useLocalDpi xmlns:a14="http://schemas.microsoft.com/office/drawing/2010/main" val="0"/>
-              </a:ext>
-            </a:extLst>
-          </a:blip>
-          <a:srcRect/>
-          <a:stretch>
-            <a:fillRect/>
-          </a:stretch>
-        </p:blipFill>
-        <p:spPr bwMode="auto">
-          <a:xfrm>
-            <a:off x="6476998" y="1568325"/>
-            <a:ext cx="4953002" cy="4384676"/>
-          </a:xfrm>
-          <a:prstGeom prst="rect">
-            <a:avLst/>
-          </a:prstGeom>
-          <a:noFill/>
-          <a:extLst>
-            <a:ext uri="{909E8E84-426E-40DD-AFC4-6F175D3DCCD1}">
-              <a14:hiddenFill xmlns:a14="http://schemas.microsoft.com/office/drawing/2010/main">
-                <a:solidFill>
-                  <a:srgbClr val="FFFFFF"/>
-                </a:solidFill>
-              </a14:hiddenFill>
-            </a:ext>
-          </a:extLst>
-        </p:spPr>
-      </p:pic>
       <p:sp>
         <p:nvSpPr>
           <p:cNvPr id="27" name="Прямоугольник 26">
@@ -6482,7 +7637,7 @@
               <p:nvPr/>
             </p:nvPicPr>
             <p:blipFill>
-              <a:blip r:embed="rId3">
+              <a:blip r:embed="rId2">
                 <a:extLst>
                   <a:ext uri="{28A0092B-C50C-407E-A947-70E740481C1C}">
                     <a14:useLocalDpi xmlns:a14="http://schemas.microsoft.com/office/drawing/2010/main" val="0"/>
@@ -6640,7 +7795,7 @@
             <p:nvPr/>
           </p:nvPicPr>
           <p:blipFill>
-            <a:blip r:embed="rId4">
+            <a:blip r:embed="rId3">
               <a:extLst>
                 <a:ext uri="{28A0092B-C50C-407E-A947-70E740481C1C}">
                   <a14:useLocalDpi xmlns:a14="http://schemas.microsoft.com/office/drawing/2010/main" val="0"/>
@@ -6676,7 +7831,7 @@
             <p:nvPr/>
           </p:nvPicPr>
           <p:blipFill>
-            <a:blip r:embed="rId5">
+            <a:blip r:embed="rId4">
               <a:extLst>
                 <a:ext uri="{28A0092B-C50C-407E-A947-70E740481C1C}">
                   <a14:useLocalDpi xmlns:a14="http://schemas.microsoft.com/office/drawing/2010/main" val="0"/>
@@ -6712,7 +7867,7 @@
             <p:nvPr/>
           </p:nvPicPr>
           <p:blipFill>
-            <a:blip r:embed="rId6">
+            <a:blip r:embed="rId5">
               <a:extLst>
                 <a:ext uri="{28A0092B-C50C-407E-A947-70E740481C1C}">
                   <a14:useLocalDpi xmlns:a14="http://schemas.microsoft.com/office/drawing/2010/main" val="0"/>
@@ -6748,7 +7903,7 @@
             <p:nvPr/>
           </p:nvPicPr>
           <p:blipFill>
-            <a:blip r:embed="rId7">
+            <a:blip r:embed="rId6">
               <a:extLst>
                 <a:ext uri="{28A0092B-C50C-407E-A947-70E740481C1C}">
                   <a14:useLocalDpi xmlns:a14="http://schemas.microsoft.com/office/drawing/2010/main" val="0"/>
@@ -6784,7 +7939,7 @@
             <p:nvPr/>
           </p:nvPicPr>
           <p:blipFill>
-            <a:blip r:embed="rId8">
+            <a:blip r:embed="rId7">
               <a:extLst>
                 <a:ext uri="{28A0092B-C50C-407E-A947-70E740481C1C}">
                   <a14:useLocalDpi xmlns:a14="http://schemas.microsoft.com/office/drawing/2010/main" val="0"/>
@@ -6820,7 +7975,7 @@
             <p:nvPr/>
           </p:nvPicPr>
           <p:blipFill>
-            <a:blip r:embed="rId9">
+            <a:blip r:embed="rId8">
               <a:extLst>
                 <a:ext uri="{28A0092B-C50C-407E-A947-70E740481C1C}">
                   <a14:useLocalDpi xmlns:a14="http://schemas.microsoft.com/office/drawing/2010/main" val="0"/>
@@ -6856,7 +8011,7 @@
             <p:nvPr/>
           </p:nvPicPr>
           <p:blipFill>
-            <a:blip r:embed="rId10">
+            <a:blip r:embed="rId9">
               <a:extLst>
                 <a:ext uri="{28A0092B-C50C-407E-A947-70E740481C1C}">
                   <a14:useLocalDpi xmlns:a14="http://schemas.microsoft.com/office/drawing/2010/main" val="0"/>
@@ -6892,7 +8047,7 @@
             <p:nvPr/>
           </p:nvPicPr>
           <p:blipFill>
-            <a:blip r:embed="rId11">
+            <a:blip r:embed="rId10">
               <a:extLst>
                 <a:ext uri="{28A0092B-C50C-407E-A947-70E740481C1C}">
                   <a14:useLocalDpi xmlns:a14="http://schemas.microsoft.com/office/drawing/2010/main" val="0"/>
@@ -6928,7 +8083,7 @@
             <p:nvPr/>
           </p:nvPicPr>
           <p:blipFill>
-            <a:blip r:embed="rId12">
+            <a:blip r:embed="rId11">
               <a:extLst>
                 <a:ext uri="{28A0092B-C50C-407E-A947-70E740481C1C}">
                   <a14:useLocalDpi xmlns:a14="http://schemas.microsoft.com/office/drawing/2010/main" val="0"/>
@@ -6978,6 +8133,14 @@
 <file path=ppt/slides/slide3.xml><?xml version="1.0" encoding="utf-8"?>
 <p:sld xmlns:a="http://schemas.openxmlformats.org/drawingml/2006/main" xmlns:r="http://schemas.openxmlformats.org/officeDocument/2006/relationships" xmlns:p="http://schemas.openxmlformats.org/presentationml/2006/main">
   <p:cSld>
+    <p:bg>
+      <p:bgPr>
+        <a:solidFill>
+          <a:srgbClr val="F4F7FB"/>
+        </a:solidFill>
+        <a:effectLst/>
+      </p:bgPr>
+    </p:bg>
     <p:spTree>
       <p:nvGrpSpPr>
         <p:cNvPr id="1" name="">
@@ -6998,308 +8161,6 @@
           <a:chExt cx="0" cy="0"/>
         </a:xfrm>
       </p:grpSpPr>
-      <p:sp>
-        <p:nvSpPr>
-          <p:cNvPr id="2" name="Заголовок 1">
-            <a:extLst>
-              <a:ext uri="{FF2B5EF4-FFF2-40B4-BE49-F238E27FC236}">
-                <a16:creationId xmlns:a16="http://schemas.microsoft.com/office/drawing/2014/main" id="{13F1396A-0F2D-B058-FA89-87904E87CC4F}"/>
-              </a:ext>
-            </a:extLst>
-          </p:cNvPr>
-          <p:cNvSpPr>
-            <a:spLocks noGrp="1"/>
-          </p:cNvSpPr>
-          <p:nvPr>
-            <p:ph type="title"/>
-          </p:nvPr>
-        </p:nvSpPr>
-        <p:spPr/>
-        <p:txBody>
-          <a:bodyPr/>
-          <a:lstStyle/>
-          <a:p>
-            <a:r>
-              <a:rPr lang="ru-RU" dirty="0"/>
-              <a:t>Целевая аудитория</a:t>
-            </a:r>
-          </a:p>
-        </p:txBody>
-      </p:sp>
-      <p:sp>
-        <p:nvSpPr>
-          <p:cNvPr id="3" name="Объект 2">
-            <a:extLst>
-              <a:ext uri="{FF2B5EF4-FFF2-40B4-BE49-F238E27FC236}">
-                <a16:creationId xmlns:a16="http://schemas.microsoft.com/office/drawing/2014/main" id="{0BA9FA7F-2A74-916B-18D0-BEE0AD8B31AC}"/>
-              </a:ext>
-            </a:extLst>
-          </p:cNvPr>
-          <p:cNvSpPr>
-            <a:spLocks noGrp="1"/>
-          </p:cNvSpPr>
-          <p:nvPr>
-            <p:ph idx="1"/>
-          </p:nvPr>
-        </p:nvSpPr>
-        <p:spPr>
-          <a:xfrm>
-            <a:off x="838200" y="1825625"/>
-            <a:ext cx="10515600" cy="2457617"/>
-          </a:xfrm>
-        </p:spPr>
-        <p:txBody>
-          <a:bodyPr/>
-          <a:lstStyle/>
-          <a:p>
-            <a:pPr marL="0" indent="0">
-              <a:buNone/>
-            </a:pPr>
-            <a:r>
-              <a:rPr lang="ru-RU" b="1" dirty="0"/>
-              <a:t>Кто будет пользоваться ПО?</a:t>
-            </a:r>
-          </a:p>
-          <a:p>
-            <a:pPr marL="0" indent="0">
-              <a:buNone/>
-            </a:pPr>
-            <a:endParaRPr lang="ru-RU" b="1" dirty="0"/>
-          </a:p>
-          <a:p>
-            <a:pPr marL="0" indent="0">
-              <a:buNone/>
-            </a:pPr>
-            <a:r>
-              <a:rPr lang="ru-RU" dirty="0"/>
-              <a:t>Указать профессии / места работы / возрастные категории (т.е. указать известную информацию о будущих пользователях системы)</a:t>
-            </a:r>
-          </a:p>
-        </p:txBody>
-      </p:sp>
-      <p:sp>
-        <p:nvSpPr>
-          <p:cNvPr id="4" name="TextBox 3">
-            <a:extLst>
-              <a:ext uri="{FF2B5EF4-FFF2-40B4-BE49-F238E27FC236}">
-                <a16:creationId xmlns:a16="http://schemas.microsoft.com/office/drawing/2014/main" id="{DC8A636A-ADF1-4246-C4C3-3ADEC20F9284}"/>
-              </a:ext>
-            </a:extLst>
-          </p:cNvPr>
-          <p:cNvSpPr txBox="1"/>
-          <p:nvPr/>
-        </p:nvSpPr>
-        <p:spPr>
-          <a:xfrm>
-            <a:off x="11245516" y="103515"/>
-            <a:ext cx="946484" cy="523220"/>
-          </a:xfrm>
-          <a:prstGeom prst="rect">
-            <a:avLst/>
-          </a:prstGeom>
-          <a:noFill/>
-        </p:spPr>
-        <p:txBody>
-          <a:bodyPr wrap="square">
-            <a:spAutoFit/>
-          </a:bodyPr>
-          <a:lstStyle/>
-          <a:p>
-            <a:r>
-              <a:rPr lang="ru-RU" sz="2800" dirty="0"/>
-              <a:t>3/11</a:t>
-            </a:r>
-          </a:p>
-        </p:txBody>
-      </p:sp>
-      <p:pic>
-        <p:nvPicPr>
-          <p:cNvPr id="5" name="Picture 4" descr="Placeholder Image | Elementor Developers">
-            <a:extLst>
-              <a:ext uri="{FF2B5EF4-FFF2-40B4-BE49-F238E27FC236}">
-                <a16:creationId xmlns:a16="http://schemas.microsoft.com/office/drawing/2014/main" id="{8AD15838-F5C5-0CAB-1DC4-9312335B5F29}"/>
-              </a:ext>
-            </a:extLst>
-          </p:cNvPr>
-          <p:cNvPicPr>
-            <a:picLocks noChangeAspect="1" noChangeArrowheads="1"/>
-          </p:cNvPicPr>
-          <p:nvPr/>
-        </p:nvPicPr>
-        <p:blipFill>
-          <a:blip r:embed="rId2">
-            <a:extLst>
-              <a:ext uri="{28A0092B-C50C-407E-A947-70E740481C1C}">
-                <a14:useLocalDpi xmlns:a14="http://schemas.microsoft.com/office/drawing/2010/main" val="0"/>
-              </a:ext>
-            </a:extLst>
-          </a:blip>
-          <a:srcRect/>
-          <a:stretch>
-            <a:fillRect/>
-          </a:stretch>
-        </p:blipFill>
-        <p:spPr bwMode="auto">
-          <a:xfrm>
-            <a:off x="838201" y="4418179"/>
-            <a:ext cx="2410326" cy="1798096"/>
-          </a:xfrm>
-          <a:prstGeom prst="rect">
-            <a:avLst/>
-          </a:prstGeom>
-          <a:noFill/>
-          <a:extLst>
-            <a:ext uri="{909E8E84-426E-40DD-AFC4-6F175D3DCCD1}">
-              <a14:hiddenFill xmlns:a14="http://schemas.microsoft.com/office/drawing/2010/main">
-                <a:solidFill>
-                  <a:srgbClr val="FFFFFF"/>
-                </a:solidFill>
-              </a14:hiddenFill>
-            </a:ext>
-          </a:extLst>
-        </p:spPr>
-      </p:pic>
-      <p:pic>
-        <p:nvPicPr>
-          <p:cNvPr id="6" name="Picture 4" descr="Placeholder Image | Elementor Developers">
-            <a:extLst>
-              <a:ext uri="{FF2B5EF4-FFF2-40B4-BE49-F238E27FC236}">
-                <a16:creationId xmlns:a16="http://schemas.microsoft.com/office/drawing/2014/main" id="{5BFB051E-C642-1C7E-6A00-359FC8D281C5}"/>
-              </a:ext>
-            </a:extLst>
-          </p:cNvPr>
-          <p:cNvPicPr>
-            <a:picLocks noChangeAspect="1" noChangeArrowheads="1"/>
-          </p:cNvPicPr>
-          <p:nvPr/>
-        </p:nvPicPr>
-        <p:blipFill>
-          <a:blip r:embed="rId2">
-            <a:extLst>
-              <a:ext uri="{28A0092B-C50C-407E-A947-70E740481C1C}">
-                <a14:useLocalDpi xmlns:a14="http://schemas.microsoft.com/office/drawing/2010/main" val="0"/>
-              </a:ext>
-            </a:extLst>
-          </a:blip>
-          <a:srcRect/>
-          <a:stretch>
-            <a:fillRect/>
-          </a:stretch>
-        </p:blipFill>
-        <p:spPr bwMode="auto">
-          <a:xfrm>
-            <a:off x="3652587" y="4418179"/>
-            <a:ext cx="2410326" cy="1798096"/>
-          </a:xfrm>
-          <a:prstGeom prst="rect">
-            <a:avLst/>
-          </a:prstGeom>
-          <a:noFill/>
-          <a:extLst>
-            <a:ext uri="{909E8E84-426E-40DD-AFC4-6F175D3DCCD1}">
-              <a14:hiddenFill xmlns:a14="http://schemas.microsoft.com/office/drawing/2010/main">
-                <a:solidFill>
-                  <a:srgbClr val="FFFFFF"/>
-                </a:solidFill>
-              </a14:hiddenFill>
-            </a:ext>
-          </a:extLst>
-        </p:spPr>
-      </p:pic>
-      <p:pic>
-        <p:nvPicPr>
-          <p:cNvPr id="7" name="Picture 4" descr="Placeholder Image | Elementor Developers">
-            <a:extLst>
-              <a:ext uri="{FF2B5EF4-FFF2-40B4-BE49-F238E27FC236}">
-                <a16:creationId xmlns:a16="http://schemas.microsoft.com/office/drawing/2014/main" id="{91F79545-0387-6A30-01FD-D288D9F069DB}"/>
-              </a:ext>
-            </a:extLst>
-          </p:cNvPr>
-          <p:cNvPicPr>
-            <a:picLocks noChangeAspect="1" noChangeArrowheads="1"/>
-          </p:cNvPicPr>
-          <p:nvPr/>
-        </p:nvPicPr>
-        <p:blipFill>
-          <a:blip r:embed="rId2">
-            <a:extLst>
-              <a:ext uri="{28A0092B-C50C-407E-A947-70E740481C1C}">
-                <a14:useLocalDpi xmlns:a14="http://schemas.microsoft.com/office/drawing/2010/main" val="0"/>
-              </a:ext>
-            </a:extLst>
-          </a:blip>
-          <a:srcRect/>
-          <a:stretch>
-            <a:fillRect/>
-          </a:stretch>
-        </p:blipFill>
-        <p:spPr bwMode="auto">
-          <a:xfrm>
-            <a:off x="6494046" y="4418179"/>
-            <a:ext cx="2410326" cy="1798096"/>
-          </a:xfrm>
-          <a:prstGeom prst="rect">
-            <a:avLst/>
-          </a:prstGeom>
-          <a:noFill/>
-          <a:extLst>
-            <a:ext uri="{909E8E84-426E-40DD-AFC4-6F175D3DCCD1}">
-              <a14:hiddenFill xmlns:a14="http://schemas.microsoft.com/office/drawing/2010/main">
-                <a:solidFill>
-                  <a:srgbClr val="FFFFFF"/>
-                </a:solidFill>
-              </a14:hiddenFill>
-            </a:ext>
-          </a:extLst>
-        </p:spPr>
-      </p:pic>
-      <p:pic>
-        <p:nvPicPr>
-          <p:cNvPr id="8" name="Picture 4" descr="Placeholder Image | Elementor Developers">
-            <a:extLst>
-              <a:ext uri="{FF2B5EF4-FFF2-40B4-BE49-F238E27FC236}">
-                <a16:creationId xmlns:a16="http://schemas.microsoft.com/office/drawing/2014/main" id="{B39B62FE-E2BF-ACA6-180F-E091FE663DB3}"/>
-              </a:ext>
-            </a:extLst>
-          </p:cNvPr>
-          <p:cNvPicPr>
-            <a:picLocks noChangeAspect="1" noChangeArrowheads="1"/>
-          </p:cNvPicPr>
-          <p:nvPr/>
-        </p:nvPicPr>
-        <p:blipFill>
-          <a:blip r:embed="rId2">
-            <a:extLst>
-              <a:ext uri="{28A0092B-C50C-407E-A947-70E740481C1C}">
-                <a14:useLocalDpi xmlns:a14="http://schemas.microsoft.com/office/drawing/2010/main" val="0"/>
-              </a:ext>
-            </a:extLst>
-          </a:blip>
-          <a:srcRect/>
-          <a:stretch>
-            <a:fillRect/>
-          </a:stretch>
-        </p:blipFill>
-        <p:spPr bwMode="auto">
-          <a:xfrm>
-            <a:off x="9308432" y="4418179"/>
-            <a:ext cx="2410326" cy="1798096"/>
-          </a:xfrm>
-          <a:prstGeom prst="rect">
-            <a:avLst/>
-          </a:prstGeom>
-          <a:noFill/>
-          <a:extLst>
-            <a:ext uri="{909E8E84-426E-40DD-AFC4-6F175D3DCCD1}">
-              <a14:hiddenFill xmlns:a14="http://schemas.microsoft.com/office/drawing/2010/main">
-                <a:solidFill>
-                  <a:srgbClr val="FFFFFF"/>
-                </a:solidFill>
-              </a14:hiddenFill>
-            </a:ext>
-          </a:extLst>
-        </p:spPr>
-      </p:pic>
       <p:sp>
         <p:nvSpPr>
           <p:cNvPr id="10" name="Прямоугольник 9">
@@ -7461,7 +8322,7 @@
               <p:nvPr/>
             </p:nvPicPr>
             <p:blipFill>
-              <a:blip r:embed="rId3">
+              <a:blip r:embed="rId2">
                 <a:extLst>
                   <a:ext uri="{28A0092B-C50C-407E-A947-70E740481C1C}">
                     <a14:useLocalDpi xmlns:a14="http://schemas.microsoft.com/office/drawing/2010/main" val="0"/>
@@ -7619,7 +8480,7 @@
             <p:nvPr/>
           </p:nvPicPr>
           <p:blipFill>
-            <a:blip r:embed="rId4">
+            <a:blip r:embed="rId3">
               <a:extLst>
                 <a:ext uri="{28A0092B-C50C-407E-A947-70E740481C1C}">
                   <a14:useLocalDpi xmlns:a14="http://schemas.microsoft.com/office/drawing/2010/main" val="0"/>
@@ -7655,7 +8516,7 @@
             <p:nvPr/>
           </p:nvPicPr>
           <p:blipFill>
-            <a:blip r:embed="rId5">
+            <a:blip r:embed="rId4">
               <a:extLst>
                 <a:ext uri="{28A0092B-C50C-407E-A947-70E740481C1C}">
                   <a14:useLocalDpi xmlns:a14="http://schemas.microsoft.com/office/drawing/2010/main" val="0"/>
@@ -7691,7 +8552,7 @@
             <p:nvPr/>
           </p:nvPicPr>
           <p:blipFill>
-            <a:blip r:embed="rId6">
+            <a:blip r:embed="rId5">
               <a:extLst>
                 <a:ext uri="{28A0092B-C50C-407E-A947-70E740481C1C}">
                   <a14:useLocalDpi xmlns:a14="http://schemas.microsoft.com/office/drawing/2010/main" val="0"/>
@@ -7727,7 +8588,7 @@
             <p:nvPr/>
           </p:nvPicPr>
           <p:blipFill>
-            <a:blip r:embed="rId7">
+            <a:blip r:embed="rId6">
               <a:extLst>
                 <a:ext uri="{28A0092B-C50C-407E-A947-70E740481C1C}">
                   <a14:useLocalDpi xmlns:a14="http://schemas.microsoft.com/office/drawing/2010/main" val="0"/>
@@ -7763,7 +8624,7 @@
             <p:nvPr/>
           </p:nvPicPr>
           <p:blipFill>
-            <a:blip r:embed="rId8">
+            <a:blip r:embed="rId7">
               <a:extLst>
                 <a:ext uri="{28A0092B-C50C-407E-A947-70E740481C1C}">
                   <a14:useLocalDpi xmlns:a14="http://schemas.microsoft.com/office/drawing/2010/main" val="0"/>
@@ -7799,7 +8660,7 @@
             <p:nvPr/>
           </p:nvPicPr>
           <p:blipFill>
-            <a:blip r:embed="rId9">
+            <a:blip r:embed="rId8">
               <a:extLst>
                 <a:ext uri="{28A0092B-C50C-407E-A947-70E740481C1C}">
                   <a14:useLocalDpi xmlns:a14="http://schemas.microsoft.com/office/drawing/2010/main" val="0"/>
@@ -7835,7 +8696,7 @@
             <p:nvPr/>
           </p:nvPicPr>
           <p:blipFill>
-            <a:blip r:embed="rId10">
+            <a:blip r:embed="rId9">
               <a:extLst>
                 <a:ext uri="{28A0092B-C50C-407E-A947-70E740481C1C}">
                   <a14:useLocalDpi xmlns:a14="http://schemas.microsoft.com/office/drawing/2010/main" val="0"/>
@@ -7871,7 +8732,7 @@
             <p:nvPr/>
           </p:nvPicPr>
           <p:blipFill>
-            <a:blip r:embed="rId11">
+            <a:blip r:embed="rId10">
               <a:extLst>
                 <a:ext uri="{28A0092B-C50C-407E-A947-70E740481C1C}">
                   <a14:useLocalDpi xmlns:a14="http://schemas.microsoft.com/office/drawing/2010/main" val="0"/>
@@ -7907,7 +8768,7 @@
             <p:nvPr/>
           </p:nvPicPr>
           <p:blipFill>
-            <a:blip r:embed="rId12">
+            <a:blip r:embed="rId11">
               <a:extLst>
                 <a:ext uri="{28A0092B-C50C-407E-A947-70E740481C1C}">
                   <a14:useLocalDpi xmlns:a14="http://schemas.microsoft.com/office/drawing/2010/main" val="0"/>
@@ -7926,6 +8787,723 @@
             <a:prstGeom prst="rect">
               <a:avLst/>
             </a:prstGeom>
+          </p:spPr>
+        </p:pic>
+      </p:grpSp>
+      <p:grpSp>
+        <p:nvGrpSpPr>
+          <p:cNvPr id="34" name="Группа 33">
+            <a:extLst>
+              <a:ext uri="{FF2B5EF4-FFF2-40B4-BE49-F238E27FC236}">
+                <a16:creationId xmlns:a16="http://schemas.microsoft.com/office/drawing/2014/main" id="{41044F8D-5DED-F1F0-E042-CD8C8593EF9E}"/>
+              </a:ext>
+            </a:extLst>
+          </p:cNvPr>
+          <p:cNvGrpSpPr/>
+          <p:nvPr/>
+        </p:nvGrpSpPr>
+        <p:grpSpPr>
+          <a:xfrm>
+            <a:off x="861468" y="106931"/>
+            <a:ext cx="11206162" cy="786262"/>
+            <a:chOff x="883444" y="90039"/>
+            <a:chExt cx="11206162" cy="786262"/>
+          </a:xfrm>
+        </p:grpSpPr>
+        <p:sp>
+          <p:nvSpPr>
+            <p:cNvPr id="35" name="Прямоугольник: скругленные углы 34">
+              <a:extLst>
+                <a:ext uri="{FF2B5EF4-FFF2-40B4-BE49-F238E27FC236}">
+                  <a16:creationId xmlns:a16="http://schemas.microsoft.com/office/drawing/2014/main" id="{31D8165E-9242-187B-039C-FE75B8C2A95C}"/>
+                </a:ext>
+              </a:extLst>
+            </p:cNvPr>
+            <p:cNvSpPr/>
+            <p:nvPr/>
+          </p:nvSpPr>
+          <p:spPr>
+            <a:xfrm>
+              <a:off x="883444" y="90039"/>
+              <a:ext cx="11206162" cy="786262"/>
+            </a:xfrm>
+            <a:prstGeom prst="roundRect">
+              <a:avLst>
+                <a:gd name="adj" fmla="val 4689"/>
+              </a:avLst>
+            </a:prstGeom>
+            <a:solidFill>
+              <a:schemeClr val="bg1"/>
+            </a:solidFill>
+            <a:ln>
+              <a:solidFill>
+                <a:schemeClr val="bg1"/>
+              </a:solidFill>
+            </a:ln>
+          </p:spPr>
+          <p:style>
+            <a:lnRef idx="2">
+              <a:schemeClr val="accent1">
+                <a:shade val="15000"/>
+              </a:schemeClr>
+            </a:lnRef>
+            <a:fillRef idx="1">
+              <a:schemeClr val="accent1"/>
+            </a:fillRef>
+            <a:effectRef idx="0">
+              <a:schemeClr val="accent1"/>
+            </a:effectRef>
+            <a:fontRef idx="minor">
+              <a:schemeClr val="lt1"/>
+            </a:fontRef>
+          </p:style>
+          <p:txBody>
+            <a:bodyPr rtlCol="0" anchor="ctr"/>
+            <a:lstStyle/>
+            <a:p>
+              <a:pPr algn="ctr"/>
+              <a:endParaRPr lang="ru-RU"/>
+            </a:p>
+          </p:txBody>
+        </p:sp>
+        <p:sp>
+          <p:nvSpPr>
+            <p:cNvPr id="36" name="TextBox 35">
+              <a:extLst>
+                <a:ext uri="{FF2B5EF4-FFF2-40B4-BE49-F238E27FC236}">
+                  <a16:creationId xmlns:a16="http://schemas.microsoft.com/office/drawing/2014/main" id="{8513342F-A85F-9C71-7D97-EFFF75972748}"/>
+                </a:ext>
+              </a:extLst>
+            </p:cNvPr>
+            <p:cNvSpPr txBox="1"/>
+            <p:nvPr/>
+          </p:nvSpPr>
+          <p:spPr>
+            <a:xfrm>
+              <a:off x="11143122" y="221560"/>
+              <a:ext cx="858378" cy="523220"/>
+            </a:xfrm>
+            <a:prstGeom prst="rect">
+              <a:avLst/>
+            </a:prstGeom>
+            <a:noFill/>
+          </p:spPr>
+          <p:txBody>
+            <a:bodyPr wrap="square">
+              <a:spAutoFit/>
+            </a:bodyPr>
+            <a:lstStyle/>
+            <a:p>
+              <a:r>
+                <a:rPr lang="ru-RU" sz="2800" dirty="0">
+                  <a:latin typeface="Comfortaa Medium" pitchFamily="2" charset="0"/>
+                </a:rPr>
+                <a:t>3/11</a:t>
+              </a:r>
+            </a:p>
+          </p:txBody>
+        </p:sp>
+      </p:grpSp>
+      <p:sp>
+        <p:nvSpPr>
+          <p:cNvPr id="37" name="Заголовок 1">
+            <a:extLst>
+              <a:ext uri="{FF2B5EF4-FFF2-40B4-BE49-F238E27FC236}">
+                <a16:creationId xmlns:a16="http://schemas.microsoft.com/office/drawing/2014/main" id="{DF48DF52-9C21-33D7-D65C-48BF51610B7A}"/>
+              </a:ext>
+            </a:extLst>
+          </p:cNvPr>
+          <p:cNvSpPr>
+            <a:spLocks noGrp="1"/>
+          </p:cNvSpPr>
+          <p:nvPr>
+            <p:ph type="title"/>
+          </p:nvPr>
+        </p:nvSpPr>
+        <p:spPr>
+          <a:xfrm>
+            <a:off x="1076324" y="228389"/>
+            <a:ext cx="10066797" cy="509563"/>
+          </a:xfrm>
+        </p:spPr>
+        <p:txBody>
+          <a:bodyPr>
+            <a:noAutofit/>
+          </a:bodyPr>
+          <a:lstStyle/>
+          <a:p>
+            <a:r>
+              <a:rPr lang="ru-RU" sz="3200" dirty="0">
+                <a:latin typeface="Comfortaa Medium" pitchFamily="2" charset="0"/>
+              </a:rPr>
+              <a:t>Целевая аудитория</a:t>
+            </a:r>
+          </a:p>
+        </p:txBody>
+      </p:sp>
+      <p:grpSp>
+        <p:nvGrpSpPr>
+          <p:cNvPr id="55" name="Группа 54">
+            <a:extLst>
+              <a:ext uri="{FF2B5EF4-FFF2-40B4-BE49-F238E27FC236}">
+                <a16:creationId xmlns:a16="http://schemas.microsoft.com/office/drawing/2014/main" id="{B668F218-94DA-241A-1D25-F78CB22DA5A5}"/>
+              </a:ext>
+            </a:extLst>
+          </p:cNvPr>
+          <p:cNvGrpSpPr/>
+          <p:nvPr/>
+        </p:nvGrpSpPr>
+        <p:grpSpPr>
+          <a:xfrm>
+            <a:off x="1277367" y="1667282"/>
+            <a:ext cx="3156980" cy="3732357"/>
+            <a:chOff x="1041394" y="1667282"/>
+            <a:chExt cx="3156980" cy="3732357"/>
+          </a:xfrm>
+        </p:grpSpPr>
+        <p:sp>
+          <p:nvSpPr>
+            <p:cNvPr id="45" name="Прямоугольник: скругленные углы 44">
+              <a:extLst>
+                <a:ext uri="{FF2B5EF4-FFF2-40B4-BE49-F238E27FC236}">
+                  <a16:creationId xmlns:a16="http://schemas.microsoft.com/office/drawing/2014/main" id="{672A310A-91B1-96D1-7256-D923F900F72E}"/>
+                </a:ext>
+              </a:extLst>
+            </p:cNvPr>
+            <p:cNvSpPr/>
+            <p:nvPr/>
+          </p:nvSpPr>
+          <p:spPr>
+            <a:xfrm>
+              <a:off x="1041394" y="1667282"/>
+              <a:ext cx="3156980" cy="3732357"/>
+            </a:xfrm>
+            <a:prstGeom prst="roundRect">
+              <a:avLst>
+                <a:gd name="adj" fmla="val 4689"/>
+              </a:avLst>
+            </a:prstGeom>
+            <a:solidFill>
+              <a:schemeClr val="bg1"/>
+            </a:solidFill>
+            <a:ln>
+              <a:solidFill>
+                <a:schemeClr val="bg1"/>
+              </a:solidFill>
+            </a:ln>
+          </p:spPr>
+          <p:style>
+            <a:lnRef idx="2">
+              <a:schemeClr val="accent1">
+                <a:shade val="15000"/>
+              </a:schemeClr>
+            </a:lnRef>
+            <a:fillRef idx="1">
+              <a:schemeClr val="accent1"/>
+            </a:fillRef>
+            <a:effectRef idx="0">
+              <a:schemeClr val="accent1"/>
+            </a:effectRef>
+            <a:fontRef idx="minor">
+              <a:schemeClr val="lt1"/>
+            </a:fontRef>
+          </p:style>
+          <p:txBody>
+            <a:bodyPr rtlCol="0" anchor="ctr"/>
+            <a:lstStyle/>
+            <a:p>
+              <a:pPr algn="ctr"/>
+              <a:endParaRPr lang="ru-RU"/>
+            </a:p>
+          </p:txBody>
+        </p:sp>
+        <p:pic>
+          <p:nvPicPr>
+            <p:cNvPr id="3074" name="Picture 2" descr="Более 70 работ на тему «колледж парк иллюстрации»: стоковые фото, картинки  и изображения royalty-free - iStock">
+              <a:extLst>
+                <a:ext uri="{FF2B5EF4-FFF2-40B4-BE49-F238E27FC236}">
+                  <a16:creationId xmlns:a16="http://schemas.microsoft.com/office/drawing/2014/main" id="{B27A964A-CB08-4BCA-764A-2AD159EAD6B0}"/>
+                </a:ext>
+              </a:extLst>
+            </p:cNvPr>
+            <p:cNvPicPr>
+              <a:picLocks noChangeAspect="1" noChangeArrowheads="1"/>
+            </p:cNvPicPr>
+            <p:nvPr/>
+          </p:nvPicPr>
+          <p:blipFill rotWithShape="1">
+            <a:blip r:embed="rId12">
+              <a:biLevel thresh="50000"/>
+              <a:extLst>
+                <a:ext uri="{BEBA8EAE-BF5A-486C-A8C5-ECC9F3942E4B}">
+                  <a14:imgProps xmlns:a14="http://schemas.microsoft.com/office/drawing/2010/main">
+                    <a14:imgLayer r:embed="rId13">
+                      <a14:imgEffect>
+                        <a14:backgroundRemoval t="24673" b="75817" l="24510" r="74510">
+                          <a14:foregroundMark x1="30229" y1="41993" x2="29902" y2="41993"/>
+                          <a14:foregroundMark x1="27778" y1="54085" x2="27778" y2="54085"/>
+                          <a14:foregroundMark x1="50163" y1="50163" x2="50163" y2="50163"/>
+                          <a14:foregroundMark x1="72712" y1="53105" x2="72712" y2="53105"/>
+                          <a14:foregroundMark x1="74510" y1="46242" x2="74510" y2="46242"/>
+                          <a14:foregroundMark x1="64216" y1="73366" x2="64216" y2="73366"/>
+                          <a14:foregroundMark x1="50490" y1="74183" x2="50490" y2="74183"/>
+                          <a14:foregroundMark x1="47876" y1="74346" x2="47876" y2="74346"/>
+                          <a14:foregroundMark x1="24673" y1="74183" x2="24673" y2="74183"/>
+                          <a14:foregroundMark x1="27288" y1="75817" x2="27288" y2="75817"/>
+                          <a14:foregroundMark x1="55229" y1="27124" x2="55229" y2="27124"/>
+                          <a14:foregroundMark x1="49673" y1="24673" x2="49673" y2="24673"/>
+                        </a14:backgroundRemoval>
+                      </a14:imgEffect>
+                    </a14:imgLayer>
+                  </a14:imgProps>
+                </a:ext>
+                <a:ext uri="{28A0092B-C50C-407E-A947-70E740481C1C}">
+                  <a14:useLocalDpi xmlns:a14="http://schemas.microsoft.com/office/drawing/2010/main" val="0"/>
+                </a:ext>
+              </a:extLst>
+            </a:blip>
+            <a:srcRect l="21326" t="22494" r="22676" b="22296"/>
+            <a:stretch>
+              <a:fillRect/>
+            </a:stretch>
+          </p:blipFill>
+          <p:spPr bwMode="auto">
+            <a:xfrm>
+              <a:off x="1561772" y="2135385"/>
+              <a:ext cx="2116224" cy="2086412"/>
+            </a:xfrm>
+            <a:prstGeom prst="rect">
+              <a:avLst/>
+            </a:prstGeom>
+            <a:noFill/>
+            <a:extLst>
+              <a:ext uri="{909E8E84-426E-40DD-AFC4-6F175D3DCCD1}">
+                <a14:hiddenFill xmlns:a14="http://schemas.microsoft.com/office/drawing/2010/main">
+                  <a:solidFill>
+                    <a:srgbClr val="FFFFFF"/>
+                  </a:solidFill>
+                </a14:hiddenFill>
+              </a:ext>
+            </a:extLst>
+          </p:spPr>
+        </p:pic>
+        <p:sp>
+          <p:nvSpPr>
+            <p:cNvPr id="40" name="TextBox 39">
+              <a:extLst>
+                <a:ext uri="{FF2B5EF4-FFF2-40B4-BE49-F238E27FC236}">
+                  <a16:creationId xmlns:a16="http://schemas.microsoft.com/office/drawing/2014/main" id="{CABC9447-49B4-8D28-5198-E2812D3E99EE}"/>
+                </a:ext>
+              </a:extLst>
+            </p:cNvPr>
+            <p:cNvSpPr txBox="1"/>
+            <p:nvPr/>
+          </p:nvSpPr>
+          <p:spPr>
+            <a:xfrm>
+              <a:off x="1041394" y="4544874"/>
+              <a:ext cx="3156980" cy="369332"/>
+            </a:xfrm>
+            <a:prstGeom prst="rect">
+              <a:avLst/>
+            </a:prstGeom>
+            <a:noFill/>
+          </p:spPr>
+          <p:txBody>
+            <a:bodyPr wrap="square">
+              <a:spAutoFit/>
+            </a:bodyPr>
+            <a:lstStyle/>
+            <a:p>
+              <a:pPr marL="0" indent="0" algn="ctr">
+                <a:buNone/>
+              </a:pPr>
+              <a:r>
+                <a:rPr lang="ru-RU" dirty="0">
+                  <a:latin typeface="Comfortaa Medium" pitchFamily="2" charset="0"/>
+                </a:rPr>
+                <a:t>Сотрудники колледжа </a:t>
+              </a:r>
+            </a:p>
+          </p:txBody>
+        </p:sp>
+      </p:grpSp>
+      <p:grpSp>
+        <p:nvGrpSpPr>
+          <p:cNvPr id="58" name="Группа 57">
+            <a:extLst>
+              <a:ext uri="{FF2B5EF4-FFF2-40B4-BE49-F238E27FC236}">
+                <a16:creationId xmlns:a16="http://schemas.microsoft.com/office/drawing/2014/main" id="{69C73553-D1F0-BC41-C3CF-0E6A4AA3A655}"/>
+              </a:ext>
+            </a:extLst>
+          </p:cNvPr>
+          <p:cNvGrpSpPr/>
+          <p:nvPr/>
+        </p:nvGrpSpPr>
+        <p:grpSpPr>
+          <a:xfrm>
+            <a:off x="4932510" y="1703727"/>
+            <a:ext cx="3156980" cy="3732357"/>
+            <a:chOff x="4932510" y="1703727"/>
+            <a:chExt cx="3156980" cy="3732357"/>
+          </a:xfrm>
+        </p:grpSpPr>
+        <p:grpSp>
+          <p:nvGrpSpPr>
+            <p:cNvPr id="54" name="Группа 53">
+              <a:extLst>
+                <a:ext uri="{FF2B5EF4-FFF2-40B4-BE49-F238E27FC236}">
+                  <a16:creationId xmlns:a16="http://schemas.microsoft.com/office/drawing/2014/main" id="{1CA3B8BC-5630-AB17-C767-29D1F630DE41}"/>
+                </a:ext>
+              </a:extLst>
+            </p:cNvPr>
+            <p:cNvGrpSpPr/>
+            <p:nvPr/>
+          </p:nvGrpSpPr>
+          <p:grpSpPr>
+            <a:xfrm>
+              <a:off x="4932510" y="1703727"/>
+              <a:ext cx="3156980" cy="3732357"/>
+              <a:chOff x="4836648" y="1703727"/>
+              <a:chExt cx="3156980" cy="3732357"/>
+            </a:xfrm>
+          </p:grpSpPr>
+          <p:sp>
+            <p:nvSpPr>
+              <p:cNvPr id="47" name="Прямоугольник: скругленные углы 46">
+                <a:extLst>
+                  <a:ext uri="{FF2B5EF4-FFF2-40B4-BE49-F238E27FC236}">
+                    <a16:creationId xmlns:a16="http://schemas.microsoft.com/office/drawing/2014/main" id="{B1B5234B-2937-EF70-546B-A8F040F243C2}"/>
+                  </a:ext>
+                </a:extLst>
+              </p:cNvPr>
+              <p:cNvSpPr/>
+              <p:nvPr/>
+            </p:nvSpPr>
+            <p:spPr>
+              <a:xfrm>
+                <a:off x="4836648" y="1703727"/>
+                <a:ext cx="3156980" cy="3732357"/>
+              </a:xfrm>
+              <a:prstGeom prst="roundRect">
+                <a:avLst>
+                  <a:gd name="adj" fmla="val 4689"/>
+                </a:avLst>
+              </a:prstGeom>
+              <a:solidFill>
+                <a:schemeClr val="bg1"/>
+              </a:solidFill>
+              <a:ln>
+                <a:solidFill>
+                  <a:schemeClr val="bg1"/>
+                </a:solidFill>
+              </a:ln>
+            </p:spPr>
+            <p:style>
+              <a:lnRef idx="2">
+                <a:schemeClr val="accent1">
+                  <a:shade val="15000"/>
+                </a:schemeClr>
+              </a:lnRef>
+              <a:fillRef idx="1">
+                <a:schemeClr val="accent1"/>
+              </a:fillRef>
+              <a:effectRef idx="0">
+                <a:schemeClr val="accent1"/>
+              </a:effectRef>
+              <a:fontRef idx="minor">
+                <a:schemeClr val="lt1"/>
+              </a:fontRef>
+            </p:style>
+            <p:txBody>
+              <a:bodyPr rtlCol="0" anchor="ctr"/>
+              <a:lstStyle/>
+              <a:p>
+                <a:pPr algn="ctr"/>
+                <a:endParaRPr lang="ru-RU"/>
+              </a:p>
+            </p:txBody>
+          </p:sp>
+          <p:sp>
+            <p:nvSpPr>
+              <p:cNvPr id="49" name="TextBox 48">
+                <a:extLst>
+                  <a:ext uri="{FF2B5EF4-FFF2-40B4-BE49-F238E27FC236}">
+                    <a16:creationId xmlns:a16="http://schemas.microsoft.com/office/drawing/2014/main" id="{E5B6AC38-B55B-1EE9-B637-F6B36BDE7F5D}"/>
+                  </a:ext>
+                </a:extLst>
+              </p:cNvPr>
+              <p:cNvSpPr txBox="1"/>
+              <p:nvPr/>
+            </p:nvSpPr>
+            <p:spPr>
+              <a:xfrm>
+                <a:off x="4836648" y="4581319"/>
+                <a:ext cx="3156980" cy="369332"/>
+              </a:xfrm>
+              <a:prstGeom prst="rect">
+                <a:avLst/>
+              </a:prstGeom>
+              <a:noFill/>
+            </p:spPr>
+            <p:txBody>
+              <a:bodyPr wrap="square">
+                <a:spAutoFit/>
+              </a:bodyPr>
+              <a:lstStyle/>
+              <a:p>
+                <a:pPr marL="0" indent="0" algn="ctr">
+                  <a:buNone/>
+                </a:pPr>
+                <a:r>
+                  <a:rPr lang="ru-RU" dirty="0">
+                    <a:latin typeface="Comfortaa Medium" pitchFamily="2" charset="0"/>
+                  </a:rPr>
+                  <a:t>Коменданты</a:t>
+                </a:r>
+              </a:p>
+            </p:txBody>
+          </p:sp>
+        </p:grpSp>
+        <p:pic>
+          <p:nvPicPr>
+            <p:cNvPr id="56" name="Picture 4" descr="Корпуса и корпуса для ноутбуков Компьютерные иконки, Ноутбук, электроника,  прямоугольник png | PNGEgg">
+              <a:extLst>
+                <a:ext uri="{FF2B5EF4-FFF2-40B4-BE49-F238E27FC236}">
+                  <a16:creationId xmlns:a16="http://schemas.microsoft.com/office/drawing/2014/main" id="{4AADC2EE-5AAB-B45D-9931-67E3DE0A1859}"/>
+                </a:ext>
+              </a:extLst>
+            </p:cNvPr>
+            <p:cNvPicPr>
+              <a:picLocks noChangeAspect="1" noChangeArrowheads="1"/>
+            </p:cNvPicPr>
+            <p:nvPr/>
+          </p:nvPicPr>
+          <p:blipFill rotWithShape="1">
+            <a:blip r:embed="rId14">
+              <a:extLst>
+                <a:ext uri="{BEBA8EAE-BF5A-486C-A8C5-ECC9F3942E4B}">
+                  <a14:imgProps xmlns:a14="http://schemas.microsoft.com/office/drawing/2010/main">
+                    <a14:imgLayer r:embed="rId15">
+                      <a14:imgEffect>
+                        <a14:backgroundRemoval t="10000" b="90000" l="10000" r="90000"/>
+                      </a14:imgEffect>
+                    </a14:imgLayer>
+                  </a14:imgProps>
+                </a:ext>
+                <a:ext uri="{28A0092B-C50C-407E-A947-70E740481C1C}">
+                  <a14:useLocalDpi xmlns:a14="http://schemas.microsoft.com/office/drawing/2010/main" val="0"/>
+                </a:ext>
+              </a:extLst>
+            </a:blip>
+            <a:srcRect l="20934" t="8844" r="20935" b="8844"/>
+            <a:stretch>
+              <a:fillRect/>
+            </a:stretch>
+          </p:blipFill>
+          <p:spPr bwMode="auto">
+            <a:xfrm>
+              <a:off x="5401022" y="2486555"/>
+              <a:ext cx="2219956" cy="1788226"/>
+            </a:xfrm>
+            <a:prstGeom prst="rect">
+              <a:avLst/>
+            </a:prstGeom>
+            <a:noFill/>
+            <a:extLst>
+              <a:ext uri="{909E8E84-426E-40DD-AFC4-6F175D3DCCD1}">
+                <a14:hiddenFill xmlns:a14="http://schemas.microsoft.com/office/drawing/2010/main">
+                  <a:solidFill>
+                    <a:srgbClr val="FFFFFF"/>
+                  </a:solidFill>
+                </a14:hiddenFill>
+              </a:ext>
+            </a:extLst>
+          </p:spPr>
+        </p:pic>
+      </p:grpSp>
+      <p:grpSp>
+        <p:nvGrpSpPr>
+          <p:cNvPr id="59" name="Группа 58">
+            <a:extLst>
+              <a:ext uri="{FF2B5EF4-FFF2-40B4-BE49-F238E27FC236}">
+                <a16:creationId xmlns:a16="http://schemas.microsoft.com/office/drawing/2014/main" id="{9B7602A2-2FDF-C8B2-6C24-54325DC86F6D}"/>
+              </a:ext>
+            </a:extLst>
+          </p:cNvPr>
+          <p:cNvGrpSpPr/>
+          <p:nvPr/>
+        </p:nvGrpSpPr>
+        <p:grpSpPr>
+          <a:xfrm>
+            <a:off x="8587653" y="1703727"/>
+            <a:ext cx="3156980" cy="3732357"/>
+            <a:chOff x="8587653" y="1703727"/>
+            <a:chExt cx="3156980" cy="3732357"/>
+          </a:xfrm>
+        </p:grpSpPr>
+        <p:grpSp>
+          <p:nvGrpSpPr>
+            <p:cNvPr id="53" name="Группа 52">
+              <a:extLst>
+                <a:ext uri="{FF2B5EF4-FFF2-40B4-BE49-F238E27FC236}">
+                  <a16:creationId xmlns:a16="http://schemas.microsoft.com/office/drawing/2014/main" id="{1D97C07C-3177-14F0-6015-F83B72D7CD23}"/>
+                </a:ext>
+              </a:extLst>
+            </p:cNvPr>
+            <p:cNvGrpSpPr/>
+            <p:nvPr/>
+          </p:nvGrpSpPr>
+          <p:grpSpPr>
+            <a:xfrm>
+              <a:off x="8587653" y="1703727"/>
+              <a:ext cx="3156980" cy="3732357"/>
+              <a:chOff x="8351680" y="1703727"/>
+              <a:chExt cx="3156980" cy="3732357"/>
+            </a:xfrm>
+          </p:grpSpPr>
+          <p:sp>
+            <p:nvSpPr>
+              <p:cNvPr id="50" name="Прямоугольник: скругленные углы 49">
+                <a:extLst>
+                  <a:ext uri="{FF2B5EF4-FFF2-40B4-BE49-F238E27FC236}">
+                    <a16:creationId xmlns:a16="http://schemas.microsoft.com/office/drawing/2014/main" id="{24239B64-5F5D-6950-4554-29F0D85EBE6B}"/>
+                  </a:ext>
+                </a:extLst>
+              </p:cNvPr>
+              <p:cNvSpPr/>
+              <p:nvPr/>
+            </p:nvSpPr>
+            <p:spPr>
+              <a:xfrm>
+                <a:off x="8351680" y="1703727"/>
+                <a:ext cx="3156980" cy="3732357"/>
+              </a:xfrm>
+              <a:prstGeom prst="roundRect">
+                <a:avLst>
+                  <a:gd name="adj" fmla="val 4689"/>
+                </a:avLst>
+              </a:prstGeom>
+              <a:solidFill>
+                <a:schemeClr val="bg1"/>
+              </a:solidFill>
+              <a:ln>
+                <a:solidFill>
+                  <a:schemeClr val="bg1"/>
+                </a:solidFill>
+              </a:ln>
+            </p:spPr>
+            <p:style>
+              <a:lnRef idx="2">
+                <a:schemeClr val="accent1">
+                  <a:shade val="15000"/>
+                </a:schemeClr>
+              </a:lnRef>
+              <a:fillRef idx="1">
+                <a:schemeClr val="accent1"/>
+              </a:fillRef>
+              <a:effectRef idx="0">
+                <a:schemeClr val="accent1"/>
+              </a:effectRef>
+              <a:fontRef idx="minor">
+                <a:schemeClr val="lt1"/>
+              </a:fontRef>
+            </p:style>
+            <p:txBody>
+              <a:bodyPr rtlCol="0" anchor="ctr"/>
+              <a:lstStyle/>
+              <a:p>
+                <a:pPr algn="ctr"/>
+                <a:endParaRPr lang="ru-RU"/>
+              </a:p>
+            </p:txBody>
+          </p:sp>
+          <p:sp>
+            <p:nvSpPr>
+              <p:cNvPr id="52" name="TextBox 51">
+                <a:extLst>
+                  <a:ext uri="{FF2B5EF4-FFF2-40B4-BE49-F238E27FC236}">
+                    <a16:creationId xmlns:a16="http://schemas.microsoft.com/office/drawing/2014/main" id="{691BCC79-35C4-2EB1-2432-E8814CE9A578}"/>
+                  </a:ext>
+                </a:extLst>
+              </p:cNvPr>
+              <p:cNvSpPr txBox="1"/>
+              <p:nvPr/>
+            </p:nvSpPr>
+            <p:spPr>
+              <a:xfrm>
+                <a:off x="8351680" y="4581319"/>
+                <a:ext cx="3156980" cy="369332"/>
+              </a:xfrm>
+              <a:prstGeom prst="rect">
+                <a:avLst/>
+              </a:prstGeom>
+              <a:noFill/>
+            </p:spPr>
+            <p:txBody>
+              <a:bodyPr wrap="square">
+                <a:spAutoFit/>
+              </a:bodyPr>
+              <a:lstStyle/>
+              <a:p>
+                <a:pPr marL="0" indent="0" algn="ctr">
+                  <a:buNone/>
+                </a:pPr>
+                <a:r>
+                  <a:rPr lang="ru-RU" dirty="0">
+                    <a:latin typeface="Comfortaa Medium" pitchFamily="2" charset="0"/>
+                  </a:rPr>
+                  <a:t>Воспитатели</a:t>
+                </a:r>
+              </a:p>
+            </p:txBody>
+          </p:sp>
+        </p:grpSp>
+        <p:pic>
+          <p:nvPicPr>
+            <p:cNvPr id="57" name="Picture 6" descr="Иконка «Мобильный телефон» | MyWebIcons">
+              <a:extLst>
+                <a:ext uri="{FF2B5EF4-FFF2-40B4-BE49-F238E27FC236}">
+                  <a16:creationId xmlns:a16="http://schemas.microsoft.com/office/drawing/2014/main" id="{3279BDCE-9155-491C-28A0-84D474BAFAAD}"/>
+                </a:ext>
+              </a:extLst>
+            </p:cNvPr>
+            <p:cNvPicPr>
+              <a:picLocks noChangeAspect="1" noChangeArrowheads="1"/>
+            </p:cNvPicPr>
+            <p:nvPr/>
+          </p:nvPicPr>
+          <p:blipFill>
+            <a:blip r:embed="rId16">
+              <a:extLst>
+                <a:ext uri="{28A0092B-C50C-407E-A947-70E740481C1C}">
+                  <a14:useLocalDpi xmlns:a14="http://schemas.microsoft.com/office/drawing/2010/main" val="0"/>
+                </a:ext>
+              </a:extLst>
+            </a:blip>
+            <a:srcRect/>
+            <a:stretch>
+              <a:fillRect/>
+            </a:stretch>
+          </p:blipFill>
+          <p:spPr bwMode="auto">
+            <a:xfrm>
+              <a:off x="9027067" y="2241592"/>
+              <a:ext cx="2278152" cy="2278152"/>
+            </a:xfrm>
+            <a:prstGeom prst="rect">
+              <a:avLst/>
+            </a:prstGeom>
+            <a:noFill/>
+            <a:extLst>
+              <a:ext uri="{909E8E84-426E-40DD-AFC4-6F175D3DCCD1}">
+                <a14:hiddenFill xmlns:a14="http://schemas.microsoft.com/office/drawing/2010/main">
+                  <a:solidFill>
+                    <a:srgbClr val="FFFFFF"/>
+                  </a:solidFill>
+                </a14:hiddenFill>
+              </a:ext>
+            </a:extLst>
           </p:spPr>
         </p:pic>
       </p:grpSp>
@@ -7957,6 +9535,14 @@
 <file path=ppt/slides/slide4.xml><?xml version="1.0" encoding="utf-8"?>
 <p:sld xmlns:a="http://schemas.openxmlformats.org/drawingml/2006/main" xmlns:r="http://schemas.openxmlformats.org/officeDocument/2006/relationships" xmlns:p="http://schemas.openxmlformats.org/presentationml/2006/main">
   <p:cSld>
+    <p:bg>
+      <p:bgPr>
+        <a:solidFill>
+          <a:srgbClr val="F4F7FB"/>
+        </a:solidFill>
+        <a:effectLst/>
+      </p:bgPr>
+    </p:bg>
     <p:spTree>
       <p:nvGrpSpPr>
         <p:cNvPr id="1" name="">
@@ -7979,34 +9565,6 @@
       </p:grpSpPr>
       <p:sp>
         <p:nvSpPr>
-          <p:cNvPr id="2" name="Заголовок 1">
-            <a:extLst>
-              <a:ext uri="{FF2B5EF4-FFF2-40B4-BE49-F238E27FC236}">
-                <a16:creationId xmlns:a16="http://schemas.microsoft.com/office/drawing/2014/main" id="{254B122C-33DE-59AB-1325-64D2CAD3A816}"/>
-              </a:ext>
-            </a:extLst>
-          </p:cNvPr>
-          <p:cNvSpPr>
-            <a:spLocks noGrp="1"/>
-          </p:cNvSpPr>
-          <p:nvPr>
-            <p:ph type="title"/>
-          </p:nvPr>
-        </p:nvSpPr>
-        <p:spPr/>
-        <p:txBody>
-          <a:bodyPr/>
-          <a:lstStyle/>
-          <a:p>
-            <a:r>
-              <a:rPr lang="ru-RU" dirty="0"/>
-              <a:t>Цель</a:t>
-            </a:r>
-          </a:p>
-        </p:txBody>
-      </p:sp>
-      <p:sp>
-        <p:nvSpPr>
           <p:cNvPr id="3" name="Объект 2">
             <a:extLst>
               <a:ext uri="{FF2B5EF4-FFF2-40B4-BE49-F238E27FC236}">
@@ -8021,7 +9579,12 @@
             <p:ph idx="1"/>
           </p:nvPr>
         </p:nvSpPr>
-        <p:spPr/>
+        <p:spPr>
+          <a:xfrm>
+            <a:off x="1041395" y="1187444"/>
+            <a:ext cx="5339740" cy="5442167"/>
+          </a:xfrm>
+        </p:spPr>
         <p:txBody>
           <a:bodyPr/>
           <a:lstStyle/>
@@ -8030,58 +9593,8 @@
               <a:buNone/>
             </a:pPr>
             <a:r>
-              <a:rPr lang="ru-RU" b="1" dirty="0"/>
-              <a:t>Что нужно выполнить во время курсового проектирования?</a:t>
-            </a:r>
-          </a:p>
-          <a:p>
-            <a:pPr marL="0" indent="0">
-              <a:buNone/>
-            </a:pPr>
-            <a:endParaRPr lang="ru-RU" dirty="0"/>
-          </a:p>
-          <a:p>
-            <a:pPr marL="0" indent="0">
-              <a:buNone/>
-            </a:pPr>
-            <a:r>
               <a:rPr lang="ru-RU" dirty="0"/>
-              <a:t>Требуется разработать подсистему / веб-сайт для …</a:t>
-            </a:r>
-          </a:p>
-        </p:txBody>
-      </p:sp>
-      <p:sp>
-        <p:nvSpPr>
-          <p:cNvPr id="4" name="TextBox 3">
-            <a:extLst>
-              <a:ext uri="{FF2B5EF4-FFF2-40B4-BE49-F238E27FC236}">
-                <a16:creationId xmlns:a16="http://schemas.microsoft.com/office/drawing/2014/main" id="{A4BE7B20-FF2E-07A6-903E-EB6EE8BE1219}"/>
-              </a:ext>
-            </a:extLst>
-          </p:cNvPr>
-          <p:cNvSpPr txBox="1"/>
-          <p:nvPr/>
-        </p:nvSpPr>
-        <p:spPr>
-          <a:xfrm>
-            <a:off x="11245516" y="103515"/>
-            <a:ext cx="946484" cy="523220"/>
-          </a:xfrm>
-          <a:prstGeom prst="rect">
-            <a:avLst/>
-          </a:prstGeom>
-          <a:noFill/>
-        </p:spPr>
-        <p:txBody>
-          <a:bodyPr wrap="square">
-            <a:spAutoFit/>
-          </a:bodyPr>
-          <a:lstStyle/>
-          <a:p>
-            <a:r>
-              <a:rPr lang="ru-RU" sz="2800" dirty="0"/>
-              <a:t>4/11</a:t>
+              <a:t>Требуется разработать подсистему для …</a:t>
             </a:r>
           </a:p>
         </p:txBody>
@@ -8715,6 +10228,157 @@
           </p:spPr>
         </p:pic>
       </p:grpSp>
+      <p:grpSp>
+        <p:nvGrpSpPr>
+          <p:cNvPr id="30" name="Группа 29">
+            <a:extLst>
+              <a:ext uri="{FF2B5EF4-FFF2-40B4-BE49-F238E27FC236}">
+                <a16:creationId xmlns:a16="http://schemas.microsoft.com/office/drawing/2014/main" id="{640EE331-EACE-0411-88AA-51F3B2801793}"/>
+              </a:ext>
+            </a:extLst>
+          </p:cNvPr>
+          <p:cNvGrpSpPr/>
+          <p:nvPr/>
+        </p:nvGrpSpPr>
+        <p:grpSpPr>
+          <a:xfrm>
+            <a:off x="861468" y="106931"/>
+            <a:ext cx="11206162" cy="786262"/>
+            <a:chOff x="883444" y="90039"/>
+            <a:chExt cx="11206162" cy="786262"/>
+          </a:xfrm>
+        </p:grpSpPr>
+        <p:sp>
+          <p:nvSpPr>
+            <p:cNvPr id="31" name="Прямоугольник: скругленные углы 30">
+              <a:extLst>
+                <a:ext uri="{FF2B5EF4-FFF2-40B4-BE49-F238E27FC236}">
+                  <a16:creationId xmlns:a16="http://schemas.microsoft.com/office/drawing/2014/main" id="{86675127-E6A3-8C2B-5FD3-DBF0040BE859}"/>
+                </a:ext>
+              </a:extLst>
+            </p:cNvPr>
+            <p:cNvSpPr/>
+            <p:nvPr/>
+          </p:nvSpPr>
+          <p:spPr>
+            <a:xfrm>
+              <a:off x="883444" y="90039"/>
+              <a:ext cx="11206162" cy="786262"/>
+            </a:xfrm>
+            <a:prstGeom prst="roundRect">
+              <a:avLst>
+                <a:gd name="adj" fmla="val 4689"/>
+              </a:avLst>
+            </a:prstGeom>
+            <a:solidFill>
+              <a:schemeClr val="bg1"/>
+            </a:solidFill>
+            <a:ln>
+              <a:solidFill>
+                <a:schemeClr val="bg1"/>
+              </a:solidFill>
+            </a:ln>
+          </p:spPr>
+          <p:style>
+            <a:lnRef idx="2">
+              <a:schemeClr val="accent1">
+                <a:shade val="15000"/>
+              </a:schemeClr>
+            </a:lnRef>
+            <a:fillRef idx="1">
+              <a:schemeClr val="accent1"/>
+            </a:fillRef>
+            <a:effectRef idx="0">
+              <a:schemeClr val="accent1"/>
+            </a:effectRef>
+            <a:fontRef idx="minor">
+              <a:schemeClr val="lt1"/>
+            </a:fontRef>
+          </p:style>
+          <p:txBody>
+            <a:bodyPr rtlCol="0" anchor="ctr"/>
+            <a:lstStyle/>
+            <a:p>
+              <a:pPr algn="ctr"/>
+              <a:endParaRPr lang="ru-RU"/>
+            </a:p>
+          </p:txBody>
+        </p:sp>
+        <p:sp>
+          <p:nvSpPr>
+            <p:cNvPr id="32" name="TextBox 31">
+              <a:extLst>
+                <a:ext uri="{FF2B5EF4-FFF2-40B4-BE49-F238E27FC236}">
+                  <a16:creationId xmlns:a16="http://schemas.microsoft.com/office/drawing/2014/main" id="{686F1E44-675C-14A8-954D-5CEA94321389}"/>
+                </a:ext>
+              </a:extLst>
+            </p:cNvPr>
+            <p:cNvSpPr txBox="1"/>
+            <p:nvPr/>
+          </p:nvSpPr>
+          <p:spPr>
+            <a:xfrm>
+              <a:off x="11143122" y="221560"/>
+              <a:ext cx="858378" cy="523220"/>
+            </a:xfrm>
+            <a:prstGeom prst="rect">
+              <a:avLst/>
+            </a:prstGeom>
+            <a:noFill/>
+          </p:spPr>
+          <p:txBody>
+            <a:bodyPr wrap="square">
+              <a:spAutoFit/>
+            </a:bodyPr>
+            <a:lstStyle/>
+            <a:p>
+              <a:r>
+                <a:rPr lang="ru-RU" sz="2800" dirty="0">
+                  <a:latin typeface="Comfortaa Medium" pitchFamily="2" charset="0"/>
+                </a:rPr>
+                <a:t>4/11</a:t>
+              </a:r>
+            </a:p>
+          </p:txBody>
+        </p:sp>
+      </p:grpSp>
+      <p:sp>
+        <p:nvSpPr>
+          <p:cNvPr id="33" name="Заголовок 1">
+            <a:extLst>
+              <a:ext uri="{FF2B5EF4-FFF2-40B4-BE49-F238E27FC236}">
+                <a16:creationId xmlns:a16="http://schemas.microsoft.com/office/drawing/2014/main" id="{0BC68D25-943F-54DB-C85C-1B6CC3F3FA19}"/>
+              </a:ext>
+            </a:extLst>
+          </p:cNvPr>
+          <p:cNvSpPr>
+            <a:spLocks noGrp="1"/>
+          </p:cNvSpPr>
+          <p:nvPr>
+            <p:ph type="title"/>
+          </p:nvPr>
+        </p:nvSpPr>
+        <p:spPr>
+          <a:xfrm>
+            <a:off x="1076324" y="228389"/>
+            <a:ext cx="10066797" cy="509563"/>
+          </a:xfrm>
+        </p:spPr>
+        <p:txBody>
+          <a:bodyPr>
+            <a:noAutofit/>
+          </a:bodyPr>
+          <a:lstStyle/>
+          <a:p>
+            <a:r>
+              <a:rPr lang="ru-RU" sz="3200" dirty="0">
+                <a:latin typeface="Comfortaa Medium" pitchFamily="2" charset="0"/>
+              </a:rPr>
+              <a:t>Цель</a:t>
+            </a:r>
+          </a:p>
+        </p:txBody>
+      </p:sp>
     </p:spTree>
     <p:extLst>
       <p:ext uri="{BB962C8B-B14F-4D97-AF65-F5344CB8AC3E}">
@@ -8743,6 +10407,14 @@
 <file path=ppt/slides/slide5.xml><?xml version="1.0" encoding="utf-8"?>
 <p:sld xmlns:a="http://schemas.openxmlformats.org/drawingml/2006/main" xmlns:r="http://schemas.openxmlformats.org/officeDocument/2006/relationships" xmlns:p="http://schemas.openxmlformats.org/presentationml/2006/main">
   <p:cSld>
+    <p:bg>
+      <p:bgPr>
+        <a:solidFill>
+          <a:srgbClr val="F4F7FB"/>
+        </a:solidFill>
+        <a:effectLst/>
+      </p:bgPr>
+    </p:bg>
     <p:spTree>
       <p:nvGrpSpPr>
         <p:cNvPr id="1" name="">
@@ -8763,34 +10435,6 @@
           <a:chExt cx="0" cy="0"/>
         </a:xfrm>
       </p:grpSpPr>
-      <p:sp>
-        <p:nvSpPr>
-          <p:cNvPr id="2" name="Заголовок 1">
-            <a:extLst>
-              <a:ext uri="{FF2B5EF4-FFF2-40B4-BE49-F238E27FC236}">
-                <a16:creationId xmlns:a16="http://schemas.microsoft.com/office/drawing/2014/main" id="{0B72C9D8-1904-85DD-1E82-2022BA15DAA4}"/>
-              </a:ext>
-            </a:extLst>
-          </p:cNvPr>
-          <p:cNvSpPr>
-            <a:spLocks noGrp="1"/>
-          </p:cNvSpPr>
-          <p:nvPr>
-            <p:ph type="title"/>
-          </p:nvPr>
-        </p:nvSpPr>
-        <p:spPr/>
-        <p:txBody>
-          <a:bodyPr/>
-          <a:lstStyle/>
-          <a:p>
-            <a:r>
-              <a:rPr lang="ru-RU" dirty="0"/>
-              <a:t>Задачи</a:t>
-            </a:r>
-          </a:p>
-        </p:txBody>
-      </p:sp>
       <p:sp>
         <p:nvSpPr>
           <p:cNvPr id="3" name="Объект 2">
@@ -8833,229 +10477,6 @@
           </a:p>
         </p:txBody>
       </p:sp>
-      <p:sp>
-        <p:nvSpPr>
-          <p:cNvPr id="4" name="TextBox 3">
-            <a:extLst>
-              <a:ext uri="{FF2B5EF4-FFF2-40B4-BE49-F238E27FC236}">
-                <a16:creationId xmlns:a16="http://schemas.microsoft.com/office/drawing/2014/main" id="{3B5E232E-027C-FE46-5869-5274132DA2FE}"/>
-              </a:ext>
-            </a:extLst>
-          </p:cNvPr>
-          <p:cNvSpPr txBox="1"/>
-          <p:nvPr/>
-        </p:nvSpPr>
-        <p:spPr>
-          <a:xfrm>
-            <a:off x="11245516" y="103515"/>
-            <a:ext cx="946484" cy="523220"/>
-          </a:xfrm>
-          <a:prstGeom prst="rect">
-            <a:avLst/>
-          </a:prstGeom>
-          <a:noFill/>
-        </p:spPr>
-        <p:txBody>
-          <a:bodyPr wrap="square">
-            <a:spAutoFit/>
-          </a:bodyPr>
-          <a:lstStyle/>
-          <a:p>
-            <a:r>
-              <a:rPr lang="ru-RU" sz="2800" dirty="0"/>
-              <a:t>5/11</a:t>
-            </a:r>
-          </a:p>
-        </p:txBody>
-      </p:sp>
-      <p:pic>
-        <p:nvPicPr>
-          <p:cNvPr id="6" name="Picture 4" descr="Placeholder Image | Elementor Developers">
-            <a:extLst>
-              <a:ext uri="{FF2B5EF4-FFF2-40B4-BE49-F238E27FC236}">
-                <a16:creationId xmlns:a16="http://schemas.microsoft.com/office/drawing/2014/main" id="{B2637D92-0094-BBF7-A467-7710F51D986B}"/>
-              </a:ext>
-            </a:extLst>
-          </p:cNvPr>
-          <p:cNvPicPr>
-            <a:picLocks noChangeAspect="1" noChangeArrowheads="1"/>
-          </p:cNvPicPr>
-          <p:nvPr/>
-        </p:nvPicPr>
-        <p:blipFill>
-          <a:blip r:embed="rId2">
-            <a:extLst>
-              <a:ext uri="{28A0092B-C50C-407E-A947-70E740481C1C}">
-                <a14:useLocalDpi xmlns:a14="http://schemas.microsoft.com/office/drawing/2010/main" val="0"/>
-              </a:ext>
-            </a:extLst>
-          </a:blip>
-          <a:srcRect/>
-          <a:stretch>
-            <a:fillRect/>
-          </a:stretch>
-        </p:blipFill>
-        <p:spPr bwMode="auto">
-          <a:xfrm>
-            <a:off x="838200" y="4694779"/>
-            <a:ext cx="2410326" cy="1798096"/>
-          </a:xfrm>
-          <a:prstGeom prst="rect">
-            <a:avLst/>
-          </a:prstGeom>
-          <a:noFill/>
-          <a:extLst>
-            <a:ext uri="{909E8E84-426E-40DD-AFC4-6F175D3DCCD1}">
-              <a14:hiddenFill xmlns:a14="http://schemas.microsoft.com/office/drawing/2010/main">
-                <a:solidFill>
-                  <a:srgbClr val="FFFFFF"/>
-                </a:solidFill>
-              </a14:hiddenFill>
-            </a:ext>
-          </a:extLst>
-        </p:spPr>
-      </p:pic>
-      <p:pic>
-        <p:nvPicPr>
-          <p:cNvPr id="7" name="Picture 4" descr="Placeholder Image | Elementor Developers">
-            <a:extLst>
-              <a:ext uri="{FF2B5EF4-FFF2-40B4-BE49-F238E27FC236}">
-                <a16:creationId xmlns:a16="http://schemas.microsoft.com/office/drawing/2014/main" id="{9E446FBF-57F0-094A-92DB-A1EFED36BF97}"/>
-              </a:ext>
-            </a:extLst>
-          </p:cNvPr>
-          <p:cNvPicPr>
-            <a:picLocks noChangeAspect="1" noChangeArrowheads="1"/>
-          </p:cNvPicPr>
-          <p:nvPr/>
-        </p:nvPicPr>
-        <p:blipFill>
-          <a:blip r:embed="rId2">
-            <a:extLst>
-              <a:ext uri="{28A0092B-C50C-407E-A947-70E740481C1C}">
-                <a14:useLocalDpi xmlns:a14="http://schemas.microsoft.com/office/drawing/2010/main" val="0"/>
-              </a:ext>
-            </a:extLst>
-          </a:blip>
-          <a:srcRect/>
-          <a:stretch>
-            <a:fillRect/>
-          </a:stretch>
-        </p:blipFill>
-        <p:spPr bwMode="auto">
-          <a:xfrm>
-            <a:off x="3508898" y="4694779"/>
-            <a:ext cx="2410326" cy="1798096"/>
-          </a:xfrm>
-          <a:prstGeom prst="rect">
-            <a:avLst/>
-          </a:prstGeom>
-          <a:noFill/>
-          <a:extLst>
-            <a:ext uri="{909E8E84-426E-40DD-AFC4-6F175D3DCCD1}">
-              <a14:hiddenFill xmlns:a14="http://schemas.microsoft.com/office/drawing/2010/main">
-                <a:solidFill>
-                  <a:srgbClr val="FFFFFF"/>
-                </a:solidFill>
-              </a14:hiddenFill>
-            </a:ext>
-          </a:extLst>
-        </p:spPr>
-      </p:pic>
-      <p:pic>
-        <p:nvPicPr>
-          <p:cNvPr id="8" name="Picture 4" descr="Placeholder Image | Elementor Developers">
-            <a:extLst>
-              <a:ext uri="{FF2B5EF4-FFF2-40B4-BE49-F238E27FC236}">
-                <a16:creationId xmlns:a16="http://schemas.microsoft.com/office/drawing/2014/main" id="{7996F788-507B-0C85-B1FC-80FE1C39CD8D}"/>
-              </a:ext>
-            </a:extLst>
-          </p:cNvPr>
-          <p:cNvPicPr>
-            <a:picLocks noChangeAspect="1" noChangeArrowheads="1"/>
-          </p:cNvPicPr>
-          <p:nvPr/>
-        </p:nvPicPr>
-        <p:blipFill>
-          <a:blip r:embed="rId2">
-            <a:extLst>
-              <a:ext uri="{28A0092B-C50C-407E-A947-70E740481C1C}">
-                <a14:useLocalDpi xmlns:a14="http://schemas.microsoft.com/office/drawing/2010/main" val="0"/>
-              </a:ext>
-            </a:extLst>
-          </a:blip>
-          <a:srcRect/>
-          <a:stretch>
-            <a:fillRect/>
-          </a:stretch>
-        </p:blipFill>
-        <p:spPr bwMode="auto">
-          <a:xfrm>
-            <a:off x="6272776" y="4694779"/>
-            <a:ext cx="2410326" cy="1798096"/>
-          </a:xfrm>
-          <a:prstGeom prst="rect">
-            <a:avLst/>
-          </a:prstGeom>
-          <a:noFill/>
-          <a:extLst>
-            <a:ext uri="{909E8E84-426E-40DD-AFC4-6F175D3DCCD1}">
-              <a14:hiddenFill xmlns:a14="http://schemas.microsoft.com/office/drawing/2010/main">
-                <a:solidFill>
-                  <a:srgbClr val="FFFFFF"/>
-                </a:solidFill>
-              </a14:hiddenFill>
-            </a:ext>
-          </a:extLst>
-        </p:spPr>
-      </p:pic>
-      <p:pic>
-        <p:nvPicPr>
-          <p:cNvPr id="9" name="Picture 4" descr="Placeholder Image | Elementor Developers">
-            <a:extLst>
-              <a:ext uri="{FF2B5EF4-FFF2-40B4-BE49-F238E27FC236}">
-                <a16:creationId xmlns:a16="http://schemas.microsoft.com/office/drawing/2014/main" id="{FDF83E25-CA2C-ADC6-83F3-6F53D6EA4476}"/>
-              </a:ext>
-            </a:extLst>
-          </p:cNvPr>
-          <p:cNvPicPr>
-            <a:picLocks noChangeAspect="1" noChangeArrowheads="1"/>
-          </p:cNvPicPr>
-          <p:nvPr/>
-        </p:nvPicPr>
-        <p:blipFill>
-          <a:blip r:embed="rId2">
-            <a:extLst>
-              <a:ext uri="{28A0092B-C50C-407E-A947-70E740481C1C}">
-                <a14:useLocalDpi xmlns:a14="http://schemas.microsoft.com/office/drawing/2010/main" val="0"/>
-              </a:ext>
-            </a:extLst>
-          </a:blip>
-          <a:srcRect/>
-          <a:stretch>
-            <a:fillRect/>
-          </a:stretch>
-        </p:blipFill>
-        <p:spPr bwMode="auto">
-          <a:xfrm>
-            <a:off x="8943474" y="4694779"/>
-            <a:ext cx="2410326" cy="1798096"/>
-          </a:xfrm>
-          <a:prstGeom prst="rect">
-            <a:avLst/>
-          </a:prstGeom>
-          <a:noFill/>
-          <a:extLst>
-            <a:ext uri="{909E8E84-426E-40DD-AFC4-6F175D3DCCD1}">
-              <a14:hiddenFill xmlns:a14="http://schemas.microsoft.com/office/drawing/2010/main">
-                <a:solidFill>
-                  <a:srgbClr val="FFFFFF"/>
-                </a:solidFill>
-              </a14:hiddenFill>
-            </a:ext>
-          </a:extLst>
-        </p:spPr>
-      </p:pic>
       <p:sp>
         <p:nvSpPr>
           <p:cNvPr id="11" name="Прямоугольник 10">
@@ -9217,7 +10638,7 @@
               <p:nvPr/>
             </p:nvPicPr>
             <p:blipFill>
-              <a:blip r:embed="rId3">
+              <a:blip r:embed="rId2">
                 <a:extLst>
                   <a:ext uri="{28A0092B-C50C-407E-A947-70E740481C1C}">
                     <a14:useLocalDpi xmlns:a14="http://schemas.microsoft.com/office/drawing/2010/main" val="0"/>
@@ -9375,7 +10796,7 @@
             <p:nvPr/>
           </p:nvPicPr>
           <p:blipFill>
-            <a:blip r:embed="rId4">
+            <a:blip r:embed="rId3">
               <a:extLst>
                 <a:ext uri="{28A0092B-C50C-407E-A947-70E740481C1C}">
                   <a14:useLocalDpi xmlns:a14="http://schemas.microsoft.com/office/drawing/2010/main" val="0"/>
@@ -9411,7 +10832,7 @@
             <p:nvPr/>
           </p:nvPicPr>
           <p:blipFill>
-            <a:blip r:embed="rId5">
+            <a:blip r:embed="rId4">
               <a:extLst>
                 <a:ext uri="{28A0092B-C50C-407E-A947-70E740481C1C}">
                   <a14:useLocalDpi xmlns:a14="http://schemas.microsoft.com/office/drawing/2010/main" val="0"/>
@@ -9447,7 +10868,7 @@
             <p:nvPr/>
           </p:nvPicPr>
           <p:blipFill>
-            <a:blip r:embed="rId6">
+            <a:blip r:embed="rId5">
               <a:extLst>
                 <a:ext uri="{28A0092B-C50C-407E-A947-70E740481C1C}">
                   <a14:useLocalDpi xmlns:a14="http://schemas.microsoft.com/office/drawing/2010/main" val="0"/>
@@ -9483,7 +10904,7 @@
             <p:nvPr/>
           </p:nvPicPr>
           <p:blipFill>
-            <a:blip r:embed="rId7">
+            <a:blip r:embed="rId6">
               <a:extLst>
                 <a:ext uri="{28A0092B-C50C-407E-A947-70E740481C1C}">
                   <a14:useLocalDpi xmlns:a14="http://schemas.microsoft.com/office/drawing/2010/main" val="0"/>
@@ -9519,7 +10940,7 @@
             <p:nvPr/>
           </p:nvPicPr>
           <p:blipFill>
-            <a:blip r:embed="rId8">
+            <a:blip r:embed="rId7">
               <a:extLst>
                 <a:ext uri="{28A0092B-C50C-407E-A947-70E740481C1C}">
                   <a14:useLocalDpi xmlns:a14="http://schemas.microsoft.com/office/drawing/2010/main" val="0"/>
@@ -9555,7 +10976,7 @@
             <p:nvPr/>
           </p:nvPicPr>
           <p:blipFill>
-            <a:blip r:embed="rId9">
+            <a:blip r:embed="rId8">
               <a:extLst>
                 <a:ext uri="{28A0092B-C50C-407E-A947-70E740481C1C}">
                   <a14:useLocalDpi xmlns:a14="http://schemas.microsoft.com/office/drawing/2010/main" val="0"/>
@@ -9591,7 +11012,7 @@
             <p:nvPr/>
           </p:nvPicPr>
           <p:blipFill>
-            <a:blip r:embed="rId10">
+            <a:blip r:embed="rId9">
               <a:extLst>
                 <a:ext uri="{28A0092B-C50C-407E-A947-70E740481C1C}">
                   <a14:useLocalDpi xmlns:a14="http://schemas.microsoft.com/office/drawing/2010/main" val="0"/>
@@ -9627,7 +11048,7 @@
             <p:nvPr/>
           </p:nvPicPr>
           <p:blipFill>
-            <a:blip r:embed="rId11">
+            <a:blip r:embed="rId10">
               <a:extLst>
                 <a:ext uri="{28A0092B-C50C-407E-A947-70E740481C1C}">
                   <a14:useLocalDpi xmlns:a14="http://schemas.microsoft.com/office/drawing/2010/main" val="0"/>
@@ -9663,7 +11084,7 @@
             <p:nvPr/>
           </p:nvPicPr>
           <p:blipFill>
-            <a:blip r:embed="rId12">
+            <a:blip r:embed="rId11">
               <a:extLst>
                 <a:ext uri="{28A0092B-C50C-407E-A947-70E740481C1C}">
                   <a14:useLocalDpi xmlns:a14="http://schemas.microsoft.com/office/drawing/2010/main" val="0"/>
@@ -9685,6 +11106,157 @@
           </p:spPr>
         </p:pic>
       </p:grpSp>
+      <p:grpSp>
+        <p:nvGrpSpPr>
+          <p:cNvPr id="28" name="Группа 27">
+            <a:extLst>
+              <a:ext uri="{FF2B5EF4-FFF2-40B4-BE49-F238E27FC236}">
+                <a16:creationId xmlns:a16="http://schemas.microsoft.com/office/drawing/2014/main" id="{3E32DADE-8EF1-C685-51E0-9EABA754DD77}"/>
+              </a:ext>
+            </a:extLst>
+          </p:cNvPr>
+          <p:cNvGrpSpPr/>
+          <p:nvPr/>
+        </p:nvGrpSpPr>
+        <p:grpSpPr>
+          <a:xfrm>
+            <a:off x="861468" y="106931"/>
+            <a:ext cx="11206162" cy="786262"/>
+            <a:chOff x="883444" y="90039"/>
+            <a:chExt cx="11206162" cy="786262"/>
+          </a:xfrm>
+        </p:grpSpPr>
+        <p:sp>
+          <p:nvSpPr>
+            <p:cNvPr id="29" name="Прямоугольник: скругленные углы 28">
+              <a:extLst>
+                <a:ext uri="{FF2B5EF4-FFF2-40B4-BE49-F238E27FC236}">
+                  <a16:creationId xmlns:a16="http://schemas.microsoft.com/office/drawing/2014/main" id="{BCD1B29D-884A-3FA3-B58D-7D6429611076}"/>
+                </a:ext>
+              </a:extLst>
+            </p:cNvPr>
+            <p:cNvSpPr/>
+            <p:nvPr/>
+          </p:nvSpPr>
+          <p:spPr>
+            <a:xfrm>
+              <a:off x="883444" y="90039"/>
+              <a:ext cx="11206162" cy="786262"/>
+            </a:xfrm>
+            <a:prstGeom prst="roundRect">
+              <a:avLst>
+                <a:gd name="adj" fmla="val 4689"/>
+              </a:avLst>
+            </a:prstGeom>
+            <a:solidFill>
+              <a:schemeClr val="bg1"/>
+            </a:solidFill>
+            <a:ln>
+              <a:solidFill>
+                <a:schemeClr val="bg1"/>
+              </a:solidFill>
+            </a:ln>
+          </p:spPr>
+          <p:style>
+            <a:lnRef idx="2">
+              <a:schemeClr val="accent1">
+                <a:shade val="15000"/>
+              </a:schemeClr>
+            </a:lnRef>
+            <a:fillRef idx="1">
+              <a:schemeClr val="accent1"/>
+            </a:fillRef>
+            <a:effectRef idx="0">
+              <a:schemeClr val="accent1"/>
+            </a:effectRef>
+            <a:fontRef idx="minor">
+              <a:schemeClr val="lt1"/>
+            </a:fontRef>
+          </p:style>
+          <p:txBody>
+            <a:bodyPr rtlCol="0" anchor="ctr"/>
+            <a:lstStyle/>
+            <a:p>
+              <a:pPr algn="ctr"/>
+              <a:endParaRPr lang="ru-RU"/>
+            </a:p>
+          </p:txBody>
+        </p:sp>
+        <p:sp>
+          <p:nvSpPr>
+            <p:cNvPr id="30" name="TextBox 29">
+              <a:extLst>
+                <a:ext uri="{FF2B5EF4-FFF2-40B4-BE49-F238E27FC236}">
+                  <a16:creationId xmlns:a16="http://schemas.microsoft.com/office/drawing/2014/main" id="{EAE01806-1140-3605-FBD6-1B1BD393300C}"/>
+                </a:ext>
+              </a:extLst>
+            </p:cNvPr>
+            <p:cNvSpPr txBox="1"/>
+            <p:nvPr/>
+          </p:nvSpPr>
+          <p:spPr>
+            <a:xfrm>
+              <a:off x="11143122" y="221560"/>
+              <a:ext cx="858378" cy="523220"/>
+            </a:xfrm>
+            <a:prstGeom prst="rect">
+              <a:avLst/>
+            </a:prstGeom>
+            <a:noFill/>
+          </p:spPr>
+          <p:txBody>
+            <a:bodyPr wrap="square">
+              <a:spAutoFit/>
+            </a:bodyPr>
+            <a:lstStyle/>
+            <a:p>
+              <a:r>
+                <a:rPr lang="ru-RU" sz="2800" dirty="0">
+                  <a:latin typeface="Comfortaa Medium" pitchFamily="2" charset="0"/>
+                </a:rPr>
+                <a:t>5/11</a:t>
+              </a:r>
+            </a:p>
+          </p:txBody>
+        </p:sp>
+      </p:grpSp>
+      <p:sp>
+        <p:nvSpPr>
+          <p:cNvPr id="31" name="Заголовок 1">
+            <a:extLst>
+              <a:ext uri="{FF2B5EF4-FFF2-40B4-BE49-F238E27FC236}">
+                <a16:creationId xmlns:a16="http://schemas.microsoft.com/office/drawing/2014/main" id="{D556D082-06BB-B253-83D2-0E267DA5FE24}"/>
+              </a:ext>
+            </a:extLst>
+          </p:cNvPr>
+          <p:cNvSpPr>
+            <a:spLocks noGrp="1"/>
+          </p:cNvSpPr>
+          <p:nvPr>
+            <p:ph type="title"/>
+          </p:nvPr>
+        </p:nvSpPr>
+        <p:spPr>
+          <a:xfrm>
+            <a:off x="1076324" y="228389"/>
+            <a:ext cx="10066797" cy="509563"/>
+          </a:xfrm>
+        </p:spPr>
+        <p:txBody>
+          <a:bodyPr>
+            <a:noAutofit/>
+          </a:bodyPr>
+          <a:lstStyle/>
+          <a:p>
+            <a:r>
+              <a:rPr lang="ru-RU" sz="3200" dirty="0">
+                <a:latin typeface="Comfortaa Medium" pitchFamily="2" charset="0"/>
+              </a:rPr>
+              <a:t>Задачи</a:t>
+            </a:r>
+          </a:p>
+        </p:txBody>
+      </p:sp>
     </p:spTree>
     <p:extLst>
       <p:ext uri="{BB962C8B-B14F-4D97-AF65-F5344CB8AC3E}">
@@ -9713,6 +11285,14 @@
 <file path=ppt/slides/slide6.xml><?xml version="1.0" encoding="utf-8"?>
 <p:sld xmlns:a="http://schemas.openxmlformats.org/drawingml/2006/main" xmlns:r="http://schemas.openxmlformats.org/officeDocument/2006/relationships" xmlns:p="http://schemas.openxmlformats.org/presentationml/2006/main">
   <p:cSld>
+    <p:bg>
+      <p:bgPr>
+        <a:solidFill>
+          <a:srgbClr val="F4F7FB"/>
+        </a:solidFill>
+        <a:effectLst/>
+      </p:bgPr>
+    </p:bg>
     <p:spTree>
       <p:nvGrpSpPr>
         <p:cNvPr id="1" name="">
@@ -9733,153 +11313,6 @@
           <a:chExt cx="0" cy="0"/>
         </a:xfrm>
       </p:grpSpPr>
-      <p:sp>
-        <p:nvSpPr>
-          <p:cNvPr id="2" name="Заголовок 1">
-            <a:extLst>
-              <a:ext uri="{FF2B5EF4-FFF2-40B4-BE49-F238E27FC236}">
-                <a16:creationId xmlns:a16="http://schemas.microsoft.com/office/drawing/2014/main" id="{5ABA55AC-F738-1A19-B8FA-CFDCD583B289}"/>
-              </a:ext>
-            </a:extLst>
-          </p:cNvPr>
-          <p:cNvSpPr>
-            <a:spLocks noGrp="1"/>
-          </p:cNvSpPr>
-          <p:nvPr>
-            <p:ph type="title"/>
-          </p:nvPr>
-        </p:nvSpPr>
-        <p:spPr/>
-        <p:txBody>
-          <a:bodyPr/>
-          <a:lstStyle/>
-          <a:p>
-            <a:r>
-              <a:rPr lang="ru-RU" dirty="0"/>
-              <a:t>Средства разработки</a:t>
-            </a:r>
-          </a:p>
-        </p:txBody>
-      </p:sp>
-      <p:sp>
-        <p:nvSpPr>
-          <p:cNvPr id="3" name="Объект 2">
-            <a:extLst>
-              <a:ext uri="{FF2B5EF4-FFF2-40B4-BE49-F238E27FC236}">
-                <a16:creationId xmlns:a16="http://schemas.microsoft.com/office/drawing/2014/main" id="{967E4BAA-1373-C4FE-CA79-188C8DB86726}"/>
-              </a:ext>
-            </a:extLst>
-          </p:cNvPr>
-          <p:cNvSpPr>
-            <a:spLocks noGrp="1"/>
-          </p:cNvSpPr>
-          <p:nvPr>
-            <p:ph idx="1"/>
-          </p:nvPr>
-        </p:nvSpPr>
-        <p:spPr/>
-        <p:txBody>
-          <a:bodyPr/>
-          <a:lstStyle/>
-          <a:p>
-            <a:pPr marL="0" indent="0">
-              <a:buNone/>
-            </a:pPr>
-            <a:r>
-              <a:rPr lang="ru-RU" b="1" dirty="0"/>
-              <a:t>Какие языки программирования / СУБД / IDE / библиотеки / ресурсы изображений / хостинг использовали? </a:t>
-            </a:r>
-          </a:p>
-          <a:p>
-            <a:r>
-              <a:rPr lang="ru-RU" dirty="0"/>
-              <a:t>Перечислить все использованное</a:t>
-            </a:r>
-          </a:p>
-        </p:txBody>
-      </p:sp>
-      <p:sp>
-        <p:nvSpPr>
-          <p:cNvPr id="4" name="TextBox 3">
-            <a:extLst>
-              <a:ext uri="{FF2B5EF4-FFF2-40B4-BE49-F238E27FC236}">
-                <a16:creationId xmlns:a16="http://schemas.microsoft.com/office/drawing/2014/main" id="{D9F7C2CF-A9BD-95C1-F7D5-666EBD39C12D}"/>
-              </a:ext>
-            </a:extLst>
-          </p:cNvPr>
-          <p:cNvSpPr txBox="1"/>
-          <p:nvPr/>
-        </p:nvSpPr>
-        <p:spPr>
-          <a:xfrm>
-            <a:off x="11245516" y="103515"/>
-            <a:ext cx="946484" cy="523220"/>
-          </a:xfrm>
-          <a:prstGeom prst="rect">
-            <a:avLst/>
-          </a:prstGeom>
-          <a:noFill/>
-        </p:spPr>
-        <p:txBody>
-          <a:bodyPr wrap="square">
-            <a:spAutoFit/>
-          </a:bodyPr>
-          <a:lstStyle/>
-          <a:p>
-            <a:r>
-              <a:rPr lang="ru-RU" sz="2800" dirty="0"/>
-              <a:t>6/11</a:t>
-            </a:r>
-          </a:p>
-        </p:txBody>
-      </p:sp>
-      <p:pic>
-        <p:nvPicPr>
-          <p:cNvPr id="8" name="Picture 4" descr="Placeholder Image | Elementor Developers">
-            <a:extLst>
-              <a:ext uri="{FF2B5EF4-FFF2-40B4-BE49-F238E27FC236}">
-                <a16:creationId xmlns:a16="http://schemas.microsoft.com/office/drawing/2014/main" id="{DE3867D2-5294-AC7C-C032-F0A0E684274B}"/>
-              </a:ext>
-            </a:extLst>
-          </p:cNvPr>
-          <p:cNvPicPr>
-            <a:picLocks noChangeAspect="1" noChangeArrowheads="1"/>
-          </p:cNvPicPr>
-          <p:nvPr/>
-        </p:nvPicPr>
-        <p:blipFill>
-          <a:blip r:embed="rId2">
-            <a:extLst>
-              <a:ext uri="{28A0092B-C50C-407E-A947-70E740481C1C}">
-                <a14:useLocalDpi xmlns:a14="http://schemas.microsoft.com/office/drawing/2010/main" val="0"/>
-              </a:ext>
-            </a:extLst>
-          </a:blip>
-          <a:srcRect/>
-          <a:stretch>
-            <a:fillRect/>
-          </a:stretch>
-        </p:blipFill>
-        <p:spPr bwMode="auto">
-          <a:xfrm>
-            <a:off x="7996990" y="3568295"/>
-            <a:ext cx="3248526" cy="2423391"/>
-          </a:xfrm>
-          <a:prstGeom prst="rect">
-            <a:avLst/>
-          </a:prstGeom>
-          <a:noFill/>
-          <a:extLst>
-            <a:ext uri="{909E8E84-426E-40DD-AFC4-6F175D3DCCD1}">
-              <a14:hiddenFill xmlns:a14="http://schemas.microsoft.com/office/drawing/2010/main">
-                <a:solidFill>
-                  <a:srgbClr val="FFFFFF"/>
-                </a:solidFill>
-              </a14:hiddenFill>
-            </a:ext>
-          </a:extLst>
-        </p:spPr>
-      </p:pic>
       <p:sp>
         <p:nvSpPr>
           <p:cNvPr id="10" name="Прямоугольник 9">
@@ -10041,7 +11474,7 @@
               <p:nvPr/>
             </p:nvPicPr>
             <p:blipFill>
-              <a:blip r:embed="rId3">
+              <a:blip r:embed="rId2">
                 <a:extLst>
                   <a:ext uri="{28A0092B-C50C-407E-A947-70E740481C1C}">
                     <a14:useLocalDpi xmlns:a14="http://schemas.microsoft.com/office/drawing/2010/main" val="0"/>
@@ -10199,7 +11632,7 @@
             <p:nvPr/>
           </p:nvPicPr>
           <p:blipFill>
-            <a:blip r:embed="rId4">
+            <a:blip r:embed="rId3">
               <a:extLst>
                 <a:ext uri="{28A0092B-C50C-407E-A947-70E740481C1C}">
                   <a14:useLocalDpi xmlns:a14="http://schemas.microsoft.com/office/drawing/2010/main" val="0"/>
@@ -10235,7 +11668,7 @@
             <p:nvPr/>
           </p:nvPicPr>
           <p:blipFill>
-            <a:blip r:embed="rId5">
+            <a:blip r:embed="rId4">
               <a:extLst>
                 <a:ext uri="{28A0092B-C50C-407E-A947-70E740481C1C}">
                   <a14:useLocalDpi xmlns:a14="http://schemas.microsoft.com/office/drawing/2010/main" val="0"/>
@@ -10271,7 +11704,7 @@
             <p:nvPr/>
           </p:nvPicPr>
           <p:blipFill>
-            <a:blip r:embed="rId6">
+            <a:blip r:embed="rId5">
               <a:extLst>
                 <a:ext uri="{28A0092B-C50C-407E-A947-70E740481C1C}">
                   <a14:useLocalDpi xmlns:a14="http://schemas.microsoft.com/office/drawing/2010/main" val="0"/>
@@ -10307,7 +11740,7 @@
             <p:nvPr/>
           </p:nvPicPr>
           <p:blipFill>
-            <a:blip r:embed="rId7">
+            <a:blip r:embed="rId6">
               <a:extLst>
                 <a:ext uri="{28A0092B-C50C-407E-A947-70E740481C1C}">
                   <a14:useLocalDpi xmlns:a14="http://schemas.microsoft.com/office/drawing/2010/main" val="0"/>
@@ -10343,7 +11776,7 @@
             <p:nvPr/>
           </p:nvPicPr>
           <p:blipFill>
-            <a:blip r:embed="rId8">
+            <a:blip r:embed="rId7">
               <a:extLst>
                 <a:ext uri="{28A0092B-C50C-407E-A947-70E740481C1C}">
                   <a14:useLocalDpi xmlns:a14="http://schemas.microsoft.com/office/drawing/2010/main" val="0"/>
@@ -10379,7 +11812,7 @@
             <p:nvPr/>
           </p:nvPicPr>
           <p:blipFill>
-            <a:blip r:embed="rId9">
+            <a:blip r:embed="rId8">
               <a:extLst>
                 <a:ext uri="{28A0092B-C50C-407E-A947-70E740481C1C}">
                   <a14:useLocalDpi xmlns:a14="http://schemas.microsoft.com/office/drawing/2010/main" val="0"/>
@@ -10415,7 +11848,7 @@
             <p:nvPr/>
           </p:nvPicPr>
           <p:blipFill>
-            <a:blip r:embed="rId10">
+            <a:blip r:embed="rId9">
               <a:extLst>
                 <a:ext uri="{28A0092B-C50C-407E-A947-70E740481C1C}">
                   <a14:useLocalDpi xmlns:a14="http://schemas.microsoft.com/office/drawing/2010/main" val="0"/>
@@ -10451,7 +11884,7 @@
             <p:nvPr/>
           </p:nvPicPr>
           <p:blipFill>
-            <a:blip r:embed="rId11">
+            <a:blip r:embed="rId10">
               <a:extLst>
                 <a:ext uri="{28A0092B-C50C-407E-A947-70E740481C1C}">
                   <a14:useLocalDpi xmlns:a14="http://schemas.microsoft.com/office/drawing/2010/main" val="0"/>
@@ -10487,7 +11920,7 @@
             <p:nvPr/>
           </p:nvPicPr>
           <p:blipFill>
-            <a:blip r:embed="rId12">
+            <a:blip r:embed="rId11">
               <a:extLst>
                 <a:ext uri="{28A0092B-C50C-407E-A947-70E740481C1C}">
                   <a14:useLocalDpi xmlns:a14="http://schemas.microsoft.com/office/drawing/2010/main" val="0"/>
@@ -10509,6 +11942,995 @@
           </p:spPr>
         </p:pic>
       </p:grpSp>
+      <p:pic>
+        <p:nvPicPr>
+          <p:cNvPr id="9" name="Рисунок 8">
+            <a:extLst>
+              <a:ext uri="{FF2B5EF4-FFF2-40B4-BE49-F238E27FC236}">
+                <a16:creationId xmlns:a16="http://schemas.microsoft.com/office/drawing/2014/main" id="{F8F6AFAB-8690-7443-E42D-BC76C4EADAE1}"/>
+              </a:ext>
+            </a:extLst>
+          </p:cNvPr>
+          <p:cNvPicPr>
+            <a:picLocks noChangeAspect="1"/>
+          </p:cNvPicPr>
+          <p:nvPr/>
+        </p:nvPicPr>
+        <p:blipFill>
+          <a:blip r:embed="rId12">
+            <a:extLst>
+              <a:ext uri="{96DAC541-7B7A-43D3-8B79-37D633B846F1}">
+                <asvg:svgBlip xmlns:asvg="http://schemas.microsoft.com/office/drawing/2016/SVG/main" r:embed="rId13"/>
+              </a:ext>
+            </a:extLst>
+          </a:blip>
+          <a:srcRect l="-9144" t="-3130" r="-6877" b="-1"/>
+          <a:stretch>
+            <a:fillRect/>
+          </a:stretch>
+        </p:blipFill>
+        <p:spPr>
+          <a:xfrm>
+            <a:off x="7629883" y="2566256"/>
+            <a:ext cx="1049864" cy="1049862"/>
+          </a:xfrm>
+          <a:prstGeom prst="rect">
+            <a:avLst/>
+          </a:prstGeom>
+        </p:spPr>
+      </p:pic>
+      <p:pic>
+        <p:nvPicPr>
+          <p:cNvPr id="1036" name="Picture 12" descr="Докер – Бесплатные иконки: бренды и логотипы">
+            <a:extLst>
+              <a:ext uri="{FF2B5EF4-FFF2-40B4-BE49-F238E27FC236}">
+                <a16:creationId xmlns:a16="http://schemas.microsoft.com/office/drawing/2014/main" id="{9A2FFD74-CE80-D6EB-3FD1-A30704DC29C9}"/>
+              </a:ext>
+            </a:extLst>
+          </p:cNvPr>
+          <p:cNvPicPr>
+            <a:picLocks noChangeAspect="1" noChangeArrowheads="1"/>
+          </p:cNvPicPr>
+          <p:nvPr/>
+        </p:nvPicPr>
+        <p:blipFill>
+          <a:blip r:embed="rId14">
+            <a:extLst>
+              <a:ext uri="{28A0092B-C50C-407E-A947-70E740481C1C}">
+                <a14:useLocalDpi xmlns:a14="http://schemas.microsoft.com/office/drawing/2010/main" val="0"/>
+              </a:ext>
+            </a:extLst>
+          </a:blip>
+          <a:srcRect/>
+          <a:stretch>
+            <a:fillRect/>
+          </a:stretch>
+        </p:blipFill>
+        <p:spPr bwMode="auto">
+          <a:xfrm>
+            <a:off x="7697615" y="5304202"/>
+            <a:ext cx="914400" cy="914401"/>
+          </a:xfrm>
+          <a:prstGeom prst="rect">
+            <a:avLst/>
+          </a:prstGeom>
+          <a:noFill/>
+          <a:extLst>
+            <a:ext uri="{909E8E84-426E-40DD-AFC4-6F175D3DCCD1}">
+              <a14:hiddenFill xmlns:a14="http://schemas.microsoft.com/office/drawing/2010/main">
+                <a:solidFill>
+                  <a:srgbClr val="FFFFFF"/>
+                </a:solidFill>
+              </a14:hiddenFill>
+            </a:ext>
+          </a:extLst>
+        </p:spPr>
+      </p:pic>
+      <p:pic>
+        <p:nvPicPr>
+          <p:cNvPr id="1042" name="Picture 18" descr="What - Docker Compose Logo Transparent Png,Compose Icon - free transparent  png images - pngaaa.com">
+            <a:extLst>
+              <a:ext uri="{FF2B5EF4-FFF2-40B4-BE49-F238E27FC236}">
+                <a16:creationId xmlns:a16="http://schemas.microsoft.com/office/drawing/2014/main" id="{7E9763BB-2683-ED89-5CC3-CF25C3821616}"/>
+              </a:ext>
+            </a:extLst>
+          </p:cNvPr>
+          <p:cNvPicPr>
+            <a:picLocks noChangeAspect="1" noChangeArrowheads="1"/>
+          </p:cNvPicPr>
+          <p:nvPr/>
+        </p:nvPicPr>
+        <p:blipFill rotWithShape="1">
+          <a:blip r:embed="rId15">
+            <a:extLst>
+              <a:ext uri="{BEBA8EAE-BF5A-486C-A8C5-ECC9F3942E4B}">
+                <a14:imgProps xmlns:a14="http://schemas.microsoft.com/office/drawing/2010/main">
+                  <a14:imgLayer r:embed="rId16">
+                    <a14:imgEffect>
+                      <a14:backgroundRemoval t="6693" b="93307" l="10000" r="90000">
+                        <a14:foregroundMark x1="65444" y1="11513" x2="65444" y2="11513"/>
+                        <a14:foregroundMark x1="68556" y1="6827" x2="68556" y2="6827"/>
+                        <a14:foregroundMark x1="58889" y1="88086" x2="58889" y2="88086"/>
+                        <a14:foregroundMark x1="59889" y1="89826" x2="59889" y2="89826"/>
+                        <a14:foregroundMark x1="58556" y1="93307" x2="58556" y2="93307"/>
+                        <a14:foregroundMark x1="51778" y1="55689" x2="51778" y2="55689"/>
+                        <a14:foregroundMark x1="47778" y1="53548" x2="48889" y2="55823"/>
+                        <a14:foregroundMark x1="50556" y1="51539" x2="53556" y2="56894"/>
+                        <a14:backgroundMark x1="46444" y1="68541" x2="46444" y2="68541"/>
+                        <a14:backgroundMark x1="59000" y1="68541" x2="59000" y2="68541"/>
+                        <a14:backgroundMark x1="58111" y1="68273" x2="58111" y2="68273"/>
+                      </a14:backgroundRemoval>
+                    </a14:imgEffect>
+                  </a14:imgLayer>
+                </a14:imgProps>
+              </a:ext>
+              <a:ext uri="{28A0092B-C50C-407E-A947-70E740481C1C}">
+                <a14:useLocalDpi xmlns:a14="http://schemas.microsoft.com/office/drawing/2010/main" val="0"/>
+              </a:ext>
+            </a:extLst>
+          </a:blip>
+          <a:srcRect l="18895" r="18881"/>
+          <a:stretch>
+            <a:fillRect/>
+          </a:stretch>
+        </p:blipFill>
+        <p:spPr bwMode="auto">
+          <a:xfrm>
+            <a:off x="8813186" y="5134788"/>
+            <a:ext cx="867406" cy="1156996"/>
+          </a:xfrm>
+          <a:prstGeom prst="rect">
+            <a:avLst/>
+          </a:prstGeom>
+          <a:noFill/>
+          <a:extLst>
+            <a:ext uri="{909E8E84-426E-40DD-AFC4-6F175D3DCCD1}">
+              <a14:hiddenFill xmlns:a14="http://schemas.microsoft.com/office/drawing/2010/main">
+                <a:solidFill>
+                  <a:srgbClr val="FFFFFF"/>
+                </a:solidFill>
+              </a14:hiddenFill>
+            </a:ext>
+          </a:extLst>
+        </p:spPr>
+      </p:pic>
+      <p:pic>
+        <p:nvPicPr>
+          <p:cNvPr id="1044" name="Picture 20">
+            <a:extLst>
+              <a:ext uri="{FF2B5EF4-FFF2-40B4-BE49-F238E27FC236}">
+                <a16:creationId xmlns:a16="http://schemas.microsoft.com/office/drawing/2014/main" id="{9B4F8D2C-4B12-2484-E4C3-11BC08421545}"/>
+              </a:ext>
+            </a:extLst>
+          </p:cNvPr>
+          <p:cNvPicPr>
+            <a:picLocks noChangeAspect="1" noChangeArrowheads="1"/>
+          </p:cNvPicPr>
+          <p:nvPr/>
+        </p:nvPicPr>
+        <p:blipFill>
+          <a:blip r:embed="rId17">
+            <a:extLst>
+              <a:ext uri="{28A0092B-C50C-407E-A947-70E740481C1C}">
+                <a14:useLocalDpi xmlns:a14="http://schemas.microsoft.com/office/drawing/2010/main" val="0"/>
+              </a:ext>
+            </a:extLst>
+          </a:blip>
+          <a:srcRect/>
+          <a:stretch>
+            <a:fillRect/>
+          </a:stretch>
+        </p:blipFill>
+        <p:spPr bwMode="auto">
+          <a:xfrm>
+            <a:off x="5302721" y="5236472"/>
+            <a:ext cx="1049861" cy="1049862"/>
+          </a:xfrm>
+          <a:prstGeom prst="rect">
+            <a:avLst/>
+          </a:prstGeom>
+          <a:noFill/>
+          <a:extLst>
+            <a:ext uri="{909E8E84-426E-40DD-AFC4-6F175D3DCCD1}">
+              <a14:hiddenFill xmlns:a14="http://schemas.microsoft.com/office/drawing/2010/main">
+                <a:solidFill>
+                  <a:srgbClr val="FFFFFF"/>
+                </a:solidFill>
+              </a14:hiddenFill>
+            </a:ext>
+          </a:extLst>
+        </p:spPr>
+      </p:pic>
+      <p:pic>
+        <p:nvPicPr>
+          <p:cNvPr id="1046" name="Picture 22" descr="Vite color icon in PNG, SVG">
+            <a:extLst>
+              <a:ext uri="{FF2B5EF4-FFF2-40B4-BE49-F238E27FC236}">
+                <a16:creationId xmlns:a16="http://schemas.microsoft.com/office/drawing/2014/main" id="{4549BD3D-3B47-1CEF-C454-093B58C7F567}"/>
+              </a:ext>
+            </a:extLst>
+          </p:cNvPr>
+          <p:cNvPicPr>
+            <a:picLocks noChangeAspect="1" noChangeArrowheads="1"/>
+          </p:cNvPicPr>
+          <p:nvPr/>
+        </p:nvPicPr>
+        <p:blipFill>
+          <a:blip r:embed="rId18">
+            <a:extLst>
+              <a:ext uri="{BEBA8EAE-BF5A-486C-A8C5-ECC9F3942E4B}">
+                <a14:imgProps xmlns:a14="http://schemas.microsoft.com/office/drawing/2010/main">
+                  <a14:imgLayer r:embed="rId19">
+                    <a14:imgEffect>
+                      <a14:backgroundRemoval t="8750" b="92917" l="8500" r="91000">
+                        <a14:foregroundMark x1="8500" y1="22667" x2="8500" y2="22667"/>
+                        <a14:foregroundMark x1="68333" y1="8750" x2="68333" y2="8750"/>
+                        <a14:foregroundMark x1="91083" y1="20667" x2="91083" y2="20667"/>
+                        <a14:foregroundMark x1="50167" y1="92917" x2="50167" y2="92917"/>
+                      </a14:backgroundRemoval>
+                    </a14:imgEffect>
+                  </a14:imgLayer>
+                </a14:imgProps>
+              </a:ext>
+              <a:ext uri="{28A0092B-C50C-407E-A947-70E740481C1C}">
+                <a14:useLocalDpi xmlns:a14="http://schemas.microsoft.com/office/drawing/2010/main" val="0"/>
+              </a:ext>
+            </a:extLst>
+          </a:blip>
+          <a:srcRect/>
+          <a:stretch>
+            <a:fillRect/>
+          </a:stretch>
+        </p:blipFill>
+        <p:spPr bwMode="auto">
+          <a:xfrm>
+            <a:off x="7710956" y="4086342"/>
+            <a:ext cx="914400" cy="914400"/>
+          </a:xfrm>
+          <a:prstGeom prst="rect">
+            <a:avLst/>
+          </a:prstGeom>
+          <a:noFill/>
+          <a:extLst>
+            <a:ext uri="{909E8E84-426E-40DD-AFC4-6F175D3DCCD1}">
+              <a14:hiddenFill xmlns:a14="http://schemas.microsoft.com/office/drawing/2010/main">
+                <a:solidFill>
+                  <a:srgbClr val="FFFFFF"/>
+                </a:solidFill>
+              </a14:hiddenFill>
+            </a:ext>
+          </a:extLst>
+        </p:spPr>
+      </p:pic>
+      <p:pic>
+        <p:nvPicPr>
+          <p:cNvPr id="1048" name="Picture 24">
+            <a:extLst>
+              <a:ext uri="{FF2B5EF4-FFF2-40B4-BE49-F238E27FC236}">
+                <a16:creationId xmlns:a16="http://schemas.microsoft.com/office/drawing/2014/main" id="{C8AB69DF-4378-AA6F-8026-77E955B60F68}"/>
+              </a:ext>
+            </a:extLst>
+          </p:cNvPr>
+          <p:cNvPicPr>
+            <a:picLocks noChangeAspect="1" noChangeArrowheads="1"/>
+          </p:cNvPicPr>
+          <p:nvPr/>
+        </p:nvPicPr>
+        <p:blipFill>
+          <a:blip r:embed="rId20">
+            <a:extLst>
+              <a:ext uri="{28A0092B-C50C-407E-A947-70E740481C1C}">
+                <a14:useLocalDpi xmlns:a14="http://schemas.microsoft.com/office/drawing/2010/main" val="0"/>
+              </a:ext>
+            </a:extLst>
+          </a:blip>
+          <a:srcRect/>
+          <a:stretch>
+            <a:fillRect/>
+          </a:stretch>
+        </p:blipFill>
+        <p:spPr bwMode="auto">
+          <a:xfrm>
+            <a:off x="6438280" y="4030684"/>
+            <a:ext cx="1030140" cy="916811"/>
+          </a:xfrm>
+          <a:prstGeom prst="rect">
+            <a:avLst/>
+          </a:prstGeom>
+          <a:noFill/>
+          <a:extLst>
+            <a:ext uri="{909E8E84-426E-40DD-AFC4-6F175D3DCCD1}">
+              <a14:hiddenFill xmlns:a14="http://schemas.microsoft.com/office/drawing/2010/main">
+                <a:solidFill>
+                  <a:srgbClr val="FFFFFF"/>
+                </a:solidFill>
+              </a14:hiddenFill>
+            </a:ext>
+          </a:extLst>
+        </p:spPr>
+      </p:pic>
+      <p:pic>
+        <p:nvPicPr>
+          <p:cNvPr id="33" name="Рисунок 32" descr="Изображение выглядит как круг, Графика, символ, снимок экрана&#10;&#10;Содержимое, созданное искусственным интеллектом, может быть неверным.">
+            <a:extLst>
+              <a:ext uri="{FF2B5EF4-FFF2-40B4-BE49-F238E27FC236}">
+                <a16:creationId xmlns:a16="http://schemas.microsoft.com/office/drawing/2014/main" id="{FF0BB5BA-7288-0AC6-B572-35C37F293719}"/>
+              </a:ext>
+            </a:extLst>
+          </p:cNvPr>
+          <p:cNvPicPr>
+            <a:picLocks noChangeAspect="1"/>
+          </p:cNvPicPr>
+          <p:nvPr/>
+        </p:nvPicPr>
+        <p:blipFill>
+          <a:blip r:embed="rId21">
+            <a:extLst>
+              <a:ext uri="{28A0092B-C50C-407E-A947-70E740481C1C}">
+                <a14:useLocalDpi xmlns:a14="http://schemas.microsoft.com/office/drawing/2010/main" val="0"/>
+              </a:ext>
+            </a:extLst>
+          </a:blip>
+          <a:stretch>
+            <a:fillRect/>
+          </a:stretch>
+        </p:blipFill>
+        <p:spPr>
+          <a:xfrm>
+            <a:off x="6493333" y="2625268"/>
+            <a:ext cx="961746" cy="961746"/>
+          </a:xfrm>
+          <a:prstGeom prst="rect">
+            <a:avLst/>
+          </a:prstGeom>
+        </p:spPr>
+      </p:pic>
+      <p:pic>
+        <p:nvPicPr>
+          <p:cNvPr id="35" name="Рисунок 34" descr="Изображение выглядит как круг, Графика, снимок экрана, Шрифт&#10;&#10;Содержимое, созданное искусственным интеллектом, может быть неверным.">
+            <a:extLst>
+              <a:ext uri="{FF2B5EF4-FFF2-40B4-BE49-F238E27FC236}">
+                <a16:creationId xmlns:a16="http://schemas.microsoft.com/office/drawing/2014/main" id="{1626EC0B-86EB-9FF7-E192-0F4CD67A2FE2}"/>
+              </a:ext>
+            </a:extLst>
+          </p:cNvPr>
+          <p:cNvPicPr>
+            <a:picLocks noChangeAspect="1"/>
+          </p:cNvPicPr>
+          <p:nvPr/>
+        </p:nvPicPr>
+        <p:blipFill>
+          <a:blip r:embed="rId22">
+            <a:extLst>
+              <a:ext uri="{28A0092B-C50C-407E-A947-70E740481C1C}">
+                <a14:useLocalDpi xmlns:a14="http://schemas.microsoft.com/office/drawing/2010/main" val="0"/>
+              </a:ext>
+            </a:extLst>
+          </a:blip>
+          <a:stretch>
+            <a:fillRect/>
+          </a:stretch>
+        </p:blipFill>
+        <p:spPr>
+          <a:xfrm>
+            <a:off x="5357109" y="2620645"/>
+            <a:ext cx="941084" cy="941084"/>
+          </a:xfrm>
+          <a:prstGeom prst="rect">
+            <a:avLst/>
+          </a:prstGeom>
+        </p:spPr>
+      </p:pic>
+      <p:pic>
+        <p:nvPicPr>
+          <p:cNvPr id="1052" name="Picture 28">
+            <a:extLst>
+              <a:ext uri="{FF2B5EF4-FFF2-40B4-BE49-F238E27FC236}">
+                <a16:creationId xmlns:a16="http://schemas.microsoft.com/office/drawing/2014/main" id="{53FB5B16-0522-4A8F-2A9B-5241A284A5E4}"/>
+              </a:ext>
+            </a:extLst>
+          </p:cNvPr>
+          <p:cNvPicPr>
+            <a:picLocks noChangeAspect="1" noChangeArrowheads="1"/>
+          </p:cNvPicPr>
+          <p:nvPr/>
+        </p:nvPicPr>
+        <p:blipFill>
+          <a:blip r:embed="rId23">
+            <a:extLst>
+              <a:ext uri="{28A0092B-C50C-407E-A947-70E740481C1C}">
+                <a14:useLocalDpi xmlns:a14="http://schemas.microsoft.com/office/drawing/2010/main" val="0"/>
+              </a:ext>
+            </a:extLst>
+          </a:blip>
+          <a:srcRect/>
+          <a:stretch>
+            <a:fillRect/>
+          </a:stretch>
+        </p:blipFill>
+        <p:spPr bwMode="auto">
+          <a:xfrm>
+            <a:off x="2996036" y="3957720"/>
+            <a:ext cx="1057345" cy="1057345"/>
+          </a:xfrm>
+          <a:prstGeom prst="rect">
+            <a:avLst/>
+          </a:prstGeom>
+          <a:noFill/>
+          <a:extLst>
+            <a:ext uri="{909E8E84-426E-40DD-AFC4-6F175D3DCCD1}">
+              <a14:hiddenFill xmlns:a14="http://schemas.microsoft.com/office/drawing/2010/main">
+                <a:solidFill>
+                  <a:srgbClr val="FFFFFF"/>
+                </a:solidFill>
+              </a14:hiddenFill>
+            </a:ext>
+          </a:extLst>
+        </p:spPr>
+      </p:pic>
+      <p:pic>
+        <p:nvPicPr>
+          <p:cNvPr id="1054" name="Picture 30">
+            <a:extLst>
+              <a:ext uri="{FF2B5EF4-FFF2-40B4-BE49-F238E27FC236}">
+                <a16:creationId xmlns:a16="http://schemas.microsoft.com/office/drawing/2014/main" id="{793F3BB0-07CE-CCE9-EAFE-6988999AA4AE}"/>
+              </a:ext>
+            </a:extLst>
+          </p:cNvPr>
+          <p:cNvPicPr>
+            <a:picLocks noChangeAspect="1" noChangeArrowheads="1"/>
+          </p:cNvPicPr>
+          <p:nvPr/>
+        </p:nvPicPr>
+        <p:blipFill>
+          <a:blip r:embed="rId24">
+            <a:extLst>
+              <a:ext uri="{28A0092B-C50C-407E-A947-70E740481C1C}">
+                <a14:useLocalDpi xmlns:a14="http://schemas.microsoft.com/office/drawing/2010/main" val="0"/>
+              </a:ext>
+            </a:extLst>
+          </a:blip>
+          <a:srcRect/>
+          <a:stretch>
+            <a:fillRect/>
+          </a:stretch>
+        </p:blipFill>
+        <p:spPr bwMode="auto">
+          <a:xfrm>
+            <a:off x="2946718" y="2488410"/>
+            <a:ext cx="1155980" cy="1155980"/>
+          </a:xfrm>
+          <a:prstGeom prst="rect">
+            <a:avLst/>
+          </a:prstGeom>
+          <a:noFill/>
+          <a:extLst>
+            <a:ext uri="{909E8E84-426E-40DD-AFC4-6F175D3DCCD1}">
+              <a14:hiddenFill xmlns:a14="http://schemas.microsoft.com/office/drawing/2010/main">
+                <a:solidFill>
+                  <a:srgbClr val="FFFFFF"/>
+                </a:solidFill>
+              </a14:hiddenFill>
+            </a:ext>
+          </a:extLst>
+        </p:spPr>
+      </p:pic>
+      <p:pic>
+        <p:nvPicPr>
+          <p:cNvPr id="1056" name="Picture 32" descr="Mysql workbench - Free Icon PNG, SVG">
+            <a:extLst>
+              <a:ext uri="{FF2B5EF4-FFF2-40B4-BE49-F238E27FC236}">
+                <a16:creationId xmlns:a16="http://schemas.microsoft.com/office/drawing/2014/main" id="{2DDCC42B-0AA1-7794-7ECD-9636B97CCE69}"/>
+              </a:ext>
+            </a:extLst>
+          </p:cNvPr>
+          <p:cNvPicPr>
+            <a:picLocks noChangeAspect="1" noChangeArrowheads="1"/>
+          </p:cNvPicPr>
+          <p:nvPr/>
+        </p:nvPicPr>
+        <p:blipFill>
+          <a:blip r:embed="rId25">
+            <a:extLst>
+              <a:ext uri="{28A0092B-C50C-407E-A947-70E740481C1C}">
+                <a14:useLocalDpi xmlns:a14="http://schemas.microsoft.com/office/drawing/2010/main" val="0"/>
+              </a:ext>
+            </a:extLst>
+          </a:blip>
+          <a:srcRect/>
+          <a:stretch>
+            <a:fillRect/>
+          </a:stretch>
+        </p:blipFill>
+        <p:spPr bwMode="auto">
+          <a:xfrm>
+            <a:off x="2946718" y="1187444"/>
+            <a:ext cx="1155980" cy="1155980"/>
+          </a:xfrm>
+          <a:prstGeom prst="rect">
+            <a:avLst/>
+          </a:prstGeom>
+          <a:noFill/>
+          <a:extLst>
+            <a:ext uri="{909E8E84-426E-40DD-AFC4-6F175D3DCCD1}">
+              <a14:hiddenFill xmlns:a14="http://schemas.microsoft.com/office/drawing/2010/main">
+                <a:solidFill>
+                  <a:srgbClr val="FFFFFF"/>
+                </a:solidFill>
+              </a14:hiddenFill>
+            </a:ext>
+          </a:extLst>
+        </p:spPr>
+      </p:pic>
+      <p:pic>
+        <p:nvPicPr>
+          <p:cNvPr id="38" name="Рисунок 37" descr="Изображение выглядит как Графика, Шрифт, логотип, текст&#10;&#10;Содержимое, созданное искусственным интеллектом, может быть неверным.">
+            <a:extLst>
+              <a:ext uri="{FF2B5EF4-FFF2-40B4-BE49-F238E27FC236}">
+                <a16:creationId xmlns:a16="http://schemas.microsoft.com/office/drawing/2014/main" id="{E684F69C-F7DD-4E54-5DB0-8B1B8D82D82C}"/>
+              </a:ext>
+            </a:extLst>
+          </p:cNvPr>
+          <p:cNvPicPr>
+            <a:picLocks noChangeAspect="1"/>
+          </p:cNvPicPr>
+          <p:nvPr/>
+        </p:nvPicPr>
+        <p:blipFill>
+          <a:blip r:embed="rId26">
+            <a:extLst>
+              <a:ext uri="{28A0092B-C50C-407E-A947-70E740481C1C}">
+                <a14:useLocalDpi xmlns:a14="http://schemas.microsoft.com/office/drawing/2010/main" val="0"/>
+              </a:ext>
+            </a:extLst>
+          </a:blip>
+          <a:stretch>
+            <a:fillRect/>
+          </a:stretch>
+        </p:blipFill>
+        <p:spPr>
+          <a:xfrm>
+            <a:off x="5346778" y="1278728"/>
+            <a:ext cx="961746" cy="961746"/>
+          </a:xfrm>
+          <a:prstGeom prst="rect">
+            <a:avLst/>
+          </a:prstGeom>
+        </p:spPr>
+      </p:pic>
+      <p:pic>
+        <p:nvPicPr>
+          <p:cNvPr id="1058" name="Picture 34" descr="Typescript - Free brands and logotypes icons">
+            <a:extLst>
+              <a:ext uri="{FF2B5EF4-FFF2-40B4-BE49-F238E27FC236}">
+                <a16:creationId xmlns:a16="http://schemas.microsoft.com/office/drawing/2014/main" id="{2C07C8E4-D0A9-AF31-0EEE-AB372C236DAA}"/>
+              </a:ext>
+            </a:extLst>
+          </p:cNvPr>
+          <p:cNvPicPr>
+            <a:picLocks noChangeAspect="1" noChangeArrowheads="1"/>
+          </p:cNvPicPr>
+          <p:nvPr/>
+        </p:nvPicPr>
+        <p:blipFill>
+          <a:blip r:embed="rId27">
+            <a:extLst>
+              <a:ext uri="{28A0092B-C50C-407E-A947-70E740481C1C}">
+                <a14:useLocalDpi xmlns:a14="http://schemas.microsoft.com/office/drawing/2010/main" val="0"/>
+              </a:ext>
+            </a:extLst>
+          </a:blip>
+          <a:srcRect/>
+          <a:stretch>
+            <a:fillRect/>
+          </a:stretch>
+        </p:blipFill>
+        <p:spPr bwMode="auto">
+          <a:xfrm>
+            <a:off x="5383792" y="4033094"/>
+            <a:ext cx="914401" cy="914401"/>
+          </a:xfrm>
+          <a:prstGeom prst="rect">
+            <a:avLst/>
+          </a:prstGeom>
+          <a:noFill/>
+          <a:extLst>
+            <a:ext uri="{909E8E84-426E-40DD-AFC4-6F175D3DCCD1}">
+              <a14:hiddenFill xmlns:a14="http://schemas.microsoft.com/office/drawing/2010/main">
+                <a:solidFill>
+                  <a:srgbClr val="FFFFFF"/>
+                </a:solidFill>
+              </a14:hiddenFill>
+            </a:ext>
+          </a:extLst>
+        </p:spPr>
+      </p:pic>
+      <p:pic>
+        <p:nvPicPr>
+          <p:cNvPr id="1060" name="Picture 36" descr="Html 5 - Free logo icons">
+            <a:extLst>
+              <a:ext uri="{FF2B5EF4-FFF2-40B4-BE49-F238E27FC236}">
+                <a16:creationId xmlns:a16="http://schemas.microsoft.com/office/drawing/2014/main" id="{4ADB8FF2-B5A6-1FD1-4E9D-5D1863E21425}"/>
+              </a:ext>
+            </a:extLst>
+          </p:cNvPr>
+          <p:cNvPicPr>
+            <a:picLocks noChangeAspect="1" noChangeArrowheads="1"/>
+          </p:cNvPicPr>
+          <p:nvPr/>
+        </p:nvPicPr>
+        <p:blipFill>
+          <a:blip r:embed="rId28">
+            <a:extLst>
+              <a:ext uri="{28A0092B-C50C-407E-A947-70E740481C1C}">
+                <a14:useLocalDpi xmlns:a14="http://schemas.microsoft.com/office/drawing/2010/main" val="0"/>
+              </a:ext>
+            </a:extLst>
+          </a:blip>
+          <a:srcRect/>
+          <a:stretch>
+            <a:fillRect/>
+          </a:stretch>
+        </p:blipFill>
+        <p:spPr bwMode="auto">
+          <a:xfrm>
+            <a:off x="8779531" y="4100663"/>
+            <a:ext cx="914402" cy="914402"/>
+          </a:xfrm>
+          <a:prstGeom prst="rect">
+            <a:avLst/>
+          </a:prstGeom>
+          <a:noFill/>
+          <a:extLst>
+            <a:ext uri="{909E8E84-426E-40DD-AFC4-6F175D3DCCD1}">
+              <a14:hiddenFill xmlns:a14="http://schemas.microsoft.com/office/drawing/2010/main">
+                <a:solidFill>
+                  <a:srgbClr val="FFFFFF"/>
+                </a:solidFill>
+              </a14:hiddenFill>
+            </a:ext>
+          </a:extLst>
+        </p:spPr>
+      </p:pic>
+      <p:pic>
+        <p:nvPicPr>
+          <p:cNvPr id="1062" name="Picture 38" descr="Css 3 – Бесплатные иконки: технологии">
+            <a:extLst>
+              <a:ext uri="{FF2B5EF4-FFF2-40B4-BE49-F238E27FC236}">
+                <a16:creationId xmlns:a16="http://schemas.microsoft.com/office/drawing/2014/main" id="{1568EC24-18E1-5565-084D-A38A5CFE99F9}"/>
+              </a:ext>
+            </a:extLst>
+          </p:cNvPr>
+          <p:cNvPicPr>
+            <a:picLocks noChangeAspect="1" noChangeArrowheads="1"/>
+          </p:cNvPicPr>
+          <p:nvPr/>
+        </p:nvPicPr>
+        <p:blipFill>
+          <a:blip r:embed="rId29">
+            <a:extLst>
+              <a:ext uri="{28A0092B-C50C-407E-A947-70E740481C1C}">
+                <a14:useLocalDpi xmlns:a14="http://schemas.microsoft.com/office/drawing/2010/main" val="0"/>
+              </a:ext>
+            </a:extLst>
+          </a:blip>
+          <a:srcRect/>
+          <a:stretch>
+            <a:fillRect/>
+          </a:stretch>
+        </p:blipFill>
+        <p:spPr bwMode="auto">
+          <a:xfrm>
+            <a:off x="9829058" y="4086342"/>
+            <a:ext cx="914402" cy="914402"/>
+          </a:xfrm>
+          <a:prstGeom prst="rect">
+            <a:avLst/>
+          </a:prstGeom>
+          <a:noFill/>
+          <a:extLst>
+            <a:ext uri="{909E8E84-426E-40DD-AFC4-6F175D3DCCD1}">
+              <a14:hiddenFill xmlns:a14="http://schemas.microsoft.com/office/drawing/2010/main">
+                <a:solidFill>
+                  <a:srgbClr val="FFFFFF"/>
+                </a:solidFill>
+              </a14:hiddenFill>
+            </a:ext>
+          </a:extLst>
+        </p:spPr>
+      </p:pic>
+      <p:pic>
+        <p:nvPicPr>
+          <p:cNvPr id="1064" name="Picture 40" descr="Figma logo - Free Icon PNG, SVG">
+            <a:extLst>
+              <a:ext uri="{FF2B5EF4-FFF2-40B4-BE49-F238E27FC236}">
+                <a16:creationId xmlns:a16="http://schemas.microsoft.com/office/drawing/2014/main" id="{A6DA375E-68BA-2755-1F93-A3098C795607}"/>
+              </a:ext>
+            </a:extLst>
+          </p:cNvPr>
+          <p:cNvPicPr>
+            <a:picLocks noChangeAspect="1" noChangeArrowheads="1"/>
+          </p:cNvPicPr>
+          <p:nvPr/>
+        </p:nvPicPr>
+        <p:blipFill>
+          <a:blip r:embed="rId30">
+            <a:extLst>
+              <a:ext uri="{28A0092B-C50C-407E-A947-70E740481C1C}">
+                <a14:useLocalDpi xmlns:a14="http://schemas.microsoft.com/office/drawing/2010/main" val="0"/>
+              </a:ext>
+            </a:extLst>
+          </a:blip>
+          <a:srcRect/>
+          <a:stretch>
+            <a:fillRect/>
+          </a:stretch>
+        </p:blipFill>
+        <p:spPr bwMode="auto">
+          <a:xfrm>
+            <a:off x="4295917" y="4053683"/>
+            <a:ext cx="914401" cy="914401"/>
+          </a:xfrm>
+          <a:prstGeom prst="rect">
+            <a:avLst/>
+          </a:prstGeom>
+          <a:noFill/>
+          <a:extLst>
+            <a:ext uri="{909E8E84-426E-40DD-AFC4-6F175D3DCCD1}">
+              <a14:hiddenFill xmlns:a14="http://schemas.microsoft.com/office/drawing/2010/main">
+                <a:solidFill>
+                  <a:srgbClr val="FFFFFF"/>
+                </a:solidFill>
+              </a14:hiddenFill>
+            </a:ext>
+          </a:extLst>
+        </p:spPr>
+      </p:pic>
+      <p:pic>
+        <p:nvPicPr>
+          <p:cNvPr id="1066" name="Picture 42">
+            <a:extLst>
+              <a:ext uri="{FF2B5EF4-FFF2-40B4-BE49-F238E27FC236}">
+                <a16:creationId xmlns:a16="http://schemas.microsoft.com/office/drawing/2014/main" id="{7B5A7D31-F24A-2BE3-6C5B-E73F245D7867}"/>
+              </a:ext>
+            </a:extLst>
+          </p:cNvPr>
+          <p:cNvPicPr>
+            <a:picLocks noChangeAspect="1" noChangeArrowheads="1"/>
+          </p:cNvPicPr>
+          <p:nvPr/>
+        </p:nvPicPr>
+        <p:blipFill>
+          <a:blip r:embed="rId31">
+            <a:extLst>
+              <a:ext uri="{28A0092B-C50C-407E-A947-70E740481C1C}">
+                <a14:useLocalDpi xmlns:a14="http://schemas.microsoft.com/office/drawing/2010/main" val="0"/>
+              </a:ext>
+            </a:extLst>
+          </a:blip>
+          <a:srcRect/>
+          <a:stretch>
+            <a:fillRect/>
+          </a:stretch>
+        </p:blipFill>
+        <p:spPr bwMode="auto">
+          <a:xfrm>
+            <a:off x="3022394" y="5232497"/>
+            <a:ext cx="1004628" cy="1004628"/>
+          </a:xfrm>
+          <a:prstGeom prst="rect">
+            <a:avLst/>
+          </a:prstGeom>
+          <a:noFill/>
+          <a:extLst>
+            <a:ext uri="{909E8E84-426E-40DD-AFC4-6F175D3DCCD1}">
+              <a14:hiddenFill xmlns:a14="http://schemas.microsoft.com/office/drawing/2010/main">
+                <a:solidFill>
+                  <a:srgbClr val="FFFFFF"/>
+                </a:solidFill>
+              </a14:hiddenFill>
+            </a:ext>
+          </a:extLst>
+        </p:spPr>
+      </p:pic>
+      <p:pic>
+        <p:nvPicPr>
+          <p:cNvPr id="1070" name="Picture 46">
+            <a:extLst>
+              <a:ext uri="{FF2B5EF4-FFF2-40B4-BE49-F238E27FC236}">
+                <a16:creationId xmlns:a16="http://schemas.microsoft.com/office/drawing/2014/main" id="{173F3D0E-1B87-D045-360C-BE6301DB66B3}"/>
+              </a:ext>
+            </a:extLst>
+          </p:cNvPr>
+          <p:cNvPicPr>
+            <a:picLocks noChangeAspect="1" noChangeArrowheads="1"/>
+          </p:cNvPicPr>
+          <p:nvPr/>
+        </p:nvPicPr>
+        <p:blipFill rotWithShape="1">
+          <a:blip r:embed="rId32">
+            <a:extLst>
+              <a:ext uri="{28A0092B-C50C-407E-A947-70E740481C1C}">
+                <a14:useLocalDpi xmlns:a14="http://schemas.microsoft.com/office/drawing/2010/main" val="0"/>
+              </a:ext>
+            </a:extLst>
+          </a:blip>
+          <a:srcRect r="70917"/>
+          <a:stretch>
+            <a:fillRect/>
+          </a:stretch>
+        </p:blipFill>
+        <p:spPr bwMode="auto">
+          <a:xfrm>
+            <a:off x="6342360" y="5181295"/>
+            <a:ext cx="1161780" cy="1201726"/>
+          </a:xfrm>
+          <a:prstGeom prst="rect">
+            <a:avLst/>
+          </a:prstGeom>
+          <a:noFill/>
+          <a:extLst>
+            <a:ext uri="{909E8E84-426E-40DD-AFC4-6F175D3DCCD1}">
+              <a14:hiddenFill xmlns:a14="http://schemas.microsoft.com/office/drawing/2010/main">
+                <a:solidFill>
+                  <a:srgbClr val="FFFFFF"/>
+                </a:solidFill>
+              </a14:hiddenFill>
+            </a:ext>
+          </a:extLst>
+        </p:spPr>
+      </p:pic>
+      <p:grpSp>
+        <p:nvGrpSpPr>
+          <p:cNvPr id="42" name="Группа 41">
+            <a:extLst>
+              <a:ext uri="{FF2B5EF4-FFF2-40B4-BE49-F238E27FC236}">
+                <a16:creationId xmlns:a16="http://schemas.microsoft.com/office/drawing/2014/main" id="{973E8C4D-588F-57AF-7833-7559C28515AF}"/>
+              </a:ext>
+            </a:extLst>
+          </p:cNvPr>
+          <p:cNvGrpSpPr/>
+          <p:nvPr/>
+        </p:nvGrpSpPr>
+        <p:grpSpPr>
+          <a:xfrm>
+            <a:off x="861468" y="106931"/>
+            <a:ext cx="11206162" cy="786262"/>
+            <a:chOff x="883444" y="90039"/>
+            <a:chExt cx="11206162" cy="786262"/>
+          </a:xfrm>
+        </p:grpSpPr>
+        <p:sp>
+          <p:nvSpPr>
+            <p:cNvPr id="43" name="Прямоугольник: скругленные углы 42">
+              <a:extLst>
+                <a:ext uri="{FF2B5EF4-FFF2-40B4-BE49-F238E27FC236}">
+                  <a16:creationId xmlns:a16="http://schemas.microsoft.com/office/drawing/2014/main" id="{E9ACE141-F4F1-10DF-74AE-C0F930441B5C}"/>
+                </a:ext>
+              </a:extLst>
+            </p:cNvPr>
+            <p:cNvSpPr/>
+            <p:nvPr/>
+          </p:nvSpPr>
+          <p:spPr>
+            <a:xfrm>
+              <a:off x="883444" y="90039"/>
+              <a:ext cx="11206162" cy="786262"/>
+            </a:xfrm>
+            <a:prstGeom prst="roundRect">
+              <a:avLst>
+                <a:gd name="adj" fmla="val 4689"/>
+              </a:avLst>
+            </a:prstGeom>
+            <a:solidFill>
+              <a:schemeClr val="bg1"/>
+            </a:solidFill>
+            <a:ln>
+              <a:solidFill>
+                <a:schemeClr val="bg1"/>
+              </a:solidFill>
+            </a:ln>
+          </p:spPr>
+          <p:style>
+            <a:lnRef idx="2">
+              <a:schemeClr val="accent1">
+                <a:shade val="15000"/>
+              </a:schemeClr>
+            </a:lnRef>
+            <a:fillRef idx="1">
+              <a:schemeClr val="accent1"/>
+            </a:fillRef>
+            <a:effectRef idx="0">
+              <a:schemeClr val="accent1"/>
+            </a:effectRef>
+            <a:fontRef idx="minor">
+              <a:schemeClr val="lt1"/>
+            </a:fontRef>
+          </p:style>
+          <p:txBody>
+            <a:bodyPr rtlCol="0" anchor="ctr"/>
+            <a:lstStyle/>
+            <a:p>
+              <a:pPr algn="ctr"/>
+              <a:endParaRPr lang="ru-RU"/>
+            </a:p>
+          </p:txBody>
+        </p:sp>
+        <p:sp>
+          <p:nvSpPr>
+            <p:cNvPr id="44" name="TextBox 43">
+              <a:extLst>
+                <a:ext uri="{FF2B5EF4-FFF2-40B4-BE49-F238E27FC236}">
+                  <a16:creationId xmlns:a16="http://schemas.microsoft.com/office/drawing/2014/main" id="{AEFE8005-3671-45AD-3998-47ABD2B2BE67}"/>
+                </a:ext>
+              </a:extLst>
+            </p:cNvPr>
+            <p:cNvSpPr txBox="1"/>
+            <p:nvPr/>
+          </p:nvSpPr>
+          <p:spPr>
+            <a:xfrm>
+              <a:off x="11143122" y="221560"/>
+              <a:ext cx="858378" cy="523220"/>
+            </a:xfrm>
+            <a:prstGeom prst="rect">
+              <a:avLst/>
+            </a:prstGeom>
+            <a:noFill/>
+          </p:spPr>
+          <p:txBody>
+            <a:bodyPr wrap="square">
+              <a:spAutoFit/>
+            </a:bodyPr>
+            <a:lstStyle/>
+            <a:p>
+              <a:r>
+                <a:rPr lang="ru-RU" sz="2800" dirty="0">
+                  <a:latin typeface="Comfortaa Medium" pitchFamily="2" charset="0"/>
+                </a:rPr>
+                <a:t>6/11</a:t>
+              </a:r>
+            </a:p>
+          </p:txBody>
+        </p:sp>
+      </p:grpSp>
+      <p:sp>
+        <p:nvSpPr>
+          <p:cNvPr id="45" name="Заголовок 1">
+            <a:extLst>
+              <a:ext uri="{FF2B5EF4-FFF2-40B4-BE49-F238E27FC236}">
+                <a16:creationId xmlns:a16="http://schemas.microsoft.com/office/drawing/2014/main" id="{D4B174EC-8FBB-83DE-A81F-594801E30297}"/>
+              </a:ext>
+            </a:extLst>
+          </p:cNvPr>
+          <p:cNvSpPr>
+            <a:spLocks noGrp="1"/>
+          </p:cNvSpPr>
+          <p:nvPr>
+            <p:ph type="title"/>
+          </p:nvPr>
+        </p:nvSpPr>
+        <p:spPr>
+          <a:xfrm>
+            <a:off x="1076324" y="228389"/>
+            <a:ext cx="10066797" cy="509563"/>
+          </a:xfrm>
+        </p:spPr>
+        <p:txBody>
+          <a:bodyPr>
+            <a:noAutofit/>
+          </a:bodyPr>
+          <a:lstStyle/>
+          <a:p>
+            <a:r>
+              <a:rPr lang="ru-RU" sz="3200" dirty="0">
+                <a:latin typeface="Comfortaa Medium" pitchFamily="2" charset="0"/>
+              </a:rPr>
+              <a:t>Средства разработки</a:t>
+            </a:r>
+          </a:p>
+        </p:txBody>
+      </p:sp>
     </p:spTree>
     <p:extLst>
       <p:ext uri="{BB962C8B-B14F-4D97-AF65-F5344CB8AC3E}">
@@ -10537,6 +12959,14 @@
 <file path=ppt/slides/slide7.xml><?xml version="1.0" encoding="utf-8"?>
 <p:sld xmlns:a="http://schemas.openxmlformats.org/drawingml/2006/main" xmlns:r="http://schemas.openxmlformats.org/officeDocument/2006/relationships" xmlns:p="http://schemas.openxmlformats.org/presentationml/2006/main">
   <p:cSld>
+    <p:bg>
+      <p:bgPr>
+        <a:solidFill>
+          <a:srgbClr val="F4F7FB"/>
+        </a:solidFill>
+        <a:effectLst/>
+      </p:bgPr>
+    </p:bg>
     <p:spTree>
       <p:nvGrpSpPr>
         <p:cNvPr id="1" name="">
@@ -10557,158 +12987,6 @@
           <a:chExt cx="0" cy="0"/>
         </a:xfrm>
       </p:grpSpPr>
-      <p:sp>
-        <p:nvSpPr>
-          <p:cNvPr id="2" name="Заголовок 1">
-            <a:extLst>
-              <a:ext uri="{FF2B5EF4-FFF2-40B4-BE49-F238E27FC236}">
-                <a16:creationId xmlns:a16="http://schemas.microsoft.com/office/drawing/2014/main" id="{CE9EA8CD-5856-9EAA-3DE2-DF75170A77FA}"/>
-              </a:ext>
-            </a:extLst>
-          </p:cNvPr>
-          <p:cNvSpPr>
-            <a:spLocks noGrp="1"/>
-          </p:cNvSpPr>
-          <p:nvPr>
-            <p:ph type="title"/>
-          </p:nvPr>
-        </p:nvSpPr>
-        <p:spPr/>
-        <p:txBody>
-          <a:bodyPr/>
-          <a:lstStyle/>
-          <a:p>
-            <a:r>
-              <a:rPr lang="ru-RU" dirty="0"/>
-              <a:t>Архитектура системы</a:t>
-            </a:r>
-          </a:p>
-        </p:txBody>
-      </p:sp>
-      <p:sp>
-        <p:nvSpPr>
-          <p:cNvPr id="3" name="Объект 2">
-            <a:extLst>
-              <a:ext uri="{FF2B5EF4-FFF2-40B4-BE49-F238E27FC236}">
-                <a16:creationId xmlns:a16="http://schemas.microsoft.com/office/drawing/2014/main" id="{BEE8F50C-4D0D-297E-C6E1-36F08B6AFE23}"/>
-              </a:ext>
-            </a:extLst>
-          </p:cNvPr>
-          <p:cNvSpPr>
-            <a:spLocks noGrp="1"/>
-          </p:cNvSpPr>
-          <p:nvPr>
-            <p:ph idx="1"/>
-          </p:nvPr>
-        </p:nvSpPr>
-        <p:spPr>
-          <a:xfrm>
-            <a:off x="838200" y="1825625"/>
-            <a:ext cx="10515600" cy="1603375"/>
-          </a:xfrm>
-        </p:spPr>
-        <p:txBody>
-          <a:bodyPr/>
-          <a:lstStyle/>
-          <a:p>
-            <a:pPr marL="0" indent="0">
-              <a:buNone/>
-            </a:pPr>
-            <a:r>
-              <a:rPr lang="ru-RU" b="1" dirty="0"/>
-              <a:t>Из каких модулей состоит система? </a:t>
-            </a:r>
-          </a:p>
-          <a:p>
-            <a:r>
-              <a:rPr lang="ru-RU" dirty="0"/>
-              <a:t>Представить структурную диаграмму UML, например диаграмму развертывания / компонентов</a:t>
-            </a:r>
-          </a:p>
-        </p:txBody>
-      </p:sp>
-      <p:sp>
-        <p:nvSpPr>
-          <p:cNvPr id="4" name="TextBox 3">
-            <a:extLst>
-              <a:ext uri="{FF2B5EF4-FFF2-40B4-BE49-F238E27FC236}">
-                <a16:creationId xmlns:a16="http://schemas.microsoft.com/office/drawing/2014/main" id="{7978CBDD-42A5-3C17-C38D-755E48BBE86B}"/>
-              </a:ext>
-            </a:extLst>
-          </p:cNvPr>
-          <p:cNvSpPr txBox="1"/>
-          <p:nvPr/>
-        </p:nvSpPr>
-        <p:spPr>
-          <a:xfrm>
-            <a:off x="11245516" y="103515"/>
-            <a:ext cx="946484" cy="523220"/>
-          </a:xfrm>
-          <a:prstGeom prst="rect">
-            <a:avLst/>
-          </a:prstGeom>
-          <a:noFill/>
-        </p:spPr>
-        <p:txBody>
-          <a:bodyPr wrap="square">
-            <a:spAutoFit/>
-          </a:bodyPr>
-          <a:lstStyle/>
-          <a:p>
-            <a:r>
-              <a:rPr lang="ru-RU" sz="2800" dirty="0"/>
-              <a:t>7/11</a:t>
-            </a:r>
-          </a:p>
-        </p:txBody>
-      </p:sp>
-      <p:pic>
-        <p:nvPicPr>
-          <p:cNvPr id="8" name="Picture 4" descr="Placeholder Image | Elementor Developers">
-            <a:extLst>
-              <a:ext uri="{FF2B5EF4-FFF2-40B4-BE49-F238E27FC236}">
-                <a16:creationId xmlns:a16="http://schemas.microsoft.com/office/drawing/2014/main" id="{738D9B69-26B8-4B78-F8E0-AC8B3DCB4AAE}"/>
-              </a:ext>
-            </a:extLst>
-          </p:cNvPr>
-          <p:cNvPicPr>
-            <a:picLocks noChangeAspect="1" noChangeArrowheads="1"/>
-          </p:cNvPicPr>
-          <p:nvPr/>
-        </p:nvPicPr>
-        <p:blipFill>
-          <a:blip r:embed="rId2">
-            <a:extLst>
-              <a:ext uri="{28A0092B-C50C-407E-A947-70E740481C1C}">
-                <a14:useLocalDpi xmlns:a14="http://schemas.microsoft.com/office/drawing/2010/main" val="0"/>
-              </a:ext>
-            </a:extLst>
-          </a:blip>
-          <a:srcRect/>
-          <a:stretch>
-            <a:fillRect/>
-          </a:stretch>
-        </p:blipFill>
-        <p:spPr bwMode="auto">
-          <a:xfrm>
-            <a:off x="3745708" y="3231063"/>
-            <a:ext cx="4700583" cy="3506621"/>
-          </a:xfrm>
-          <a:prstGeom prst="rect">
-            <a:avLst/>
-          </a:prstGeom>
-          <a:noFill/>
-          <a:extLst>
-            <a:ext uri="{909E8E84-426E-40DD-AFC4-6F175D3DCCD1}">
-              <a14:hiddenFill xmlns:a14="http://schemas.microsoft.com/office/drawing/2010/main">
-                <a:solidFill>
-                  <a:srgbClr val="FFFFFF"/>
-                </a:solidFill>
-              </a14:hiddenFill>
-            </a:ext>
-          </a:extLst>
-        </p:spPr>
-      </p:pic>
       <p:sp>
         <p:nvSpPr>
           <p:cNvPr id="10" name="Прямоугольник 9">
@@ -10870,7 +13148,7 @@
               <p:nvPr/>
             </p:nvPicPr>
             <p:blipFill>
-              <a:blip r:embed="rId3">
+              <a:blip r:embed="rId2">
                 <a:extLst>
                   <a:ext uri="{28A0092B-C50C-407E-A947-70E740481C1C}">
                     <a14:useLocalDpi xmlns:a14="http://schemas.microsoft.com/office/drawing/2010/main" val="0"/>
@@ -11028,7 +13306,7 @@
             <p:nvPr/>
           </p:nvPicPr>
           <p:blipFill>
-            <a:blip r:embed="rId4">
+            <a:blip r:embed="rId3">
               <a:extLst>
                 <a:ext uri="{28A0092B-C50C-407E-A947-70E740481C1C}">
                   <a14:useLocalDpi xmlns:a14="http://schemas.microsoft.com/office/drawing/2010/main" val="0"/>
@@ -11064,7 +13342,7 @@
             <p:nvPr/>
           </p:nvPicPr>
           <p:blipFill>
-            <a:blip r:embed="rId5">
+            <a:blip r:embed="rId4">
               <a:extLst>
                 <a:ext uri="{28A0092B-C50C-407E-A947-70E740481C1C}">
                   <a14:useLocalDpi xmlns:a14="http://schemas.microsoft.com/office/drawing/2010/main" val="0"/>
@@ -11100,7 +13378,7 @@
             <p:nvPr/>
           </p:nvPicPr>
           <p:blipFill>
-            <a:blip r:embed="rId6">
+            <a:blip r:embed="rId5">
               <a:extLst>
                 <a:ext uri="{28A0092B-C50C-407E-A947-70E740481C1C}">
                   <a14:useLocalDpi xmlns:a14="http://schemas.microsoft.com/office/drawing/2010/main" val="0"/>
@@ -11136,7 +13414,7 @@
             <p:nvPr/>
           </p:nvPicPr>
           <p:blipFill>
-            <a:blip r:embed="rId7">
+            <a:blip r:embed="rId6">
               <a:extLst>
                 <a:ext uri="{28A0092B-C50C-407E-A947-70E740481C1C}">
                   <a14:useLocalDpi xmlns:a14="http://schemas.microsoft.com/office/drawing/2010/main" val="0"/>
@@ -11172,7 +13450,7 @@
             <p:nvPr/>
           </p:nvPicPr>
           <p:blipFill>
-            <a:blip r:embed="rId8">
+            <a:blip r:embed="rId7">
               <a:extLst>
                 <a:ext uri="{28A0092B-C50C-407E-A947-70E740481C1C}">
                   <a14:useLocalDpi xmlns:a14="http://schemas.microsoft.com/office/drawing/2010/main" val="0"/>
@@ -11208,7 +13486,7 @@
             <p:nvPr/>
           </p:nvPicPr>
           <p:blipFill>
-            <a:blip r:embed="rId9">
+            <a:blip r:embed="rId8">
               <a:extLst>
                 <a:ext uri="{28A0092B-C50C-407E-A947-70E740481C1C}">
                   <a14:useLocalDpi xmlns:a14="http://schemas.microsoft.com/office/drawing/2010/main" val="0"/>
@@ -11244,7 +13522,7 @@
             <p:nvPr/>
           </p:nvPicPr>
           <p:blipFill>
-            <a:blip r:embed="rId10">
+            <a:blip r:embed="rId9">
               <a:extLst>
                 <a:ext uri="{28A0092B-C50C-407E-A947-70E740481C1C}">
                   <a14:useLocalDpi xmlns:a14="http://schemas.microsoft.com/office/drawing/2010/main" val="0"/>
@@ -11280,7 +13558,7 @@
             <p:nvPr/>
           </p:nvPicPr>
           <p:blipFill>
-            <a:blip r:embed="rId11">
+            <a:blip r:embed="rId10">
               <a:extLst>
                 <a:ext uri="{28A0092B-C50C-407E-A947-70E740481C1C}">
                   <a14:useLocalDpi xmlns:a14="http://schemas.microsoft.com/office/drawing/2010/main" val="0"/>
@@ -11316,7 +13594,7 @@
             <p:nvPr/>
           </p:nvPicPr>
           <p:blipFill>
-            <a:blip r:embed="rId12">
+            <a:blip r:embed="rId11">
               <a:extLst>
                 <a:ext uri="{28A0092B-C50C-407E-A947-70E740481C1C}">
                   <a14:useLocalDpi xmlns:a14="http://schemas.microsoft.com/office/drawing/2010/main" val="0"/>
@@ -11337,6 +13615,629 @@
             </a:prstGeom>
           </p:spPr>
         </p:pic>
+      </p:grpSp>
+      <p:grpSp>
+        <p:nvGrpSpPr>
+          <p:cNvPr id="7" name="Группа 6">
+            <a:extLst>
+              <a:ext uri="{FF2B5EF4-FFF2-40B4-BE49-F238E27FC236}">
+                <a16:creationId xmlns:a16="http://schemas.microsoft.com/office/drawing/2014/main" id="{76190485-2E14-DC7D-33D1-05D10C9B251E}"/>
+              </a:ext>
+            </a:extLst>
+          </p:cNvPr>
+          <p:cNvGrpSpPr/>
+          <p:nvPr/>
+        </p:nvGrpSpPr>
+        <p:grpSpPr>
+          <a:xfrm>
+            <a:off x="861468" y="106931"/>
+            <a:ext cx="11206162" cy="786262"/>
+            <a:chOff x="883444" y="90039"/>
+            <a:chExt cx="11206162" cy="786262"/>
+          </a:xfrm>
+        </p:grpSpPr>
+        <p:sp>
+          <p:nvSpPr>
+            <p:cNvPr id="9" name="Прямоугольник: скругленные углы 8">
+              <a:extLst>
+                <a:ext uri="{FF2B5EF4-FFF2-40B4-BE49-F238E27FC236}">
+                  <a16:creationId xmlns:a16="http://schemas.microsoft.com/office/drawing/2014/main" id="{0BB7E734-9BE0-72B2-C7FD-FF9A5DFB0F9F}"/>
+                </a:ext>
+              </a:extLst>
+            </p:cNvPr>
+            <p:cNvSpPr/>
+            <p:nvPr/>
+          </p:nvSpPr>
+          <p:spPr>
+            <a:xfrm>
+              <a:off x="883444" y="90039"/>
+              <a:ext cx="11206162" cy="786262"/>
+            </a:xfrm>
+            <a:prstGeom prst="roundRect">
+              <a:avLst>
+                <a:gd name="adj" fmla="val 4689"/>
+              </a:avLst>
+            </a:prstGeom>
+            <a:solidFill>
+              <a:schemeClr val="bg1"/>
+            </a:solidFill>
+            <a:ln>
+              <a:solidFill>
+                <a:schemeClr val="bg1"/>
+              </a:solidFill>
+            </a:ln>
+          </p:spPr>
+          <p:style>
+            <a:lnRef idx="2">
+              <a:schemeClr val="accent1">
+                <a:shade val="15000"/>
+              </a:schemeClr>
+            </a:lnRef>
+            <a:fillRef idx="1">
+              <a:schemeClr val="accent1"/>
+            </a:fillRef>
+            <a:effectRef idx="0">
+              <a:schemeClr val="accent1"/>
+            </a:effectRef>
+            <a:fontRef idx="minor">
+              <a:schemeClr val="lt1"/>
+            </a:fontRef>
+          </p:style>
+          <p:txBody>
+            <a:bodyPr rtlCol="0" anchor="ctr"/>
+            <a:lstStyle/>
+            <a:p>
+              <a:pPr algn="ctr"/>
+              <a:endParaRPr lang="ru-RU"/>
+            </a:p>
+          </p:txBody>
+        </p:sp>
+        <p:sp>
+          <p:nvSpPr>
+            <p:cNvPr id="27" name="TextBox 26">
+              <a:extLst>
+                <a:ext uri="{FF2B5EF4-FFF2-40B4-BE49-F238E27FC236}">
+                  <a16:creationId xmlns:a16="http://schemas.microsoft.com/office/drawing/2014/main" id="{CEA770EB-B744-D9DD-280C-F7B02BCEDB8F}"/>
+                </a:ext>
+              </a:extLst>
+            </p:cNvPr>
+            <p:cNvSpPr txBox="1"/>
+            <p:nvPr/>
+          </p:nvSpPr>
+          <p:spPr>
+            <a:xfrm>
+              <a:off x="11143122" y="221560"/>
+              <a:ext cx="858378" cy="523220"/>
+            </a:xfrm>
+            <a:prstGeom prst="rect">
+              <a:avLst/>
+            </a:prstGeom>
+            <a:noFill/>
+          </p:spPr>
+          <p:txBody>
+            <a:bodyPr wrap="square">
+              <a:spAutoFit/>
+            </a:bodyPr>
+            <a:lstStyle/>
+            <a:p>
+              <a:r>
+                <a:rPr lang="ru-RU" sz="2800" dirty="0">
+                  <a:latin typeface="Comfortaa Medium" pitchFamily="2" charset="0"/>
+                </a:rPr>
+                <a:t>7/11</a:t>
+              </a:r>
+            </a:p>
+          </p:txBody>
+        </p:sp>
+      </p:grpSp>
+      <p:sp>
+        <p:nvSpPr>
+          <p:cNvPr id="28" name="Заголовок 1">
+            <a:extLst>
+              <a:ext uri="{FF2B5EF4-FFF2-40B4-BE49-F238E27FC236}">
+                <a16:creationId xmlns:a16="http://schemas.microsoft.com/office/drawing/2014/main" id="{3F94D7C6-18FA-60AE-2D55-C3CEC1743467}"/>
+              </a:ext>
+            </a:extLst>
+          </p:cNvPr>
+          <p:cNvSpPr>
+            <a:spLocks noGrp="1"/>
+          </p:cNvSpPr>
+          <p:nvPr>
+            <p:ph type="title"/>
+          </p:nvPr>
+        </p:nvSpPr>
+        <p:spPr>
+          <a:xfrm>
+            <a:off x="1076324" y="228389"/>
+            <a:ext cx="10066797" cy="509563"/>
+          </a:xfrm>
+        </p:spPr>
+        <p:txBody>
+          <a:bodyPr>
+            <a:noAutofit/>
+          </a:bodyPr>
+          <a:lstStyle/>
+          <a:p>
+            <a:r>
+              <a:rPr lang="ru-RU" sz="3200" dirty="0">
+                <a:latin typeface="Comfortaa Medium" pitchFamily="2" charset="0"/>
+              </a:rPr>
+              <a:t>Архитектура системы</a:t>
+            </a:r>
+          </a:p>
+        </p:txBody>
+      </p:sp>
+      <p:grpSp>
+        <p:nvGrpSpPr>
+          <p:cNvPr id="58" name="Группа 57">
+            <a:extLst>
+              <a:ext uri="{FF2B5EF4-FFF2-40B4-BE49-F238E27FC236}">
+                <a16:creationId xmlns:a16="http://schemas.microsoft.com/office/drawing/2014/main" id="{CAEADBD3-A672-DED4-B0F3-6D9C1F3A2B18}"/>
+              </a:ext>
+            </a:extLst>
+          </p:cNvPr>
+          <p:cNvGrpSpPr/>
+          <p:nvPr/>
+        </p:nvGrpSpPr>
+        <p:grpSpPr>
+          <a:xfrm>
+            <a:off x="2979084" y="2284582"/>
+            <a:ext cx="6970929" cy="3239077"/>
+            <a:chOff x="2601696" y="2305050"/>
+            <a:chExt cx="6970929" cy="3239077"/>
+          </a:xfrm>
+        </p:grpSpPr>
+        <p:sp>
+          <p:nvSpPr>
+            <p:cNvPr id="34" name="Прямоугольник: скругленные углы 33">
+              <a:extLst>
+                <a:ext uri="{FF2B5EF4-FFF2-40B4-BE49-F238E27FC236}">
+                  <a16:creationId xmlns:a16="http://schemas.microsoft.com/office/drawing/2014/main" id="{7BC65B17-085A-FD12-88AF-DE6936E11F0D}"/>
+                </a:ext>
+              </a:extLst>
+            </p:cNvPr>
+            <p:cNvSpPr/>
+            <p:nvPr/>
+          </p:nvSpPr>
+          <p:spPr>
+            <a:xfrm>
+              <a:off x="2601696" y="2305050"/>
+              <a:ext cx="6970929" cy="2066925"/>
+            </a:xfrm>
+            <a:prstGeom prst="roundRect">
+              <a:avLst>
+                <a:gd name="adj" fmla="val 4818"/>
+              </a:avLst>
+            </a:prstGeom>
+            <a:solidFill>
+              <a:schemeClr val="bg1"/>
+            </a:solidFill>
+          </p:spPr>
+          <p:style>
+            <a:lnRef idx="2">
+              <a:schemeClr val="accent1">
+                <a:shade val="15000"/>
+              </a:schemeClr>
+            </a:lnRef>
+            <a:fillRef idx="1">
+              <a:schemeClr val="accent1"/>
+            </a:fillRef>
+            <a:effectRef idx="0">
+              <a:schemeClr val="accent1"/>
+            </a:effectRef>
+            <a:fontRef idx="minor">
+              <a:schemeClr val="lt1"/>
+            </a:fontRef>
+          </p:style>
+          <p:txBody>
+            <a:bodyPr rtlCol="0" anchor="ctr"/>
+            <a:lstStyle/>
+            <a:p>
+              <a:pPr algn="ctr"/>
+              <a:r>
+                <a:rPr lang="ru-RU" dirty="0">
+                  <a:solidFill>
+                    <a:schemeClr val="tx1"/>
+                  </a:solidFill>
+                  <a:latin typeface="Comfortaa Medium" pitchFamily="2" charset="0"/>
+                </a:rPr>
+                <a:t>Сервер</a:t>
+              </a:r>
+            </a:p>
+            <a:p>
+              <a:pPr algn="ctr"/>
+              <a:endParaRPr lang="ru-RU" dirty="0">
+                <a:solidFill>
+                  <a:schemeClr val="tx1"/>
+                </a:solidFill>
+                <a:latin typeface="Comfortaa Medium" pitchFamily="2" charset="0"/>
+              </a:endParaRPr>
+            </a:p>
+            <a:p>
+              <a:pPr algn="ctr"/>
+              <a:endParaRPr lang="ru-RU" dirty="0">
+                <a:solidFill>
+                  <a:schemeClr val="tx1"/>
+                </a:solidFill>
+                <a:latin typeface="Comfortaa Medium" pitchFamily="2" charset="0"/>
+              </a:endParaRPr>
+            </a:p>
+            <a:p>
+              <a:pPr algn="ctr"/>
+              <a:endParaRPr lang="ru-RU" dirty="0">
+                <a:solidFill>
+                  <a:schemeClr val="tx1"/>
+                </a:solidFill>
+                <a:latin typeface="Comfortaa Medium" pitchFamily="2" charset="0"/>
+              </a:endParaRPr>
+            </a:p>
+            <a:p>
+              <a:pPr algn="ctr"/>
+              <a:endParaRPr lang="ru-RU" dirty="0">
+                <a:solidFill>
+                  <a:schemeClr val="tx1"/>
+                </a:solidFill>
+                <a:latin typeface="Comfortaa Medium" pitchFamily="2" charset="0"/>
+              </a:endParaRPr>
+            </a:p>
+          </p:txBody>
+        </p:sp>
+        <p:sp>
+          <p:nvSpPr>
+            <p:cNvPr id="35" name="Прямоугольник: скругленные углы 34">
+              <a:extLst>
+                <a:ext uri="{FF2B5EF4-FFF2-40B4-BE49-F238E27FC236}">
+                  <a16:creationId xmlns:a16="http://schemas.microsoft.com/office/drawing/2014/main" id="{1ECA7979-34F0-56C8-1C91-78FC075843F0}"/>
+                </a:ext>
+              </a:extLst>
+            </p:cNvPr>
+            <p:cNvSpPr/>
+            <p:nvPr/>
+          </p:nvSpPr>
+          <p:spPr>
+            <a:xfrm>
+              <a:off x="5123884" y="4747046"/>
+              <a:ext cx="1971676" cy="797081"/>
+            </a:xfrm>
+            <a:prstGeom prst="roundRect">
+              <a:avLst/>
+            </a:prstGeom>
+            <a:solidFill>
+              <a:schemeClr val="bg1"/>
+            </a:solidFill>
+          </p:spPr>
+          <p:style>
+            <a:lnRef idx="2">
+              <a:schemeClr val="accent1">
+                <a:shade val="15000"/>
+              </a:schemeClr>
+            </a:lnRef>
+            <a:fillRef idx="1">
+              <a:schemeClr val="accent1"/>
+            </a:fillRef>
+            <a:effectRef idx="0">
+              <a:schemeClr val="accent1"/>
+            </a:effectRef>
+            <a:fontRef idx="minor">
+              <a:schemeClr val="lt1"/>
+            </a:fontRef>
+          </p:style>
+          <p:txBody>
+            <a:bodyPr rtlCol="0" anchor="ctr"/>
+            <a:lstStyle/>
+            <a:p>
+              <a:pPr algn="ctr"/>
+              <a:r>
+                <a:rPr lang="ru-RU" dirty="0">
+                  <a:solidFill>
+                    <a:schemeClr val="tx1"/>
+                  </a:solidFill>
+                  <a:latin typeface="Comfortaa Medium" pitchFamily="2" charset="0"/>
+                </a:rPr>
+                <a:t>Браузер</a:t>
+              </a:r>
+            </a:p>
+          </p:txBody>
+        </p:sp>
+        <p:sp>
+          <p:nvSpPr>
+            <p:cNvPr id="33" name="Прямоугольник: скругленные углы 32">
+              <a:extLst>
+                <a:ext uri="{FF2B5EF4-FFF2-40B4-BE49-F238E27FC236}">
+                  <a16:creationId xmlns:a16="http://schemas.microsoft.com/office/drawing/2014/main" id="{3299F8B5-F131-F5A5-45A3-2257B1A206A4}"/>
+                </a:ext>
+              </a:extLst>
+            </p:cNvPr>
+            <p:cNvSpPr/>
+            <p:nvPr/>
+          </p:nvSpPr>
+          <p:spPr>
+            <a:xfrm>
+              <a:off x="5110162" y="3234977"/>
+              <a:ext cx="1971676" cy="797081"/>
+            </a:xfrm>
+            <a:prstGeom prst="roundRect">
+              <a:avLst/>
+            </a:prstGeom>
+            <a:solidFill>
+              <a:schemeClr val="bg1"/>
+            </a:solidFill>
+          </p:spPr>
+          <p:style>
+            <a:lnRef idx="2">
+              <a:schemeClr val="accent1">
+                <a:shade val="15000"/>
+              </a:schemeClr>
+            </a:lnRef>
+            <a:fillRef idx="1">
+              <a:schemeClr val="accent1"/>
+            </a:fillRef>
+            <a:effectRef idx="0">
+              <a:schemeClr val="accent1"/>
+            </a:effectRef>
+            <a:fontRef idx="minor">
+              <a:schemeClr val="lt1"/>
+            </a:fontRef>
+          </p:style>
+          <p:txBody>
+            <a:bodyPr rtlCol="0" anchor="ctr"/>
+            <a:lstStyle/>
+            <a:p>
+              <a:pPr algn="ctr"/>
+              <a:r>
+                <a:rPr lang="en-US" dirty="0">
+                  <a:solidFill>
+                    <a:schemeClr val="tx1"/>
+                  </a:solidFill>
+                  <a:latin typeface="Comfortaa Medium" pitchFamily="2" charset="0"/>
+                </a:rPr>
+                <a:t>API</a:t>
+              </a:r>
+              <a:endParaRPr lang="ru-RU" dirty="0">
+                <a:solidFill>
+                  <a:schemeClr val="tx1"/>
+                </a:solidFill>
+                <a:latin typeface="Comfortaa Medium" pitchFamily="2" charset="0"/>
+              </a:endParaRPr>
+            </a:p>
+          </p:txBody>
+        </p:sp>
+        <p:sp>
+          <p:nvSpPr>
+            <p:cNvPr id="38" name="Прямоугольник: скругленные углы 37">
+              <a:extLst>
+                <a:ext uri="{FF2B5EF4-FFF2-40B4-BE49-F238E27FC236}">
+                  <a16:creationId xmlns:a16="http://schemas.microsoft.com/office/drawing/2014/main" id="{59038C30-FE58-AD58-814D-B120C0D96249}"/>
+                </a:ext>
+              </a:extLst>
+            </p:cNvPr>
+            <p:cNvSpPr/>
+            <p:nvPr/>
+          </p:nvSpPr>
+          <p:spPr>
+            <a:xfrm>
+              <a:off x="2807948" y="3234977"/>
+              <a:ext cx="1971676" cy="797081"/>
+            </a:xfrm>
+            <a:prstGeom prst="roundRect">
+              <a:avLst>
+                <a:gd name="adj" fmla="val 13082"/>
+              </a:avLst>
+            </a:prstGeom>
+            <a:solidFill>
+              <a:schemeClr val="bg1"/>
+            </a:solidFill>
+          </p:spPr>
+          <p:style>
+            <a:lnRef idx="2">
+              <a:schemeClr val="accent1">
+                <a:shade val="15000"/>
+              </a:schemeClr>
+            </a:lnRef>
+            <a:fillRef idx="1">
+              <a:schemeClr val="accent1"/>
+            </a:fillRef>
+            <a:effectRef idx="0">
+              <a:schemeClr val="accent1"/>
+            </a:effectRef>
+            <a:fontRef idx="minor">
+              <a:schemeClr val="lt1"/>
+            </a:fontRef>
+          </p:style>
+          <p:txBody>
+            <a:bodyPr rtlCol="0" anchor="ctr"/>
+            <a:lstStyle/>
+            <a:p>
+              <a:pPr algn="ctr"/>
+              <a:r>
+                <a:rPr lang="ru-RU" dirty="0">
+                  <a:solidFill>
+                    <a:schemeClr val="tx1"/>
+                  </a:solidFill>
+                  <a:latin typeface="Comfortaa Medium" pitchFamily="2" charset="0"/>
+                </a:rPr>
+                <a:t>Базы данных</a:t>
+              </a:r>
+            </a:p>
+          </p:txBody>
+        </p:sp>
+        <p:sp>
+          <p:nvSpPr>
+            <p:cNvPr id="39" name="Прямоугольник: скругленные углы 38">
+              <a:extLst>
+                <a:ext uri="{FF2B5EF4-FFF2-40B4-BE49-F238E27FC236}">
+                  <a16:creationId xmlns:a16="http://schemas.microsoft.com/office/drawing/2014/main" id="{9341A8C8-B130-57BE-0385-BC9B3AA1B4AE}"/>
+                </a:ext>
+              </a:extLst>
+            </p:cNvPr>
+            <p:cNvSpPr/>
+            <p:nvPr/>
+          </p:nvSpPr>
+          <p:spPr>
+            <a:xfrm>
+              <a:off x="7412376" y="3234977"/>
+              <a:ext cx="1971676" cy="797081"/>
+            </a:xfrm>
+            <a:prstGeom prst="roundRect">
+              <a:avLst/>
+            </a:prstGeom>
+            <a:solidFill>
+              <a:schemeClr val="bg1"/>
+            </a:solidFill>
+          </p:spPr>
+          <p:style>
+            <a:lnRef idx="2">
+              <a:schemeClr val="accent1">
+                <a:shade val="15000"/>
+              </a:schemeClr>
+            </a:lnRef>
+            <a:fillRef idx="1">
+              <a:schemeClr val="accent1"/>
+            </a:fillRef>
+            <a:effectRef idx="0">
+              <a:schemeClr val="accent1"/>
+            </a:effectRef>
+            <a:fontRef idx="minor">
+              <a:schemeClr val="lt1"/>
+            </a:fontRef>
+          </p:style>
+          <p:txBody>
+            <a:bodyPr rtlCol="0" anchor="ctr"/>
+            <a:lstStyle/>
+            <a:p>
+              <a:pPr algn="ctr"/>
+              <a:r>
+                <a:rPr lang="ru-RU" dirty="0">
+                  <a:solidFill>
+                    <a:schemeClr val="tx1"/>
+                  </a:solidFill>
+                  <a:latin typeface="Comfortaa Medium" pitchFamily="2" charset="0"/>
+                </a:rPr>
+                <a:t>Веб-сервер</a:t>
+              </a:r>
+            </a:p>
+          </p:txBody>
+        </p:sp>
+        <p:cxnSp>
+          <p:nvCxnSpPr>
+            <p:cNvPr id="41" name="Прямая соединительная линия 40">
+              <a:extLst>
+                <a:ext uri="{FF2B5EF4-FFF2-40B4-BE49-F238E27FC236}">
+                  <a16:creationId xmlns:a16="http://schemas.microsoft.com/office/drawing/2014/main" id="{C16EAF6B-7F79-F899-253B-35414FF68C85}"/>
+                </a:ext>
+              </a:extLst>
+            </p:cNvPr>
+            <p:cNvCxnSpPr>
+              <a:cxnSpLocks/>
+              <a:stCxn id="38" idx="3"/>
+              <a:endCxn id="33" idx="1"/>
+            </p:cNvCxnSpPr>
+            <p:nvPr/>
+          </p:nvCxnSpPr>
+          <p:spPr>
+            <a:xfrm>
+              <a:off x="4779624" y="3633518"/>
+              <a:ext cx="330538" cy="0"/>
+            </a:xfrm>
+            <a:prstGeom prst="line">
+              <a:avLst/>
+            </a:prstGeom>
+          </p:spPr>
+          <p:style>
+            <a:lnRef idx="2">
+              <a:schemeClr val="dk1"/>
+            </a:lnRef>
+            <a:fillRef idx="0">
+              <a:schemeClr val="dk1"/>
+            </a:fillRef>
+            <a:effectRef idx="1">
+              <a:schemeClr val="dk1"/>
+            </a:effectRef>
+            <a:fontRef idx="minor">
+              <a:schemeClr val="tx1"/>
+            </a:fontRef>
+          </p:style>
+        </p:cxnSp>
+        <p:cxnSp>
+          <p:nvCxnSpPr>
+            <p:cNvPr id="47" name="Прямая соединительная линия 46">
+              <a:extLst>
+                <a:ext uri="{FF2B5EF4-FFF2-40B4-BE49-F238E27FC236}">
+                  <a16:creationId xmlns:a16="http://schemas.microsoft.com/office/drawing/2014/main" id="{DA9AD919-4632-E802-E6C6-15E2A1CB3E67}"/>
+                </a:ext>
+              </a:extLst>
+            </p:cNvPr>
+            <p:cNvCxnSpPr>
+              <a:cxnSpLocks/>
+              <a:stCxn id="33" idx="3"/>
+              <a:endCxn id="39" idx="1"/>
+            </p:cNvCxnSpPr>
+            <p:nvPr/>
+          </p:nvCxnSpPr>
+          <p:spPr>
+            <a:xfrm>
+              <a:off x="7081838" y="3633518"/>
+              <a:ext cx="330538" cy="0"/>
+            </a:xfrm>
+            <a:prstGeom prst="line">
+              <a:avLst/>
+            </a:prstGeom>
+          </p:spPr>
+          <p:style>
+            <a:lnRef idx="2">
+              <a:schemeClr val="dk1"/>
+            </a:lnRef>
+            <a:fillRef idx="0">
+              <a:schemeClr val="dk1"/>
+            </a:fillRef>
+            <a:effectRef idx="1">
+              <a:schemeClr val="dk1"/>
+            </a:effectRef>
+            <a:fontRef idx="minor">
+              <a:schemeClr val="tx1"/>
+            </a:fontRef>
+          </p:style>
+        </p:cxnSp>
+        <p:cxnSp>
+          <p:nvCxnSpPr>
+            <p:cNvPr id="51" name="Соединитель: уступ 50">
+              <a:extLst>
+                <a:ext uri="{FF2B5EF4-FFF2-40B4-BE49-F238E27FC236}">
+                  <a16:creationId xmlns:a16="http://schemas.microsoft.com/office/drawing/2014/main" id="{8A84A74E-39D4-5756-0CCD-E3CF8627D16C}"/>
+                </a:ext>
+              </a:extLst>
+            </p:cNvPr>
+            <p:cNvCxnSpPr>
+              <a:cxnSpLocks/>
+              <a:stCxn id="39" idx="2"/>
+              <a:endCxn id="35" idx="3"/>
+            </p:cNvCxnSpPr>
+            <p:nvPr/>
+          </p:nvCxnSpPr>
+          <p:spPr>
+            <a:xfrm rot="5400000">
+              <a:off x="7190123" y="3937495"/>
+              <a:ext cx="1113529" cy="1302654"/>
+            </a:xfrm>
+            <a:prstGeom prst="bentConnector2">
+              <a:avLst/>
+            </a:prstGeom>
+          </p:spPr>
+          <p:style>
+            <a:lnRef idx="2">
+              <a:schemeClr val="dk1"/>
+            </a:lnRef>
+            <a:fillRef idx="0">
+              <a:schemeClr val="dk1"/>
+            </a:fillRef>
+            <a:effectRef idx="1">
+              <a:schemeClr val="dk1"/>
+            </a:effectRef>
+            <a:fontRef idx="minor">
+              <a:schemeClr val="tx1"/>
+            </a:fontRef>
+          </p:style>
+        </p:cxnSp>
       </p:grpSp>
     </p:spTree>
     <p:extLst>
@@ -11366,6 +14267,14 @@
 <file path=ppt/slides/slide8.xml><?xml version="1.0" encoding="utf-8"?>
 <p:sld xmlns:a="http://schemas.openxmlformats.org/drawingml/2006/main" xmlns:r="http://schemas.openxmlformats.org/officeDocument/2006/relationships" xmlns:p="http://schemas.openxmlformats.org/presentationml/2006/main">
   <p:cSld>
+    <p:bg>
+      <p:bgPr>
+        <a:solidFill>
+          <a:srgbClr val="F4F7FB"/>
+        </a:solidFill>
+        <a:effectLst/>
+      </p:bgPr>
+    </p:bg>
     <p:spTree>
       <p:nvGrpSpPr>
         <p:cNvPr id="1" name="">
@@ -11386,94 +14295,6 @@
           <a:chExt cx="0" cy="0"/>
         </a:xfrm>
       </p:grpSpPr>
-      <p:sp>
-        <p:nvSpPr>
-          <p:cNvPr id="2" name="Заголовок 1">
-            <a:extLst>
-              <a:ext uri="{FF2B5EF4-FFF2-40B4-BE49-F238E27FC236}">
-                <a16:creationId xmlns:a16="http://schemas.microsoft.com/office/drawing/2014/main" id="{DD54B649-6C97-33EA-A607-16FAA5E452A6}"/>
-              </a:ext>
-            </a:extLst>
-          </p:cNvPr>
-          <p:cNvSpPr>
-            <a:spLocks noGrp="1"/>
-          </p:cNvSpPr>
-          <p:nvPr>
-            <p:ph type="title"/>
-          </p:nvPr>
-        </p:nvSpPr>
-        <p:spPr/>
-        <p:txBody>
-          <a:bodyPr/>
-          <a:lstStyle/>
-          <a:p>
-            <a:r>
-              <a:rPr lang="ru-RU" dirty="0"/>
-              <a:t>Демо</a:t>
-            </a:r>
-          </a:p>
-        </p:txBody>
-      </p:sp>
-      <p:sp>
-        <p:nvSpPr>
-          <p:cNvPr id="3" name="Объект 2">
-            <a:extLst>
-              <a:ext uri="{FF2B5EF4-FFF2-40B4-BE49-F238E27FC236}">
-                <a16:creationId xmlns:a16="http://schemas.microsoft.com/office/drawing/2014/main" id="{D8A6B30B-9647-3A60-0D6C-D3415324E1D7}"/>
-              </a:ext>
-            </a:extLst>
-          </p:cNvPr>
-          <p:cNvSpPr>
-            <a:spLocks noGrp="1"/>
-          </p:cNvSpPr>
-          <p:nvPr>
-            <p:ph idx="1"/>
-          </p:nvPr>
-        </p:nvSpPr>
-        <p:spPr/>
-        <p:txBody>
-          <a:bodyPr/>
-          <a:lstStyle/>
-          <a:p>
-            <a:endParaRPr lang="ru-RU" dirty="0"/>
-          </a:p>
-        </p:txBody>
-      </p:sp>
-      <p:sp>
-        <p:nvSpPr>
-          <p:cNvPr id="5" name="TextBox 4">
-            <a:extLst>
-              <a:ext uri="{FF2B5EF4-FFF2-40B4-BE49-F238E27FC236}">
-                <a16:creationId xmlns:a16="http://schemas.microsoft.com/office/drawing/2014/main" id="{A3C475FD-808F-5D08-3196-49C28109FE7A}"/>
-              </a:ext>
-            </a:extLst>
-          </p:cNvPr>
-          <p:cNvSpPr txBox="1"/>
-          <p:nvPr/>
-        </p:nvSpPr>
-        <p:spPr>
-          <a:xfrm>
-            <a:off x="11245516" y="103515"/>
-            <a:ext cx="946484" cy="523220"/>
-          </a:xfrm>
-          <a:prstGeom prst="rect">
-            <a:avLst/>
-          </a:prstGeom>
-          <a:noFill/>
-        </p:spPr>
-        <p:txBody>
-          <a:bodyPr wrap="square">
-            <a:spAutoFit/>
-          </a:bodyPr>
-          <a:lstStyle/>
-          <a:p>
-            <a:r>
-              <a:rPr lang="ru-RU" sz="2800" dirty="0"/>
-              <a:t>8/11</a:t>
-            </a:r>
-          </a:p>
-        </p:txBody>
-      </p:sp>
       <p:sp>
         <p:nvSpPr>
           <p:cNvPr id="7" name="Прямоугольник 6">
@@ -12103,6 +14924,270 @@
           </p:spPr>
         </p:pic>
       </p:grpSp>
+      <p:grpSp>
+        <p:nvGrpSpPr>
+          <p:cNvPr id="24" name="Группа 23">
+            <a:extLst>
+              <a:ext uri="{FF2B5EF4-FFF2-40B4-BE49-F238E27FC236}">
+                <a16:creationId xmlns:a16="http://schemas.microsoft.com/office/drawing/2014/main" id="{D5373B3F-4DA4-A051-A386-C642F6AFFD0E}"/>
+              </a:ext>
+            </a:extLst>
+          </p:cNvPr>
+          <p:cNvGrpSpPr/>
+          <p:nvPr/>
+        </p:nvGrpSpPr>
+        <p:grpSpPr>
+          <a:xfrm>
+            <a:off x="861468" y="106931"/>
+            <a:ext cx="11206162" cy="786262"/>
+            <a:chOff x="883444" y="90039"/>
+            <a:chExt cx="11206162" cy="786262"/>
+          </a:xfrm>
+        </p:grpSpPr>
+        <p:sp>
+          <p:nvSpPr>
+            <p:cNvPr id="25" name="Прямоугольник: скругленные углы 24">
+              <a:extLst>
+                <a:ext uri="{FF2B5EF4-FFF2-40B4-BE49-F238E27FC236}">
+                  <a16:creationId xmlns:a16="http://schemas.microsoft.com/office/drawing/2014/main" id="{0C1E17B7-AEB8-AB25-57AB-D6771520C83C}"/>
+                </a:ext>
+              </a:extLst>
+            </p:cNvPr>
+            <p:cNvSpPr/>
+            <p:nvPr/>
+          </p:nvSpPr>
+          <p:spPr>
+            <a:xfrm>
+              <a:off x="883444" y="90039"/>
+              <a:ext cx="11206162" cy="786262"/>
+            </a:xfrm>
+            <a:prstGeom prst="roundRect">
+              <a:avLst>
+                <a:gd name="adj" fmla="val 4689"/>
+              </a:avLst>
+            </a:prstGeom>
+            <a:solidFill>
+              <a:schemeClr val="bg1"/>
+            </a:solidFill>
+            <a:ln>
+              <a:solidFill>
+                <a:schemeClr val="bg1"/>
+              </a:solidFill>
+            </a:ln>
+          </p:spPr>
+          <p:style>
+            <a:lnRef idx="2">
+              <a:schemeClr val="accent1">
+                <a:shade val="15000"/>
+              </a:schemeClr>
+            </a:lnRef>
+            <a:fillRef idx="1">
+              <a:schemeClr val="accent1"/>
+            </a:fillRef>
+            <a:effectRef idx="0">
+              <a:schemeClr val="accent1"/>
+            </a:effectRef>
+            <a:fontRef idx="minor">
+              <a:schemeClr val="lt1"/>
+            </a:fontRef>
+          </p:style>
+          <p:txBody>
+            <a:bodyPr rtlCol="0" anchor="ctr"/>
+            <a:lstStyle/>
+            <a:p>
+              <a:pPr algn="ctr"/>
+              <a:endParaRPr lang="ru-RU"/>
+            </a:p>
+          </p:txBody>
+        </p:sp>
+        <p:sp>
+          <p:nvSpPr>
+            <p:cNvPr id="26" name="TextBox 25">
+              <a:extLst>
+                <a:ext uri="{FF2B5EF4-FFF2-40B4-BE49-F238E27FC236}">
+                  <a16:creationId xmlns:a16="http://schemas.microsoft.com/office/drawing/2014/main" id="{E7054059-6722-6AE6-ACD5-8133C0F60B6F}"/>
+                </a:ext>
+              </a:extLst>
+            </p:cNvPr>
+            <p:cNvSpPr txBox="1"/>
+            <p:nvPr/>
+          </p:nvSpPr>
+          <p:spPr>
+            <a:xfrm>
+              <a:off x="11143122" y="221560"/>
+              <a:ext cx="858378" cy="523220"/>
+            </a:xfrm>
+            <a:prstGeom prst="rect">
+              <a:avLst/>
+            </a:prstGeom>
+            <a:noFill/>
+          </p:spPr>
+          <p:txBody>
+            <a:bodyPr wrap="square">
+              <a:spAutoFit/>
+            </a:bodyPr>
+            <a:lstStyle/>
+            <a:p>
+              <a:r>
+                <a:rPr lang="ru-RU" sz="2800" dirty="0">
+                  <a:latin typeface="Comfortaa Medium" pitchFamily="2" charset="0"/>
+                </a:rPr>
+                <a:t>8/11</a:t>
+              </a:r>
+            </a:p>
+          </p:txBody>
+        </p:sp>
+      </p:grpSp>
+      <p:sp>
+        <p:nvSpPr>
+          <p:cNvPr id="27" name="Заголовок 1">
+            <a:extLst>
+              <a:ext uri="{FF2B5EF4-FFF2-40B4-BE49-F238E27FC236}">
+                <a16:creationId xmlns:a16="http://schemas.microsoft.com/office/drawing/2014/main" id="{1518F75B-76A1-D4A7-DE6F-D4C845256B13}"/>
+              </a:ext>
+            </a:extLst>
+          </p:cNvPr>
+          <p:cNvSpPr>
+            <a:spLocks noGrp="1"/>
+          </p:cNvSpPr>
+          <p:nvPr>
+            <p:ph type="title"/>
+          </p:nvPr>
+        </p:nvSpPr>
+        <p:spPr>
+          <a:xfrm>
+            <a:off x="1076324" y="228389"/>
+            <a:ext cx="10066797" cy="509563"/>
+          </a:xfrm>
+        </p:spPr>
+        <p:txBody>
+          <a:bodyPr>
+            <a:noAutofit/>
+          </a:bodyPr>
+          <a:lstStyle/>
+          <a:p>
+            <a:r>
+              <a:rPr lang="ru-RU" sz="3200" dirty="0">
+                <a:latin typeface="Comfortaa Medium" pitchFamily="2" charset="0"/>
+              </a:rPr>
+              <a:t>Демо</a:t>
+            </a:r>
+          </a:p>
+        </p:txBody>
+      </p:sp>
+      <p:grpSp>
+        <p:nvGrpSpPr>
+          <p:cNvPr id="31" name="Группа 30">
+            <a:extLst>
+              <a:ext uri="{FF2B5EF4-FFF2-40B4-BE49-F238E27FC236}">
+                <a16:creationId xmlns:a16="http://schemas.microsoft.com/office/drawing/2014/main" id="{E3381768-51E7-7B35-A383-B73D1ABCAF39}"/>
+              </a:ext>
+            </a:extLst>
+          </p:cNvPr>
+          <p:cNvGrpSpPr/>
+          <p:nvPr/>
+        </p:nvGrpSpPr>
+        <p:grpSpPr>
+          <a:xfrm>
+            <a:off x="3911192" y="1295283"/>
+            <a:ext cx="5106713" cy="4476355"/>
+            <a:chOff x="3911192" y="1295283"/>
+            <a:chExt cx="5106713" cy="4476355"/>
+          </a:xfrm>
+        </p:grpSpPr>
+        <p:sp>
+          <p:nvSpPr>
+            <p:cNvPr id="30" name="Прямоугольник: скругленные углы 29">
+              <a:extLst>
+                <a:ext uri="{FF2B5EF4-FFF2-40B4-BE49-F238E27FC236}">
+                  <a16:creationId xmlns:a16="http://schemas.microsoft.com/office/drawing/2014/main" id="{9A3A87A8-2E61-9251-E046-9935808F3761}"/>
+                </a:ext>
+              </a:extLst>
+            </p:cNvPr>
+            <p:cNvSpPr/>
+            <p:nvPr/>
+          </p:nvSpPr>
+          <p:spPr>
+            <a:xfrm>
+              <a:off x="3911192" y="1295283"/>
+              <a:ext cx="5106713" cy="4476355"/>
+            </a:xfrm>
+            <a:prstGeom prst="roundRect">
+              <a:avLst>
+                <a:gd name="adj" fmla="val 2492"/>
+              </a:avLst>
+            </a:prstGeom>
+            <a:solidFill>
+              <a:schemeClr val="bg1"/>
+            </a:solidFill>
+            <a:ln>
+              <a:solidFill>
+                <a:schemeClr val="bg1"/>
+              </a:solidFill>
+            </a:ln>
+          </p:spPr>
+          <p:style>
+            <a:lnRef idx="2">
+              <a:schemeClr val="accent1">
+                <a:shade val="15000"/>
+              </a:schemeClr>
+            </a:lnRef>
+            <a:fillRef idx="1">
+              <a:schemeClr val="accent1"/>
+            </a:fillRef>
+            <a:effectRef idx="0">
+              <a:schemeClr val="accent1"/>
+            </a:effectRef>
+            <a:fontRef idx="minor">
+              <a:schemeClr val="lt1"/>
+            </a:fontRef>
+          </p:style>
+          <p:txBody>
+            <a:bodyPr rtlCol="0" anchor="ctr"/>
+            <a:lstStyle/>
+            <a:p>
+              <a:pPr algn="ctr"/>
+              <a:endParaRPr lang="ru-RU"/>
+            </a:p>
+          </p:txBody>
+        </p:sp>
+        <p:pic>
+          <p:nvPicPr>
+            <p:cNvPr id="29" name="Рисунок 28" descr="Изображение выглядит как снимок экрана, круг, прямоугольный, дизайн&#10;&#10;Содержимое, созданное искусственным интеллектом, может быть неверным.">
+              <a:extLst>
+                <a:ext uri="{FF2B5EF4-FFF2-40B4-BE49-F238E27FC236}">
+                  <a16:creationId xmlns:a16="http://schemas.microsoft.com/office/drawing/2014/main" id="{24FE6EDF-F969-2627-058F-4283F7A125A3}"/>
+                </a:ext>
+              </a:extLst>
+            </p:cNvPr>
+            <p:cNvPicPr>
+              <a:picLocks noChangeAspect="1"/>
+            </p:cNvPicPr>
+            <p:nvPr/>
+          </p:nvPicPr>
+          <p:blipFill>
+            <a:blip r:embed="rId12">
+              <a:extLst>
+                <a:ext uri="{28A0092B-C50C-407E-A947-70E740481C1C}">
+                  <a14:useLocalDpi xmlns:a14="http://schemas.microsoft.com/office/drawing/2010/main" val="0"/>
+                </a:ext>
+              </a:extLst>
+            </a:blip>
+            <a:stretch>
+              <a:fillRect/>
+            </a:stretch>
+          </p:blipFill>
+          <p:spPr>
+            <a:xfrm>
+              <a:off x="5057691" y="1738128"/>
+              <a:ext cx="2813716" cy="3381743"/>
+            </a:xfrm>
+            <a:prstGeom prst="rect">
+              <a:avLst/>
+            </a:prstGeom>
+          </p:spPr>
+        </p:pic>
+      </p:grpSp>
     </p:spTree>
     <p:extLst>
       <p:ext uri="{BB962C8B-B14F-4D97-AF65-F5344CB8AC3E}">
@@ -12131,6 +15216,14 @@
 <file path=ppt/slides/slide9.xml><?xml version="1.0" encoding="utf-8"?>
 <p:sld xmlns:a="http://schemas.openxmlformats.org/drawingml/2006/main" xmlns:r="http://schemas.openxmlformats.org/officeDocument/2006/relationships" xmlns:p="http://schemas.openxmlformats.org/presentationml/2006/main">
   <p:cSld>
+    <p:bg>
+      <p:bgPr>
+        <a:solidFill>
+          <a:srgbClr val="F4F7FB"/>
+        </a:solidFill>
+        <a:effectLst/>
+      </p:bgPr>
+    </p:bg>
     <p:spTree>
       <p:nvGrpSpPr>
         <p:cNvPr id="1" name=""/>
@@ -12145,109 +15238,6 @@
           <a:chExt cx="0" cy="0"/>
         </a:xfrm>
       </p:grpSpPr>
-      <p:sp>
-        <p:nvSpPr>
-          <p:cNvPr id="2" name="Заголовок 1">
-            <a:extLst>
-              <a:ext uri="{FF2B5EF4-FFF2-40B4-BE49-F238E27FC236}">
-                <a16:creationId xmlns:a16="http://schemas.microsoft.com/office/drawing/2014/main" id="{296DF8A9-2582-2571-1E4A-747DFD7296AB}"/>
-              </a:ext>
-            </a:extLst>
-          </p:cNvPr>
-          <p:cNvSpPr>
-            <a:spLocks noGrp="1"/>
-          </p:cNvSpPr>
-          <p:nvPr>
-            <p:ph type="title"/>
-          </p:nvPr>
-        </p:nvSpPr>
-        <p:spPr/>
-        <p:txBody>
-          <a:bodyPr/>
-          <a:lstStyle/>
-          <a:p>
-            <a:r>
-              <a:rPr lang="ru-RU" dirty="0"/>
-              <a:t>Преимущества разработанного ПО / Особенности разработки </a:t>
-            </a:r>
-          </a:p>
-        </p:txBody>
-      </p:sp>
-      <p:sp>
-        <p:nvSpPr>
-          <p:cNvPr id="3" name="Объект 2">
-            <a:extLst>
-              <a:ext uri="{FF2B5EF4-FFF2-40B4-BE49-F238E27FC236}">
-                <a16:creationId xmlns:a16="http://schemas.microsoft.com/office/drawing/2014/main" id="{D2696195-5C1A-8B74-9088-BAEB4276F6B9}"/>
-              </a:ext>
-            </a:extLst>
-          </p:cNvPr>
-          <p:cNvSpPr>
-            <a:spLocks noGrp="1"/>
-          </p:cNvSpPr>
-          <p:nvPr>
-            <p:ph idx="1"/>
-          </p:nvPr>
-        </p:nvSpPr>
-        <p:spPr/>
-        <p:txBody>
-          <a:bodyPr/>
-          <a:lstStyle/>
-          <a:p>
-            <a:pPr marL="0" indent="0">
-              <a:buNone/>
-            </a:pPr>
-            <a:r>
-              <a:rPr lang="ru-RU" b="1" dirty="0"/>
-              <a:t>Какие преимущества от использования разработанной системы? </a:t>
-            </a:r>
-          </a:p>
-          <a:p>
-            <a:pPr marL="0" indent="0">
-              <a:buNone/>
-            </a:pPr>
-            <a:r>
-              <a:rPr lang="ru-RU" b="1" dirty="0"/>
-              <a:t>Какие технологии были освоены самостоятельно в ходе разработки?</a:t>
-            </a:r>
-          </a:p>
-        </p:txBody>
-      </p:sp>
-      <p:sp>
-        <p:nvSpPr>
-          <p:cNvPr id="4" name="TextBox 3">
-            <a:extLst>
-              <a:ext uri="{FF2B5EF4-FFF2-40B4-BE49-F238E27FC236}">
-                <a16:creationId xmlns:a16="http://schemas.microsoft.com/office/drawing/2014/main" id="{E5C1BA21-98DA-18B9-F478-F3C07132236D}"/>
-              </a:ext>
-            </a:extLst>
-          </p:cNvPr>
-          <p:cNvSpPr txBox="1"/>
-          <p:nvPr/>
-        </p:nvSpPr>
-        <p:spPr>
-          <a:xfrm>
-            <a:off x="11245516" y="103515"/>
-            <a:ext cx="946484" cy="523220"/>
-          </a:xfrm>
-          <a:prstGeom prst="rect">
-            <a:avLst/>
-          </a:prstGeom>
-          <a:noFill/>
-        </p:spPr>
-        <p:txBody>
-          <a:bodyPr wrap="square">
-            <a:spAutoFit/>
-          </a:bodyPr>
-          <a:lstStyle/>
-          <a:p>
-            <a:r>
-              <a:rPr lang="ru-RU" sz="2800" dirty="0"/>
-              <a:t>9/11</a:t>
-            </a:r>
-          </a:p>
-        </p:txBody>
-      </p:sp>
       <p:sp>
         <p:nvSpPr>
           <p:cNvPr id="6" name="Прямоугольник 5">
@@ -12874,6 +15864,889 @@
             <a:prstGeom prst="rect">
               <a:avLst/>
             </a:prstGeom>
+          </p:spPr>
+        </p:pic>
+      </p:grpSp>
+      <p:grpSp>
+        <p:nvGrpSpPr>
+          <p:cNvPr id="24" name="Группа 23">
+            <a:extLst>
+              <a:ext uri="{FF2B5EF4-FFF2-40B4-BE49-F238E27FC236}">
+                <a16:creationId xmlns:a16="http://schemas.microsoft.com/office/drawing/2014/main" id="{ACDEFC85-D958-F805-43B0-03F4006179F7}"/>
+              </a:ext>
+            </a:extLst>
+          </p:cNvPr>
+          <p:cNvGrpSpPr/>
+          <p:nvPr/>
+        </p:nvGrpSpPr>
+        <p:grpSpPr>
+          <a:xfrm>
+            <a:off x="861468" y="106931"/>
+            <a:ext cx="11206162" cy="786262"/>
+            <a:chOff x="883444" y="90039"/>
+            <a:chExt cx="11206162" cy="786262"/>
+          </a:xfrm>
+        </p:grpSpPr>
+        <p:sp>
+          <p:nvSpPr>
+            <p:cNvPr id="25" name="Прямоугольник: скругленные углы 24">
+              <a:extLst>
+                <a:ext uri="{FF2B5EF4-FFF2-40B4-BE49-F238E27FC236}">
+                  <a16:creationId xmlns:a16="http://schemas.microsoft.com/office/drawing/2014/main" id="{204D1476-FB00-4238-ECD1-7089C8F7F9AC}"/>
+                </a:ext>
+              </a:extLst>
+            </p:cNvPr>
+            <p:cNvSpPr/>
+            <p:nvPr/>
+          </p:nvSpPr>
+          <p:spPr>
+            <a:xfrm>
+              <a:off x="883444" y="90039"/>
+              <a:ext cx="11206162" cy="786262"/>
+            </a:xfrm>
+            <a:prstGeom prst="roundRect">
+              <a:avLst>
+                <a:gd name="adj" fmla="val 4689"/>
+              </a:avLst>
+            </a:prstGeom>
+            <a:solidFill>
+              <a:schemeClr val="bg1"/>
+            </a:solidFill>
+            <a:ln>
+              <a:solidFill>
+                <a:schemeClr val="bg1"/>
+              </a:solidFill>
+            </a:ln>
+          </p:spPr>
+          <p:style>
+            <a:lnRef idx="2">
+              <a:schemeClr val="accent1">
+                <a:shade val="15000"/>
+              </a:schemeClr>
+            </a:lnRef>
+            <a:fillRef idx="1">
+              <a:schemeClr val="accent1"/>
+            </a:fillRef>
+            <a:effectRef idx="0">
+              <a:schemeClr val="accent1"/>
+            </a:effectRef>
+            <a:fontRef idx="minor">
+              <a:schemeClr val="lt1"/>
+            </a:fontRef>
+          </p:style>
+          <p:txBody>
+            <a:bodyPr rtlCol="0" anchor="ctr"/>
+            <a:lstStyle/>
+            <a:p>
+              <a:pPr algn="ctr"/>
+              <a:endParaRPr lang="ru-RU"/>
+            </a:p>
+          </p:txBody>
+        </p:sp>
+        <p:sp>
+          <p:nvSpPr>
+            <p:cNvPr id="26" name="TextBox 25">
+              <a:extLst>
+                <a:ext uri="{FF2B5EF4-FFF2-40B4-BE49-F238E27FC236}">
+                  <a16:creationId xmlns:a16="http://schemas.microsoft.com/office/drawing/2014/main" id="{84079B6E-3210-FF5D-86AD-7651C07B9BEC}"/>
+                </a:ext>
+              </a:extLst>
+            </p:cNvPr>
+            <p:cNvSpPr txBox="1"/>
+            <p:nvPr/>
+          </p:nvSpPr>
+          <p:spPr>
+            <a:xfrm>
+              <a:off x="11143122" y="221560"/>
+              <a:ext cx="858378" cy="523220"/>
+            </a:xfrm>
+            <a:prstGeom prst="rect">
+              <a:avLst/>
+            </a:prstGeom>
+            <a:noFill/>
+          </p:spPr>
+          <p:txBody>
+            <a:bodyPr wrap="square">
+              <a:spAutoFit/>
+            </a:bodyPr>
+            <a:lstStyle/>
+            <a:p>
+              <a:r>
+                <a:rPr lang="ru-RU" sz="2800" dirty="0">
+                  <a:latin typeface="Comfortaa Medium" pitchFamily="2" charset="0"/>
+                </a:rPr>
+                <a:t>9/11</a:t>
+              </a:r>
+            </a:p>
+          </p:txBody>
+        </p:sp>
+      </p:grpSp>
+      <p:sp>
+        <p:nvSpPr>
+          <p:cNvPr id="27" name="Заголовок 1">
+            <a:extLst>
+              <a:ext uri="{FF2B5EF4-FFF2-40B4-BE49-F238E27FC236}">
+                <a16:creationId xmlns:a16="http://schemas.microsoft.com/office/drawing/2014/main" id="{E45D4625-DDE0-06B6-6F55-AE45317309C4}"/>
+              </a:ext>
+            </a:extLst>
+          </p:cNvPr>
+          <p:cNvSpPr>
+            <a:spLocks noGrp="1"/>
+          </p:cNvSpPr>
+          <p:nvPr>
+            <p:ph type="title"/>
+          </p:nvPr>
+        </p:nvSpPr>
+        <p:spPr>
+          <a:xfrm>
+            <a:off x="1076324" y="228389"/>
+            <a:ext cx="10066797" cy="509563"/>
+          </a:xfrm>
+        </p:spPr>
+        <p:txBody>
+          <a:bodyPr>
+            <a:noAutofit/>
+          </a:bodyPr>
+          <a:lstStyle/>
+          <a:p>
+            <a:r>
+              <a:rPr lang="ru-RU" sz="3200" dirty="0">
+                <a:latin typeface="Comfortaa Medium" pitchFamily="2" charset="0"/>
+              </a:rPr>
+              <a:t>Преимущества проекта</a:t>
+            </a:r>
+          </a:p>
+        </p:txBody>
+      </p:sp>
+      <p:grpSp>
+        <p:nvGrpSpPr>
+          <p:cNvPr id="54" name="Группа 53">
+            <a:extLst>
+              <a:ext uri="{FF2B5EF4-FFF2-40B4-BE49-F238E27FC236}">
+                <a16:creationId xmlns:a16="http://schemas.microsoft.com/office/drawing/2014/main" id="{454F39D7-2DAE-C311-7C9F-E4ACD60B17F6}"/>
+              </a:ext>
+            </a:extLst>
+          </p:cNvPr>
+          <p:cNvGrpSpPr/>
+          <p:nvPr/>
+        </p:nvGrpSpPr>
+        <p:grpSpPr>
+          <a:xfrm>
+            <a:off x="952500" y="1723424"/>
+            <a:ext cx="2518287" cy="3732357"/>
+            <a:chOff x="952500" y="1723424"/>
+            <a:chExt cx="2518287" cy="3732357"/>
+          </a:xfrm>
+        </p:grpSpPr>
+        <p:grpSp>
+          <p:nvGrpSpPr>
+            <p:cNvPr id="35" name="Группа 34">
+              <a:extLst>
+                <a:ext uri="{FF2B5EF4-FFF2-40B4-BE49-F238E27FC236}">
+                  <a16:creationId xmlns:a16="http://schemas.microsoft.com/office/drawing/2014/main" id="{E3169C10-CA12-291D-CBD4-2F177882C89D}"/>
+                </a:ext>
+              </a:extLst>
+            </p:cNvPr>
+            <p:cNvGrpSpPr/>
+            <p:nvPr/>
+          </p:nvGrpSpPr>
+          <p:grpSpPr>
+            <a:xfrm>
+              <a:off x="952500" y="1723424"/>
+              <a:ext cx="2518287" cy="3732357"/>
+              <a:chOff x="1041394" y="1667282"/>
+              <a:chExt cx="3156980" cy="3732357"/>
+            </a:xfrm>
+          </p:grpSpPr>
+          <p:sp>
+            <p:nvSpPr>
+              <p:cNvPr id="36" name="Прямоугольник: скругленные углы 35">
+                <a:extLst>
+                  <a:ext uri="{FF2B5EF4-FFF2-40B4-BE49-F238E27FC236}">
+                    <a16:creationId xmlns:a16="http://schemas.microsoft.com/office/drawing/2014/main" id="{B6F1861F-5083-0700-2D25-599413660F3C}"/>
+                  </a:ext>
+                </a:extLst>
+              </p:cNvPr>
+              <p:cNvSpPr/>
+              <p:nvPr/>
+            </p:nvSpPr>
+            <p:spPr>
+              <a:xfrm>
+                <a:off x="1041394" y="1667282"/>
+                <a:ext cx="3156980" cy="3732357"/>
+              </a:xfrm>
+              <a:prstGeom prst="roundRect">
+                <a:avLst>
+                  <a:gd name="adj" fmla="val 4689"/>
+                </a:avLst>
+              </a:prstGeom>
+              <a:solidFill>
+                <a:schemeClr val="bg1"/>
+              </a:solidFill>
+              <a:ln>
+                <a:solidFill>
+                  <a:schemeClr val="bg1"/>
+                </a:solidFill>
+              </a:ln>
+            </p:spPr>
+            <p:style>
+              <a:lnRef idx="2">
+                <a:schemeClr val="accent1">
+                  <a:shade val="15000"/>
+                </a:schemeClr>
+              </a:lnRef>
+              <a:fillRef idx="1">
+                <a:schemeClr val="accent1"/>
+              </a:fillRef>
+              <a:effectRef idx="0">
+                <a:schemeClr val="accent1"/>
+              </a:effectRef>
+              <a:fontRef idx="minor">
+                <a:schemeClr val="lt1"/>
+              </a:fontRef>
+            </p:style>
+            <p:txBody>
+              <a:bodyPr rtlCol="0" anchor="ctr"/>
+              <a:lstStyle/>
+              <a:p>
+                <a:pPr algn="ctr"/>
+                <a:endParaRPr lang="ru-RU"/>
+              </a:p>
+            </p:txBody>
+          </p:sp>
+          <p:sp>
+            <p:nvSpPr>
+              <p:cNvPr id="37" name="TextBox 36">
+                <a:extLst>
+                  <a:ext uri="{FF2B5EF4-FFF2-40B4-BE49-F238E27FC236}">
+                    <a16:creationId xmlns:a16="http://schemas.microsoft.com/office/drawing/2014/main" id="{4AE0352C-BA42-4CC9-10B1-08DA098C4611}"/>
+                  </a:ext>
+                </a:extLst>
+              </p:cNvPr>
+              <p:cNvSpPr txBox="1"/>
+              <p:nvPr/>
+            </p:nvSpPr>
+            <p:spPr>
+              <a:xfrm>
+                <a:off x="1041394" y="4412577"/>
+                <a:ext cx="3156980" cy="369332"/>
+              </a:xfrm>
+              <a:prstGeom prst="rect">
+                <a:avLst/>
+              </a:prstGeom>
+              <a:noFill/>
+            </p:spPr>
+            <p:txBody>
+              <a:bodyPr wrap="square">
+                <a:spAutoFit/>
+              </a:bodyPr>
+              <a:lstStyle/>
+              <a:p>
+                <a:pPr algn="ctr"/>
+                <a:r>
+                  <a:rPr lang="ru-RU" dirty="0">
+                    <a:latin typeface="Comfortaa Medium" pitchFamily="2" charset="0"/>
+                  </a:rPr>
+                  <a:t>Скорость</a:t>
+                </a:r>
+              </a:p>
+            </p:txBody>
+          </p:sp>
+        </p:grpSp>
+        <p:pic>
+          <p:nvPicPr>
+            <p:cNvPr id="43" name="Picture 4" descr="Максимальная скорость – Бесплатные иконки:">
+              <a:extLst>
+                <a:ext uri="{FF2B5EF4-FFF2-40B4-BE49-F238E27FC236}">
+                  <a16:creationId xmlns:a16="http://schemas.microsoft.com/office/drawing/2014/main" id="{B90749CF-5A1E-B9BC-B6EB-1320F2FA9498}"/>
+                </a:ext>
+              </a:extLst>
+            </p:cNvPr>
+            <p:cNvPicPr>
+              <a:picLocks noChangeAspect="1" noChangeArrowheads="1"/>
+            </p:cNvPicPr>
+            <p:nvPr/>
+          </p:nvPicPr>
+          <p:blipFill>
+            <a:blip r:embed="rId12">
+              <a:extLst>
+                <a:ext uri="{28A0092B-C50C-407E-A947-70E740481C1C}">
+                  <a14:useLocalDpi xmlns:a14="http://schemas.microsoft.com/office/drawing/2010/main" val="0"/>
+                </a:ext>
+              </a:extLst>
+            </a:blip>
+            <a:srcRect/>
+            <a:stretch>
+              <a:fillRect/>
+            </a:stretch>
+          </p:blipFill>
+          <p:spPr bwMode="auto">
+            <a:xfrm>
+              <a:off x="1366069" y="2319232"/>
+              <a:ext cx="1691148" cy="1691148"/>
+            </a:xfrm>
+            <a:prstGeom prst="rect">
+              <a:avLst/>
+            </a:prstGeom>
+            <a:noFill/>
+            <a:extLst>
+              <a:ext uri="{909E8E84-426E-40DD-AFC4-6F175D3DCCD1}">
+                <a14:hiddenFill xmlns:a14="http://schemas.microsoft.com/office/drawing/2010/main">
+                  <a:solidFill>
+                    <a:srgbClr val="FFFFFF"/>
+                  </a:solidFill>
+                </a14:hiddenFill>
+              </a:ext>
+            </a:extLst>
+          </p:spPr>
+        </p:pic>
+      </p:grpSp>
+      <p:grpSp>
+        <p:nvGrpSpPr>
+          <p:cNvPr id="53" name="Группа 52">
+            <a:extLst>
+              <a:ext uri="{FF2B5EF4-FFF2-40B4-BE49-F238E27FC236}">
+                <a16:creationId xmlns:a16="http://schemas.microsoft.com/office/drawing/2014/main" id="{7DB1BE3D-E594-4CB9-64FE-403FE1860352}"/>
+              </a:ext>
+            </a:extLst>
+          </p:cNvPr>
+          <p:cNvGrpSpPr/>
+          <p:nvPr/>
+        </p:nvGrpSpPr>
+        <p:grpSpPr>
+          <a:xfrm>
+            <a:off x="3729944" y="1719321"/>
+            <a:ext cx="2668883" cy="3732357"/>
+            <a:chOff x="3729944" y="1719321"/>
+            <a:chExt cx="2668883" cy="3732357"/>
+          </a:xfrm>
+        </p:grpSpPr>
+        <p:grpSp>
+          <p:nvGrpSpPr>
+            <p:cNvPr id="32" name="Группа 31">
+              <a:extLst>
+                <a:ext uri="{FF2B5EF4-FFF2-40B4-BE49-F238E27FC236}">
+                  <a16:creationId xmlns:a16="http://schemas.microsoft.com/office/drawing/2014/main" id="{561B926A-111A-C405-BDA2-7E41806723C8}"/>
+                </a:ext>
+              </a:extLst>
+            </p:cNvPr>
+            <p:cNvGrpSpPr/>
+            <p:nvPr/>
+          </p:nvGrpSpPr>
+          <p:grpSpPr>
+            <a:xfrm>
+              <a:off x="3729944" y="1719321"/>
+              <a:ext cx="2668883" cy="3732357"/>
+              <a:chOff x="1041394" y="1667282"/>
+              <a:chExt cx="3156980" cy="3732357"/>
+            </a:xfrm>
+          </p:grpSpPr>
+          <p:sp>
+            <p:nvSpPr>
+              <p:cNvPr id="33" name="Прямоугольник: скругленные углы 32">
+                <a:extLst>
+                  <a:ext uri="{FF2B5EF4-FFF2-40B4-BE49-F238E27FC236}">
+                    <a16:creationId xmlns:a16="http://schemas.microsoft.com/office/drawing/2014/main" id="{DDEBCA52-EAA7-E1EC-6E91-B19882DB1F7B}"/>
+                  </a:ext>
+                </a:extLst>
+              </p:cNvPr>
+              <p:cNvSpPr/>
+              <p:nvPr/>
+            </p:nvSpPr>
+            <p:spPr>
+              <a:xfrm>
+                <a:off x="1041394" y="1667282"/>
+                <a:ext cx="3156980" cy="3732357"/>
+              </a:xfrm>
+              <a:prstGeom prst="roundRect">
+                <a:avLst>
+                  <a:gd name="adj" fmla="val 4689"/>
+                </a:avLst>
+              </a:prstGeom>
+              <a:solidFill>
+                <a:schemeClr val="bg1"/>
+              </a:solidFill>
+              <a:ln>
+                <a:solidFill>
+                  <a:schemeClr val="bg1"/>
+                </a:solidFill>
+              </a:ln>
+            </p:spPr>
+            <p:style>
+              <a:lnRef idx="2">
+                <a:schemeClr val="accent1">
+                  <a:shade val="15000"/>
+                </a:schemeClr>
+              </a:lnRef>
+              <a:fillRef idx="1">
+                <a:schemeClr val="accent1"/>
+              </a:fillRef>
+              <a:effectRef idx="0">
+                <a:schemeClr val="accent1"/>
+              </a:effectRef>
+              <a:fontRef idx="minor">
+                <a:schemeClr val="lt1"/>
+              </a:fontRef>
+            </p:style>
+            <p:txBody>
+              <a:bodyPr rtlCol="0" anchor="ctr"/>
+              <a:lstStyle/>
+              <a:p>
+                <a:pPr algn="ctr"/>
+                <a:endParaRPr lang="ru-RU" dirty="0"/>
+              </a:p>
+            </p:txBody>
+          </p:sp>
+          <p:sp>
+            <p:nvSpPr>
+              <p:cNvPr id="34" name="TextBox 33">
+                <a:extLst>
+                  <a:ext uri="{FF2B5EF4-FFF2-40B4-BE49-F238E27FC236}">
+                    <a16:creationId xmlns:a16="http://schemas.microsoft.com/office/drawing/2014/main" id="{105B4375-81D1-80A6-4372-F5FD97576521}"/>
+                  </a:ext>
+                </a:extLst>
+              </p:cNvPr>
+              <p:cNvSpPr txBox="1"/>
+              <p:nvPr/>
+            </p:nvSpPr>
+            <p:spPr>
+              <a:xfrm>
+                <a:off x="1041394" y="4429331"/>
+                <a:ext cx="3156980" cy="369332"/>
+              </a:xfrm>
+              <a:prstGeom prst="rect">
+                <a:avLst/>
+              </a:prstGeom>
+              <a:noFill/>
+            </p:spPr>
+            <p:txBody>
+              <a:bodyPr wrap="square">
+                <a:spAutoFit/>
+              </a:bodyPr>
+              <a:lstStyle/>
+              <a:p>
+                <a:pPr algn="ctr"/>
+                <a:r>
+                  <a:rPr lang="ru-RU" dirty="0">
+                    <a:latin typeface="Comfortaa Medium" pitchFamily="2" charset="0"/>
+                  </a:rPr>
+                  <a:t>Контроль</a:t>
+                </a:r>
+              </a:p>
+            </p:txBody>
+          </p:sp>
+        </p:grpSp>
+        <p:pic>
+          <p:nvPicPr>
+            <p:cNvPr id="45" name="Picture 6" descr="Пнг Проверка 27 фото">
+              <a:extLst>
+                <a:ext uri="{FF2B5EF4-FFF2-40B4-BE49-F238E27FC236}">
+                  <a16:creationId xmlns:a16="http://schemas.microsoft.com/office/drawing/2014/main" id="{9F18291D-E2C3-239D-CBFE-C60703029C0A}"/>
+                </a:ext>
+              </a:extLst>
+            </p:cNvPr>
+            <p:cNvPicPr>
+              <a:picLocks noChangeAspect="1" noChangeArrowheads="1"/>
+            </p:cNvPicPr>
+            <p:nvPr/>
+          </p:nvPicPr>
+          <p:blipFill>
+            <a:blip r:embed="rId13">
+              <a:extLst>
+                <a:ext uri="{28A0092B-C50C-407E-A947-70E740481C1C}">
+                  <a14:useLocalDpi xmlns:a14="http://schemas.microsoft.com/office/drawing/2010/main" val="0"/>
+                </a:ext>
+              </a:extLst>
+            </a:blip>
+            <a:srcRect/>
+            <a:stretch>
+              <a:fillRect/>
+            </a:stretch>
+          </p:blipFill>
+          <p:spPr bwMode="auto">
+            <a:xfrm>
+              <a:off x="4184090" y="2284511"/>
+              <a:ext cx="1760590" cy="1760590"/>
+            </a:xfrm>
+            <a:prstGeom prst="rect">
+              <a:avLst/>
+            </a:prstGeom>
+            <a:noFill/>
+            <a:extLst>
+              <a:ext uri="{909E8E84-426E-40DD-AFC4-6F175D3DCCD1}">
+                <a14:hiddenFill xmlns:a14="http://schemas.microsoft.com/office/drawing/2010/main">
+                  <a:solidFill>
+                    <a:srgbClr val="FFFFFF"/>
+                  </a:solidFill>
+                </a14:hiddenFill>
+              </a:ext>
+            </a:extLst>
+          </p:spPr>
+        </p:pic>
+      </p:grpSp>
+      <p:grpSp>
+        <p:nvGrpSpPr>
+          <p:cNvPr id="52" name="Группа 51">
+            <a:extLst>
+              <a:ext uri="{FF2B5EF4-FFF2-40B4-BE49-F238E27FC236}">
+                <a16:creationId xmlns:a16="http://schemas.microsoft.com/office/drawing/2014/main" id="{9944D1C2-5A77-4EE5-936D-CC91B844D1DE}"/>
+              </a:ext>
+            </a:extLst>
+          </p:cNvPr>
+          <p:cNvGrpSpPr/>
+          <p:nvPr/>
+        </p:nvGrpSpPr>
+        <p:grpSpPr>
+          <a:xfrm>
+            <a:off x="6657984" y="1717270"/>
+            <a:ext cx="2544097" cy="3732357"/>
+            <a:chOff x="6657984" y="1717270"/>
+            <a:chExt cx="2544097" cy="3732357"/>
+          </a:xfrm>
+        </p:grpSpPr>
+        <p:grpSp>
+          <p:nvGrpSpPr>
+            <p:cNvPr id="28" name="Группа 27">
+              <a:extLst>
+                <a:ext uri="{FF2B5EF4-FFF2-40B4-BE49-F238E27FC236}">
+                  <a16:creationId xmlns:a16="http://schemas.microsoft.com/office/drawing/2014/main" id="{C56951AD-4FEF-31EF-20E3-443AF3A31A7D}"/>
+                </a:ext>
+              </a:extLst>
+            </p:cNvPr>
+            <p:cNvGrpSpPr/>
+            <p:nvPr/>
+          </p:nvGrpSpPr>
+          <p:grpSpPr>
+            <a:xfrm>
+              <a:off x="6657984" y="1717270"/>
+              <a:ext cx="2544097" cy="3732357"/>
+              <a:chOff x="1041394" y="1667282"/>
+              <a:chExt cx="3156980" cy="3732357"/>
+            </a:xfrm>
+          </p:grpSpPr>
+          <p:sp>
+            <p:nvSpPr>
+              <p:cNvPr id="29" name="Прямоугольник: скругленные углы 28">
+                <a:extLst>
+                  <a:ext uri="{FF2B5EF4-FFF2-40B4-BE49-F238E27FC236}">
+                    <a16:creationId xmlns:a16="http://schemas.microsoft.com/office/drawing/2014/main" id="{9CCD54FC-01B4-DA7C-0B0D-C24CFC60A382}"/>
+                  </a:ext>
+                </a:extLst>
+              </p:cNvPr>
+              <p:cNvSpPr/>
+              <p:nvPr/>
+            </p:nvSpPr>
+            <p:spPr>
+              <a:xfrm>
+                <a:off x="1041394" y="1667282"/>
+                <a:ext cx="3156980" cy="3732357"/>
+              </a:xfrm>
+              <a:prstGeom prst="roundRect">
+                <a:avLst>
+                  <a:gd name="adj" fmla="val 4689"/>
+                </a:avLst>
+              </a:prstGeom>
+              <a:solidFill>
+                <a:schemeClr val="bg1"/>
+              </a:solidFill>
+              <a:ln>
+                <a:solidFill>
+                  <a:schemeClr val="bg1"/>
+                </a:solidFill>
+              </a:ln>
+            </p:spPr>
+            <p:style>
+              <a:lnRef idx="2">
+                <a:schemeClr val="accent1">
+                  <a:shade val="15000"/>
+                </a:schemeClr>
+              </a:lnRef>
+              <a:fillRef idx="1">
+                <a:schemeClr val="accent1"/>
+              </a:fillRef>
+              <a:effectRef idx="0">
+                <a:schemeClr val="accent1"/>
+              </a:effectRef>
+              <a:fontRef idx="minor">
+                <a:schemeClr val="lt1"/>
+              </a:fontRef>
+            </p:style>
+            <p:txBody>
+              <a:bodyPr rtlCol="0" anchor="ctr"/>
+              <a:lstStyle/>
+              <a:p>
+                <a:pPr algn="ctr"/>
+                <a:endParaRPr lang="ru-RU" dirty="0"/>
+              </a:p>
+            </p:txBody>
+          </p:sp>
+          <p:sp>
+            <p:nvSpPr>
+              <p:cNvPr id="31" name="TextBox 30">
+                <a:extLst>
+                  <a:ext uri="{FF2B5EF4-FFF2-40B4-BE49-F238E27FC236}">
+                    <a16:creationId xmlns:a16="http://schemas.microsoft.com/office/drawing/2014/main" id="{939969A3-1104-B7DA-0ACB-E9D642977611}"/>
+                  </a:ext>
+                </a:extLst>
+              </p:cNvPr>
+              <p:cNvSpPr txBox="1"/>
+              <p:nvPr/>
+            </p:nvSpPr>
+            <p:spPr>
+              <a:xfrm>
+                <a:off x="1041394" y="4418731"/>
+                <a:ext cx="3124952" cy="369332"/>
+              </a:xfrm>
+              <a:prstGeom prst="rect">
+                <a:avLst/>
+              </a:prstGeom>
+              <a:noFill/>
+            </p:spPr>
+            <p:txBody>
+              <a:bodyPr wrap="square">
+                <a:spAutoFit/>
+              </a:bodyPr>
+              <a:lstStyle/>
+              <a:p>
+                <a:pPr algn="ctr"/>
+                <a:r>
+                  <a:rPr lang="ru-RU" dirty="0">
+                    <a:latin typeface="Comfortaa Medium" pitchFamily="2" charset="0"/>
+                  </a:rPr>
+                  <a:t>Расширение</a:t>
+                </a:r>
+              </a:p>
+            </p:txBody>
+          </p:sp>
+        </p:grpSp>
+        <p:pic>
+          <p:nvPicPr>
+            <p:cNvPr id="4108" name="Picture 12" descr="Значок расширения Символ вектора расширения Простой черный значок  увеличения | Премиум вектор">
+              <a:extLst>
+                <a:ext uri="{FF2B5EF4-FFF2-40B4-BE49-F238E27FC236}">
+                  <a16:creationId xmlns:a16="http://schemas.microsoft.com/office/drawing/2014/main" id="{D2676F6E-FE8E-4681-A7BF-2E50725396EC}"/>
+                </a:ext>
+              </a:extLst>
+            </p:cNvPr>
+            <p:cNvPicPr>
+              <a:picLocks noChangeAspect="1" noChangeArrowheads="1"/>
+            </p:cNvPicPr>
+            <p:nvPr/>
+          </p:nvPicPr>
+          <p:blipFill>
+            <a:blip r:embed="rId14">
+              <a:extLst>
+                <a:ext uri="{28A0092B-C50C-407E-A947-70E740481C1C}">
+                  <a14:useLocalDpi xmlns:a14="http://schemas.microsoft.com/office/drawing/2010/main" val="0"/>
+                </a:ext>
+              </a:extLst>
+            </a:blip>
+            <a:srcRect/>
+            <a:stretch>
+              <a:fillRect/>
+            </a:stretch>
+          </p:blipFill>
+          <p:spPr bwMode="auto">
+            <a:xfrm>
+              <a:off x="6995706" y="2230480"/>
+              <a:ext cx="1868652" cy="1868652"/>
+            </a:xfrm>
+            <a:prstGeom prst="rect">
+              <a:avLst/>
+            </a:prstGeom>
+            <a:noFill/>
+            <a:extLst>
+              <a:ext uri="{909E8E84-426E-40DD-AFC4-6F175D3DCCD1}">
+                <a14:hiddenFill xmlns:a14="http://schemas.microsoft.com/office/drawing/2010/main">
+                  <a:solidFill>
+                    <a:srgbClr val="FFFFFF"/>
+                  </a:solidFill>
+                </a14:hiddenFill>
+              </a:ext>
+            </a:extLst>
+          </p:spPr>
+        </p:pic>
+      </p:grpSp>
+      <p:grpSp>
+        <p:nvGrpSpPr>
+          <p:cNvPr id="51" name="Группа 50">
+            <a:extLst>
+              <a:ext uri="{FF2B5EF4-FFF2-40B4-BE49-F238E27FC236}">
+                <a16:creationId xmlns:a16="http://schemas.microsoft.com/office/drawing/2014/main" id="{11A99480-9063-F93E-9C84-EE15662BE76B}"/>
+              </a:ext>
+            </a:extLst>
+          </p:cNvPr>
+          <p:cNvGrpSpPr/>
+          <p:nvPr/>
+        </p:nvGrpSpPr>
+        <p:grpSpPr>
+          <a:xfrm>
+            <a:off x="9461237" y="1721372"/>
+            <a:ext cx="2518287" cy="3732357"/>
+            <a:chOff x="9461237" y="1721372"/>
+            <a:chExt cx="2518287" cy="3732357"/>
+          </a:xfrm>
+        </p:grpSpPr>
+        <p:grpSp>
+          <p:nvGrpSpPr>
+            <p:cNvPr id="40" name="Группа 39">
+              <a:extLst>
+                <a:ext uri="{FF2B5EF4-FFF2-40B4-BE49-F238E27FC236}">
+                  <a16:creationId xmlns:a16="http://schemas.microsoft.com/office/drawing/2014/main" id="{2B2FB407-8656-C708-9628-EDB011C815FE}"/>
+                </a:ext>
+              </a:extLst>
+            </p:cNvPr>
+            <p:cNvGrpSpPr/>
+            <p:nvPr/>
+          </p:nvGrpSpPr>
+          <p:grpSpPr>
+            <a:xfrm>
+              <a:off x="9461237" y="1721372"/>
+              <a:ext cx="2518287" cy="3732357"/>
+              <a:chOff x="1041394" y="1667282"/>
+              <a:chExt cx="3156980" cy="3732357"/>
+            </a:xfrm>
+          </p:grpSpPr>
+          <p:sp>
+            <p:nvSpPr>
+              <p:cNvPr id="41" name="Прямоугольник: скругленные углы 40">
+                <a:extLst>
+                  <a:ext uri="{FF2B5EF4-FFF2-40B4-BE49-F238E27FC236}">
+                    <a16:creationId xmlns:a16="http://schemas.microsoft.com/office/drawing/2014/main" id="{B95AF9D4-EDC3-59ED-A483-A44010E06A68}"/>
+                  </a:ext>
+                </a:extLst>
+              </p:cNvPr>
+              <p:cNvSpPr/>
+              <p:nvPr/>
+            </p:nvSpPr>
+            <p:spPr>
+              <a:xfrm>
+                <a:off x="1041394" y="1667282"/>
+                <a:ext cx="3156980" cy="3732357"/>
+              </a:xfrm>
+              <a:prstGeom prst="roundRect">
+                <a:avLst>
+                  <a:gd name="adj" fmla="val 4689"/>
+                </a:avLst>
+              </a:prstGeom>
+              <a:solidFill>
+                <a:schemeClr val="bg1"/>
+              </a:solidFill>
+              <a:ln>
+                <a:solidFill>
+                  <a:schemeClr val="bg1"/>
+                </a:solidFill>
+              </a:ln>
+            </p:spPr>
+            <p:style>
+              <a:lnRef idx="2">
+                <a:schemeClr val="accent1">
+                  <a:shade val="15000"/>
+                </a:schemeClr>
+              </a:lnRef>
+              <a:fillRef idx="1">
+                <a:schemeClr val="accent1"/>
+              </a:fillRef>
+              <a:effectRef idx="0">
+                <a:schemeClr val="accent1"/>
+              </a:effectRef>
+              <a:fontRef idx="minor">
+                <a:schemeClr val="lt1"/>
+              </a:fontRef>
+            </p:style>
+            <p:txBody>
+              <a:bodyPr rtlCol="0" anchor="ctr"/>
+              <a:lstStyle/>
+              <a:p>
+                <a:pPr algn="ctr"/>
+                <a:endParaRPr lang="ru-RU"/>
+              </a:p>
+            </p:txBody>
+          </p:sp>
+          <p:sp>
+            <p:nvSpPr>
+              <p:cNvPr id="42" name="TextBox 41">
+                <a:extLst>
+                  <a:ext uri="{FF2B5EF4-FFF2-40B4-BE49-F238E27FC236}">
+                    <a16:creationId xmlns:a16="http://schemas.microsoft.com/office/drawing/2014/main" id="{8C2C9C01-DA66-3821-6207-B0D5B9E482D1}"/>
+                  </a:ext>
+                </a:extLst>
+              </p:cNvPr>
+              <p:cNvSpPr txBox="1"/>
+              <p:nvPr/>
+            </p:nvSpPr>
+            <p:spPr>
+              <a:xfrm>
+                <a:off x="1041394" y="4418731"/>
+                <a:ext cx="3156980" cy="369332"/>
+              </a:xfrm>
+              <a:prstGeom prst="rect">
+                <a:avLst/>
+              </a:prstGeom>
+              <a:noFill/>
+            </p:spPr>
+            <p:txBody>
+              <a:bodyPr wrap="square">
+                <a:spAutoFit/>
+              </a:bodyPr>
+              <a:lstStyle/>
+              <a:p>
+                <a:pPr algn="ctr"/>
+                <a:r>
+                  <a:rPr lang="ru-RU" dirty="0">
+                    <a:latin typeface="Comfortaa Medium" pitchFamily="2" charset="0"/>
+                  </a:rPr>
+                  <a:t>Удобство</a:t>
+                </a:r>
+              </a:p>
+            </p:txBody>
+          </p:sp>
+        </p:grpSp>
+        <p:pic>
+          <p:nvPicPr>
+            <p:cNvPr id="50" name="Picture 22" descr="Диван – Бесплатные иконки: мебель и дом">
+              <a:extLst>
+                <a:ext uri="{FF2B5EF4-FFF2-40B4-BE49-F238E27FC236}">
+                  <a16:creationId xmlns:a16="http://schemas.microsoft.com/office/drawing/2014/main" id="{AA8D93C2-9AFF-9532-825A-F97EAD03F0B3}"/>
+                </a:ext>
+              </a:extLst>
+            </p:cNvPr>
+            <p:cNvPicPr>
+              <a:picLocks noChangeAspect="1" noChangeArrowheads="1"/>
+            </p:cNvPicPr>
+            <p:nvPr/>
+          </p:nvPicPr>
+          <p:blipFill>
+            <a:blip r:embed="rId15">
+              <a:extLst>
+                <a:ext uri="{28A0092B-C50C-407E-A947-70E740481C1C}">
+                  <a14:useLocalDpi xmlns:a14="http://schemas.microsoft.com/office/drawing/2010/main" val="0"/>
+                </a:ext>
+              </a:extLst>
+            </a:blip>
+            <a:srcRect/>
+            <a:stretch>
+              <a:fillRect/>
+            </a:stretch>
+          </p:blipFill>
+          <p:spPr bwMode="auto">
+            <a:xfrm>
+              <a:off x="9752220" y="2196646"/>
+              <a:ext cx="1936320" cy="1936320"/>
+            </a:xfrm>
+            <a:prstGeom prst="rect">
+              <a:avLst/>
+            </a:prstGeom>
+            <a:noFill/>
+            <a:extLst>
+              <a:ext uri="{909E8E84-426E-40DD-AFC4-6F175D3DCCD1}">
+                <a14:hiddenFill xmlns:a14="http://schemas.microsoft.com/office/drawing/2010/main">
+                  <a:solidFill>
+                    <a:srgbClr val="FFFFFF"/>
+                  </a:solidFill>
+                </a14:hiddenFill>
+              </a:ext>
+            </a:extLst>
           </p:spPr>
         </p:pic>
       </p:grpSp>

--- a/КП/Презентация/Презентация.pptx
+++ b/КП/Презентация/Презентация.pptx
@@ -269,7 +269,7 @@
           <a:p>
             <a:fld id="{D373FD95-13B8-4D9F-981D-7E2051AFE206}" type="datetimeFigureOut">
               <a:rPr lang="ru-RU" smtClean="0"/>
-              <a:t>03.12.2025</a:t>
+              <a:t>04.12.2025</a:t>
             </a:fld>
             <a:endParaRPr lang="ru-RU"/>
           </a:p>
@@ -479,7 +479,7 @@
           <a:p>
             <a:fld id="{D373FD95-13B8-4D9F-981D-7E2051AFE206}" type="datetimeFigureOut">
               <a:rPr lang="ru-RU" smtClean="0"/>
-              <a:t>03.12.2025</a:t>
+              <a:t>04.12.2025</a:t>
             </a:fld>
             <a:endParaRPr lang="ru-RU"/>
           </a:p>
@@ -699,7 +699,7 @@
           <a:p>
             <a:fld id="{D373FD95-13B8-4D9F-981D-7E2051AFE206}" type="datetimeFigureOut">
               <a:rPr lang="ru-RU" smtClean="0"/>
-              <a:t>03.12.2025</a:t>
+              <a:t>04.12.2025</a:t>
             </a:fld>
             <a:endParaRPr lang="ru-RU"/>
           </a:p>
@@ -909,7 +909,7 @@
           <a:p>
             <a:fld id="{D373FD95-13B8-4D9F-981D-7E2051AFE206}" type="datetimeFigureOut">
               <a:rPr lang="ru-RU" smtClean="0"/>
-              <a:t>03.12.2025</a:t>
+              <a:t>04.12.2025</a:t>
             </a:fld>
             <a:endParaRPr lang="ru-RU"/>
           </a:p>
@@ -1196,7 +1196,7 @@
           <a:p>
             <a:fld id="{D373FD95-13B8-4D9F-981D-7E2051AFE206}" type="datetimeFigureOut">
               <a:rPr lang="ru-RU" smtClean="0"/>
-              <a:t>03.12.2025</a:t>
+              <a:t>04.12.2025</a:t>
             </a:fld>
             <a:endParaRPr lang="ru-RU"/>
           </a:p>
@@ -1473,7 +1473,7 @@
           <a:p>
             <a:fld id="{D373FD95-13B8-4D9F-981D-7E2051AFE206}" type="datetimeFigureOut">
               <a:rPr lang="ru-RU" smtClean="0"/>
-              <a:t>03.12.2025</a:t>
+              <a:t>04.12.2025</a:t>
             </a:fld>
             <a:endParaRPr lang="ru-RU"/>
           </a:p>
@@ -1897,7 +1897,7 @@
           <a:p>
             <a:fld id="{D373FD95-13B8-4D9F-981D-7E2051AFE206}" type="datetimeFigureOut">
               <a:rPr lang="ru-RU" smtClean="0"/>
-              <a:t>03.12.2025</a:t>
+              <a:t>04.12.2025</a:t>
             </a:fld>
             <a:endParaRPr lang="ru-RU"/>
           </a:p>
@@ -2050,7 +2050,7 @@
           <a:p>
             <a:fld id="{D373FD95-13B8-4D9F-981D-7E2051AFE206}" type="datetimeFigureOut">
               <a:rPr lang="ru-RU" smtClean="0"/>
-              <a:t>03.12.2025</a:t>
+              <a:t>04.12.2025</a:t>
             </a:fld>
             <a:endParaRPr lang="ru-RU"/>
           </a:p>
@@ -2175,7 +2175,7 @@
           <a:p>
             <a:fld id="{D373FD95-13B8-4D9F-981D-7E2051AFE206}" type="datetimeFigureOut">
               <a:rPr lang="ru-RU" smtClean="0"/>
-              <a:t>03.12.2025</a:t>
+              <a:t>04.12.2025</a:t>
             </a:fld>
             <a:endParaRPr lang="ru-RU"/>
           </a:p>
@@ -2498,7 +2498,7 @@
           <a:p>
             <a:fld id="{D373FD95-13B8-4D9F-981D-7E2051AFE206}" type="datetimeFigureOut">
               <a:rPr lang="ru-RU" smtClean="0"/>
-              <a:t>03.12.2025</a:t>
+              <a:t>04.12.2025</a:t>
             </a:fld>
             <a:endParaRPr lang="ru-RU"/>
           </a:p>
@@ -2798,7 +2798,7 @@
           <a:p>
             <a:fld id="{D373FD95-13B8-4D9F-981D-7E2051AFE206}" type="datetimeFigureOut">
               <a:rPr lang="ru-RU" smtClean="0"/>
-              <a:t>03.12.2025</a:t>
+              <a:t>04.12.2025</a:t>
             </a:fld>
             <a:endParaRPr lang="ru-RU"/>
           </a:p>
@@ -3051,7 +3051,7 @@
           <a:p>
             <a:fld id="{D373FD95-13B8-4D9F-981D-7E2051AFE206}" type="datetimeFigureOut">
               <a:rPr lang="ru-RU" smtClean="0"/>
-              <a:t>03.12.2025</a:t>
+              <a:t>04.12.2025</a:t>
             </a:fld>
             <a:endParaRPr lang="ru-RU"/>
           </a:p>
@@ -5776,6 +5776,285 @@
           </a:p>
         </p:txBody>
       </p:sp>
+      <p:grpSp>
+        <p:nvGrpSpPr>
+          <p:cNvPr id="5" name="Группа 4">
+            <a:extLst>
+              <a:ext uri="{FF2B5EF4-FFF2-40B4-BE49-F238E27FC236}">
+                <a16:creationId xmlns:a16="http://schemas.microsoft.com/office/drawing/2014/main" id="{4B137328-195C-C343-7370-C4A755526655}"/>
+              </a:ext>
+            </a:extLst>
+          </p:cNvPr>
+          <p:cNvGrpSpPr/>
+          <p:nvPr/>
+        </p:nvGrpSpPr>
+        <p:grpSpPr>
+          <a:xfrm>
+            <a:off x="1729466" y="2695636"/>
+            <a:ext cx="3121184" cy="1466727"/>
+            <a:chOff x="2341062" y="2335789"/>
+            <a:chExt cx="3121184" cy="1466727"/>
+          </a:xfrm>
+        </p:grpSpPr>
+        <p:sp>
+          <p:nvSpPr>
+            <p:cNvPr id="4" name="Прямоугольник: скругленные углы 3">
+              <a:extLst>
+                <a:ext uri="{FF2B5EF4-FFF2-40B4-BE49-F238E27FC236}">
+                  <a16:creationId xmlns:a16="http://schemas.microsoft.com/office/drawing/2014/main" id="{2EBD1A73-8D4A-E3F6-00E3-78341FF8385F}"/>
+                </a:ext>
+              </a:extLst>
+            </p:cNvPr>
+            <p:cNvSpPr/>
+            <p:nvPr/>
+          </p:nvSpPr>
+          <p:spPr>
+            <a:xfrm>
+              <a:off x="2341062" y="2335789"/>
+              <a:ext cx="3121184" cy="1466727"/>
+            </a:xfrm>
+            <a:prstGeom prst="roundRect">
+              <a:avLst>
+                <a:gd name="adj" fmla="val 4689"/>
+              </a:avLst>
+            </a:prstGeom>
+            <a:solidFill>
+              <a:schemeClr val="bg1"/>
+            </a:solidFill>
+            <a:ln>
+              <a:solidFill>
+                <a:srgbClr val="FFA726"/>
+              </a:solidFill>
+            </a:ln>
+          </p:spPr>
+          <p:style>
+            <a:lnRef idx="2">
+              <a:schemeClr val="accent1">
+                <a:shade val="15000"/>
+              </a:schemeClr>
+            </a:lnRef>
+            <a:fillRef idx="1">
+              <a:schemeClr val="accent1"/>
+            </a:fillRef>
+            <a:effectRef idx="0">
+              <a:schemeClr val="accent1"/>
+            </a:effectRef>
+            <a:fontRef idx="minor">
+              <a:schemeClr val="lt1"/>
+            </a:fontRef>
+          </p:style>
+          <p:txBody>
+            <a:bodyPr rtlCol="0" anchor="ctr"/>
+            <a:lstStyle/>
+            <a:p>
+              <a:pPr algn="ctr"/>
+              <a:endParaRPr lang="ru-RU"/>
+            </a:p>
+          </p:txBody>
+        </p:sp>
+        <p:sp>
+          <p:nvSpPr>
+            <p:cNvPr id="3" name="TextBox 2">
+              <a:extLst>
+                <a:ext uri="{FF2B5EF4-FFF2-40B4-BE49-F238E27FC236}">
+                  <a16:creationId xmlns:a16="http://schemas.microsoft.com/office/drawing/2014/main" id="{49B5968C-50DC-1C00-843C-0492E03E7144}"/>
+                </a:ext>
+              </a:extLst>
+            </p:cNvPr>
+            <p:cNvSpPr txBox="1"/>
+            <p:nvPr/>
+          </p:nvSpPr>
+          <p:spPr>
+            <a:xfrm>
+              <a:off x="2460074" y="2468988"/>
+              <a:ext cx="2883160" cy="1200329"/>
+            </a:xfrm>
+            <a:prstGeom prst="rect">
+              <a:avLst/>
+            </a:prstGeom>
+            <a:noFill/>
+          </p:spPr>
+          <p:txBody>
+            <a:bodyPr wrap="square">
+              <a:spAutoFit/>
+            </a:bodyPr>
+            <a:lstStyle/>
+            <a:p>
+              <a:pPr marL="0" marR="0" lvl="0" indent="0" algn="l" rtl="0">
+                <a:spcBef>
+                  <a:spcPts val="0"/>
+                </a:spcBef>
+                <a:spcAft>
+                  <a:spcPts val="0"/>
+                </a:spcAft>
+                <a:buNone/>
+              </a:pPr>
+              <a:r>
+                <a:rPr lang="ru-RU" sz="1800" b="0" i="0" u="none" strike="noStrike" cap="none" dirty="0">
+                  <a:solidFill>
+                    <a:srgbClr val="0E0E0E"/>
+                  </a:solidFill>
+                  <a:latin typeface="Comfortaa Medium" pitchFamily="2" charset="0"/>
+                  <a:ea typeface="Poppins"/>
+                  <a:cs typeface="Poppins"/>
+                  <a:sym typeface="Poppins"/>
+                </a:rPr>
+                <a:t>Поставленная цель достигнута и вс</a:t>
+              </a:r>
+              <a:r>
+                <a:rPr lang="ru-RU" sz="1800" dirty="0">
+                  <a:solidFill>
+                    <a:srgbClr val="0E0E0E"/>
+                  </a:solidFill>
+                  <a:latin typeface="Comfortaa Medium" pitchFamily="2" charset="0"/>
+                  <a:ea typeface="Poppins"/>
+                  <a:cs typeface="Poppins"/>
+                  <a:sym typeface="Poppins"/>
+                </a:rPr>
+                <a:t>е компетенции закрыты</a:t>
+              </a:r>
+              <a:endParaRPr lang="ru-RU" sz="1800" b="0" i="0" u="none" strike="noStrike" cap="none" dirty="0">
+                <a:solidFill>
+                  <a:schemeClr val="dk1"/>
+                </a:solidFill>
+                <a:latin typeface="Comfortaa Medium" pitchFamily="2" charset="0"/>
+                <a:ea typeface="Calibri"/>
+                <a:cs typeface="Calibri"/>
+                <a:sym typeface="Calibri"/>
+              </a:endParaRPr>
+            </a:p>
+          </p:txBody>
+        </p:sp>
+      </p:grpSp>
+      <p:pic>
+        <p:nvPicPr>
+          <p:cNvPr id="6" name="Picture 4" descr="Скачать картинки Куча бумаг, стоковые фото Куча бумаг в ...">
+            <a:extLst>
+              <a:ext uri="{FF2B5EF4-FFF2-40B4-BE49-F238E27FC236}">
+                <a16:creationId xmlns:a16="http://schemas.microsoft.com/office/drawing/2014/main" id="{540B2C80-8D04-FB8B-4928-983FE16B08DB}"/>
+              </a:ext>
+            </a:extLst>
+          </p:cNvPr>
+          <p:cNvPicPr>
+            <a:picLocks noChangeAspect="1" noChangeArrowheads="1"/>
+          </p:cNvPicPr>
+          <p:nvPr/>
+        </p:nvPicPr>
+        <p:blipFill rotWithShape="1">
+          <a:blip r:embed="rId12">
+            <a:extLst>
+              <a:ext uri="{BEBA8EAE-BF5A-486C-A8C5-ECC9F3942E4B}">
+                <a14:imgProps xmlns:a14="http://schemas.microsoft.com/office/drawing/2010/main">
+                  <a14:imgLayer r:embed="rId13">
+                    <a14:imgEffect>
+                      <a14:backgroundRemoval t="10000" b="90000" l="10000" r="90000">
+                        <a14:foregroundMark x1="80912" y1="32432" x2="75169" y2="20120"/>
+                        <a14:foregroundMark x1="75169" y1="20120" x2="84122" y2="23423"/>
+                        <a14:foregroundMark x1="88851" y1="15015" x2="80236" y2="14715"/>
+                        <a14:foregroundMark x1="72128" y1="85886" x2="86149" y2="89189"/>
+                        <a14:foregroundMark x1="86149" y1="89189" x2="88682" y2="87387"/>
+                        <a14:foregroundMark x1="58446" y1="88589" x2="58108" y2="42643"/>
+                        <a14:foregroundMark x1="58108" y1="42643" x2="44595" y2="40841"/>
+                        <a14:foregroundMark x1="44595" y1="40841" x2="40114" y2="55131"/>
+                        <a14:foregroundMark x1="39311" y1="64993" x2="40034" y2="74174"/>
+                        <a14:foregroundMark x1="40034" y1="74174" x2="55574" y2="88889"/>
+                        <a14:foregroundMark x1="55574" y1="88889" x2="58615" y2="89189"/>
+                        <a14:foregroundMark x1="9966" y1="68168" x2="24324" y2="68468"/>
+                        <a14:foregroundMark x1="24324" y1="68468" x2="27365" y2="86486"/>
+                        <a14:foregroundMark x1="27365" y1="86486" x2="16723" y2="86186"/>
+                        <a14:foregroundMark x1="16723" y1="86186" x2="10473" y2="74775"/>
+                        <a14:foregroundMark x1="10473" y1="74775" x2="10642" y2="70270"/>
+                        <a14:backgroundMark x1="39020" y1="54955" x2="38514" y2="64865"/>
+                      </a14:backgroundRemoval>
+                    </a14:imgEffect>
+                  </a14:imgLayer>
+                </a14:imgProps>
+              </a:ext>
+              <a:ext uri="{28A0092B-C50C-407E-A947-70E740481C1C}">
+                <a14:useLocalDpi xmlns:a14="http://schemas.microsoft.com/office/drawing/2010/main" val="0"/>
+              </a:ext>
+            </a:extLst>
+          </a:blip>
+          <a:srcRect l="8022" t="10350" r="8680" b="7103"/>
+          <a:stretch>
+            <a:fillRect/>
+          </a:stretch>
+        </p:blipFill>
+        <p:spPr bwMode="auto">
+          <a:xfrm flipH="1">
+            <a:off x="5562450" y="1764648"/>
+            <a:ext cx="5525585" cy="3131206"/>
+          </a:xfrm>
+          <a:prstGeom prst="rect">
+            <a:avLst/>
+          </a:prstGeom>
+          <a:noFill/>
+          <a:extLst>
+            <a:ext uri="{909E8E84-426E-40DD-AFC4-6F175D3DCCD1}">
+              <a14:hiddenFill xmlns:a14="http://schemas.microsoft.com/office/drawing/2010/main">
+                <a:solidFill>
+                  <a:srgbClr val="FFFFFF"/>
+                </a:solidFill>
+              </a14:hiddenFill>
+            </a:ext>
+          </a:extLst>
+        </p:spPr>
+      </p:pic>
+      <p:sp>
+        <p:nvSpPr>
+          <p:cNvPr id="8" name="Стрелка: вправо 7">
+            <a:extLst>
+              <a:ext uri="{FF2B5EF4-FFF2-40B4-BE49-F238E27FC236}">
+                <a16:creationId xmlns:a16="http://schemas.microsoft.com/office/drawing/2014/main" id="{AC877CA2-9573-9DE1-22A3-0618212CB73B}"/>
+              </a:ext>
+            </a:extLst>
+          </p:cNvPr>
+          <p:cNvSpPr/>
+          <p:nvPr/>
+        </p:nvSpPr>
+        <p:spPr>
+          <a:xfrm>
+            <a:off x="5562450" y="4940403"/>
+            <a:ext cx="5525585" cy="167330"/>
+          </a:xfrm>
+          <a:prstGeom prst="rightArrow">
+            <a:avLst>
+              <a:gd name="adj1" fmla="val 50000"/>
+              <a:gd name="adj2" fmla="val 150859"/>
+            </a:avLst>
+          </a:prstGeom>
+          <a:solidFill>
+            <a:srgbClr val="FFA726"/>
+          </a:solidFill>
+          <a:ln>
+            <a:noFill/>
+          </a:ln>
+        </p:spPr>
+        <p:style>
+          <a:lnRef idx="2">
+            <a:schemeClr val="dk1">
+              <a:shade val="15000"/>
+            </a:schemeClr>
+          </a:lnRef>
+          <a:fillRef idx="1">
+            <a:schemeClr val="dk1"/>
+          </a:fillRef>
+          <a:effectRef idx="0">
+            <a:schemeClr val="dk1"/>
+          </a:effectRef>
+          <a:fontRef idx="minor">
+            <a:schemeClr val="lt1"/>
+          </a:fontRef>
+        </p:style>
+        <p:txBody>
+          <a:bodyPr rtlCol="0" anchor="ctr"/>
+          <a:lstStyle/>
+          <a:p>
+            <a:pPr algn="ctr"/>
+            <a:endParaRPr lang="ru-RU"/>
+          </a:p>
+        </p:txBody>
+      </p:sp>
     </p:spTree>
     <p:extLst>
       <p:ext uri="{BB962C8B-B14F-4D97-AF65-F5344CB8AC3E}">
@@ -7433,51 +7712,6 @@
       </p:sp>
       <p:sp>
         <p:nvSpPr>
-          <p:cNvPr id="8" name="AutoShape 2" descr="Placeholder Image | Elementor Developers">
-            <a:extLst>
-              <a:ext uri="{FF2B5EF4-FFF2-40B4-BE49-F238E27FC236}">
-                <a16:creationId xmlns:a16="http://schemas.microsoft.com/office/drawing/2014/main" id="{EA6FE66B-DDCE-6E03-91C5-2B86AA0BE746}"/>
-              </a:ext>
-            </a:extLst>
-          </p:cNvPr>
-          <p:cNvSpPr>
-            <a:spLocks noChangeAspect="1" noChangeArrowheads="1"/>
-          </p:cNvSpPr>
-          <p:nvPr/>
-        </p:nvSpPr>
-        <p:spPr bwMode="auto">
-          <a:xfrm>
-            <a:off x="5943600" y="3276600"/>
-            <a:ext cx="304800" cy="304800"/>
-          </a:xfrm>
-          <a:prstGeom prst="rect">
-            <a:avLst/>
-          </a:prstGeom>
-          <a:noFill/>
-          <a:extLst>
-            <a:ext uri="{909E8E84-426E-40DD-AFC4-6F175D3DCCD1}">
-              <a14:hiddenFill xmlns:a14="http://schemas.microsoft.com/office/drawing/2010/main">
-                <a:solidFill>
-                  <a:srgbClr val="FFFFFF"/>
-                </a:solidFill>
-              </a14:hiddenFill>
-            </a:ext>
-          </a:extLst>
-        </p:spPr>
-        <p:txBody>
-          <a:bodyPr vert="horz" wrap="square" lIns="91440" tIns="45720" rIns="91440" bIns="45720" numCol="1" anchor="t" anchorCtr="0" compatLnSpc="1">
-            <a:prstTxWarp prst="textNoShape">
-              <a:avLst/>
-            </a:prstTxWarp>
-          </a:bodyPr>
-          <a:lstStyle/>
-          <a:p>
-            <a:endParaRPr lang="ru-RU"/>
-          </a:p>
-        </p:txBody>
-      </p:sp>
-      <p:sp>
-        <p:nvSpPr>
           <p:cNvPr id="27" name="Прямоугольник 26">
             <a:extLst>
               <a:ext uri="{FF2B5EF4-FFF2-40B4-BE49-F238E27FC236}">
@@ -8105,6 +8339,248 @@
           </p:spPr>
         </p:pic>
       </p:grpSp>
+      <p:sp>
+        <p:nvSpPr>
+          <p:cNvPr id="91" name="Прямоугольник: скругленные углы 90">
+            <a:extLst>
+              <a:ext uri="{FF2B5EF4-FFF2-40B4-BE49-F238E27FC236}">
+                <a16:creationId xmlns:a16="http://schemas.microsoft.com/office/drawing/2014/main" id="{51B582E9-BF52-F7D1-39A3-296C0D7F3323}"/>
+              </a:ext>
+            </a:extLst>
+          </p:cNvPr>
+          <p:cNvSpPr/>
+          <p:nvPr/>
+        </p:nvSpPr>
+        <p:spPr>
+          <a:xfrm>
+            <a:off x="7127666" y="1748704"/>
+            <a:ext cx="4784939" cy="3732357"/>
+          </a:xfrm>
+          <a:prstGeom prst="roundRect">
+            <a:avLst>
+              <a:gd name="adj" fmla="val 4689"/>
+            </a:avLst>
+          </a:prstGeom>
+          <a:solidFill>
+            <a:schemeClr val="bg1"/>
+          </a:solidFill>
+          <a:ln>
+            <a:solidFill>
+              <a:schemeClr val="bg1"/>
+            </a:solidFill>
+          </a:ln>
+        </p:spPr>
+        <p:style>
+          <a:lnRef idx="2">
+            <a:schemeClr val="accent1">
+              <a:shade val="15000"/>
+            </a:schemeClr>
+          </a:lnRef>
+          <a:fillRef idx="1">
+            <a:schemeClr val="accent1"/>
+          </a:fillRef>
+          <a:effectRef idx="0">
+            <a:schemeClr val="accent1"/>
+          </a:effectRef>
+          <a:fontRef idx="minor">
+            <a:schemeClr val="lt1"/>
+          </a:fontRef>
+        </p:style>
+        <p:txBody>
+          <a:bodyPr rtlCol="0" anchor="ctr"/>
+          <a:lstStyle/>
+          <a:p>
+            <a:pPr algn="ctr"/>
+            <a:endParaRPr lang="ru-RU"/>
+          </a:p>
+        </p:txBody>
+      </p:sp>
+      <p:sp>
+        <p:nvSpPr>
+          <p:cNvPr id="92" name="TextBox 91">
+            <a:extLst>
+              <a:ext uri="{FF2B5EF4-FFF2-40B4-BE49-F238E27FC236}">
+                <a16:creationId xmlns:a16="http://schemas.microsoft.com/office/drawing/2014/main" id="{126ABDBE-AE03-FD30-9B5E-A4012349ED3D}"/>
+              </a:ext>
+            </a:extLst>
+          </p:cNvPr>
+          <p:cNvSpPr txBox="1"/>
+          <p:nvPr/>
+        </p:nvSpPr>
+        <p:spPr>
+          <a:xfrm>
+            <a:off x="7343715" y="1848192"/>
+            <a:ext cx="4568890" cy="3370538"/>
+          </a:xfrm>
+          <a:prstGeom prst="rect">
+            <a:avLst/>
+          </a:prstGeom>
+          <a:noFill/>
+        </p:spPr>
+        <p:txBody>
+          <a:bodyPr wrap="square">
+            <a:spAutoFit/>
+          </a:bodyPr>
+          <a:lstStyle/>
+          <a:p>
+            <a:pPr lvl="0">
+              <a:lnSpc>
+                <a:spcPct val="150000"/>
+              </a:lnSpc>
+            </a:pPr>
+            <a:r>
+              <a:rPr lang="ru-RU" dirty="0">
+                <a:solidFill>
+                  <a:srgbClr val="0E0E0E"/>
+                </a:solidFill>
+                <a:latin typeface="Comfortaa Medium" pitchFamily="2" charset="0"/>
+                <a:ea typeface="Calibri"/>
+                <a:cs typeface="Poppins"/>
+                <a:sym typeface="Poppins"/>
+              </a:rPr>
+              <a:t>Процесс управления студенческим общежитием во многих учебных заведениях сильно затруднен из-за использования устаревших бумажных методов учета, отсутствует единая система управления номерным фондом.</a:t>
+            </a:r>
+            <a:endParaRPr lang="ru-RU" sz="1800" b="0" i="0" u="none" strike="noStrike" cap="none" dirty="0">
+              <a:solidFill>
+                <a:schemeClr val="dk1"/>
+              </a:solidFill>
+              <a:latin typeface="Comfortaa Medium" pitchFamily="2" charset="0"/>
+              <a:ea typeface="Calibri"/>
+              <a:cs typeface="Calibri"/>
+              <a:sym typeface="Calibri"/>
+            </a:endParaRPr>
+          </a:p>
+        </p:txBody>
+      </p:sp>
+      <p:pic>
+        <p:nvPicPr>
+          <p:cNvPr id="2052" name="Picture 4" descr="Скачать картинки Куча бумаг, стоковые фото Куча бумаг в ...">
+            <a:extLst>
+              <a:ext uri="{FF2B5EF4-FFF2-40B4-BE49-F238E27FC236}">
+                <a16:creationId xmlns:a16="http://schemas.microsoft.com/office/drawing/2014/main" id="{46FCE9F9-7F4E-6496-A377-697DCB8F1045}"/>
+              </a:ext>
+            </a:extLst>
+          </p:cNvPr>
+          <p:cNvPicPr>
+            <a:picLocks noChangeAspect="1" noChangeArrowheads="1"/>
+          </p:cNvPicPr>
+          <p:nvPr/>
+        </p:nvPicPr>
+        <p:blipFill rotWithShape="1">
+          <a:blip r:embed="rId12">
+            <a:extLst>
+              <a:ext uri="{BEBA8EAE-BF5A-486C-A8C5-ECC9F3942E4B}">
+                <a14:imgProps xmlns:a14="http://schemas.microsoft.com/office/drawing/2010/main">
+                  <a14:imgLayer r:embed="rId13">
+                    <a14:imgEffect>
+                      <a14:backgroundRemoval t="10000" b="90000" l="10000" r="90000">
+                        <a14:foregroundMark x1="80912" y1="32432" x2="75169" y2="20120"/>
+                        <a14:foregroundMark x1="75169" y1="20120" x2="84122" y2="23423"/>
+                        <a14:foregroundMark x1="88851" y1="15015" x2="80236" y2="14715"/>
+                        <a14:foregroundMark x1="72128" y1="85886" x2="86149" y2="89189"/>
+                        <a14:foregroundMark x1="86149" y1="89189" x2="88682" y2="87387"/>
+                        <a14:foregroundMark x1="58446" y1="88589" x2="58108" y2="42643"/>
+                        <a14:foregroundMark x1="58108" y1="42643" x2="44595" y2="40841"/>
+                        <a14:foregroundMark x1="44595" y1="40841" x2="40114" y2="55131"/>
+                        <a14:foregroundMark x1="39311" y1="64993" x2="40034" y2="74174"/>
+                        <a14:foregroundMark x1="40034" y1="74174" x2="55574" y2="88889"/>
+                        <a14:foregroundMark x1="55574" y1="88889" x2="58615" y2="89189"/>
+                        <a14:foregroundMark x1="9966" y1="68168" x2="24324" y2="68468"/>
+                        <a14:foregroundMark x1="24324" y1="68468" x2="27365" y2="86486"/>
+                        <a14:foregroundMark x1="27365" y1="86486" x2="16723" y2="86186"/>
+                        <a14:foregroundMark x1="16723" y1="86186" x2="10473" y2="74775"/>
+                        <a14:foregroundMark x1="10473" y1="74775" x2="10642" y2="70270"/>
+                        <a14:backgroundMark x1="39020" y1="54955" x2="38514" y2="64865"/>
+                      </a14:backgroundRemoval>
+                    </a14:imgEffect>
+                  </a14:imgLayer>
+                </a14:imgProps>
+              </a:ext>
+              <a:ext uri="{28A0092B-C50C-407E-A947-70E740481C1C}">
+                <a14:useLocalDpi xmlns:a14="http://schemas.microsoft.com/office/drawing/2010/main" val="0"/>
+              </a:ext>
+            </a:extLst>
+          </a:blip>
+          <a:srcRect l="8022" t="10350" r="8680" b="7103"/>
+          <a:stretch>
+            <a:fillRect/>
+          </a:stretch>
+        </p:blipFill>
+        <p:spPr bwMode="auto">
+          <a:xfrm>
+            <a:off x="1231169" y="2087524"/>
+            <a:ext cx="5617102" cy="3131206"/>
+          </a:xfrm>
+          <a:prstGeom prst="rect">
+            <a:avLst/>
+          </a:prstGeom>
+          <a:noFill/>
+          <a:extLst>
+            <a:ext uri="{909E8E84-426E-40DD-AFC4-6F175D3DCCD1}">
+              <a14:hiddenFill xmlns:a14="http://schemas.microsoft.com/office/drawing/2010/main">
+                <a:solidFill>
+                  <a:srgbClr val="FFFFFF"/>
+                </a:solidFill>
+              </a14:hiddenFill>
+            </a:ext>
+          </a:extLst>
+        </p:spPr>
+      </p:pic>
+      <p:sp>
+        <p:nvSpPr>
+          <p:cNvPr id="93" name="Стрелка: вправо 92">
+            <a:extLst>
+              <a:ext uri="{FF2B5EF4-FFF2-40B4-BE49-F238E27FC236}">
+                <a16:creationId xmlns:a16="http://schemas.microsoft.com/office/drawing/2014/main" id="{89B02C87-EA98-D2D3-171E-8F8682601E35}"/>
+              </a:ext>
+            </a:extLst>
+          </p:cNvPr>
+          <p:cNvSpPr/>
+          <p:nvPr/>
+        </p:nvSpPr>
+        <p:spPr>
+          <a:xfrm>
+            <a:off x="1322686" y="5313731"/>
+            <a:ext cx="5525585" cy="167330"/>
+          </a:xfrm>
+          <a:prstGeom prst="rightArrow">
+            <a:avLst>
+              <a:gd name="adj1" fmla="val 50000"/>
+              <a:gd name="adj2" fmla="val 150859"/>
+            </a:avLst>
+          </a:prstGeom>
+          <a:solidFill>
+            <a:srgbClr val="FFA726"/>
+          </a:solidFill>
+          <a:ln>
+            <a:noFill/>
+          </a:ln>
+        </p:spPr>
+        <p:style>
+          <a:lnRef idx="2">
+            <a:schemeClr val="dk1">
+              <a:shade val="15000"/>
+            </a:schemeClr>
+          </a:lnRef>
+          <a:fillRef idx="1">
+            <a:schemeClr val="dk1"/>
+          </a:fillRef>
+          <a:effectRef idx="0">
+            <a:schemeClr val="dk1"/>
+          </a:effectRef>
+          <a:fontRef idx="minor">
+            <a:schemeClr val="lt1"/>
+          </a:fontRef>
+        </p:style>
+        <p:txBody>
+          <a:bodyPr rtlCol="0" anchor="ctr"/>
+          <a:lstStyle/>
+          <a:p>
+            <a:pPr algn="ctr"/>
+            <a:endParaRPr lang="ru-RU"/>
+          </a:p>
+        </p:txBody>
+      </p:sp>
     </p:spTree>
     <p:extLst>
       <p:ext uri="{BB962C8B-B14F-4D97-AF65-F5344CB8AC3E}">
@@ -9013,7 +9489,7 @@
             <a:lstStyle/>
             <a:p>
               <a:pPr algn="ctr"/>
-              <a:endParaRPr lang="ru-RU"/>
+              <a:endParaRPr lang="ru-RU" dirty="0"/>
             </a:p>
           </p:txBody>
         </p:sp>
@@ -9565,42 +10041,6 @@
       </p:grpSpPr>
       <p:sp>
         <p:nvSpPr>
-          <p:cNvPr id="3" name="Объект 2">
-            <a:extLst>
-              <a:ext uri="{FF2B5EF4-FFF2-40B4-BE49-F238E27FC236}">
-                <a16:creationId xmlns:a16="http://schemas.microsoft.com/office/drawing/2014/main" id="{C62A7E29-A206-A935-FD29-7D3EBC5962B9}"/>
-              </a:ext>
-            </a:extLst>
-          </p:cNvPr>
-          <p:cNvSpPr>
-            <a:spLocks noGrp="1"/>
-          </p:cNvSpPr>
-          <p:nvPr>
-            <p:ph idx="1"/>
-          </p:nvPr>
-        </p:nvSpPr>
-        <p:spPr>
-          <a:xfrm>
-            <a:off x="1041395" y="1187444"/>
-            <a:ext cx="5339740" cy="5442167"/>
-          </a:xfrm>
-        </p:spPr>
-        <p:txBody>
-          <a:bodyPr/>
-          <a:lstStyle/>
-          <a:p>
-            <a:pPr marL="0" indent="0">
-              <a:buNone/>
-            </a:pPr>
-            <a:r>
-              <a:rPr lang="ru-RU" dirty="0"/>
-              <a:t>Требуется разработать подсистему для …</a:t>
-            </a:r>
-          </a:p>
-        </p:txBody>
-      </p:sp>
-      <p:sp>
-        <p:nvSpPr>
           <p:cNvPr id="6" name="Прямоугольник 5">
             <a:extLst>
               <a:ext uri="{FF2B5EF4-FFF2-40B4-BE49-F238E27FC236}">
@@ -10379,6 +10819,346 @@
           </a:p>
         </p:txBody>
       </p:sp>
+      <p:grpSp>
+        <p:nvGrpSpPr>
+          <p:cNvPr id="26" name="Группа 25">
+            <a:extLst>
+              <a:ext uri="{FF2B5EF4-FFF2-40B4-BE49-F238E27FC236}">
+                <a16:creationId xmlns:a16="http://schemas.microsoft.com/office/drawing/2014/main" id="{000D640C-E531-52FB-47F5-107B814FC764}"/>
+              </a:ext>
+            </a:extLst>
+          </p:cNvPr>
+          <p:cNvGrpSpPr/>
+          <p:nvPr/>
+        </p:nvGrpSpPr>
+        <p:grpSpPr>
+          <a:xfrm>
+            <a:off x="861468" y="1014651"/>
+            <a:ext cx="11165127" cy="914400"/>
+            <a:chOff x="902503" y="5281007"/>
+            <a:chExt cx="11165127" cy="914400"/>
+          </a:xfrm>
+        </p:grpSpPr>
+        <p:sp>
+          <p:nvSpPr>
+            <p:cNvPr id="24" name="Прямоугольник: скругленные углы 23">
+              <a:extLst>
+                <a:ext uri="{FF2B5EF4-FFF2-40B4-BE49-F238E27FC236}">
+                  <a16:creationId xmlns:a16="http://schemas.microsoft.com/office/drawing/2014/main" id="{4B02BAC1-B22E-517E-186A-FB73DF66B5DD}"/>
+                </a:ext>
+              </a:extLst>
+            </p:cNvPr>
+            <p:cNvSpPr/>
+            <p:nvPr/>
+          </p:nvSpPr>
+          <p:spPr>
+            <a:xfrm>
+              <a:off x="923021" y="5281007"/>
+              <a:ext cx="11124091" cy="914400"/>
+            </a:xfrm>
+            <a:prstGeom prst="roundRect">
+              <a:avLst>
+                <a:gd name="adj" fmla="val 4689"/>
+              </a:avLst>
+            </a:prstGeom>
+            <a:solidFill>
+              <a:schemeClr val="bg1"/>
+            </a:solidFill>
+            <a:ln>
+              <a:solidFill>
+                <a:schemeClr val="bg1"/>
+              </a:solidFill>
+            </a:ln>
+          </p:spPr>
+          <p:style>
+            <a:lnRef idx="2">
+              <a:schemeClr val="accent1">
+                <a:shade val="15000"/>
+              </a:schemeClr>
+            </a:lnRef>
+            <a:fillRef idx="1">
+              <a:schemeClr val="accent1"/>
+            </a:fillRef>
+            <a:effectRef idx="0">
+              <a:schemeClr val="accent1"/>
+            </a:effectRef>
+            <a:fontRef idx="minor">
+              <a:schemeClr val="lt1"/>
+            </a:fontRef>
+          </p:style>
+          <p:txBody>
+            <a:bodyPr rtlCol="0" anchor="ctr"/>
+            <a:lstStyle/>
+            <a:p>
+              <a:pPr algn="ctr"/>
+              <a:endParaRPr lang="ru-RU" dirty="0"/>
+            </a:p>
+          </p:txBody>
+        </p:sp>
+        <p:grpSp>
+          <p:nvGrpSpPr>
+            <p:cNvPr id="25" name="Группа 24">
+              <a:extLst>
+                <a:ext uri="{FF2B5EF4-FFF2-40B4-BE49-F238E27FC236}">
+                  <a16:creationId xmlns:a16="http://schemas.microsoft.com/office/drawing/2014/main" id="{ECCE9956-BE87-634D-FD3E-7704307BE1D2}"/>
+                </a:ext>
+              </a:extLst>
+            </p:cNvPr>
+            <p:cNvGrpSpPr/>
+            <p:nvPr/>
+          </p:nvGrpSpPr>
+          <p:grpSpPr>
+            <a:xfrm>
+              <a:off x="902503" y="5368875"/>
+              <a:ext cx="11165127" cy="738664"/>
+              <a:chOff x="902503" y="5331316"/>
+              <a:chExt cx="11165127" cy="738664"/>
+            </a:xfrm>
+          </p:grpSpPr>
+          <p:sp>
+            <p:nvSpPr>
+              <p:cNvPr id="84" name="TextBox 83">
+                <a:extLst>
+                  <a:ext uri="{FF2B5EF4-FFF2-40B4-BE49-F238E27FC236}">
+                    <a16:creationId xmlns:a16="http://schemas.microsoft.com/office/drawing/2014/main" id="{FFEF581E-062D-5219-D5E2-E90588C873A5}"/>
+                  </a:ext>
+                </a:extLst>
+              </p:cNvPr>
+              <p:cNvSpPr txBox="1"/>
+              <p:nvPr/>
+            </p:nvSpPr>
+            <p:spPr>
+              <a:xfrm>
+                <a:off x="902503" y="5331316"/>
+                <a:ext cx="11124091" cy="369332"/>
+              </a:xfrm>
+              <a:prstGeom prst="rect">
+                <a:avLst/>
+              </a:prstGeom>
+              <a:noFill/>
+            </p:spPr>
+            <p:txBody>
+              <a:bodyPr wrap="square">
+                <a:spAutoFit/>
+              </a:bodyPr>
+              <a:lstStyle/>
+              <a:p>
+                <a:pPr marL="0" marR="0" lvl="0" indent="0" algn="ctr" rtl="0">
+                  <a:spcBef>
+                    <a:spcPts val="0"/>
+                  </a:spcBef>
+                  <a:spcAft>
+                    <a:spcPts val="0"/>
+                  </a:spcAft>
+                  <a:buNone/>
+                </a:pPr>
+                <a:r>
+                  <a:rPr lang="ru-RU" sz="1800" b="1" i="0" u="none" strike="noStrike" cap="none" dirty="0">
+                    <a:solidFill>
+                      <a:srgbClr val="0E0E0E"/>
+                    </a:solidFill>
+                    <a:latin typeface="Comfortaa SemiBold" pitchFamily="2" charset="0"/>
+                    <a:ea typeface="Pacifico"/>
+                    <a:cs typeface="Pacifico"/>
+                    <a:sym typeface="Pacifico"/>
+                  </a:rPr>
+                  <a:t>Создание веб</a:t>
+                </a:r>
+                <a:r>
+                  <a:rPr lang="en-US" sz="1800" b="1" i="0" u="none" strike="noStrike" cap="none" dirty="0">
+                    <a:solidFill>
+                      <a:srgbClr val="0E0E0E"/>
+                    </a:solidFill>
+                    <a:latin typeface="Comfortaa SemiBold" pitchFamily="2" charset="0"/>
+                    <a:ea typeface="Pacifico"/>
+                    <a:cs typeface="Pacifico"/>
+                    <a:sym typeface="Pacifico"/>
+                  </a:rPr>
+                  <a:t>-</a:t>
+                </a:r>
+                <a:r>
+                  <a:rPr lang="ru-RU" sz="1800" b="1" i="0" u="none" strike="noStrike" cap="none" dirty="0">
+                    <a:solidFill>
+                      <a:srgbClr val="0E0E0E"/>
+                    </a:solidFill>
+                    <a:latin typeface="Comfortaa SemiBold" pitchFamily="2" charset="0"/>
+                    <a:ea typeface="Pacifico"/>
+                    <a:cs typeface="Pacifico"/>
+                    <a:sym typeface="Pacifico"/>
+                  </a:rPr>
+                  <a:t>приложения</a:t>
+                </a:r>
+                <a:endParaRPr lang="ru-RU" sz="1800" b="1" i="0" u="none" strike="noStrike" cap="none" dirty="0">
+                  <a:solidFill>
+                    <a:schemeClr val="dk1"/>
+                  </a:solidFill>
+                  <a:latin typeface="Comfortaa SemiBold" pitchFamily="2" charset="0"/>
+                  <a:ea typeface="Calibri"/>
+                  <a:cs typeface="Calibri"/>
+                  <a:sym typeface="Calibri"/>
+                </a:endParaRPr>
+              </a:p>
+            </p:txBody>
+          </p:sp>
+          <p:sp>
+            <p:nvSpPr>
+              <p:cNvPr id="86" name="TextBox 85">
+                <a:extLst>
+                  <a:ext uri="{FF2B5EF4-FFF2-40B4-BE49-F238E27FC236}">
+                    <a16:creationId xmlns:a16="http://schemas.microsoft.com/office/drawing/2014/main" id="{AF0EA88D-FEF7-72B0-DCF0-3D156DDF4C27}"/>
+                  </a:ext>
+                </a:extLst>
+              </p:cNvPr>
+              <p:cNvSpPr txBox="1"/>
+              <p:nvPr/>
+            </p:nvSpPr>
+            <p:spPr>
+              <a:xfrm>
+                <a:off x="943539" y="5700648"/>
+                <a:ext cx="11124091" cy="369332"/>
+              </a:xfrm>
+              <a:prstGeom prst="rect">
+                <a:avLst/>
+              </a:prstGeom>
+              <a:noFill/>
+            </p:spPr>
+            <p:txBody>
+              <a:bodyPr wrap="square">
+                <a:spAutoFit/>
+              </a:bodyPr>
+              <a:lstStyle/>
+              <a:p>
+                <a:pPr marL="0" marR="0" lvl="0" indent="0" algn="ctr" rtl="0">
+                  <a:spcBef>
+                    <a:spcPts val="0"/>
+                  </a:spcBef>
+                  <a:spcAft>
+                    <a:spcPts val="0"/>
+                  </a:spcAft>
+                  <a:buNone/>
+                </a:pPr>
+                <a:r>
+                  <a:rPr lang="ru-RU" dirty="0">
+                    <a:solidFill>
+                      <a:srgbClr val="0E0E0E"/>
+                    </a:solidFill>
+                    <a:latin typeface="Calibri"/>
+                    <a:ea typeface="Calibri"/>
+                    <a:cs typeface="Poppins"/>
+                    <a:sym typeface="Poppins"/>
+                  </a:rPr>
+                  <a:t>к</a:t>
+                </a:r>
+                <a:r>
+                  <a:rPr lang="ru-RU" sz="1800" dirty="0">
+                    <a:solidFill>
+                      <a:srgbClr val="0E0E0E"/>
+                    </a:solidFill>
+                    <a:latin typeface="Calibri"/>
+                    <a:ea typeface="Calibri"/>
+                    <a:cs typeface="Poppins"/>
+                    <a:sym typeface="Poppins"/>
+                  </a:rPr>
+                  <a:t>оторое будет обеспечивать упрощенную форму учета </a:t>
+                </a:r>
+                <a:r>
+                  <a:rPr lang="ru-RU" dirty="0">
+                    <a:solidFill>
+                      <a:srgbClr val="0E0E0E"/>
+                    </a:solidFill>
+                    <a:latin typeface="Calibri"/>
+                    <a:ea typeface="Calibri"/>
+                    <a:cs typeface="Poppins"/>
+                    <a:sym typeface="Poppins"/>
+                  </a:rPr>
+                  <a:t>данных о студентах проживающих в общежитии</a:t>
+                </a:r>
+                <a:endParaRPr lang="ru-RU" sz="1800" b="0" i="0" u="none" strike="noStrike" cap="none" dirty="0">
+                  <a:solidFill>
+                    <a:schemeClr val="dk1"/>
+                  </a:solidFill>
+                  <a:latin typeface="Calibri"/>
+                  <a:ea typeface="Calibri"/>
+                  <a:cs typeface="Calibri"/>
+                  <a:sym typeface="Calibri"/>
+                </a:endParaRPr>
+              </a:p>
+            </p:txBody>
+          </p:sp>
+        </p:grpSp>
+      </p:grpSp>
+      <p:pic>
+        <p:nvPicPr>
+          <p:cNvPr id="88" name="Рисунок 87" descr="Изображение выглядит как текст, Мобильный телефон, снимок экрана, Мобильное устройство&#10;&#10;Содержимое, созданное искусственным интеллектом, может быть неверным.">
+            <a:extLst>
+              <a:ext uri="{FF2B5EF4-FFF2-40B4-BE49-F238E27FC236}">
+                <a16:creationId xmlns:a16="http://schemas.microsoft.com/office/drawing/2014/main" id="{65A9494A-9FE4-7442-8CBE-86A937BFB350}"/>
+              </a:ext>
+            </a:extLst>
+          </p:cNvPr>
+          <p:cNvPicPr>
+            <a:picLocks noChangeAspect="1"/>
+          </p:cNvPicPr>
+          <p:nvPr/>
+        </p:nvPicPr>
+        <p:blipFill>
+          <a:blip r:embed="rId12">
+            <a:extLst>
+              <a:ext uri="{28A0092B-C50C-407E-A947-70E740481C1C}">
+                <a14:useLocalDpi xmlns:a14="http://schemas.microsoft.com/office/drawing/2010/main" val="0"/>
+              </a:ext>
+            </a:extLst>
+          </a:blip>
+          <a:stretch>
+            <a:fillRect/>
+          </a:stretch>
+        </p:blipFill>
+        <p:spPr>
+          <a:xfrm>
+            <a:off x="8585218" y="2126481"/>
+            <a:ext cx="2200995" cy="4499810"/>
+          </a:xfrm>
+          <a:prstGeom prst="rect">
+            <a:avLst/>
+          </a:prstGeom>
+        </p:spPr>
+      </p:pic>
+      <p:pic>
+        <p:nvPicPr>
+          <p:cNvPr id="38" name="Рисунок 37" descr="Изображение выглядит как текст, снимок экрана, программное обеспечение, мультимедиа&#10;&#10;Содержимое, созданное искусственным интеллектом, может быть неверным.">
+            <a:extLst>
+              <a:ext uri="{FF2B5EF4-FFF2-40B4-BE49-F238E27FC236}">
+                <a16:creationId xmlns:a16="http://schemas.microsoft.com/office/drawing/2014/main" id="{8B94A15A-73E2-596E-2234-991E2071FEC4}"/>
+              </a:ext>
+            </a:extLst>
+          </p:cNvPr>
+          <p:cNvPicPr>
+            <a:picLocks noChangeAspect="1"/>
+          </p:cNvPicPr>
+          <p:nvPr/>
+        </p:nvPicPr>
+        <p:blipFill>
+          <a:blip r:embed="rId13">
+            <a:extLst>
+              <a:ext uri="{28A0092B-C50C-407E-A947-70E740481C1C}">
+                <a14:useLocalDpi xmlns:a14="http://schemas.microsoft.com/office/drawing/2010/main" val="0"/>
+              </a:ext>
+            </a:extLst>
+          </a:blip>
+          <a:stretch>
+            <a:fillRect/>
+          </a:stretch>
+        </p:blipFill>
+        <p:spPr>
+          <a:xfrm>
+            <a:off x="1798752" y="2126481"/>
+            <a:ext cx="6318882" cy="4499810"/>
+          </a:xfrm>
+          <a:prstGeom prst="rect">
+            <a:avLst/>
+          </a:prstGeom>
+        </p:spPr>
+      </p:pic>
     </p:spTree>
     <p:extLst>
       <p:ext uri="{BB962C8B-B14F-4D97-AF65-F5344CB8AC3E}">
@@ -10435,48 +11215,6 @@
           <a:chExt cx="0" cy="0"/>
         </a:xfrm>
       </p:grpSpPr>
-      <p:sp>
-        <p:nvSpPr>
-          <p:cNvPr id="3" name="Объект 2">
-            <a:extLst>
-              <a:ext uri="{FF2B5EF4-FFF2-40B4-BE49-F238E27FC236}">
-                <a16:creationId xmlns:a16="http://schemas.microsoft.com/office/drawing/2014/main" id="{D9D41A2A-7545-1501-2164-F9EE0A29B797}"/>
-              </a:ext>
-            </a:extLst>
-          </p:cNvPr>
-          <p:cNvSpPr>
-            <a:spLocks noGrp="1"/>
-          </p:cNvSpPr>
-          <p:nvPr>
-            <p:ph idx="1"/>
-          </p:nvPr>
-        </p:nvSpPr>
-        <p:spPr>
-          <a:xfrm>
-            <a:off x="838200" y="1825625"/>
-            <a:ext cx="10515600" cy="2650122"/>
-          </a:xfrm>
-        </p:spPr>
-        <p:txBody>
-          <a:bodyPr/>
-          <a:lstStyle/>
-          <a:p>
-            <a:pPr marL="0" indent="0">
-              <a:buNone/>
-            </a:pPr>
-            <a:r>
-              <a:rPr lang="ru-RU" b="1" dirty="0"/>
-              <a:t>Какие этапы разработки нужно выполнить для достижения цели? </a:t>
-            </a:r>
-          </a:p>
-          <a:p>
-            <a:r>
-              <a:rPr lang="ru-RU" dirty="0"/>
-              <a:t>Можно перечислить этапы жизненного цикла ПО (проанализировать, спроектировать, разработать, протестировать, разработать документацию, … – с уточнениями, какие именно задачи требовалось решить)</a:t>
-            </a:r>
-          </a:p>
-        </p:txBody>
-      </p:sp>
       <p:sp>
         <p:nvSpPr>
           <p:cNvPr id="11" name="Прямоугольник 10">
@@ -11257,6 +11995,1782 @@
           </a:p>
         </p:txBody>
       </p:sp>
+      <p:grpSp>
+        <p:nvGrpSpPr>
+          <p:cNvPr id="34" name="Группа 33">
+            <a:extLst>
+              <a:ext uri="{FF2B5EF4-FFF2-40B4-BE49-F238E27FC236}">
+                <a16:creationId xmlns:a16="http://schemas.microsoft.com/office/drawing/2014/main" id="{2263EF27-B39A-9D88-784C-0C80A129C85A}"/>
+              </a:ext>
+            </a:extLst>
+          </p:cNvPr>
+          <p:cNvGrpSpPr/>
+          <p:nvPr/>
+        </p:nvGrpSpPr>
+        <p:grpSpPr>
+          <a:xfrm>
+            <a:off x="952500" y="1187444"/>
+            <a:ext cx="5322678" cy="936757"/>
+            <a:chOff x="1041393" y="3810289"/>
+            <a:chExt cx="5322678" cy="936757"/>
+          </a:xfrm>
+        </p:grpSpPr>
+        <p:sp>
+          <p:nvSpPr>
+            <p:cNvPr id="35" name="Прямоугольник: скругленные углы 34">
+              <a:extLst>
+                <a:ext uri="{FF2B5EF4-FFF2-40B4-BE49-F238E27FC236}">
+                  <a16:creationId xmlns:a16="http://schemas.microsoft.com/office/drawing/2014/main" id="{92C194BA-5EF5-48BB-CE7F-F40D7A20A382}"/>
+                </a:ext>
+              </a:extLst>
+            </p:cNvPr>
+            <p:cNvSpPr/>
+            <p:nvPr/>
+          </p:nvSpPr>
+          <p:spPr>
+            <a:xfrm>
+              <a:off x="1041393" y="3810289"/>
+              <a:ext cx="5322678" cy="936757"/>
+            </a:xfrm>
+            <a:prstGeom prst="roundRect">
+              <a:avLst>
+                <a:gd name="adj" fmla="val 4689"/>
+              </a:avLst>
+            </a:prstGeom>
+            <a:solidFill>
+              <a:schemeClr val="bg1"/>
+            </a:solidFill>
+            <a:ln>
+              <a:solidFill>
+                <a:schemeClr val="bg1"/>
+              </a:solidFill>
+            </a:ln>
+          </p:spPr>
+          <p:style>
+            <a:lnRef idx="2">
+              <a:schemeClr val="accent1">
+                <a:shade val="15000"/>
+              </a:schemeClr>
+            </a:lnRef>
+            <a:fillRef idx="1">
+              <a:schemeClr val="accent1"/>
+            </a:fillRef>
+            <a:effectRef idx="0">
+              <a:schemeClr val="accent1"/>
+            </a:effectRef>
+            <a:fontRef idx="minor">
+              <a:schemeClr val="lt1"/>
+            </a:fontRef>
+          </p:style>
+          <p:txBody>
+            <a:bodyPr rtlCol="0" anchor="ctr"/>
+            <a:lstStyle/>
+            <a:p>
+              <a:pPr algn="ctr"/>
+              <a:endParaRPr lang="ru-RU" dirty="0"/>
+            </a:p>
+          </p:txBody>
+        </p:sp>
+        <p:sp>
+          <p:nvSpPr>
+            <p:cNvPr id="36" name="TextBox 35">
+              <a:extLst>
+                <a:ext uri="{FF2B5EF4-FFF2-40B4-BE49-F238E27FC236}">
+                  <a16:creationId xmlns:a16="http://schemas.microsoft.com/office/drawing/2014/main" id="{2882F559-3189-FD6D-CC17-85E342FDFB88}"/>
+                </a:ext>
+              </a:extLst>
+            </p:cNvPr>
+            <p:cNvSpPr txBox="1"/>
+            <p:nvPr/>
+          </p:nvSpPr>
+          <p:spPr>
+            <a:xfrm>
+              <a:off x="1823834" y="4094001"/>
+              <a:ext cx="4272166" cy="369332"/>
+            </a:xfrm>
+            <a:prstGeom prst="rect">
+              <a:avLst/>
+            </a:prstGeom>
+            <a:noFill/>
+          </p:spPr>
+          <p:txBody>
+            <a:bodyPr wrap="square">
+              <a:spAutoFit/>
+            </a:bodyPr>
+            <a:lstStyle/>
+            <a:p>
+              <a:pPr lvl="0"/>
+              <a:r>
+                <a:rPr lang="ru-RU" dirty="0">
+                  <a:solidFill>
+                    <a:srgbClr val="0E0E0E"/>
+                  </a:solidFill>
+                  <a:latin typeface="Comfortaa Medium" pitchFamily="2" charset="0"/>
+                  <a:ea typeface="Pacifico"/>
+                  <a:cs typeface="Poppins" panose="020B0604020202020204" charset="0"/>
+                  <a:sym typeface="Pacifico"/>
+                </a:rPr>
+                <a:t>Анализ целевой аудитории</a:t>
+              </a:r>
+            </a:p>
+          </p:txBody>
+        </p:sp>
+        <p:sp>
+          <p:nvSpPr>
+            <p:cNvPr id="37" name="Овал 36">
+              <a:extLst>
+                <a:ext uri="{FF2B5EF4-FFF2-40B4-BE49-F238E27FC236}">
+                  <a16:creationId xmlns:a16="http://schemas.microsoft.com/office/drawing/2014/main" id="{37CC72B0-36C1-57A8-7F89-1E194456A5D6}"/>
+                </a:ext>
+              </a:extLst>
+            </p:cNvPr>
+            <p:cNvSpPr/>
+            <p:nvPr/>
+          </p:nvSpPr>
+          <p:spPr>
+            <a:xfrm>
+              <a:off x="1217220" y="3999274"/>
+              <a:ext cx="558787" cy="558787"/>
+            </a:xfrm>
+            <a:prstGeom prst="ellipse">
+              <a:avLst/>
+            </a:prstGeom>
+            <a:solidFill>
+              <a:srgbClr val="FFA726"/>
+            </a:solidFill>
+            <a:ln>
+              <a:noFill/>
+            </a:ln>
+          </p:spPr>
+          <p:style>
+            <a:lnRef idx="2">
+              <a:schemeClr val="accent1">
+                <a:shade val="15000"/>
+              </a:schemeClr>
+            </a:lnRef>
+            <a:fillRef idx="1">
+              <a:schemeClr val="accent1"/>
+            </a:fillRef>
+            <a:effectRef idx="0">
+              <a:schemeClr val="accent1"/>
+            </a:effectRef>
+            <a:fontRef idx="minor">
+              <a:schemeClr val="lt1"/>
+            </a:fontRef>
+          </p:style>
+          <p:txBody>
+            <a:bodyPr rtlCol="0" anchor="ctr"/>
+            <a:lstStyle/>
+            <a:p>
+              <a:pPr algn="ctr"/>
+              <a:endParaRPr lang="ru-RU" sz="1400" dirty="0">
+                <a:latin typeface="Bahnschrift" panose="020B0502040204020203" pitchFamily="34" charset="0"/>
+              </a:endParaRPr>
+            </a:p>
+          </p:txBody>
+        </p:sp>
+        <p:sp>
+          <p:nvSpPr>
+            <p:cNvPr id="38" name="TextBox 37">
+              <a:extLst>
+                <a:ext uri="{FF2B5EF4-FFF2-40B4-BE49-F238E27FC236}">
+                  <a16:creationId xmlns:a16="http://schemas.microsoft.com/office/drawing/2014/main" id="{F983E0A2-6B81-46A5-B265-C1EA26B6798E}"/>
+                </a:ext>
+              </a:extLst>
+            </p:cNvPr>
+            <p:cNvSpPr txBox="1"/>
+            <p:nvPr/>
+          </p:nvSpPr>
+          <p:spPr>
+            <a:xfrm>
+              <a:off x="1169392" y="4109390"/>
+              <a:ext cx="654442" cy="338554"/>
+            </a:xfrm>
+            <a:prstGeom prst="rect">
+              <a:avLst/>
+            </a:prstGeom>
+            <a:noFill/>
+          </p:spPr>
+          <p:txBody>
+            <a:bodyPr wrap="square">
+              <a:spAutoFit/>
+            </a:bodyPr>
+            <a:lstStyle/>
+            <a:p>
+              <a:pPr algn="ctr"/>
+              <a:r>
+                <a:rPr lang="ru-RU" sz="1600" dirty="0">
+                  <a:solidFill>
+                    <a:schemeClr val="bg1"/>
+                  </a:solidFill>
+                  <a:latin typeface="Comfortaa Medium" pitchFamily="2" charset="0"/>
+                </a:rPr>
+                <a:t>1</a:t>
+              </a:r>
+              <a:endParaRPr lang="ru-RU" dirty="0">
+                <a:solidFill>
+                  <a:schemeClr val="bg1"/>
+                </a:solidFill>
+                <a:latin typeface="Comfortaa Medium" pitchFamily="2" charset="0"/>
+              </a:endParaRPr>
+            </a:p>
+          </p:txBody>
+        </p:sp>
+      </p:grpSp>
+      <p:grpSp>
+        <p:nvGrpSpPr>
+          <p:cNvPr id="39" name="Группа 38">
+            <a:extLst>
+              <a:ext uri="{FF2B5EF4-FFF2-40B4-BE49-F238E27FC236}">
+                <a16:creationId xmlns:a16="http://schemas.microsoft.com/office/drawing/2014/main" id="{5A63F0CE-C1CC-70F9-F254-34F0EF7ECB05}"/>
+              </a:ext>
+            </a:extLst>
+          </p:cNvPr>
+          <p:cNvGrpSpPr/>
+          <p:nvPr/>
+        </p:nvGrpSpPr>
+        <p:grpSpPr>
+          <a:xfrm>
+            <a:off x="952500" y="2530430"/>
+            <a:ext cx="5322678" cy="936757"/>
+            <a:chOff x="1041393" y="3810289"/>
+            <a:chExt cx="5322678" cy="936757"/>
+          </a:xfrm>
+        </p:grpSpPr>
+        <p:sp>
+          <p:nvSpPr>
+            <p:cNvPr id="40" name="Прямоугольник: скругленные углы 39">
+              <a:extLst>
+                <a:ext uri="{FF2B5EF4-FFF2-40B4-BE49-F238E27FC236}">
+                  <a16:creationId xmlns:a16="http://schemas.microsoft.com/office/drawing/2014/main" id="{6952F47D-2E87-8CE6-29F6-A324D10A5AA1}"/>
+                </a:ext>
+              </a:extLst>
+            </p:cNvPr>
+            <p:cNvSpPr/>
+            <p:nvPr/>
+          </p:nvSpPr>
+          <p:spPr>
+            <a:xfrm>
+              <a:off x="1041393" y="3810289"/>
+              <a:ext cx="5322678" cy="936757"/>
+            </a:xfrm>
+            <a:prstGeom prst="roundRect">
+              <a:avLst>
+                <a:gd name="adj" fmla="val 4689"/>
+              </a:avLst>
+            </a:prstGeom>
+            <a:solidFill>
+              <a:schemeClr val="bg1"/>
+            </a:solidFill>
+            <a:ln>
+              <a:solidFill>
+                <a:schemeClr val="bg1"/>
+              </a:solidFill>
+            </a:ln>
+          </p:spPr>
+          <p:style>
+            <a:lnRef idx="2">
+              <a:schemeClr val="accent1">
+                <a:shade val="15000"/>
+              </a:schemeClr>
+            </a:lnRef>
+            <a:fillRef idx="1">
+              <a:schemeClr val="accent1"/>
+            </a:fillRef>
+            <a:effectRef idx="0">
+              <a:schemeClr val="accent1"/>
+            </a:effectRef>
+            <a:fontRef idx="minor">
+              <a:schemeClr val="lt1"/>
+            </a:fontRef>
+          </p:style>
+          <p:txBody>
+            <a:bodyPr rtlCol="0" anchor="ctr"/>
+            <a:lstStyle/>
+            <a:p>
+              <a:pPr algn="ctr"/>
+              <a:endParaRPr lang="ru-RU" dirty="0"/>
+            </a:p>
+          </p:txBody>
+        </p:sp>
+        <p:sp>
+          <p:nvSpPr>
+            <p:cNvPr id="41" name="TextBox 40">
+              <a:extLst>
+                <a:ext uri="{FF2B5EF4-FFF2-40B4-BE49-F238E27FC236}">
+                  <a16:creationId xmlns:a16="http://schemas.microsoft.com/office/drawing/2014/main" id="{1F6D3810-38BB-1761-006F-0474B15F1129}"/>
+                </a:ext>
+              </a:extLst>
+            </p:cNvPr>
+            <p:cNvSpPr txBox="1"/>
+            <p:nvPr/>
+          </p:nvSpPr>
+          <p:spPr>
+            <a:xfrm>
+              <a:off x="1823834" y="4094001"/>
+              <a:ext cx="4272166" cy="369332"/>
+            </a:xfrm>
+            <a:prstGeom prst="rect">
+              <a:avLst/>
+            </a:prstGeom>
+            <a:noFill/>
+          </p:spPr>
+          <p:txBody>
+            <a:bodyPr wrap="square">
+              <a:spAutoFit/>
+            </a:bodyPr>
+            <a:lstStyle/>
+            <a:p>
+              <a:pPr lvl="0"/>
+              <a:r>
+                <a:rPr lang="ru-RU" dirty="0">
+                  <a:solidFill>
+                    <a:srgbClr val="0E0E0E"/>
+                  </a:solidFill>
+                  <a:latin typeface="Comfortaa Medium" pitchFamily="2" charset="0"/>
+                  <a:ea typeface="Pacifico"/>
+                  <a:cs typeface="Poppins" panose="020B0604020202020204" charset="0"/>
+                  <a:sym typeface="Pacifico"/>
+                </a:rPr>
+                <a:t>Анализ потребностей</a:t>
+              </a:r>
+            </a:p>
+          </p:txBody>
+        </p:sp>
+        <p:sp>
+          <p:nvSpPr>
+            <p:cNvPr id="42" name="Овал 41">
+              <a:extLst>
+                <a:ext uri="{FF2B5EF4-FFF2-40B4-BE49-F238E27FC236}">
+                  <a16:creationId xmlns:a16="http://schemas.microsoft.com/office/drawing/2014/main" id="{B873F9C1-4DAC-FFC7-9855-93FD64CFA06A}"/>
+                </a:ext>
+              </a:extLst>
+            </p:cNvPr>
+            <p:cNvSpPr/>
+            <p:nvPr/>
+          </p:nvSpPr>
+          <p:spPr>
+            <a:xfrm>
+              <a:off x="1217220" y="3999274"/>
+              <a:ext cx="558787" cy="558787"/>
+            </a:xfrm>
+            <a:prstGeom prst="ellipse">
+              <a:avLst/>
+            </a:prstGeom>
+            <a:solidFill>
+              <a:srgbClr val="FFA726"/>
+            </a:solidFill>
+            <a:ln>
+              <a:noFill/>
+            </a:ln>
+          </p:spPr>
+          <p:style>
+            <a:lnRef idx="2">
+              <a:schemeClr val="accent1">
+                <a:shade val="15000"/>
+              </a:schemeClr>
+            </a:lnRef>
+            <a:fillRef idx="1">
+              <a:schemeClr val="accent1"/>
+            </a:fillRef>
+            <a:effectRef idx="0">
+              <a:schemeClr val="accent1"/>
+            </a:effectRef>
+            <a:fontRef idx="minor">
+              <a:schemeClr val="lt1"/>
+            </a:fontRef>
+          </p:style>
+          <p:txBody>
+            <a:bodyPr rtlCol="0" anchor="ctr"/>
+            <a:lstStyle/>
+            <a:p>
+              <a:pPr algn="ctr"/>
+              <a:endParaRPr lang="ru-RU" sz="1400" dirty="0">
+                <a:latin typeface="Bahnschrift" panose="020B0502040204020203" pitchFamily="34" charset="0"/>
+              </a:endParaRPr>
+            </a:p>
+          </p:txBody>
+        </p:sp>
+        <p:sp>
+          <p:nvSpPr>
+            <p:cNvPr id="43" name="TextBox 42">
+              <a:extLst>
+                <a:ext uri="{FF2B5EF4-FFF2-40B4-BE49-F238E27FC236}">
+                  <a16:creationId xmlns:a16="http://schemas.microsoft.com/office/drawing/2014/main" id="{7CA39B19-AD61-34FC-D388-1E9203487C3E}"/>
+                </a:ext>
+              </a:extLst>
+            </p:cNvPr>
+            <p:cNvSpPr txBox="1"/>
+            <p:nvPr/>
+          </p:nvSpPr>
+          <p:spPr>
+            <a:xfrm>
+              <a:off x="1169392" y="4109390"/>
+              <a:ext cx="654442" cy="338554"/>
+            </a:xfrm>
+            <a:prstGeom prst="rect">
+              <a:avLst/>
+            </a:prstGeom>
+            <a:noFill/>
+          </p:spPr>
+          <p:txBody>
+            <a:bodyPr wrap="square">
+              <a:spAutoFit/>
+            </a:bodyPr>
+            <a:lstStyle/>
+            <a:p>
+              <a:pPr algn="ctr"/>
+              <a:r>
+                <a:rPr lang="ru-RU" sz="1600" dirty="0">
+                  <a:solidFill>
+                    <a:schemeClr val="bg1"/>
+                  </a:solidFill>
+                  <a:latin typeface="Comfortaa Medium" pitchFamily="2" charset="0"/>
+                </a:rPr>
+                <a:t>2</a:t>
+              </a:r>
+              <a:endParaRPr lang="ru-RU" dirty="0">
+                <a:solidFill>
+                  <a:schemeClr val="bg1"/>
+                </a:solidFill>
+                <a:latin typeface="Comfortaa Medium" pitchFamily="2" charset="0"/>
+              </a:endParaRPr>
+            </a:p>
+          </p:txBody>
+        </p:sp>
+      </p:grpSp>
+      <p:grpSp>
+        <p:nvGrpSpPr>
+          <p:cNvPr id="56" name="Группа 55">
+            <a:extLst>
+              <a:ext uri="{FF2B5EF4-FFF2-40B4-BE49-F238E27FC236}">
+                <a16:creationId xmlns:a16="http://schemas.microsoft.com/office/drawing/2014/main" id="{B3A554DB-15EF-3D4D-D54C-0C50BDCE5843}"/>
+              </a:ext>
+            </a:extLst>
+          </p:cNvPr>
+          <p:cNvGrpSpPr/>
+          <p:nvPr/>
+        </p:nvGrpSpPr>
+        <p:grpSpPr>
+          <a:xfrm>
+            <a:off x="952500" y="3873416"/>
+            <a:ext cx="5322678" cy="936757"/>
+            <a:chOff x="1041393" y="3810289"/>
+            <a:chExt cx="5322678" cy="936757"/>
+          </a:xfrm>
+        </p:grpSpPr>
+        <p:sp>
+          <p:nvSpPr>
+            <p:cNvPr id="57" name="Прямоугольник: скругленные углы 56">
+              <a:extLst>
+                <a:ext uri="{FF2B5EF4-FFF2-40B4-BE49-F238E27FC236}">
+                  <a16:creationId xmlns:a16="http://schemas.microsoft.com/office/drawing/2014/main" id="{C9430649-466A-CBF3-28E0-E630717422D1}"/>
+                </a:ext>
+              </a:extLst>
+            </p:cNvPr>
+            <p:cNvSpPr/>
+            <p:nvPr/>
+          </p:nvSpPr>
+          <p:spPr>
+            <a:xfrm>
+              <a:off x="1041393" y="3810289"/>
+              <a:ext cx="5322678" cy="936757"/>
+            </a:xfrm>
+            <a:prstGeom prst="roundRect">
+              <a:avLst>
+                <a:gd name="adj" fmla="val 4689"/>
+              </a:avLst>
+            </a:prstGeom>
+            <a:solidFill>
+              <a:schemeClr val="bg1"/>
+            </a:solidFill>
+            <a:ln>
+              <a:solidFill>
+                <a:schemeClr val="bg1"/>
+              </a:solidFill>
+            </a:ln>
+          </p:spPr>
+          <p:style>
+            <a:lnRef idx="2">
+              <a:schemeClr val="accent1">
+                <a:shade val="15000"/>
+              </a:schemeClr>
+            </a:lnRef>
+            <a:fillRef idx="1">
+              <a:schemeClr val="accent1"/>
+            </a:fillRef>
+            <a:effectRef idx="0">
+              <a:schemeClr val="accent1"/>
+            </a:effectRef>
+            <a:fontRef idx="minor">
+              <a:schemeClr val="lt1"/>
+            </a:fontRef>
+          </p:style>
+          <p:txBody>
+            <a:bodyPr rtlCol="0" anchor="ctr"/>
+            <a:lstStyle/>
+            <a:p>
+              <a:pPr algn="ctr"/>
+              <a:endParaRPr lang="ru-RU" dirty="0"/>
+            </a:p>
+          </p:txBody>
+        </p:sp>
+        <p:sp>
+          <p:nvSpPr>
+            <p:cNvPr id="58" name="TextBox 57">
+              <a:extLst>
+                <a:ext uri="{FF2B5EF4-FFF2-40B4-BE49-F238E27FC236}">
+                  <a16:creationId xmlns:a16="http://schemas.microsoft.com/office/drawing/2014/main" id="{BAAB5DCA-D418-676C-5262-9C98DFBE982A}"/>
+                </a:ext>
+              </a:extLst>
+            </p:cNvPr>
+            <p:cNvSpPr txBox="1"/>
+            <p:nvPr/>
+          </p:nvSpPr>
+          <p:spPr>
+            <a:xfrm>
+              <a:off x="1823834" y="4094001"/>
+              <a:ext cx="4272166" cy="369332"/>
+            </a:xfrm>
+            <a:prstGeom prst="rect">
+              <a:avLst/>
+            </a:prstGeom>
+            <a:noFill/>
+          </p:spPr>
+          <p:txBody>
+            <a:bodyPr wrap="square">
+              <a:spAutoFit/>
+            </a:bodyPr>
+            <a:lstStyle/>
+            <a:p>
+              <a:pPr lvl="0"/>
+              <a:r>
+                <a:rPr lang="ru-RU" dirty="0">
+                  <a:solidFill>
+                    <a:srgbClr val="0E0E0E"/>
+                  </a:solidFill>
+                  <a:latin typeface="Comfortaa Medium" pitchFamily="2" charset="0"/>
+                  <a:ea typeface="Pacifico"/>
+                  <a:cs typeface="Poppins" panose="020B0604020202020204" charset="0"/>
+                  <a:sym typeface="Pacifico"/>
+                </a:rPr>
+                <a:t>Проектирование архитектуры</a:t>
+              </a:r>
+            </a:p>
+          </p:txBody>
+        </p:sp>
+        <p:sp>
+          <p:nvSpPr>
+            <p:cNvPr id="59" name="Овал 58">
+              <a:extLst>
+                <a:ext uri="{FF2B5EF4-FFF2-40B4-BE49-F238E27FC236}">
+                  <a16:creationId xmlns:a16="http://schemas.microsoft.com/office/drawing/2014/main" id="{0D0F482E-98A4-5127-C6FA-62B0A6B27197}"/>
+                </a:ext>
+              </a:extLst>
+            </p:cNvPr>
+            <p:cNvSpPr/>
+            <p:nvPr/>
+          </p:nvSpPr>
+          <p:spPr>
+            <a:xfrm>
+              <a:off x="1217220" y="3999274"/>
+              <a:ext cx="558787" cy="558787"/>
+            </a:xfrm>
+            <a:prstGeom prst="ellipse">
+              <a:avLst/>
+            </a:prstGeom>
+            <a:solidFill>
+              <a:srgbClr val="FFA726"/>
+            </a:solidFill>
+            <a:ln>
+              <a:noFill/>
+            </a:ln>
+          </p:spPr>
+          <p:style>
+            <a:lnRef idx="2">
+              <a:schemeClr val="accent1">
+                <a:shade val="15000"/>
+              </a:schemeClr>
+            </a:lnRef>
+            <a:fillRef idx="1">
+              <a:schemeClr val="accent1"/>
+            </a:fillRef>
+            <a:effectRef idx="0">
+              <a:schemeClr val="accent1"/>
+            </a:effectRef>
+            <a:fontRef idx="minor">
+              <a:schemeClr val="lt1"/>
+            </a:fontRef>
+          </p:style>
+          <p:txBody>
+            <a:bodyPr rtlCol="0" anchor="ctr"/>
+            <a:lstStyle/>
+            <a:p>
+              <a:pPr algn="ctr"/>
+              <a:endParaRPr lang="ru-RU" sz="1400" dirty="0">
+                <a:latin typeface="Bahnschrift" panose="020B0502040204020203" pitchFamily="34" charset="0"/>
+              </a:endParaRPr>
+            </a:p>
+          </p:txBody>
+        </p:sp>
+        <p:sp>
+          <p:nvSpPr>
+            <p:cNvPr id="60" name="TextBox 59">
+              <a:extLst>
+                <a:ext uri="{FF2B5EF4-FFF2-40B4-BE49-F238E27FC236}">
+                  <a16:creationId xmlns:a16="http://schemas.microsoft.com/office/drawing/2014/main" id="{82B39EB9-1922-6491-8896-469708E04313}"/>
+                </a:ext>
+              </a:extLst>
+            </p:cNvPr>
+            <p:cNvSpPr txBox="1"/>
+            <p:nvPr/>
+          </p:nvSpPr>
+          <p:spPr>
+            <a:xfrm>
+              <a:off x="1169392" y="4109390"/>
+              <a:ext cx="654442" cy="338554"/>
+            </a:xfrm>
+            <a:prstGeom prst="rect">
+              <a:avLst/>
+            </a:prstGeom>
+            <a:noFill/>
+          </p:spPr>
+          <p:txBody>
+            <a:bodyPr wrap="square">
+              <a:spAutoFit/>
+            </a:bodyPr>
+            <a:lstStyle/>
+            <a:p>
+              <a:pPr algn="ctr"/>
+              <a:r>
+                <a:rPr lang="ru-RU" sz="1600" dirty="0">
+                  <a:solidFill>
+                    <a:schemeClr val="bg1"/>
+                  </a:solidFill>
+                  <a:latin typeface="Comfortaa Medium" pitchFamily="2" charset="0"/>
+                </a:rPr>
+                <a:t>3</a:t>
+              </a:r>
+              <a:endParaRPr lang="ru-RU" dirty="0">
+                <a:solidFill>
+                  <a:schemeClr val="bg1"/>
+                </a:solidFill>
+                <a:latin typeface="Comfortaa Medium" pitchFamily="2" charset="0"/>
+              </a:endParaRPr>
+            </a:p>
+          </p:txBody>
+        </p:sp>
+      </p:grpSp>
+      <p:grpSp>
+        <p:nvGrpSpPr>
+          <p:cNvPr id="81" name="Группа 80">
+            <a:extLst>
+              <a:ext uri="{FF2B5EF4-FFF2-40B4-BE49-F238E27FC236}">
+                <a16:creationId xmlns:a16="http://schemas.microsoft.com/office/drawing/2014/main" id="{0E569526-ED5C-D578-CA4C-406EB7C8FA19}"/>
+              </a:ext>
+            </a:extLst>
+          </p:cNvPr>
+          <p:cNvGrpSpPr/>
+          <p:nvPr/>
+        </p:nvGrpSpPr>
+        <p:grpSpPr>
+          <a:xfrm>
+            <a:off x="994778" y="5216402"/>
+            <a:ext cx="5322678" cy="936757"/>
+            <a:chOff x="1041393" y="3810289"/>
+            <a:chExt cx="5322678" cy="936757"/>
+          </a:xfrm>
+        </p:grpSpPr>
+        <p:sp>
+          <p:nvSpPr>
+            <p:cNvPr id="82" name="Прямоугольник: скругленные углы 81">
+              <a:extLst>
+                <a:ext uri="{FF2B5EF4-FFF2-40B4-BE49-F238E27FC236}">
+                  <a16:creationId xmlns:a16="http://schemas.microsoft.com/office/drawing/2014/main" id="{2847B3B2-5F0C-7EF4-01C0-E18EC0D67E77}"/>
+                </a:ext>
+              </a:extLst>
+            </p:cNvPr>
+            <p:cNvSpPr/>
+            <p:nvPr/>
+          </p:nvSpPr>
+          <p:spPr>
+            <a:xfrm>
+              <a:off x="1041393" y="3810289"/>
+              <a:ext cx="5322678" cy="936757"/>
+            </a:xfrm>
+            <a:prstGeom prst="roundRect">
+              <a:avLst>
+                <a:gd name="adj" fmla="val 4689"/>
+              </a:avLst>
+            </a:prstGeom>
+            <a:solidFill>
+              <a:schemeClr val="bg1"/>
+            </a:solidFill>
+            <a:ln>
+              <a:solidFill>
+                <a:schemeClr val="bg1"/>
+              </a:solidFill>
+            </a:ln>
+          </p:spPr>
+          <p:style>
+            <a:lnRef idx="2">
+              <a:schemeClr val="accent1">
+                <a:shade val="15000"/>
+              </a:schemeClr>
+            </a:lnRef>
+            <a:fillRef idx="1">
+              <a:schemeClr val="accent1"/>
+            </a:fillRef>
+            <a:effectRef idx="0">
+              <a:schemeClr val="accent1"/>
+            </a:effectRef>
+            <a:fontRef idx="minor">
+              <a:schemeClr val="lt1"/>
+            </a:fontRef>
+          </p:style>
+          <p:txBody>
+            <a:bodyPr rtlCol="0" anchor="ctr"/>
+            <a:lstStyle/>
+            <a:p>
+              <a:pPr algn="ctr"/>
+              <a:endParaRPr lang="ru-RU" dirty="0"/>
+            </a:p>
+          </p:txBody>
+        </p:sp>
+        <p:sp>
+          <p:nvSpPr>
+            <p:cNvPr id="83" name="TextBox 82">
+              <a:extLst>
+                <a:ext uri="{FF2B5EF4-FFF2-40B4-BE49-F238E27FC236}">
+                  <a16:creationId xmlns:a16="http://schemas.microsoft.com/office/drawing/2014/main" id="{186343CC-571B-B925-5202-E163532D84F6}"/>
+                </a:ext>
+              </a:extLst>
+            </p:cNvPr>
+            <p:cNvSpPr txBox="1"/>
+            <p:nvPr/>
+          </p:nvSpPr>
+          <p:spPr>
+            <a:xfrm>
+              <a:off x="1823834" y="3955501"/>
+              <a:ext cx="4272166" cy="646331"/>
+            </a:xfrm>
+            <a:prstGeom prst="rect">
+              <a:avLst/>
+            </a:prstGeom>
+            <a:noFill/>
+          </p:spPr>
+          <p:txBody>
+            <a:bodyPr wrap="square">
+              <a:spAutoFit/>
+            </a:bodyPr>
+            <a:lstStyle/>
+            <a:p>
+              <a:pPr lvl="0"/>
+              <a:r>
+                <a:rPr lang="ru-RU" dirty="0">
+                  <a:solidFill>
+                    <a:srgbClr val="0E0E0E"/>
+                  </a:solidFill>
+                  <a:latin typeface="Comfortaa Medium" pitchFamily="2" charset="0"/>
+                  <a:ea typeface="Pacifico"/>
+                  <a:cs typeface="Poppins" panose="020B0604020202020204" charset="0"/>
+                  <a:sym typeface="Pacifico"/>
+                </a:rPr>
+                <a:t>Разработка структуры базы данных</a:t>
+              </a:r>
+            </a:p>
+          </p:txBody>
+        </p:sp>
+        <p:sp>
+          <p:nvSpPr>
+            <p:cNvPr id="84" name="Овал 83">
+              <a:extLst>
+                <a:ext uri="{FF2B5EF4-FFF2-40B4-BE49-F238E27FC236}">
+                  <a16:creationId xmlns:a16="http://schemas.microsoft.com/office/drawing/2014/main" id="{D70F06E0-0109-B4AD-1416-9D3A92A8BA8C}"/>
+                </a:ext>
+              </a:extLst>
+            </p:cNvPr>
+            <p:cNvSpPr/>
+            <p:nvPr/>
+          </p:nvSpPr>
+          <p:spPr>
+            <a:xfrm>
+              <a:off x="1217220" y="3999274"/>
+              <a:ext cx="558787" cy="558787"/>
+            </a:xfrm>
+            <a:prstGeom prst="ellipse">
+              <a:avLst/>
+            </a:prstGeom>
+            <a:solidFill>
+              <a:srgbClr val="FFA726"/>
+            </a:solidFill>
+            <a:ln>
+              <a:noFill/>
+            </a:ln>
+          </p:spPr>
+          <p:style>
+            <a:lnRef idx="2">
+              <a:schemeClr val="accent1">
+                <a:shade val="15000"/>
+              </a:schemeClr>
+            </a:lnRef>
+            <a:fillRef idx="1">
+              <a:schemeClr val="accent1"/>
+            </a:fillRef>
+            <a:effectRef idx="0">
+              <a:schemeClr val="accent1"/>
+            </a:effectRef>
+            <a:fontRef idx="minor">
+              <a:schemeClr val="lt1"/>
+            </a:fontRef>
+          </p:style>
+          <p:txBody>
+            <a:bodyPr rtlCol="0" anchor="ctr"/>
+            <a:lstStyle/>
+            <a:p>
+              <a:pPr algn="ctr"/>
+              <a:endParaRPr lang="ru-RU" sz="1400" dirty="0">
+                <a:latin typeface="Bahnschrift" panose="020B0502040204020203" pitchFamily="34" charset="0"/>
+              </a:endParaRPr>
+            </a:p>
+          </p:txBody>
+        </p:sp>
+        <p:sp>
+          <p:nvSpPr>
+            <p:cNvPr id="85" name="TextBox 84">
+              <a:extLst>
+                <a:ext uri="{FF2B5EF4-FFF2-40B4-BE49-F238E27FC236}">
+                  <a16:creationId xmlns:a16="http://schemas.microsoft.com/office/drawing/2014/main" id="{2BE52EEE-79B3-7B66-F062-86C16AB1680C}"/>
+                </a:ext>
+              </a:extLst>
+            </p:cNvPr>
+            <p:cNvSpPr txBox="1"/>
+            <p:nvPr/>
+          </p:nvSpPr>
+          <p:spPr>
+            <a:xfrm>
+              <a:off x="1169392" y="4109390"/>
+              <a:ext cx="654442" cy="338554"/>
+            </a:xfrm>
+            <a:prstGeom prst="rect">
+              <a:avLst/>
+            </a:prstGeom>
+            <a:noFill/>
+          </p:spPr>
+          <p:txBody>
+            <a:bodyPr wrap="square">
+              <a:spAutoFit/>
+            </a:bodyPr>
+            <a:lstStyle/>
+            <a:p>
+              <a:pPr algn="ctr"/>
+              <a:r>
+                <a:rPr lang="ru-RU" sz="1600" dirty="0">
+                  <a:solidFill>
+                    <a:schemeClr val="bg1"/>
+                  </a:solidFill>
+                  <a:latin typeface="Comfortaa Medium" pitchFamily="2" charset="0"/>
+                </a:rPr>
+                <a:t>4</a:t>
+              </a:r>
+              <a:endParaRPr lang="ru-RU" dirty="0">
+                <a:solidFill>
+                  <a:schemeClr val="bg1"/>
+                </a:solidFill>
+                <a:latin typeface="Comfortaa Medium" pitchFamily="2" charset="0"/>
+              </a:endParaRPr>
+            </a:p>
+          </p:txBody>
+        </p:sp>
+      </p:grpSp>
+      <p:grpSp>
+        <p:nvGrpSpPr>
+          <p:cNvPr id="86" name="Группа 85">
+            <a:extLst>
+              <a:ext uri="{FF2B5EF4-FFF2-40B4-BE49-F238E27FC236}">
+                <a16:creationId xmlns:a16="http://schemas.microsoft.com/office/drawing/2014/main" id="{D49125A3-F675-F4DD-E9A3-93C7FB6F573E}"/>
+              </a:ext>
+            </a:extLst>
+          </p:cNvPr>
+          <p:cNvGrpSpPr/>
+          <p:nvPr/>
+        </p:nvGrpSpPr>
+        <p:grpSpPr>
+          <a:xfrm>
+            <a:off x="6658983" y="1188969"/>
+            <a:ext cx="5322678" cy="936757"/>
+            <a:chOff x="1041393" y="3810289"/>
+            <a:chExt cx="5322678" cy="936757"/>
+          </a:xfrm>
+        </p:grpSpPr>
+        <p:sp>
+          <p:nvSpPr>
+            <p:cNvPr id="87" name="Прямоугольник: скругленные углы 86">
+              <a:extLst>
+                <a:ext uri="{FF2B5EF4-FFF2-40B4-BE49-F238E27FC236}">
+                  <a16:creationId xmlns:a16="http://schemas.microsoft.com/office/drawing/2014/main" id="{A74C4349-9036-FD47-3B91-331CDCE29D47}"/>
+                </a:ext>
+              </a:extLst>
+            </p:cNvPr>
+            <p:cNvSpPr/>
+            <p:nvPr/>
+          </p:nvSpPr>
+          <p:spPr>
+            <a:xfrm>
+              <a:off x="1041393" y="3810289"/>
+              <a:ext cx="5322678" cy="936757"/>
+            </a:xfrm>
+            <a:prstGeom prst="roundRect">
+              <a:avLst>
+                <a:gd name="adj" fmla="val 4689"/>
+              </a:avLst>
+            </a:prstGeom>
+            <a:solidFill>
+              <a:schemeClr val="bg1"/>
+            </a:solidFill>
+            <a:ln>
+              <a:solidFill>
+                <a:schemeClr val="bg1"/>
+              </a:solidFill>
+            </a:ln>
+          </p:spPr>
+          <p:style>
+            <a:lnRef idx="2">
+              <a:schemeClr val="accent1">
+                <a:shade val="15000"/>
+              </a:schemeClr>
+            </a:lnRef>
+            <a:fillRef idx="1">
+              <a:schemeClr val="accent1"/>
+            </a:fillRef>
+            <a:effectRef idx="0">
+              <a:schemeClr val="accent1"/>
+            </a:effectRef>
+            <a:fontRef idx="minor">
+              <a:schemeClr val="lt1"/>
+            </a:fontRef>
+          </p:style>
+          <p:txBody>
+            <a:bodyPr rtlCol="0" anchor="ctr"/>
+            <a:lstStyle/>
+            <a:p>
+              <a:pPr algn="ctr"/>
+              <a:endParaRPr lang="ru-RU" dirty="0"/>
+            </a:p>
+          </p:txBody>
+        </p:sp>
+        <p:sp>
+          <p:nvSpPr>
+            <p:cNvPr id="88" name="TextBox 87">
+              <a:extLst>
+                <a:ext uri="{FF2B5EF4-FFF2-40B4-BE49-F238E27FC236}">
+                  <a16:creationId xmlns:a16="http://schemas.microsoft.com/office/drawing/2014/main" id="{EC977B90-0D6B-545E-9150-C52B003AAECF}"/>
+                </a:ext>
+              </a:extLst>
+            </p:cNvPr>
+            <p:cNvSpPr txBox="1"/>
+            <p:nvPr/>
+          </p:nvSpPr>
+          <p:spPr>
+            <a:xfrm>
+              <a:off x="1823834" y="4094001"/>
+              <a:ext cx="4272166" cy="369332"/>
+            </a:xfrm>
+            <a:prstGeom prst="rect">
+              <a:avLst/>
+            </a:prstGeom>
+            <a:noFill/>
+          </p:spPr>
+          <p:txBody>
+            <a:bodyPr wrap="square">
+              <a:spAutoFit/>
+            </a:bodyPr>
+            <a:lstStyle/>
+            <a:p>
+              <a:r>
+                <a:rPr lang="ru-RU" dirty="0">
+                  <a:solidFill>
+                    <a:srgbClr val="0E0E0E"/>
+                  </a:solidFill>
+                  <a:latin typeface="Comfortaa Medium" pitchFamily="2" charset="0"/>
+                  <a:ea typeface="Pacifico"/>
+                  <a:cs typeface="Poppins" panose="020B0604020202020204" charset="0"/>
+                  <a:sym typeface="Pacifico"/>
+                </a:rPr>
+                <a:t>Разработка интерфейса</a:t>
+              </a:r>
+            </a:p>
+          </p:txBody>
+        </p:sp>
+        <p:sp>
+          <p:nvSpPr>
+            <p:cNvPr id="89" name="Овал 88">
+              <a:extLst>
+                <a:ext uri="{FF2B5EF4-FFF2-40B4-BE49-F238E27FC236}">
+                  <a16:creationId xmlns:a16="http://schemas.microsoft.com/office/drawing/2014/main" id="{6CE8D0CD-C3DA-5705-5D42-91B602A3A0BE}"/>
+                </a:ext>
+              </a:extLst>
+            </p:cNvPr>
+            <p:cNvSpPr/>
+            <p:nvPr/>
+          </p:nvSpPr>
+          <p:spPr>
+            <a:xfrm>
+              <a:off x="1217220" y="3999274"/>
+              <a:ext cx="558787" cy="558787"/>
+            </a:xfrm>
+            <a:prstGeom prst="ellipse">
+              <a:avLst/>
+            </a:prstGeom>
+            <a:solidFill>
+              <a:srgbClr val="FFA726"/>
+            </a:solidFill>
+            <a:ln>
+              <a:noFill/>
+            </a:ln>
+          </p:spPr>
+          <p:style>
+            <a:lnRef idx="2">
+              <a:schemeClr val="accent1">
+                <a:shade val="15000"/>
+              </a:schemeClr>
+            </a:lnRef>
+            <a:fillRef idx="1">
+              <a:schemeClr val="accent1"/>
+            </a:fillRef>
+            <a:effectRef idx="0">
+              <a:schemeClr val="accent1"/>
+            </a:effectRef>
+            <a:fontRef idx="minor">
+              <a:schemeClr val="lt1"/>
+            </a:fontRef>
+          </p:style>
+          <p:txBody>
+            <a:bodyPr rtlCol="0" anchor="ctr"/>
+            <a:lstStyle/>
+            <a:p>
+              <a:pPr algn="ctr"/>
+              <a:endParaRPr lang="ru-RU" sz="1400" dirty="0">
+                <a:latin typeface="Bahnschrift" panose="020B0502040204020203" pitchFamily="34" charset="0"/>
+              </a:endParaRPr>
+            </a:p>
+          </p:txBody>
+        </p:sp>
+        <p:sp>
+          <p:nvSpPr>
+            <p:cNvPr id="90" name="TextBox 89">
+              <a:extLst>
+                <a:ext uri="{FF2B5EF4-FFF2-40B4-BE49-F238E27FC236}">
+                  <a16:creationId xmlns:a16="http://schemas.microsoft.com/office/drawing/2014/main" id="{74B672B9-DC29-1452-951F-38FF820D9F6C}"/>
+                </a:ext>
+              </a:extLst>
+            </p:cNvPr>
+            <p:cNvSpPr txBox="1"/>
+            <p:nvPr/>
+          </p:nvSpPr>
+          <p:spPr>
+            <a:xfrm>
+              <a:off x="1169392" y="4109390"/>
+              <a:ext cx="654442" cy="338554"/>
+            </a:xfrm>
+            <a:prstGeom prst="rect">
+              <a:avLst/>
+            </a:prstGeom>
+            <a:noFill/>
+          </p:spPr>
+          <p:txBody>
+            <a:bodyPr wrap="square">
+              <a:spAutoFit/>
+            </a:bodyPr>
+            <a:lstStyle/>
+            <a:p>
+              <a:pPr algn="ctr"/>
+              <a:r>
+                <a:rPr lang="ru-RU" sz="1600" dirty="0">
+                  <a:solidFill>
+                    <a:schemeClr val="bg1"/>
+                  </a:solidFill>
+                  <a:latin typeface="Comfortaa Medium" pitchFamily="2" charset="0"/>
+                </a:rPr>
+                <a:t>5</a:t>
+              </a:r>
+              <a:endParaRPr lang="ru-RU" dirty="0">
+                <a:solidFill>
+                  <a:schemeClr val="bg1"/>
+                </a:solidFill>
+                <a:latin typeface="Comfortaa Medium" pitchFamily="2" charset="0"/>
+              </a:endParaRPr>
+            </a:p>
+          </p:txBody>
+        </p:sp>
+      </p:grpSp>
+      <p:grpSp>
+        <p:nvGrpSpPr>
+          <p:cNvPr id="91" name="Группа 90">
+            <a:extLst>
+              <a:ext uri="{FF2B5EF4-FFF2-40B4-BE49-F238E27FC236}">
+                <a16:creationId xmlns:a16="http://schemas.microsoft.com/office/drawing/2014/main" id="{345F01F0-B088-3785-3A8C-2F8CDBD49F23}"/>
+              </a:ext>
+            </a:extLst>
+          </p:cNvPr>
+          <p:cNvGrpSpPr/>
+          <p:nvPr/>
+        </p:nvGrpSpPr>
+        <p:grpSpPr>
+          <a:xfrm>
+            <a:off x="6658983" y="2531955"/>
+            <a:ext cx="5322678" cy="936757"/>
+            <a:chOff x="1041393" y="3810289"/>
+            <a:chExt cx="5322678" cy="936757"/>
+          </a:xfrm>
+        </p:grpSpPr>
+        <p:sp>
+          <p:nvSpPr>
+            <p:cNvPr id="92" name="Прямоугольник: скругленные углы 91">
+              <a:extLst>
+                <a:ext uri="{FF2B5EF4-FFF2-40B4-BE49-F238E27FC236}">
+                  <a16:creationId xmlns:a16="http://schemas.microsoft.com/office/drawing/2014/main" id="{33F2B824-5F8C-0ADE-653B-46149B735067}"/>
+                </a:ext>
+              </a:extLst>
+            </p:cNvPr>
+            <p:cNvSpPr/>
+            <p:nvPr/>
+          </p:nvSpPr>
+          <p:spPr>
+            <a:xfrm>
+              <a:off x="1041393" y="3810289"/>
+              <a:ext cx="5322678" cy="936757"/>
+            </a:xfrm>
+            <a:prstGeom prst="roundRect">
+              <a:avLst>
+                <a:gd name="adj" fmla="val 4689"/>
+              </a:avLst>
+            </a:prstGeom>
+            <a:solidFill>
+              <a:schemeClr val="bg1"/>
+            </a:solidFill>
+            <a:ln>
+              <a:solidFill>
+                <a:schemeClr val="bg1"/>
+              </a:solidFill>
+            </a:ln>
+          </p:spPr>
+          <p:style>
+            <a:lnRef idx="2">
+              <a:schemeClr val="accent1">
+                <a:shade val="15000"/>
+              </a:schemeClr>
+            </a:lnRef>
+            <a:fillRef idx="1">
+              <a:schemeClr val="accent1"/>
+            </a:fillRef>
+            <a:effectRef idx="0">
+              <a:schemeClr val="accent1"/>
+            </a:effectRef>
+            <a:fontRef idx="minor">
+              <a:schemeClr val="lt1"/>
+            </a:fontRef>
+          </p:style>
+          <p:txBody>
+            <a:bodyPr rtlCol="0" anchor="ctr"/>
+            <a:lstStyle/>
+            <a:p>
+              <a:pPr algn="ctr"/>
+              <a:endParaRPr lang="ru-RU" dirty="0"/>
+            </a:p>
+          </p:txBody>
+        </p:sp>
+        <p:sp>
+          <p:nvSpPr>
+            <p:cNvPr id="93" name="TextBox 92">
+              <a:extLst>
+                <a:ext uri="{FF2B5EF4-FFF2-40B4-BE49-F238E27FC236}">
+                  <a16:creationId xmlns:a16="http://schemas.microsoft.com/office/drawing/2014/main" id="{6AF28F16-75AB-8E3F-EDBD-9FDE2E3FE063}"/>
+                </a:ext>
+              </a:extLst>
+            </p:cNvPr>
+            <p:cNvSpPr txBox="1"/>
+            <p:nvPr/>
+          </p:nvSpPr>
+          <p:spPr>
+            <a:xfrm>
+              <a:off x="1776007" y="3948869"/>
+              <a:ext cx="4272166" cy="646331"/>
+            </a:xfrm>
+            <a:prstGeom prst="rect">
+              <a:avLst/>
+            </a:prstGeom>
+            <a:noFill/>
+          </p:spPr>
+          <p:txBody>
+            <a:bodyPr wrap="square">
+              <a:spAutoFit/>
+            </a:bodyPr>
+            <a:lstStyle/>
+            <a:p>
+              <a:pPr lvl="0"/>
+              <a:r>
+                <a:rPr lang="ru-RU" dirty="0">
+                  <a:solidFill>
+                    <a:srgbClr val="0E0E0E"/>
+                  </a:solidFill>
+                  <a:latin typeface="Comfortaa Medium" pitchFamily="2" charset="0"/>
+                  <a:ea typeface="Pacifico"/>
+                  <a:cs typeface="Poppins" panose="020B0604020202020204" charset="0"/>
+                  <a:sym typeface="Pacifico"/>
+                </a:rPr>
+                <a:t>Реализация модулей подсистемы</a:t>
+              </a:r>
+            </a:p>
+          </p:txBody>
+        </p:sp>
+        <p:sp>
+          <p:nvSpPr>
+            <p:cNvPr id="94" name="Овал 93">
+              <a:extLst>
+                <a:ext uri="{FF2B5EF4-FFF2-40B4-BE49-F238E27FC236}">
+                  <a16:creationId xmlns:a16="http://schemas.microsoft.com/office/drawing/2014/main" id="{637AB873-927D-319F-9235-B2339B0F6688}"/>
+                </a:ext>
+              </a:extLst>
+            </p:cNvPr>
+            <p:cNvSpPr/>
+            <p:nvPr/>
+          </p:nvSpPr>
+          <p:spPr>
+            <a:xfrm>
+              <a:off x="1217220" y="3999274"/>
+              <a:ext cx="558787" cy="558787"/>
+            </a:xfrm>
+            <a:prstGeom prst="ellipse">
+              <a:avLst/>
+            </a:prstGeom>
+            <a:solidFill>
+              <a:srgbClr val="FFA726"/>
+            </a:solidFill>
+            <a:ln>
+              <a:noFill/>
+            </a:ln>
+          </p:spPr>
+          <p:style>
+            <a:lnRef idx="2">
+              <a:schemeClr val="accent1">
+                <a:shade val="15000"/>
+              </a:schemeClr>
+            </a:lnRef>
+            <a:fillRef idx="1">
+              <a:schemeClr val="accent1"/>
+            </a:fillRef>
+            <a:effectRef idx="0">
+              <a:schemeClr val="accent1"/>
+            </a:effectRef>
+            <a:fontRef idx="minor">
+              <a:schemeClr val="lt1"/>
+            </a:fontRef>
+          </p:style>
+          <p:txBody>
+            <a:bodyPr rtlCol="0" anchor="ctr"/>
+            <a:lstStyle/>
+            <a:p>
+              <a:pPr algn="ctr"/>
+              <a:endParaRPr lang="ru-RU" sz="1400" dirty="0">
+                <a:latin typeface="Bahnschrift" panose="020B0502040204020203" pitchFamily="34" charset="0"/>
+              </a:endParaRPr>
+            </a:p>
+          </p:txBody>
+        </p:sp>
+        <p:sp>
+          <p:nvSpPr>
+            <p:cNvPr id="95" name="TextBox 94">
+              <a:extLst>
+                <a:ext uri="{FF2B5EF4-FFF2-40B4-BE49-F238E27FC236}">
+                  <a16:creationId xmlns:a16="http://schemas.microsoft.com/office/drawing/2014/main" id="{6FE43FCC-80F1-B174-00F1-9CB02613598B}"/>
+                </a:ext>
+              </a:extLst>
+            </p:cNvPr>
+            <p:cNvSpPr txBox="1"/>
+            <p:nvPr/>
+          </p:nvSpPr>
+          <p:spPr>
+            <a:xfrm>
+              <a:off x="1169392" y="4109390"/>
+              <a:ext cx="654442" cy="338554"/>
+            </a:xfrm>
+            <a:prstGeom prst="rect">
+              <a:avLst/>
+            </a:prstGeom>
+            <a:noFill/>
+          </p:spPr>
+          <p:txBody>
+            <a:bodyPr wrap="square">
+              <a:spAutoFit/>
+            </a:bodyPr>
+            <a:lstStyle/>
+            <a:p>
+              <a:pPr algn="ctr"/>
+              <a:r>
+                <a:rPr lang="ru-RU" sz="1600" dirty="0">
+                  <a:solidFill>
+                    <a:schemeClr val="bg1"/>
+                  </a:solidFill>
+                  <a:latin typeface="Comfortaa Medium" pitchFamily="2" charset="0"/>
+                </a:rPr>
+                <a:t>6</a:t>
+              </a:r>
+              <a:endParaRPr lang="ru-RU" dirty="0">
+                <a:solidFill>
+                  <a:schemeClr val="bg1"/>
+                </a:solidFill>
+                <a:latin typeface="Comfortaa Medium" pitchFamily="2" charset="0"/>
+              </a:endParaRPr>
+            </a:p>
+          </p:txBody>
+        </p:sp>
+      </p:grpSp>
+      <p:grpSp>
+        <p:nvGrpSpPr>
+          <p:cNvPr id="96" name="Группа 95">
+            <a:extLst>
+              <a:ext uri="{FF2B5EF4-FFF2-40B4-BE49-F238E27FC236}">
+                <a16:creationId xmlns:a16="http://schemas.microsoft.com/office/drawing/2014/main" id="{E3671830-AE90-189A-31C0-344E2F4BCF5D}"/>
+              </a:ext>
+            </a:extLst>
+          </p:cNvPr>
+          <p:cNvGrpSpPr/>
+          <p:nvPr/>
+        </p:nvGrpSpPr>
+        <p:grpSpPr>
+          <a:xfrm>
+            <a:off x="6658983" y="3874941"/>
+            <a:ext cx="5322678" cy="936757"/>
+            <a:chOff x="1041393" y="3810289"/>
+            <a:chExt cx="5322678" cy="936757"/>
+          </a:xfrm>
+        </p:grpSpPr>
+        <p:sp>
+          <p:nvSpPr>
+            <p:cNvPr id="97" name="Прямоугольник: скругленные углы 96">
+              <a:extLst>
+                <a:ext uri="{FF2B5EF4-FFF2-40B4-BE49-F238E27FC236}">
+                  <a16:creationId xmlns:a16="http://schemas.microsoft.com/office/drawing/2014/main" id="{AE842E35-53A4-9DEF-B4EF-F4527A6AD5E2}"/>
+                </a:ext>
+              </a:extLst>
+            </p:cNvPr>
+            <p:cNvSpPr/>
+            <p:nvPr/>
+          </p:nvSpPr>
+          <p:spPr>
+            <a:xfrm>
+              <a:off x="1041393" y="3810289"/>
+              <a:ext cx="5322678" cy="936757"/>
+            </a:xfrm>
+            <a:prstGeom prst="roundRect">
+              <a:avLst>
+                <a:gd name="adj" fmla="val 4689"/>
+              </a:avLst>
+            </a:prstGeom>
+            <a:solidFill>
+              <a:schemeClr val="bg1"/>
+            </a:solidFill>
+            <a:ln>
+              <a:solidFill>
+                <a:schemeClr val="bg1"/>
+              </a:solidFill>
+            </a:ln>
+          </p:spPr>
+          <p:style>
+            <a:lnRef idx="2">
+              <a:schemeClr val="accent1">
+                <a:shade val="15000"/>
+              </a:schemeClr>
+            </a:lnRef>
+            <a:fillRef idx="1">
+              <a:schemeClr val="accent1"/>
+            </a:fillRef>
+            <a:effectRef idx="0">
+              <a:schemeClr val="accent1"/>
+            </a:effectRef>
+            <a:fontRef idx="minor">
+              <a:schemeClr val="lt1"/>
+            </a:fontRef>
+          </p:style>
+          <p:txBody>
+            <a:bodyPr rtlCol="0" anchor="ctr"/>
+            <a:lstStyle/>
+            <a:p>
+              <a:pPr algn="ctr"/>
+              <a:endParaRPr lang="ru-RU" dirty="0"/>
+            </a:p>
+          </p:txBody>
+        </p:sp>
+        <p:sp>
+          <p:nvSpPr>
+            <p:cNvPr id="98" name="TextBox 97">
+              <a:extLst>
+                <a:ext uri="{FF2B5EF4-FFF2-40B4-BE49-F238E27FC236}">
+                  <a16:creationId xmlns:a16="http://schemas.microsoft.com/office/drawing/2014/main" id="{10A5374B-0F1A-AD12-4C5B-0360B6CA5AE3}"/>
+                </a:ext>
+              </a:extLst>
+            </p:cNvPr>
+            <p:cNvSpPr txBox="1"/>
+            <p:nvPr/>
+          </p:nvSpPr>
+          <p:spPr>
+            <a:xfrm>
+              <a:off x="1823834" y="4094001"/>
+              <a:ext cx="4272166" cy="369332"/>
+            </a:xfrm>
+            <a:prstGeom prst="rect">
+              <a:avLst/>
+            </a:prstGeom>
+            <a:noFill/>
+          </p:spPr>
+          <p:txBody>
+            <a:bodyPr wrap="square">
+              <a:spAutoFit/>
+            </a:bodyPr>
+            <a:lstStyle/>
+            <a:p>
+              <a:r>
+                <a:rPr lang="ru-RU" dirty="0">
+                  <a:solidFill>
+                    <a:srgbClr val="0E0E0E"/>
+                  </a:solidFill>
+                  <a:latin typeface="Comfortaa Medium" pitchFamily="2" charset="0"/>
+                  <a:ea typeface="Pacifico"/>
+                  <a:cs typeface="Poppins" panose="020B0604020202020204" charset="0"/>
+                  <a:sym typeface="Pacifico"/>
+                </a:rPr>
+                <a:t>Тестирование</a:t>
+              </a:r>
+              <a:endParaRPr lang="ru-RU" dirty="0">
+                <a:latin typeface="Comfortaa Medium" pitchFamily="2" charset="0"/>
+              </a:endParaRPr>
+            </a:p>
+          </p:txBody>
+        </p:sp>
+        <p:sp>
+          <p:nvSpPr>
+            <p:cNvPr id="99" name="Овал 98">
+              <a:extLst>
+                <a:ext uri="{FF2B5EF4-FFF2-40B4-BE49-F238E27FC236}">
+                  <a16:creationId xmlns:a16="http://schemas.microsoft.com/office/drawing/2014/main" id="{87CC053A-D08C-BDD4-72A1-B8C70ACABEFD}"/>
+                </a:ext>
+              </a:extLst>
+            </p:cNvPr>
+            <p:cNvSpPr/>
+            <p:nvPr/>
+          </p:nvSpPr>
+          <p:spPr>
+            <a:xfrm>
+              <a:off x="1217220" y="3999274"/>
+              <a:ext cx="558787" cy="558787"/>
+            </a:xfrm>
+            <a:prstGeom prst="ellipse">
+              <a:avLst/>
+            </a:prstGeom>
+            <a:solidFill>
+              <a:srgbClr val="FFA726"/>
+            </a:solidFill>
+            <a:ln>
+              <a:noFill/>
+            </a:ln>
+          </p:spPr>
+          <p:style>
+            <a:lnRef idx="2">
+              <a:schemeClr val="accent1">
+                <a:shade val="15000"/>
+              </a:schemeClr>
+            </a:lnRef>
+            <a:fillRef idx="1">
+              <a:schemeClr val="accent1"/>
+            </a:fillRef>
+            <a:effectRef idx="0">
+              <a:schemeClr val="accent1"/>
+            </a:effectRef>
+            <a:fontRef idx="minor">
+              <a:schemeClr val="lt1"/>
+            </a:fontRef>
+          </p:style>
+          <p:txBody>
+            <a:bodyPr rtlCol="0" anchor="ctr"/>
+            <a:lstStyle/>
+            <a:p>
+              <a:pPr algn="ctr"/>
+              <a:endParaRPr lang="ru-RU" sz="1400" dirty="0">
+                <a:latin typeface="Bahnschrift" panose="020B0502040204020203" pitchFamily="34" charset="0"/>
+              </a:endParaRPr>
+            </a:p>
+          </p:txBody>
+        </p:sp>
+        <p:sp>
+          <p:nvSpPr>
+            <p:cNvPr id="100" name="TextBox 99">
+              <a:extLst>
+                <a:ext uri="{FF2B5EF4-FFF2-40B4-BE49-F238E27FC236}">
+                  <a16:creationId xmlns:a16="http://schemas.microsoft.com/office/drawing/2014/main" id="{DC0DFAE3-07E5-4E43-AE89-406C3D869B7E}"/>
+                </a:ext>
+              </a:extLst>
+            </p:cNvPr>
+            <p:cNvSpPr txBox="1"/>
+            <p:nvPr/>
+          </p:nvSpPr>
+          <p:spPr>
+            <a:xfrm>
+              <a:off x="1169392" y="4109390"/>
+              <a:ext cx="654442" cy="338554"/>
+            </a:xfrm>
+            <a:prstGeom prst="rect">
+              <a:avLst/>
+            </a:prstGeom>
+            <a:noFill/>
+          </p:spPr>
+          <p:txBody>
+            <a:bodyPr wrap="square">
+              <a:spAutoFit/>
+            </a:bodyPr>
+            <a:lstStyle/>
+            <a:p>
+              <a:pPr algn="ctr"/>
+              <a:r>
+                <a:rPr lang="ru-RU" sz="1600" dirty="0">
+                  <a:solidFill>
+                    <a:schemeClr val="bg1"/>
+                  </a:solidFill>
+                  <a:latin typeface="Comfortaa Medium" pitchFamily="2" charset="0"/>
+                </a:rPr>
+                <a:t>7</a:t>
+              </a:r>
+              <a:endParaRPr lang="ru-RU" dirty="0">
+                <a:solidFill>
+                  <a:schemeClr val="bg1"/>
+                </a:solidFill>
+                <a:latin typeface="Comfortaa Medium" pitchFamily="2" charset="0"/>
+              </a:endParaRPr>
+            </a:p>
+          </p:txBody>
+        </p:sp>
+      </p:grpSp>
+      <p:grpSp>
+        <p:nvGrpSpPr>
+          <p:cNvPr id="101" name="Группа 100">
+            <a:extLst>
+              <a:ext uri="{FF2B5EF4-FFF2-40B4-BE49-F238E27FC236}">
+                <a16:creationId xmlns:a16="http://schemas.microsoft.com/office/drawing/2014/main" id="{6E052527-A590-97E5-4362-F31CEABFD083}"/>
+              </a:ext>
+            </a:extLst>
+          </p:cNvPr>
+          <p:cNvGrpSpPr/>
+          <p:nvPr/>
+        </p:nvGrpSpPr>
+        <p:grpSpPr>
+          <a:xfrm>
+            <a:off x="6701261" y="5217927"/>
+            <a:ext cx="5322678" cy="936757"/>
+            <a:chOff x="1041393" y="3810289"/>
+            <a:chExt cx="5322678" cy="936757"/>
+          </a:xfrm>
+        </p:grpSpPr>
+        <p:sp>
+          <p:nvSpPr>
+            <p:cNvPr id="102" name="Прямоугольник: скругленные углы 101">
+              <a:extLst>
+                <a:ext uri="{FF2B5EF4-FFF2-40B4-BE49-F238E27FC236}">
+                  <a16:creationId xmlns:a16="http://schemas.microsoft.com/office/drawing/2014/main" id="{CA7DA645-5C1A-5198-CE42-9D548E147063}"/>
+                </a:ext>
+              </a:extLst>
+            </p:cNvPr>
+            <p:cNvSpPr/>
+            <p:nvPr/>
+          </p:nvSpPr>
+          <p:spPr>
+            <a:xfrm>
+              <a:off x="1041393" y="3810289"/>
+              <a:ext cx="5322678" cy="936757"/>
+            </a:xfrm>
+            <a:prstGeom prst="roundRect">
+              <a:avLst>
+                <a:gd name="adj" fmla="val 4689"/>
+              </a:avLst>
+            </a:prstGeom>
+            <a:solidFill>
+              <a:schemeClr val="bg1"/>
+            </a:solidFill>
+            <a:ln>
+              <a:solidFill>
+                <a:schemeClr val="bg1"/>
+              </a:solidFill>
+            </a:ln>
+          </p:spPr>
+          <p:style>
+            <a:lnRef idx="2">
+              <a:schemeClr val="accent1">
+                <a:shade val="15000"/>
+              </a:schemeClr>
+            </a:lnRef>
+            <a:fillRef idx="1">
+              <a:schemeClr val="accent1"/>
+            </a:fillRef>
+            <a:effectRef idx="0">
+              <a:schemeClr val="accent1"/>
+            </a:effectRef>
+            <a:fontRef idx="minor">
+              <a:schemeClr val="lt1"/>
+            </a:fontRef>
+          </p:style>
+          <p:txBody>
+            <a:bodyPr rtlCol="0" anchor="ctr"/>
+            <a:lstStyle/>
+            <a:p>
+              <a:pPr algn="ctr"/>
+              <a:endParaRPr lang="ru-RU" dirty="0"/>
+            </a:p>
+          </p:txBody>
+        </p:sp>
+        <p:sp>
+          <p:nvSpPr>
+            <p:cNvPr id="103" name="TextBox 102">
+              <a:extLst>
+                <a:ext uri="{FF2B5EF4-FFF2-40B4-BE49-F238E27FC236}">
+                  <a16:creationId xmlns:a16="http://schemas.microsoft.com/office/drawing/2014/main" id="{5B235CAE-EA30-97E0-3795-76B385EAFF4C}"/>
+                </a:ext>
+              </a:extLst>
+            </p:cNvPr>
+            <p:cNvSpPr txBox="1"/>
+            <p:nvPr/>
+          </p:nvSpPr>
+          <p:spPr>
+            <a:xfrm>
+              <a:off x="1823834" y="4076727"/>
+              <a:ext cx="4272166" cy="369332"/>
+            </a:xfrm>
+            <a:prstGeom prst="rect">
+              <a:avLst/>
+            </a:prstGeom>
+            <a:noFill/>
+          </p:spPr>
+          <p:txBody>
+            <a:bodyPr wrap="square">
+              <a:spAutoFit/>
+            </a:bodyPr>
+            <a:lstStyle/>
+            <a:p>
+              <a:r>
+                <a:rPr lang="ru-RU" dirty="0">
+                  <a:solidFill>
+                    <a:srgbClr val="0E0E0E"/>
+                  </a:solidFill>
+                  <a:latin typeface="Comfortaa Medium" pitchFamily="2" charset="0"/>
+                  <a:ea typeface="Pacifico"/>
+                  <a:cs typeface="Poppins" panose="020B0604020202020204" charset="0"/>
+                  <a:sym typeface="Pacifico"/>
+                </a:rPr>
+                <a:t>Написание документации</a:t>
+              </a:r>
+            </a:p>
+          </p:txBody>
+        </p:sp>
+        <p:sp>
+          <p:nvSpPr>
+            <p:cNvPr id="104" name="Овал 103">
+              <a:extLst>
+                <a:ext uri="{FF2B5EF4-FFF2-40B4-BE49-F238E27FC236}">
+                  <a16:creationId xmlns:a16="http://schemas.microsoft.com/office/drawing/2014/main" id="{FE9A29B7-9C21-0161-370D-C351192D459C}"/>
+                </a:ext>
+              </a:extLst>
+            </p:cNvPr>
+            <p:cNvSpPr/>
+            <p:nvPr/>
+          </p:nvSpPr>
+          <p:spPr>
+            <a:xfrm>
+              <a:off x="1217220" y="3999274"/>
+              <a:ext cx="558787" cy="558787"/>
+            </a:xfrm>
+            <a:prstGeom prst="ellipse">
+              <a:avLst/>
+            </a:prstGeom>
+            <a:solidFill>
+              <a:srgbClr val="FFA726"/>
+            </a:solidFill>
+            <a:ln>
+              <a:noFill/>
+            </a:ln>
+          </p:spPr>
+          <p:style>
+            <a:lnRef idx="2">
+              <a:schemeClr val="accent1">
+                <a:shade val="15000"/>
+              </a:schemeClr>
+            </a:lnRef>
+            <a:fillRef idx="1">
+              <a:schemeClr val="accent1"/>
+            </a:fillRef>
+            <a:effectRef idx="0">
+              <a:schemeClr val="accent1"/>
+            </a:effectRef>
+            <a:fontRef idx="minor">
+              <a:schemeClr val="lt1"/>
+            </a:fontRef>
+          </p:style>
+          <p:txBody>
+            <a:bodyPr rtlCol="0" anchor="ctr"/>
+            <a:lstStyle/>
+            <a:p>
+              <a:pPr algn="ctr"/>
+              <a:endParaRPr lang="ru-RU" sz="1400" dirty="0">
+                <a:latin typeface="Bahnschrift" panose="020B0502040204020203" pitchFamily="34" charset="0"/>
+              </a:endParaRPr>
+            </a:p>
+          </p:txBody>
+        </p:sp>
+        <p:sp>
+          <p:nvSpPr>
+            <p:cNvPr id="105" name="TextBox 104">
+              <a:extLst>
+                <a:ext uri="{FF2B5EF4-FFF2-40B4-BE49-F238E27FC236}">
+                  <a16:creationId xmlns:a16="http://schemas.microsoft.com/office/drawing/2014/main" id="{A251C82C-633F-02F5-A3E1-A28F58E711F2}"/>
+                </a:ext>
+              </a:extLst>
+            </p:cNvPr>
+            <p:cNvSpPr txBox="1"/>
+            <p:nvPr/>
+          </p:nvSpPr>
+          <p:spPr>
+            <a:xfrm>
+              <a:off x="1169392" y="4109390"/>
+              <a:ext cx="654442" cy="338554"/>
+            </a:xfrm>
+            <a:prstGeom prst="rect">
+              <a:avLst/>
+            </a:prstGeom>
+            <a:noFill/>
+          </p:spPr>
+          <p:txBody>
+            <a:bodyPr wrap="square">
+              <a:spAutoFit/>
+            </a:bodyPr>
+            <a:lstStyle/>
+            <a:p>
+              <a:pPr algn="ctr"/>
+              <a:r>
+                <a:rPr lang="ru-RU" sz="1600" dirty="0">
+                  <a:solidFill>
+                    <a:schemeClr val="bg1"/>
+                  </a:solidFill>
+                  <a:latin typeface="Comfortaa Medium" pitchFamily="2" charset="0"/>
+                </a:rPr>
+                <a:t>8</a:t>
+              </a:r>
+              <a:endParaRPr lang="ru-RU" dirty="0">
+                <a:solidFill>
+                  <a:schemeClr val="bg1"/>
+                </a:solidFill>
+                <a:latin typeface="Comfortaa Medium" pitchFamily="2" charset="0"/>
+              </a:endParaRPr>
+            </a:p>
+          </p:txBody>
+        </p:sp>
+      </p:grpSp>
     </p:spTree>
     <p:extLst>
       <p:ext uri="{BB962C8B-B14F-4D97-AF65-F5344CB8AC3E}">
@@ -11942,844 +14456,613 @@
           </p:spPr>
         </p:pic>
       </p:grpSp>
-      <p:pic>
-        <p:nvPicPr>
-          <p:cNvPr id="9" name="Рисунок 8">
+      <p:grpSp>
+        <p:nvGrpSpPr>
+          <p:cNvPr id="29" name="Группа 28">
             <a:extLst>
               <a:ext uri="{FF2B5EF4-FFF2-40B4-BE49-F238E27FC236}">
-                <a16:creationId xmlns:a16="http://schemas.microsoft.com/office/drawing/2014/main" id="{F8F6AFAB-8690-7443-E42D-BC76C4EADAE1}"/>
+                <a16:creationId xmlns:a16="http://schemas.microsoft.com/office/drawing/2014/main" id="{9A97E7EB-391F-84B0-F5F9-EAADD472FADE}"/>
               </a:ext>
             </a:extLst>
           </p:cNvPr>
-          <p:cNvPicPr>
-            <a:picLocks noChangeAspect="1"/>
-          </p:cNvPicPr>
+          <p:cNvGrpSpPr/>
           <p:nvPr/>
-        </p:nvPicPr>
-        <p:blipFill>
-          <a:blip r:embed="rId12">
-            <a:extLst>
-              <a:ext uri="{96DAC541-7B7A-43D3-8B79-37D633B846F1}">
-                <asvg:svgBlip xmlns:asvg="http://schemas.microsoft.com/office/drawing/2016/SVG/main" r:embed="rId13"/>
-              </a:ext>
-            </a:extLst>
-          </a:blip>
-          <a:srcRect l="-9144" t="-3130" r="-6877" b="-1"/>
-          <a:stretch>
-            <a:fillRect/>
-          </a:stretch>
-        </p:blipFill>
-        <p:spPr>
+        </p:nvGrpSpPr>
+        <p:grpSpPr>
           <a:xfrm>
-            <a:off x="7629883" y="2566256"/>
-            <a:ext cx="1049864" cy="1049862"/>
+            <a:off x="5559092" y="1288511"/>
+            <a:ext cx="6508537" cy="1914424"/>
+            <a:chOff x="3629659" y="1979926"/>
+            <a:chExt cx="6508537" cy="1914424"/>
           </a:xfrm>
-          <a:prstGeom prst="rect">
-            <a:avLst/>
-          </a:prstGeom>
-        </p:spPr>
-      </p:pic>
-      <p:pic>
-        <p:nvPicPr>
-          <p:cNvPr id="1036" name="Picture 12" descr="Докер – Бесплатные иконки: бренды и логотипы">
+        </p:grpSpPr>
+        <p:sp>
+          <p:nvSpPr>
+            <p:cNvPr id="4" name="Прямоугольник: скругленные углы 3">
+              <a:extLst>
+                <a:ext uri="{FF2B5EF4-FFF2-40B4-BE49-F238E27FC236}">
+                  <a16:creationId xmlns:a16="http://schemas.microsoft.com/office/drawing/2014/main" id="{873131DD-3525-A20D-887A-3E27DC1CC1CC}"/>
+                </a:ext>
+              </a:extLst>
+            </p:cNvPr>
+            <p:cNvSpPr/>
+            <p:nvPr/>
+          </p:nvSpPr>
+          <p:spPr>
+            <a:xfrm>
+              <a:off x="3629659" y="1979926"/>
+              <a:ext cx="6508537" cy="1914424"/>
+            </a:xfrm>
+            <a:prstGeom prst="roundRect">
+              <a:avLst>
+                <a:gd name="adj" fmla="val 4689"/>
+              </a:avLst>
+            </a:prstGeom>
+            <a:solidFill>
+              <a:schemeClr val="bg1"/>
+            </a:solidFill>
+            <a:ln>
+              <a:solidFill>
+                <a:schemeClr val="bg1"/>
+              </a:solidFill>
+            </a:ln>
+          </p:spPr>
+          <p:style>
+            <a:lnRef idx="2">
+              <a:schemeClr val="accent1">
+                <a:shade val="15000"/>
+              </a:schemeClr>
+            </a:lnRef>
+            <a:fillRef idx="1">
+              <a:schemeClr val="accent1"/>
+            </a:fillRef>
+            <a:effectRef idx="0">
+              <a:schemeClr val="accent1"/>
+            </a:effectRef>
+            <a:fontRef idx="minor">
+              <a:schemeClr val="lt1"/>
+            </a:fontRef>
+          </p:style>
+          <p:txBody>
+            <a:bodyPr rtlCol="0" anchor="ctr"/>
+            <a:lstStyle/>
+            <a:p>
+              <a:pPr algn="ctr"/>
+              <a:endParaRPr lang="ru-RU" dirty="0"/>
+            </a:p>
+          </p:txBody>
+        </p:sp>
+        <p:grpSp>
+          <p:nvGrpSpPr>
+            <p:cNvPr id="5" name="Группа 4">
+              <a:extLst>
+                <a:ext uri="{FF2B5EF4-FFF2-40B4-BE49-F238E27FC236}">
+                  <a16:creationId xmlns:a16="http://schemas.microsoft.com/office/drawing/2014/main" id="{D0D5A9E4-3C66-0B64-BFC8-5B22C62089D5}"/>
+                </a:ext>
+              </a:extLst>
+            </p:cNvPr>
+            <p:cNvGrpSpPr/>
+            <p:nvPr/>
+          </p:nvGrpSpPr>
+          <p:grpSpPr>
+            <a:xfrm>
+              <a:off x="3864831" y="2721986"/>
+              <a:ext cx="5997900" cy="1057345"/>
+              <a:chOff x="3014928" y="2777758"/>
+              <a:chExt cx="5997900" cy="1057345"/>
+            </a:xfrm>
+          </p:grpSpPr>
+          <p:pic>
+            <p:nvPicPr>
+              <p:cNvPr id="1046" name="Picture 22" descr="Vite color icon in PNG, SVG">
+                <a:extLst>
+                  <a:ext uri="{FF2B5EF4-FFF2-40B4-BE49-F238E27FC236}">
+                    <a16:creationId xmlns:a16="http://schemas.microsoft.com/office/drawing/2014/main" id="{4549BD3D-3B47-1CEF-C454-093B58C7F567}"/>
+                  </a:ext>
+                </a:extLst>
+              </p:cNvPr>
+              <p:cNvPicPr>
+                <a:picLocks noChangeAspect="1" noChangeArrowheads="1"/>
+              </p:cNvPicPr>
+              <p:nvPr/>
+            </p:nvPicPr>
+            <p:blipFill>
+              <a:blip r:embed="rId12">
+                <a:extLst>
+                  <a:ext uri="{BEBA8EAE-BF5A-486C-A8C5-ECC9F3942E4B}">
+                    <a14:imgProps xmlns:a14="http://schemas.microsoft.com/office/drawing/2010/main">
+                      <a14:imgLayer r:embed="rId13">
+                        <a14:imgEffect>
+                          <a14:backgroundRemoval t="8750" b="92917" l="8500" r="91000">
+                            <a14:foregroundMark x1="8500" y1="22667" x2="8500" y2="22667"/>
+                            <a14:foregroundMark x1="68333" y1="8750" x2="68333" y2="8750"/>
+                            <a14:foregroundMark x1="91083" y1="20667" x2="91083" y2="20667"/>
+                            <a14:foregroundMark x1="50167" y1="92917" x2="50167" y2="92917"/>
+                          </a14:backgroundRemoval>
+                        </a14:imgEffect>
+                      </a14:imgLayer>
+                    </a14:imgProps>
+                  </a:ext>
+                  <a:ext uri="{28A0092B-C50C-407E-A947-70E740481C1C}">
+                    <a14:useLocalDpi xmlns:a14="http://schemas.microsoft.com/office/drawing/2010/main" val="0"/>
+                  </a:ext>
+                </a:extLst>
+              </a:blip>
+              <a:srcRect/>
+              <a:stretch>
+                <a:fillRect/>
+              </a:stretch>
+            </p:blipFill>
+            <p:spPr bwMode="auto">
+              <a:xfrm>
+                <a:off x="8098428" y="2849230"/>
+                <a:ext cx="914400" cy="914400"/>
+              </a:xfrm>
+              <a:prstGeom prst="rect">
+                <a:avLst/>
+              </a:prstGeom>
+              <a:noFill/>
+              <a:extLst>
+                <a:ext uri="{909E8E84-426E-40DD-AFC4-6F175D3DCCD1}">
+                  <a14:hiddenFill xmlns:a14="http://schemas.microsoft.com/office/drawing/2010/main">
+                    <a:solidFill>
+                      <a:srgbClr val="FFFFFF"/>
+                    </a:solidFill>
+                  </a14:hiddenFill>
+                </a:ext>
+              </a:extLst>
+            </p:spPr>
+          </p:pic>
+          <p:pic>
+            <p:nvPicPr>
+              <p:cNvPr id="1048" name="Picture 24">
+                <a:extLst>
+                  <a:ext uri="{FF2B5EF4-FFF2-40B4-BE49-F238E27FC236}">
+                    <a16:creationId xmlns:a16="http://schemas.microsoft.com/office/drawing/2014/main" id="{C8AB69DF-4378-AA6F-8026-77E955B60F68}"/>
+                  </a:ext>
+                </a:extLst>
+              </p:cNvPr>
+              <p:cNvPicPr>
+                <a:picLocks noChangeAspect="1" noChangeArrowheads="1"/>
+              </p:cNvPicPr>
+              <p:nvPr/>
+            </p:nvPicPr>
+            <p:blipFill>
+              <a:blip r:embed="rId14">
+                <a:extLst>
+                  <a:ext uri="{28A0092B-C50C-407E-A947-70E740481C1C}">
+                    <a14:useLocalDpi xmlns:a14="http://schemas.microsoft.com/office/drawing/2010/main" val="0"/>
+                  </a:ext>
+                </a:extLst>
+              </a:blip>
+              <a:srcRect/>
+              <a:stretch>
+                <a:fillRect/>
+              </a:stretch>
+            </p:blipFill>
+            <p:spPr bwMode="auto">
+              <a:xfrm>
+                <a:off x="6374416" y="2848025"/>
+                <a:ext cx="1030140" cy="916811"/>
+              </a:xfrm>
+              <a:prstGeom prst="rect">
+                <a:avLst/>
+              </a:prstGeom>
+              <a:noFill/>
+              <a:extLst>
+                <a:ext uri="{909E8E84-426E-40DD-AFC4-6F175D3DCCD1}">
+                  <a14:hiddenFill xmlns:a14="http://schemas.microsoft.com/office/drawing/2010/main">
+                    <a:solidFill>
+                      <a:srgbClr val="FFFFFF"/>
+                    </a:solidFill>
+                  </a14:hiddenFill>
+                </a:ext>
+              </a:extLst>
+            </p:spPr>
+          </p:pic>
+          <p:pic>
+            <p:nvPicPr>
+              <p:cNvPr id="1052" name="Picture 28">
+                <a:extLst>
+                  <a:ext uri="{FF2B5EF4-FFF2-40B4-BE49-F238E27FC236}">
+                    <a16:creationId xmlns:a16="http://schemas.microsoft.com/office/drawing/2014/main" id="{53FB5B16-0522-4A8F-2A9B-5241A284A5E4}"/>
+                  </a:ext>
+                </a:extLst>
+              </p:cNvPr>
+              <p:cNvPicPr>
+                <a:picLocks noChangeAspect="1" noChangeArrowheads="1"/>
+              </p:cNvPicPr>
+              <p:nvPr/>
+            </p:nvPicPr>
+            <p:blipFill>
+              <a:blip r:embed="rId15">
+                <a:extLst>
+                  <a:ext uri="{28A0092B-C50C-407E-A947-70E740481C1C}">
+                    <a14:useLocalDpi xmlns:a14="http://schemas.microsoft.com/office/drawing/2010/main" val="0"/>
+                  </a:ext>
+                </a:extLst>
+              </a:blip>
+              <a:srcRect/>
+              <a:stretch>
+                <a:fillRect/>
+              </a:stretch>
+            </p:blipFill>
+            <p:spPr bwMode="auto">
+              <a:xfrm>
+                <a:off x="3014928" y="2777758"/>
+                <a:ext cx="1057345" cy="1057345"/>
+              </a:xfrm>
+              <a:prstGeom prst="rect">
+                <a:avLst/>
+              </a:prstGeom>
+              <a:noFill/>
+              <a:extLst>
+                <a:ext uri="{909E8E84-426E-40DD-AFC4-6F175D3DCCD1}">
+                  <a14:hiddenFill xmlns:a14="http://schemas.microsoft.com/office/drawing/2010/main">
+                    <a:solidFill>
+                      <a:srgbClr val="FFFFFF"/>
+                    </a:solidFill>
+                  </a14:hiddenFill>
+                </a:ext>
+              </a:extLst>
+            </p:spPr>
+          </p:pic>
+          <p:pic>
+            <p:nvPicPr>
+              <p:cNvPr id="1058" name="Picture 34" descr="Typescript - Free brands and logotypes icons">
+                <a:extLst>
+                  <a:ext uri="{FF2B5EF4-FFF2-40B4-BE49-F238E27FC236}">
+                    <a16:creationId xmlns:a16="http://schemas.microsoft.com/office/drawing/2014/main" id="{2C07C8E4-D0A9-AF31-0EEE-AB372C236DAA}"/>
+                  </a:ext>
+                </a:extLst>
+              </p:cNvPr>
+              <p:cNvPicPr>
+                <a:picLocks noChangeAspect="1" noChangeArrowheads="1"/>
+              </p:cNvPicPr>
+              <p:nvPr/>
+            </p:nvPicPr>
+            <p:blipFill>
+              <a:blip r:embed="rId16">
+                <a:extLst>
+                  <a:ext uri="{28A0092B-C50C-407E-A947-70E740481C1C}">
+                    <a14:useLocalDpi xmlns:a14="http://schemas.microsoft.com/office/drawing/2010/main" val="0"/>
+                  </a:ext>
+                </a:extLst>
+              </a:blip>
+              <a:srcRect/>
+              <a:stretch>
+                <a:fillRect/>
+              </a:stretch>
+            </p:blipFill>
+            <p:spPr bwMode="auto">
+              <a:xfrm>
+                <a:off x="4766144" y="2849230"/>
+                <a:ext cx="914401" cy="914401"/>
+              </a:xfrm>
+              <a:prstGeom prst="rect">
+                <a:avLst/>
+              </a:prstGeom>
+              <a:noFill/>
+              <a:extLst>
+                <a:ext uri="{909E8E84-426E-40DD-AFC4-6F175D3DCCD1}">
+                  <a14:hiddenFill xmlns:a14="http://schemas.microsoft.com/office/drawing/2010/main">
+                    <a:solidFill>
+                      <a:srgbClr val="FFFFFF"/>
+                    </a:solidFill>
+                  </a14:hiddenFill>
+                </a:ext>
+              </a:extLst>
+            </p:spPr>
+          </p:pic>
+        </p:grpSp>
+      </p:grpSp>
+      <p:grpSp>
+        <p:nvGrpSpPr>
+          <p:cNvPr id="34" name="Группа 33">
             <a:extLst>
               <a:ext uri="{FF2B5EF4-FFF2-40B4-BE49-F238E27FC236}">
-                <a16:creationId xmlns:a16="http://schemas.microsoft.com/office/drawing/2014/main" id="{9A2FFD74-CE80-D6EB-3FD1-A30704DC29C9}"/>
+                <a16:creationId xmlns:a16="http://schemas.microsoft.com/office/drawing/2014/main" id="{1986405D-5712-AEAA-0904-4FD626BC533F}"/>
               </a:ext>
             </a:extLst>
           </p:cNvPr>
-          <p:cNvPicPr>
-            <a:picLocks noChangeAspect="1" noChangeArrowheads="1"/>
-          </p:cNvPicPr>
+          <p:cNvGrpSpPr/>
           <p:nvPr/>
-        </p:nvPicPr>
-        <p:blipFill>
-          <a:blip r:embed="rId14">
-            <a:extLst>
-              <a:ext uri="{28A0092B-C50C-407E-A947-70E740481C1C}">
-                <a14:useLocalDpi xmlns:a14="http://schemas.microsoft.com/office/drawing/2010/main" val="0"/>
-              </a:ext>
-            </a:extLst>
-          </a:blip>
-          <a:srcRect/>
-          <a:stretch>
-            <a:fillRect/>
-          </a:stretch>
-        </p:blipFill>
-        <p:spPr bwMode="auto">
+        </p:nvGrpSpPr>
+        <p:grpSpPr>
           <a:xfrm>
-            <a:off x="7697615" y="5304202"/>
-            <a:ext cx="914400" cy="914401"/>
+            <a:off x="5559093" y="3399222"/>
+            <a:ext cx="6508536" cy="3135067"/>
+            <a:chOff x="9060634" y="3105802"/>
+            <a:chExt cx="6508536" cy="3135067"/>
           </a:xfrm>
-          <a:prstGeom prst="rect">
-            <a:avLst/>
-          </a:prstGeom>
-          <a:noFill/>
-          <a:extLst>
-            <a:ext uri="{909E8E84-426E-40DD-AFC4-6F175D3DCCD1}">
-              <a14:hiddenFill xmlns:a14="http://schemas.microsoft.com/office/drawing/2010/main">
-                <a:solidFill>
-                  <a:srgbClr val="FFFFFF"/>
-                </a:solidFill>
-              </a14:hiddenFill>
-            </a:ext>
-          </a:extLst>
-        </p:spPr>
-      </p:pic>
-      <p:pic>
-        <p:nvPicPr>
-          <p:cNvPr id="1042" name="Picture 18" descr="What - Docker Compose Logo Transparent Png,Compose Icon - free transparent  png images - pngaaa.com">
-            <a:extLst>
-              <a:ext uri="{FF2B5EF4-FFF2-40B4-BE49-F238E27FC236}">
-                <a16:creationId xmlns:a16="http://schemas.microsoft.com/office/drawing/2014/main" id="{7E9763BB-2683-ED89-5CC3-CF25C3821616}"/>
-              </a:ext>
-            </a:extLst>
-          </p:cNvPr>
-          <p:cNvPicPr>
-            <a:picLocks noChangeAspect="1" noChangeArrowheads="1"/>
-          </p:cNvPicPr>
-          <p:nvPr/>
-        </p:nvPicPr>
-        <p:blipFill rotWithShape="1">
-          <a:blip r:embed="rId15">
-            <a:extLst>
-              <a:ext uri="{BEBA8EAE-BF5A-486C-A8C5-ECC9F3942E4B}">
-                <a14:imgProps xmlns:a14="http://schemas.microsoft.com/office/drawing/2010/main">
-                  <a14:imgLayer r:embed="rId16">
-                    <a14:imgEffect>
-                      <a14:backgroundRemoval t="6693" b="93307" l="10000" r="90000">
-                        <a14:foregroundMark x1="65444" y1="11513" x2="65444" y2="11513"/>
-                        <a14:foregroundMark x1="68556" y1="6827" x2="68556" y2="6827"/>
-                        <a14:foregroundMark x1="58889" y1="88086" x2="58889" y2="88086"/>
-                        <a14:foregroundMark x1="59889" y1="89826" x2="59889" y2="89826"/>
-                        <a14:foregroundMark x1="58556" y1="93307" x2="58556" y2="93307"/>
-                        <a14:foregroundMark x1="51778" y1="55689" x2="51778" y2="55689"/>
-                        <a14:foregroundMark x1="47778" y1="53548" x2="48889" y2="55823"/>
-                        <a14:foregroundMark x1="50556" y1="51539" x2="53556" y2="56894"/>
-                        <a14:backgroundMark x1="46444" y1="68541" x2="46444" y2="68541"/>
-                        <a14:backgroundMark x1="59000" y1="68541" x2="59000" y2="68541"/>
-                        <a14:backgroundMark x1="58111" y1="68273" x2="58111" y2="68273"/>
-                      </a14:backgroundRemoval>
-                    </a14:imgEffect>
-                  </a14:imgLayer>
-                </a14:imgProps>
-              </a:ext>
-              <a:ext uri="{28A0092B-C50C-407E-A947-70E740481C1C}">
-                <a14:useLocalDpi xmlns:a14="http://schemas.microsoft.com/office/drawing/2010/main" val="0"/>
-              </a:ext>
-            </a:extLst>
-          </a:blip>
-          <a:srcRect l="18895" r="18881"/>
-          <a:stretch>
-            <a:fillRect/>
-          </a:stretch>
-        </p:blipFill>
-        <p:spPr bwMode="auto">
-          <a:xfrm>
-            <a:off x="8813186" y="5134788"/>
-            <a:ext cx="867406" cy="1156996"/>
-          </a:xfrm>
-          <a:prstGeom prst="rect">
-            <a:avLst/>
-          </a:prstGeom>
-          <a:noFill/>
-          <a:extLst>
-            <a:ext uri="{909E8E84-426E-40DD-AFC4-6F175D3DCCD1}">
-              <a14:hiddenFill xmlns:a14="http://schemas.microsoft.com/office/drawing/2010/main">
-                <a:solidFill>
-                  <a:srgbClr val="FFFFFF"/>
-                </a:solidFill>
-              </a14:hiddenFill>
-            </a:ext>
-          </a:extLst>
-        </p:spPr>
-      </p:pic>
-      <p:pic>
-        <p:nvPicPr>
-          <p:cNvPr id="1044" name="Picture 20">
-            <a:extLst>
-              <a:ext uri="{FF2B5EF4-FFF2-40B4-BE49-F238E27FC236}">
-                <a16:creationId xmlns:a16="http://schemas.microsoft.com/office/drawing/2014/main" id="{9B4F8D2C-4B12-2484-E4C3-11BC08421545}"/>
-              </a:ext>
-            </a:extLst>
-          </p:cNvPr>
-          <p:cNvPicPr>
-            <a:picLocks noChangeAspect="1" noChangeArrowheads="1"/>
-          </p:cNvPicPr>
-          <p:nvPr/>
-        </p:nvPicPr>
-        <p:blipFill>
-          <a:blip r:embed="rId17">
-            <a:extLst>
-              <a:ext uri="{28A0092B-C50C-407E-A947-70E740481C1C}">
-                <a14:useLocalDpi xmlns:a14="http://schemas.microsoft.com/office/drawing/2010/main" val="0"/>
-              </a:ext>
-            </a:extLst>
-          </a:blip>
-          <a:srcRect/>
-          <a:stretch>
-            <a:fillRect/>
-          </a:stretch>
-        </p:blipFill>
-        <p:spPr bwMode="auto">
-          <a:xfrm>
-            <a:off x="5302721" y="5236472"/>
-            <a:ext cx="1049861" cy="1049862"/>
-          </a:xfrm>
-          <a:prstGeom prst="rect">
-            <a:avLst/>
-          </a:prstGeom>
-          <a:noFill/>
-          <a:extLst>
-            <a:ext uri="{909E8E84-426E-40DD-AFC4-6F175D3DCCD1}">
-              <a14:hiddenFill xmlns:a14="http://schemas.microsoft.com/office/drawing/2010/main">
-                <a:solidFill>
-                  <a:srgbClr val="FFFFFF"/>
-                </a:solidFill>
-              </a14:hiddenFill>
-            </a:ext>
-          </a:extLst>
-        </p:spPr>
-      </p:pic>
-      <p:pic>
-        <p:nvPicPr>
-          <p:cNvPr id="1046" name="Picture 22" descr="Vite color icon in PNG, SVG">
-            <a:extLst>
-              <a:ext uri="{FF2B5EF4-FFF2-40B4-BE49-F238E27FC236}">
-                <a16:creationId xmlns:a16="http://schemas.microsoft.com/office/drawing/2014/main" id="{4549BD3D-3B47-1CEF-C454-093B58C7F567}"/>
-              </a:ext>
-            </a:extLst>
-          </p:cNvPr>
-          <p:cNvPicPr>
-            <a:picLocks noChangeAspect="1" noChangeArrowheads="1"/>
-          </p:cNvPicPr>
-          <p:nvPr/>
-        </p:nvPicPr>
-        <p:blipFill>
-          <a:blip r:embed="rId18">
-            <a:extLst>
-              <a:ext uri="{BEBA8EAE-BF5A-486C-A8C5-ECC9F3942E4B}">
-                <a14:imgProps xmlns:a14="http://schemas.microsoft.com/office/drawing/2010/main">
-                  <a14:imgLayer r:embed="rId19">
-                    <a14:imgEffect>
-                      <a14:backgroundRemoval t="8750" b="92917" l="8500" r="91000">
-                        <a14:foregroundMark x1="8500" y1="22667" x2="8500" y2="22667"/>
-                        <a14:foregroundMark x1="68333" y1="8750" x2="68333" y2="8750"/>
-                        <a14:foregroundMark x1="91083" y1="20667" x2="91083" y2="20667"/>
-                        <a14:foregroundMark x1="50167" y1="92917" x2="50167" y2="92917"/>
-                      </a14:backgroundRemoval>
-                    </a14:imgEffect>
-                  </a14:imgLayer>
-                </a14:imgProps>
-              </a:ext>
-              <a:ext uri="{28A0092B-C50C-407E-A947-70E740481C1C}">
-                <a14:useLocalDpi xmlns:a14="http://schemas.microsoft.com/office/drawing/2010/main" val="0"/>
-              </a:ext>
-            </a:extLst>
-          </a:blip>
-          <a:srcRect/>
-          <a:stretch>
-            <a:fillRect/>
-          </a:stretch>
-        </p:blipFill>
-        <p:spPr bwMode="auto">
-          <a:xfrm>
-            <a:off x="7710956" y="4086342"/>
-            <a:ext cx="914400" cy="914400"/>
-          </a:xfrm>
-          <a:prstGeom prst="rect">
-            <a:avLst/>
-          </a:prstGeom>
-          <a:noFill/>
-          <a:extLst>
-            <a:ext uri="{909E8E84-426E-40DD-AFC4-6F175D3DCCD1}">
-              <a14:hiddenFill xmlns:a14="http://schemas.microsoft.com/office/drawing/2010/main">
-                <a:solidFill>
-                  <a:srgbClr val="FFFFFF"/>
-                </a:solidFill>
-              </a14:hiddenFill>
-            </a:ext>
-          </a:extLst>
-        </p:spPr>
-      </p:pic>
-      <p:pic>
-        <p:nvPicPr>
-          <p:cNvPr id="1048" name="Picture 24">
-            <a:extLst>
-              <a:ext uri="{FF2B5EF4-FFF2-40B4-BE49-F238E27FC236}">
-                <a16:creationId xmlns:a16="http://schemas.microsoft.com/office/drawing/2014/main" id="{C8AB69DF-4378-AA6F-8026-77E955B60F68}"/>
-              </a:ext>
-            </a:extLst>
-          </p:cNvPr>
-          <p:cNvPicPr>
-            <a:picLocks noChangeAspect="1" noChangeArrowheads="1"/>
-          </p:cNvPicPr>
-          <p:nvPr/>
-        </p:nvPicPr>
-        <p:blipFill>
-          <a:blip r:embed="rId20">
-            <a:extLst>
-              <a:ext uri="{28A0092B-C50C-407E-A947-70E740481C1C}">
-                <a14:useLocalDpi xmlns:a14="http://schemas.microsoft.com/office/drawing/2010/main" val="0"/>
-              </a:ext>
-            </a:extLst>
-          </a:blip>
-          <a:srcRect/>
-          <a:stretch>
-            <a:fillRect/>
-          </a:stretch>
-        </p:blipFill>
-        <p:spPr bwMode="auto">
-          <a:xfrm>
-            <a:off x="6438280" y="4030684"/>
-            <a:ext cx="1030140" cy="916811"/>
-          </a:xfrm>
-          <a:prstGeom prst="rect">
-            <a:avLst/>
-          </a:prstGeom>
-          <a:noFill/>
-          <a:extLst>
-            <a:ext uri="{909E8E84-426E-40DD-AFC4-6F175D3DCCD1}">
-              <a14:hiddenFill xmlns:a14="http://schemas.microsoft.com/office/drawing/2010/main">
-                <a:solidFill>
-                  <a:srgbClr val="FFFFFF"/>
-                </a:solidFill>
-              </a14:hiddenFill>
-            </a:ext>
-          </a:extLst>
-        </p:spPr>
-      </p:pic>
-      <p:pic>
-        <p:nvPicPr>
-          <p:cNvPr id="33" name="Рисунок 32" descr="Изображение выглядит как круг, Графика, символ, снимок экрана&#10;&#10;Содержимое, созданное искусственным интеллектом, может быть неверным.">
-            <a:extLst>
-              <a:ext uri="{FF2B5EF4-FFF2-40B4-BE49-F238E27FC236}">
-                <a16:creationId xmlns:a16="http://schemas.microsoft.com/office/drawing/2014/main" id="{FF0BB5BA-7288-0AC6-B572-35C37F293719}"/>
-              </a:ext>
-            </a:extLst>
-          </p:cNvPr>
-          <p:cNvPicPr>
-            <a:picLocks noChangeAspect="1"/>
-          </p:cNvPicPr>
-          <p:nvPr/>
-        </p:nvPicPr>
-        <p:blipFill>
-          <a:blip r:embed="rId21">
-            <a:extLst>
-              <a:ext uri="{28A0092B-C50C-407E-A947-70E740481C1C}">
-                <a14:useLocalDpi xmlns:a14="http://schemas.microsoft.com/office/drawing/2010/main" val="0"/>
-              </a:ext>
-            </a:extLst>
-          </a:blip>
-          <a:stretch>
-            <a:fillRect/>
-          </a:stretch>
-        </p:blipFill>
-        <p:spPr>
-          <a:xfrm>
-            <a:off x="6493333" y="2625268"/>
-            <a:ext cx="961746" cy="961746"/>
-          </a:xfrm>
-          <a:prstGeom prst="rect">
-            <a:avLst/>
-          </a:prstGeom>
-        </p:spPr>
-      </p:pic>
-      <p:pic>
-        <p:nvPicPr>
-          <p:cNvPr id="35" name="Рисунок 34" descr="Изображение выглядит как круг, Графика, снимок экрана, Шрифт&#10;&#10;Содержимое, созданное искусственным интеллектом, может быть неверным.">
-            <a:extLst>
-              <a:ext uri="{FF2B5EF4-FFF2-40B4-BE49-F238E27FC236}">
-                <a16:creationId xmlns:a16="http://schemas.microsoft.com/office/drawing/2014/main" id="{1626EC0B-86EB-9FF7-E192-0F4CD67A2FE2}"/>
-              </a:ext>
-            </a:extLst>
-          </p:cNvPr>
-          <p:cNvPicPr>
-            <a:picLocks noChangeAspect="1"/>
-          </p:cNvPicPr>
-          <p:nvPr/>
-        </p:nvPicPr>
-        <p:blipFill>
-          <a:blip r:embed="rId22">
-            <a:extLst>
-              <a:ext uri="{28A0092B-C50C-407E-A947-70E740481C1C}">
-                <a14:useLocalDpi xmlns:a14="http://schemas.microsoft.com/office/drawing/2010/main" val="0"/>
-              </a:ext>
-            </a:extLst>
-          </a:blip>
-          <a:stretch>
-            <a:fillRect/>
-          </a:stretch>
-        </p:blipFill>
-        <p:spPr>
-          <a:xfrm>
-            <a:off x="5357109" y="2620645"/>
-            <a:ext cx="941084" cy="941084"/>
-          </a:xfrm>
-          <a:prstGeom prst="rect">
-            <a:avLst/>
-          </a:prstGeom>
-        </p:spPr>
-      </p:pic>
-      <p:pic>
-        <p:nvPicPr>
-          <p:cNvPr id="1052" name="Picture 28">
-            <a:extLst>
-              <a:ext uri="{FF2B5EF4-FFF2-40B4-BE49-F238E27FC236}">
-                <a16:creationId xmlns:a16="http://schemas.microsoft.com/office/drawing/2014/main" id="{53FB5B16-0522-4A8F-2A9B-5241A284A5E4}"/>
-              </a:ext>
-            </a:extLst>
-          </p:cNvPr>
-          <p:cNvPicPr>
-            <a:picLocks noChangeAspect="1" noChangeArrowheads="1"/>
-          </p:cNvPicPr>
-          <p:nvPr/>
-        </p:nvPicPr>
-        <p:blipFill>
-          <a:blip r:embed="rId23">
-            <a:extLst>
-              <a:ext uri="{28A0092B-C50C-407E-A947-70E740481C1C}">
-                <a14:useLocalDpi xmlns:a14="http://schemas.microsoft.com/office/drawing/2010/main" val="0"/>
-              </a:ext>
-            </a:extLst>
-          </a:blip>
-          <a:srcRect/>
-          <a:stretch>
-            <a:fillRect/>
-          </a:stretch>
-        </p:blipFill>
-        <p:spPr bwMode="auto">
-          <a:xfrm>
-            <a:off x="2996036" y="3957720"/>
-            <a:ext cx="1057345" cy="1057345"/>
-          </a:xfrm>
-          <a:prstGeom prst="rect">
-            <a:avLst/>
-          </a:prstGeom>
-          <a:noFill/>
-          <a:extLst>
-            <a:ext uri="{909E8E84-426E-40DD-AFC4-6F175D3DCCD1}">
-              <a14:hiddenFill xmlns:a14="http://schemas.microsoft.com/office/drawing/2010/main">
-                <a:solidFill>
-                  <a:srgbClr val="FFFFFF"/>
-                </a:solidFill>
-              </a14:hiddenFill>
-            </a:ext>
-          </a:extLst>
-        </p:spPr>
-      </p:pic>
-      <p:pic>
-        <p:nvPicPr>
-          <p:cNvPr id="1054" name="Picture 30">
-            <a:extLst>
-              <a:ext uri="{FF2B5EF4-FFF2-40B4-BE49-F238E27FC236}">
-                <a16:creationId xmlns:a16="http://schemas.microsoft.com/office/drawing/2014/main" id="{793F3BB0-07CE-CCE9-EAFE-6988999AA4AE}"/>
-              </a:ext>
-            </a:extLst>
-          </p:cNvPr>
-          <p:cNvPicPr>
-            <a:picLocks noChangeAspect="1" noChangeArrowheads="1"/>
-          </p:cNvPicPr>
-          <p:nvPr/>
-        </p:nvPicPr>
-        <p:blipFill>
-          <a:blip r:embed="rId24">
-            <a:extLst>
-              <a:ext uri="{28A0092B-C50C-407E-A947-70E740481C1C}">
-                <a14:useLocalDpi xmlns:a14="http://schemas.microsoft.com/office/drawing/2010/main" val="0"/>
-              </a:ext>
-            </a:extLst>
-          </a:blip>
-          <a:srcRect/>
-          <a:stretch>
-            <a:fillRect/>
-          </a:stretch>
-        </p:blipFill>
-        <p:spPr bwMode="auto">
-          <a:xfrm>
-            <a:off x="2946718" y="2488410"/>
-            <a:ext cx="1155980" cy="1155980"/>
-          </a:xfrm>
-          <a:prstGeom prst="rect">
-            <a:avLst/>
-          </a:prstGeom>
-          <a:noFill/>
-          <a:extLst>
-            <a:ext uri="{909E8E84-426E-40DD-AFC4-6F175D3DCCD1}">
-              <a14:hiddenFill xmlns:a14="http://schemas.microsoft.com/office/drawing/2010/main">
-                <a:solidFill>
-                  <a:srgbClr val="FFFFFF"/>
-                </a:solidFill>
-              </a14:hiddenFill>
-            </a:ext>
-          </a:extLst>
-        </p:spPr>
-      </p:pic>
-      <p:pic>
-        <p:nvPicPr>
-          <p:cNvPr id="1056" name="Picture 32" descr="Mysql workbench - Free Icon PNG, SVG">
-            <a:extLst>
-              <a:ext uri="{FF2B5EF4-FFF2-40B4-BE49-F238E27FC236}">
-                <a16:creationId xmlns:a16="http://schemas.microsoft.com/office/drawing/2014/main" id="{2DDCC42B-0AA1-7794-7ECD-9636B97CCE69}"/>
-              </a:ext>
-            </a:extLst>
-          </p:cNvPr>
-          <p:cNvPicPr>
-            <a:picLocks noChangeAspect="1" noChangeArrowheads="1"/>
-          </p:cNvPicPr>
-          <p:nvPr/>
-        </p:nvPicPr>
-        <p:blipFill>
-          <a:blip r:embed="rId25">
-            <a:extLst>
-              <a:ext uri="{28A0092B-C50C-407E-A947-70E740481C1C}">
-                <a14:useLocalDpi xmlns:a14="http://schemas.microsoft.com/office/drawing/2010/main" val="0"/>
-              </a:ext>
-            </a:extLst>
-          </a:blip>
-          <a:srcRect/>
-          <a:stretch>
-            <a:fillRect/>
-          </a:stretch>
-        </p:blipFill>
-        <p:spPr bwMode="auto">
-          <a:xfrm>
-            <a:off x="2946718" y="1187444"/>
-            <a:ext cx="1155980" cy="1155980"/>
-          </a:xfrm>
-          <a:prstGeom prst="rect">
-            <a:avLst/>
-          </a:prstGeom>
-          <a:noFill/>
-          <a:extLst>
-            <a:ext uri="{909E8E84-426E-40DD-AFC4-6F175D3DCCD1}">
-              <a14:hiddenFill xmlns:a14="http://schemas.microsoft.com/office/drawing/2010/main">
-                <a:solidFill>
-                  <a:srgbClr val="FFFFFF"/>
-                </a:solidFill>
-              </a14:hiddenFill>
-            </a:ext>
-          </a:extLst>
-        </p:spPr>
-      </p:pic>
-      <p:pic>
-        <p:nvPicPr>
-          <p:cNvPr id="38" name="Рисунок 37" descr="Изображение выглядит как Графика, Шрифт, логотип, текст&#10;&#10;Содержимое, созданное искусственным интеллектом, может быть неверным.">
-            <a:extLst>
-              <a:ext uri="{FF2B5EF4-FFF2-40B4-BE49-F238E27FC236}">
-                <a16:creationId xmlns:a16="http://schemas.microsoft.com/office/drawing/2014/main" id="{E684F69C-F7DD-4E54-5DB0-8B1B8D82D82C}"/>
-              </a:ext>
-            </a:extLst>
-          </p:cNvPr>
-          <p:cNvPicPr>
-            <a:picLocks noChangeAspect="1"/>
-          </p:cNvPicPr>
-          <p:nvPr/>
-        </p:nvPicPr>
-        <p:blipFill>
-          <a:blip r:embed="rId26">
-            <a:extLst>
-              <a:ext uri="{28A0092B-C50C-407E-A947-70E740481C1C}">
-                <a14:useLocalDpi xmlns:a14="http://schemas.microsoft.com/office/drawing/2010/main" val="0"/>
-              </a:ext>
-            </a:extLst>
-          </a:blip>
-          <a:stretch>
-            <a:fillRect/>
-          </a:stretch>
-        </p:blipFill>
-        <p:spPr>
-          <a:xfrm>
-            <a:off x="5346778" y="1278728"/>
-            <a:ext cx="961746" cy="961746"/>
-          </a:xfrm>
-          <a:prstGeom prst="rect">
-            <a:avLst/>
-          </a:prstGeom>
-        </p:spPr>
-      </p:pic>
-      <p:pic>
-        <p:nvPicPr>
-          <p:cNvPr id="1058" name="Picture 34" descr="Typescript - Free brands and logotypes icons">
-            <a:extLst>
-              <a:ext uri="{FF2B5EF4-FFF2-40B4-BE49-F238E27FC236}">
-                <a16:creationId xmlns:a16="http://schemas.microsoft.com/office/drawing/2014/main" id="{2C07C8E4-D0A9-AF31-0EEE-AB372C236DAA}"/>
-              </a:ext>
-            </a:extLst>
-          </p:cNvPr>
-          <p:cNvPicPr>
-            <a:picLocks noChangeAspect="1" noChangeArrowheads="1"/>
-          </p:cNvPicPr>
-          <p:nvPr/>
-        </p:nvPicPr>
-        <p:blipFill>
-          <a:blip r:embed="rId27">
-            <a:extLst>
-              <a:ext uri="{28A0092B-C50C-407E-A947-70E740481C1C}">
-                <a14:useLocalDpi xmlns:a14="http://schemas.microsoft.com/office/drawing/2010/main" val="0"/>
-              </a:ext>
-            </a:extLst>
-          </a:blip>
-          <a:srcRect/>
-          <a:stretch>
-            <a:fillRect/>
-          </a:stretch>
-        </p:blipFill>
-        <p:spPr bwMode="auto">
-          <a:xfrm>
-            <a:off x="5383792" y="4033094"/>
-            <a:ext cx="914401" cy="914401"/>
-          </a:xfrm>
-          <a:prstGeom prst="rect">
-            <a:avLst/>
-          </a:prstGeom>
-          <a:noFill/>
-          <a:extLst>
-            <a:ext uri="{909E8E84-426E-40DD-AFC4-6F175D3DCCD1}">
-              <a14:hiddenFill xmlns:a14="http://schemas.microsoft.com/office/drawing/2010/main">
-                <a:solidFill>
-                  <a:srgbClr val="FFFFFF"/>
-                </a:solidFill>
-              </a14:hiddenFill>
-            </a:ext>
-          </a:extLst>
-        </p:spPr>
-      </p:pic>
-      <p:pic>
-        <p:nvPicPr>
-          <p:cNvPr id="1060" name="Picture 36" descr="Html 5 - Free logo icons">
-            <a:extLst>
-              <a:ext uri="{FF2B5EF4-FFF2-40B4-BE49-F238E27FC236}">
-                <a16:creationId xmlns:a16="http://schemas.microsoft.com/office/drawing/2014/main" id="{4ADB8FF2-B5A6-1FD1-4E9D-5D1863E21425}"/>
-              </a:ext>
-            </a:extLst>
-          </p:cNvPr>
-          <p:cNvPicPr>
-            <a:picLocks noChangeAspect="1" noChangeArrowheads="1"/>
-          </p:cNvPicPr>
-          <p:nvPr/>
-        </p:nvPicPr>
-        <p:blipFill>
-          <a:blip r:embed="rId28">
-            <a:extLst>
-              <a:ext uri="{28A0092B-C50C-407E-A947-70E740481C1C}">
-                <a14:useLocalDpi xmlns:a14="http://schemas.microsoft.com/office/drawing/2010/main" val="0"/>
-              </a:ext>
-            </a:extLst>
-          </a:blip>
-          <a:srcRect/>
-          <a:stretch>
-            <a:fillRect/>
-          </a:stretch>
-        </p:blipFill>
-        <p:spPr bwMode="auto">
-          <a:xfrm>
-            <a:off x="8779531" y="4100663"/>
-            <a:ext cx="914402" cy="914402"/>
-          </a:xfrm>
-          <a:prstGeom prst="rect">
-            <a:avLst/>
-          </a:prstGeom>
-          <a:noFill/>
-          <a:extLst>
-            <a:ext uri="{909E8E84-426E-40DD-AFC4-6F175D3DCCD1}">
-              <a14:hiddenFill xmlns:a14="http://schemas.microsoft.com/office/drawing/2010/main">
-                <a:solidFill>
-                  <a:srgbClr val="FFFFFF"/>
-                </a:solidFill>
-              </a14:hiddenFill>
-            </a:ext>
-          </a:extLst>
-        </p:spPr>
-      </p:pic>
-      <p:pic>
-        <p:nvPicPr>
-          <p:cNvPr id="1062" name="Picture 38" descr="Css 3 – Бесплатные иконки: технологии">
-            <a:extLst>
-              <a:ext uri="{FF2B5EF4-FFF2-40B4-BE49-F238E27FC236}">
-                <a16:creationId xmlns:a16="http://schemas.microsoft.com/office/drawing/2014/main" id="{1568EC24-18E1-5565-084D-A38A5CFE99F9}"/>
-              </a:ext>
-            </a:extLst>
-          </p:cNvPr>
-          <p:cNvPicPr>
-            <a:picLocks noChangeAspect="1" noChangeArrowheads="1"/>
-          </p:cNvPicPr>
-          <p:nvPr/>
-        </p:nvPicPr>
-        <p:blipFill>
-          <a:blip r:embed="rId29">
-            <a:extLst>
-              <a:ext uri="{28A0092B-C50C-407E-A947-70E740481C1C}">
-                <a14:useLocalDpi xmlns:a14="http://schemas.microsoft.com/office/drawing/2010/main" val="0"/>
-              </a:ext>
-            </a:extLst>
-          </a:blip>
-          <a:srcRect/>
-          <a:stretch>
-            <a:fillRect/>
-          </a:stretch>
-        </p:blipFill>
-        <p:spPr bwMode="auto">
-          <a:xfrm>
-            <a:off x="9829058" y="4086342"/>
-            <a:ext cx="914402" cy="914402"/>
-          </a:xfrm>
-          <a:prstGeom prst="rect">
-            <a:avLst/>
-          </a:prstGeom>
-          <a:noFill/>
-          <a:extLst>
-            <a:ext uri="{909E8E84-426E-40DD-AFC4-6F175D3DCCD1}">
-              <a14:hiddenFill xmlns:a14="http://schemas.microsoft.com/office/drawing/2010/main">
-                <a:solidFill>
-                  <a:srgbClr val="FFFFFF"/>
-                </a:solidFill>
-              </a14:hiddenFill>
-            </a:ext>
-          </a:extLst>
-        </p:spPr>
-      </p:pic>
-      <p:pic>
-        <p:nvPicPr>
-          <p:cNvPr id="1064" name="Picture 40" descr="Figma logo - Free Icon PNG, SVG">
-            <a:extLst>
-              <a:ext uri="{FF2B5EF4-FFF2-40B4-BE49-F238E27FC236}">
-                <a16:creationId xmlns:a16="http://schemas.microsoft.com/office/drawing/2014/main" id="{A6DA375E-68BA-2755-1F93-A3098C795607}"/>
-              </a:ext>
-            </a:extLst>
-          </p:cNvPr>
-          <p:cNvPicPr>
-            <a:picLocks noChangeAspect="1" noChangeArrowheads="1"/>
-          </p:cNvPicPr>
-          <p:nvPr/>
-        </p:nvPicPr>
-        <p:blipFill>
-          <a:blip r:embed="rId30">
-            <a:extLst>
-              <a:ext uri="{28A0092B-C50C-407E-A947-70E740481C1C}">
-                <a14:useLocalDpi xmlns:a14="http://schemas.microsoft.com/office/drawing/2010/main" val="0"/>
-              </a:ext>
-            </a:extLst>
-          </a:blip>
-          <a:srcRect/>
-          <a:stretch>
-            <a:fillRect/>
-          </a:stretch>
-        </p:blipFill>
-        <p:spPr bwMode="auto">
-          <a:xfrm>
-            <a:off x="4295917" y="4053683"/>
-            <a:ext cx="914401" cy="914401"/>
-          </a:xfrm>
-          <a:prstGeom prst="rect">
-            <a:avLst/>
-          </a:prstGeom>
-          <a:noFill/>
-          <a:extLst>
-            <a:ext uri="{909E8E84-426E-40DD-AFC4-6F175D3DCCD1}">
-              <a14:hiddenFill xmlns:a14="http://schemas.microsoft.com/office/drawing/2010/main">
-                <a:solidFill>
-                  <a:srgbClr val="FFFFFF"/>
-                </a:solidFill>
-              </a14:hiddenFill>
-            </a:ext>
-          </a:extLst>
-        </p:spPr>
-      </p:pic>
-      <p:pic>
-        <p:nvPicPr>
-          <p:cNvPr id="1066" name="Picture 42">
-            <a:extLst>
-              <a:ext uri="{FF2B5EF4-FFF2-40B4-BE49-F238E27FC236}">
-                <a16:creationId xmlns:a16="http://schemas.microsoft.com/office/drawing/2014/main" id="{7B5A7D31-F24A-2BE3-6C5B-E73F245D7867}"/>
-              </a:ext>
-            </a:extLst>
-          </p:cNvPr>
-          <p:cNvPicPr>
-            <a:picLocks noChangeAspect="1" noChangeArrowheads="1"/>
-          </p:cNvPicPr>
-          <p:nvPr/>
-        </p:nvPicPr>
-        <p:blipFill>
-          <a:blip r:embed="rId31">
-            <a:extLst>
-              <a:ext uri="{28A0092B-C50C-407E-A947-70E740481C1C}">
-                <a14:useLocalDpi xmlns:a14="http://schemas.microsoft.com/office/drawing/2010/main" val="0"/>
-              </a:ext>
-            </a:extLst>
-          </a:blip>
-          <a:srcRect/>
-          <a:stretch>
-            <a:fillRect/>
-          </a:stretch>
-        </p:blipFill>
-        <p:spPr bwMode="auto">
-          <a:xfrm>
-            <a:off x="3022394" y="5232497"/>
-            <a:ext cx="1004628" cy="1004628"/>
-          </a:xfrm>
-          <a:prstGeom prst="rect">
-            <a:avLst/>
-          </a:prstGeom>
-          <a:noFill/>
-          <a:extLst>
-            <a:ext uri="{909E8E84-426E-40DD-AFC4-6F175D3DCCD1}">
-              <a14:hiddenFill xmlns:a14="http://schemas.microsoft.com/office/drawing/2010/main">
-                <a:solidFill>
-                  <a:srgbClr val="FFFFFF"/>
-                </a:solidFill>
-              </a14:hiddenFill>
-            </a:ext>
-          </a:extLst>
-        </p:spPr>
-      </p:pic>
-      <p:pic>
-        <p:nvPicPr>
-          <p:cNvPr id="1070" name="Picture 46">
-            <a:extLst>
-              <a:ext uri="{FF2B5EF4-FFF2-40B4-BE49-F238E27FC236}">
-                <a16:creationId xmlns:a16="http://schemas.microsoft.com/office/drawing/2014/main" id="{173F3D0E-1B87-D045-360C-BE6301DB66B3}"/>
-              </a:ext>
-            </a:extLst>
-          </p:cNvPr>
-          <p:cNvPicPr>
-            <a:picLocks noChangeAspect="1" noChangeArrowheads="1"/>
-          </p:cNvPicPr>
-          <p:nvPr/>
-        </p:nvPicPr>
-        <p:blipFill rotWithShape="1">
-          <a:blip r:embed="rId32">
-            <a:extLst>
-              <a:ext uri="{28A0092B-C50C-407E-A947-70E740481C1C}">
-                <a14:useLocalDpi xmlns:a14="http://schemas.microsoft.com/office/drawing/2010/main" val="0"/>
-              </a:ext>
-            </a:extLst>
-          </a:blip>
-          <a:srcRect r="70917"/>
-          <a:stretch>
-            <a:fillRect/>
-          </a:stretch>
-        </p:blipFill>
-        <p:spPr bwMode="auto">
-          <a:xfrm>
-            <a:off x="6342360" y="5181295"/>
-            <a:ext cx="1161780" cy="1201726"/>
-          </a:xfrm>
-          <a:prstGeom prst="rect">
-            <a:avLst/>
-          </a:prstGeom>
-          <a:noFill/>
-          <a:extLst>
-            <a:ext uri="{909E8E84-426E-40DD-AFC4-6F175D3DCCD1}">
-              <a14:hiddenFill xmlns:a14="http://schemas.microsoft.com/office/drawing/2010/main">
-                <a:solidFill>
-                  <a:srgbClr val="FFFFFF"/>
-                </a:solidFill>
-              </a14:hiddenFill>
-            </a:ext>
-          </a:extLst>
-        </p:spPr>
-      </p:pic>
+        </p:grpSpPr>
+        <p:sp>
+          <p:nvSpPr>
+            <p:cNvPr id="30" name="Прямоугольник: скругленные углы 29">
+              <a:extLst>
+                <a:ext uri="{FF2B5EF4-FFF2-40B4-BE49-F238E27FC236}">
+                  <a16:creationId xmlns:a16="http://schemas.microsoft.com/office/drawing/2014/main" id="{BDFE6510-BA33-FF06-8D09-100D456C1B97}"/>
+                </a:ext>
+              </a:extLst>
+            </p:cNvPr>
+            <p:cNvSpPr/>
+            <p:nvPr/>
+          </p:nvSpPr>
+          <p:spPr>
+            <a:xfrm>
+              <a:off x="9060634" y="3105802"/>
+              <a:ext cx="6508536" cy="3135067"/>
+            </a:xfrm>
+            <a:prstGeom prst="roundRect">
+              <a:avLst>
+                <a:gd name="adj" fmla="val 4689"/>
+              </a:avLst>
+            </a:prstGeom>
+            <a:solidFill>
+              <a:schemeClr val="bg1"/>
+            </a:solidFill>
+            <a:ln>
+              <a:solidFill>
+                <a:schemeClr val="bg1"/>
+              </a:solidFill>
+            </a:ln>
+          </p:spPr>
+          <p:style>
+            <a:lnRef idx="2">
+              <a:schemeClr val="accent1">
+                <a:shade val="15000"/>
+              </a:schemeClr>
+            </a:lnRef>
+            <a:fillRef idx="1">
+              <a:schemeClr val="accent1"/>
+            </a:fillRef>
+            <a:effectRef idx="0">
+              <a:schemeClr val="accent1"/>
+            </a:effectRef>
+            <a:fontRef idx="minor">
+              <a:schemeClr val="lt1"/>
+            </a:fontRef>
+          </p:style>
+          <p:txBody>
+            <a:bodyPr rtlCol="0" anchor="ctr"/>
+            <a:lstStyle/>
+            <a:p>
+              <a:pPr algn="ctr"/>
+              <a:endParaRPr lang="ru-RU" dirty="0"/>
+            </a:p>
+          </p:txBody>
+        </p:sp>
+        <p:grpSp>
+          <p:nvGrpSpPr>
+            <p:cNvPr id="7" name="Группа 6">
+              <a:extLst>
+                <a:ext uri="{FF2B5EF4-FFF2-40B4-BE49-F238E27FC236}">
+                  <a16:creationId xmlns:a16="http://schemas.microsoft.com/office/drawing/2014/main" id="{8069D545-447F-E14C-2B88-221DF1F068A2}"/>
+                </a:ext>
+              </a:extLst>
+            </p:cNvPr>
+            <p:cNvGrpSpPr/>
+            <p:nvPr/>
+          </p:nvGrpSpPr>
+          <p:grpSpPr>
+            <a:xfrm>
+              <a:off x="9295805" y="4184571"/>
+              <a:ext cx="6075141" cy="1201726"/>
+              <a:chOff x="5460709" y="5501222"/>
+              <a:chExt cx="6075141" cy="1201726"/>
+            </a:xfrm>
+          </p:grpSpPr>
+          <p:pic>
+            <p:nvPicPr>
+              <p:cNvPr id="1036" name="Picture 12" descr="Докер – Бесплатные иконки: бренды и логотипы">
+                <a:extLst>
+                  <a:ext uri="{FF2B5EF4-FFF2-40B4-BE49-F238E27FC236}">
+                    <a16:creationId xmlns:a16="http://schemas.microsoft.com/office/drawing/2014/main" id="{9A2FFD74-CE80-D6EB-3FD1-A30704DC29C9}"/>
+                  </a:ext>
+                </a:extLst>
+              </p:cNvPr>
+              <p:cNvPicPr>
+                <a:picLocks noChangeAspect="1" noChangeArrowheads="1"/>
+              </p:cNvPicPr>
+              <p:nvPr/>
+            </p:nvPicPr>
+            <p:blipFill>
+              <a:blip r:embed="rId17">
+                <a:extLst>
+                  <a:ext uri="{28A0092B-C50C-407E-A947-70E740481C1C}">
+                    <a14:useLocalDpi xmlns:a14="http://schemas.microsoft.com/office/drawing/2010/main" val="0"/>
+                  </a:ext>
+                </a:extLst>
+              </a:blip>
+              <a:srcRect/>
+              <a:stretch>
+                <a:fillRect/>
+              </a:stretch>
+            </p:blipFill>
+            <p:spPr bwMode="auto">
+              <a:xfrm>
+                <a:off x="9060146" y="5644885"/>
+                <a:ext cx="914400" cy="914401"/>
+              </a:xfrm>
+              <a:prstGeom prst="rect">
+                <a:avLst/>
+              </a:prstGeom>
+              <a:noFill/>
+              <a:extLst>
+                <a:ext uri="{909E8E84-426E-40DD-AFC4-6F175D3DCCD1}">
+                  <a14:hiddenFill xmlns:a14="http://schemas.microsoft.com/office/drawing/2010/main">
+                    <a:solidFill>
+                      <a:srgbClr val="FFFFFF"/>
+                    </a:solidFill>
+                  </a14:hiddenFill>
+                </a:ext>
+              </a:extLst>
+            </p:spPr>
+          </p:pic>
+          <p:pic>
+            <p:nvPicPr>
+              <p:cNvPr id="1042" name="Picture 18" descr="What - Docker Compose Logo Transparent Png,Compose Icon - free transparent  png images - pngaaa.com">
+                <a:extLst>
+                  <a:ext uri="{FF2B5EF4-FFF2-40B4-BE49-F238E27FC236}">
+                    <a16:creationId xmlns:a16="http://schemas.microsoft.com/office/drawing/2014/main" id="{7E9763BB-2683-ED89-5CC3-CF25C3821616}"/>
+                  </a:ext>
+                </a:extLst>
+              </p:cNvPr>
+              <p:cNvPicPr>
+                <a:picLocks noChangeAspect="1" noChangeArrowheads="1"/>
+              </p:cNvPicPr>
+              <p:nvPr/>
+            </p:nvPicPr>
+            <p:blipFill rotWithShape="1">
+              <a:blip r:embed="rId18">
+                <a:extLst>
+                  <a:ext uri="{BEBA8EAE-BF5A-486C-A8C5-ECC9F3942E4B}">
+                    <a14:imgProps xmlns:a14="http://schemas.microsoft.com/office/drawing/2010/main">
+                      <a14:imgLayer r:embed="rId19">
+                        <a14:imgEffect>
+                          <a14:backgroundRemoval t="6693" b="93307" l="10000" r="90000">
+                            <a14:foregroundMark x1="65444" y1="11513" x2="65444" y2="11513"/>
+                            <a14:foregroundMark x1="68556" y1="6827" x2="68556" y2="6827"/>
+                            <a14:foregroundMark x1="58889" y1="88086" x2="58889" y2="88086"/>
+                            <a14:foregroundMark x1="59889" y1="89826" x2="59889" y2="89826"/>
+                            <a14:foregroundMark x1="58556" y1="93307" x2="58556" y2="93307"/>
+                            <a14:foregroundMark x1="51778" y1="55689" x2="51778" y2="55689"/>
+                            <a14:foregroundMark x1="47778" y1="53548" x2="48889" y2="55823"/>
+                            <a14:foregroundMark x1="50556" y1="51539" x2="53556" y2="56894"/>
+                            <a14:backgroundMark x1="46444" y1="68541" x2="46444" y2="68541"/>
+                            <a14:backgroundMark x1="59000" y1="68541" x2="59000" y2="68541"/>
+                            <a14:backgroundMark x1="58111" y1="68273" x2="58111" y2="68273"/>
+                          </a14:backgroundRemoval>
+                        </a14:imgEffect>
+                      </a14:imgLayer>
+                    </a14:imgProps>
+                  </a:ext>
+                  <a:ext uri="{28A0092B-C50C-407E-A947-70E740481C1C}">
+                    <a14:useLocalDpi xmlns:a14="http://schemas.microsoft.com/office/drawing/2010/main" val="0"/>
+                  </a:ext>
+                </a:extLst>
+              </a:blip>
+              <a:srcRect l="18895" r="18881"/>
+              <a:stretch>
+                <a:fillRect/>
+              </a:stretch>
+            </p:blipFill>
+            <p:spPr bwMode="auto">
+              <a:xfrm>
+                <a:off x="10668444" y="5523587"/>
+                <a:ext cx="867406" cy="1156996"/>
+              </a:xfrm>
+              <a:prstGeom prst="rect">
+                <a:avLst/>
+              </a:prstGeom>
+              <a:noFill/>
+              <a:extLst>
+                <a:ext uri="{909E8E84-426E-40DD-AFC4-6F175D3DCCD1}">
+                  <a14:hiddenFill xmlns:a14="http://schemas.microsoft.com/office/drawing/2010/main">
+                    <a:solidFill>
+                      <a:srgbClr val="FFFFFF"/>
+                    </a:solidFill>
+                  </a14:hiddenFill>
+                </a:ext>
+              </a:extLst>
+            </p:spPr>
+          </p:pic>
+          <p:pic>
+            <p:nvPicPr>
+              <p:cNvPr id="1044" name="Picture 20">
+                <a:extLst>
+                  <a:ext uri="{FF2B5EF4-FFF2-40B4-BE49-F238E27FC236}">
+                    <a16:creationId xmlns:a16="http://schemas.microsoft.com/office/drawing/2014/main" id="{9B4F8D2C-4B12-2484-E4C3-11BC08421545}"/>
+                  </a:ext>
+                </a:extLst>
+              </p:cNvPr>
+              <p:cNvPicPr>
+                <a:picLocks noChangeAspect="1" noChangeArrowheads="1"/>
+              </p:cNvPicPr>
+              <p:nvPr/>
+            </p:nvPicPr>
+            <p:blipFill>
+              <a:blip r:embed="rId20">
+                <a:extLst>
+                  <a:ext uri="{28A0092B-C50C-407E-A947-70E740481C1C}">
+                    <a14:useLocalDpi xmlns:a14="http://schemas.microsoft.com/office/drawing/2010/main" val="0"/>
+                  </a:ext>
+                </a:extLst>
+              </a:blip>
+              <a:srcRect/>
+              <a:stretch>
+                <a:fillRect/>
+              </a:stretch>
+            </p:blipFill>
+            <p:spPr bwMode="auto">
+              <a:xfrm>
+                <a:off x="5460709" y="5577154"/>
+                <a:ext cx="1049861" cy="1049862"/>
+              </a:xfrm>
+              <a:prstGeom prst="rect">
+                <a:avLst/>
+              </a:prstGeom>
+              <a:noFill/>
+              <a:extLst>
+                <a:ext uri="{909E8E84-426E-40DD-AFC4-6F175D3DCCD1}">
+                  <a14:hiddenFill xmlns:a14="http://schemas.microsoft.com/office/drawing/2010/main">
+                    <a:solidFill>
+                      <a:srgbClr val="FFFFFF"/>
+                    </a:solidFill>
+                  </a14:hiddenFill>
+                </a:ext>
+              </a:extLst>
+            </p:spPr>
+          </p:pic>
+          <p:pic>
+            <p:nvPicPr>
+              <p:cNvPr id="1070" name="Picture 46">
+                <a:extLst>
+                  <a:ext uri="{FF2B5EF4-FFF2-40B4-BE49-F238E27FC236}">
+                    <a16:creationId xmlns:a16="http://schemas.microsoft.com/office/drawing/2014/main" id="{173F3D0E-1B87-D045-360C-BE6301DB66B3}"/>
+                  </a:ext>
+                </a:extLst>
+              </p:cNvPr>
+              <p:cNvPicPr>
+                <a:picLocks noChangeAspect="1" noChangeArrowheads="1"/>
+              </p:cNvPicPr>
+              <p:nvPr/>
+            </p:nvPicPr>
+            <p:blipFill rotWithShape="1">
+              <a:blip r:embed="rId21">
+                <a:extLst>
+                  <a:ext uri="{28A0092B-C50C-407E-A947-70E740481C1C}">
+                    <a14:useLocalDpi xmlns:a14="http://schemas.microsoft.com/office/drawing/2010/main" val="0"/>
+                  </a:ext>
+                </a:extLst>
+              </a:blip>
+              <a:srcRect r="70917"/>
+              <a:stretch>
+                <a:fillRect/>
+              </a:stretch>
+            </p:blipFill>
+            <p:spPr bwMode="auto">
+              <a:xfrm>
+                <a:off x="7204468" y="5501222"/>
+                <a:ext cx="1161780" cy="1201726"/>
+              </a:xfrm>
+              <a:prstGeom prst="rect">
+                <a:avLst/>
+              </a:prstGeom>
+              <a:noFill/>
+              <a:extLst>
+                <a:ext uri="{909E8E84-426E-40DD-AFC4-6F175D3DCCD1}">
+                  <a14:hiddenFill xmlns:a14="http://schemas.microsoft.com/office/drawing/2010/main">
+                    <a:solidFill>
+                      <a:srgbClr val="FFFFFF"/>
+                    </a:solidFill>
+                  </a14:hiddenFill>
+                </a:ext>
+              </a:extLst>
+            </p:spPr>
+          </p:pic>
+        </p:grpSp>
+      </p:grpSp>
       <p:grpSp>
         <p:nvGrpSpPr>
           <p:cNvPr id="42" name="Группа 41">
@@ -12928,6 +15211,620 @@
               </a:rPr>
               <a:t>Средства разработки</a:t>
             </a:r>
+          </a:p>
+        </p:txBody>
+      </p:sp>
+      <p:grpSp>
+        <p:nvGrpSpPr>
+          <p:cNvPr id="39" name="Группа 38">
+            <a:extLst>
+              <a:ext uri="{FF2B5EF4-FFF2-40B4-BE49-F238E27FC236}">
+                <a16:creationId xmlns:a16="http://schemas.microsoft.com/office/drawing/2014/main" id="{F00E9408-7241-E106-0CA0-C4913B0AE106}"/>
+              </a:ext>
+            </a:extLst>
+          </p:cNvPr>
+          <p:cNvGrpSpPr/>
+          <p:nvPr/>
+        </p:nvGrpSpPr>
+        <p:grpSpPr>
+          <a:xfrm>
+            <a:off x="861468" y="1288510"/>
+            <a:ext cx="4397801" cy="1914425"/>
+            <a:chOff x="126237" y="1900773"/>
+            <a:chExt cx="4397801" cy="1914425"/>
+          </a:xfrm>
+        </p:grpSpPr>
+        <p:grpSp>
+          <p:nvGrpSpPr>
+            <p:cNvPr id="36" name="Группа 35">
+              <a:extLst>
+                <a:ext uri="{FF2B5EF4-FFF2-40B4-BE49-F238E27FC236}">
+                  <a16:creationId xmlns:a16="http://schemas.microsoft.com/office/drawing/2014/main" id="{B02DE382-A648-2F8E-C0D7-ECB85B5BC814}"/>
+                </a:ext>
+              </a:extLst>
+            </p:cNvPr>
+            <p:cNvGrpSpPr/>
+            <p:nvPr/>
+          </p:nvGrpSpPr>
+          <p:grpSpPr>
+            <a:xfrm>
+              <a:off x="126237" y="1900773"/>
+              <a:ext cx="4397801" cy="1914425"/>
+              <a:chOff x="-873883" y="564905"/>
+              <a:chExt cx="4397801" cy="1914425"/>
+            </a:xfrm>
+          </p:grpSpPr>
+          <p:sp>
+            <p:nvSpPr>
+              <p:cNvPr id="2" name="Прямоугольник: скругленные углы 1">
+                <a:extLst>
+                  <a:ext uri="{FF2B5EF4-FFF2-40B4-BE49-F238E27FC236}">
+                    <a16:creationId xmlns:a16="http://schemas.microsoft.com/office/drawing/2014/main" id="{85586D6E-190F-65E8-1248-54D22741B042}"/>
+                  </a:ext>
+                </a:extLst>
+              </p:cNvPr>
+              <p:cNvSpPr/>
+              <p:nvPr/>
+            </p:nvSpPr>
+            <p:spPr>
+              <a:xfrm>
+                <a:off x="-873883" y="564905"/>
+                <a:ext cx="4397801" cy="1914425"/>
+              </a:xfrm>
+              <a:prstGeom prst="roundRect">
+                <a:avLst>
+                  <a:gd name="adj" fmla="val 4689"/>
+                </a:avLst>
+              </a:prstGeom>
+              <a:solidFill>
+                <a:schemeClr val="bg1"/>
+              </a:solidFill>
+              <a:ln>
+                <a:solidFill>
+                  <a:schemeClr val="bg1"/>
+                </a:solidFill>
+              </a:ln>
+            </p:spPr>
+            <p:style>
+              <a:lnRef idx="2">
+                <a:schemeClr val="accent1">
+                  <a:shade val="15000"/>
+                </a:schemeClr>
+              </a:lnRef>
+              <a:fillRef idx="1">
+                <a:schemeClr val="accent1"/>
+              </a:fillRef>
+              <a:effectRef idx="0">
+                <a:schemeClr val="accent1"/>
+              </a:effectRef>
+              <a:fontRef idx="minor">
+                <a:schemeClr val="lt1"/>
+              </a:fontRef>
+            </p:style>
+            <p:txBody>
+              <a:bodyPr rtlCol="0" anchor="ctr"/>
+              <a:lstStyle/>
+              <a:p>
+                <a:pPr algn="ctr"/>
+                <a:endParaRPr lang="ru-RU" dirty="0"/>
+              </a:p>
+            </p:txBody>
+          </p:sp>
+          <p:pic>
+            <p:nvPicPr>
+              <p:cNvPr id="1056" name="Picture 32" descr="Mysql workbench - Free Icon PNG, SVG">
+                <a:extLst>
+                  <a:ext uri="{FF2B5EF4-FFF2-40B4-BE49-F238E27FC236}">
+                    <a16:creationId xmlns:a16="http://schemas.microsoft.com/office/drawing/2014/main" id="{2DDCC42B-0AA1-7794-7ECD-9636B97CCE69}"/>
+                  </a:ext>
+                </a:extLst>
+              </p:cNvPr>
+              <p:cNvPicPr>
+                <a:picLocks noChangeAspect="1" noChangeArrowheads="1"/>
+              </p:cNvPicPr>
+              <p:nvPr/>
+            </p:nvPicPr>
+            <p:blipFill>
+              <a:blip r:embed="rId22">
+                <a:extLst>
+                  <a:ext uri="{28A0092B-C50C-407E-A947-70E740481C1C}">
+                    <a14:useLocalDpi xmlns:a14="http://schemas.microsoft.com/office/drawing/2010/main" val="0"/>
+                  </a:ext>
+                </a:extLst>
+              </a:blip>
+              <a:srcRect/>
+              <a:stretch>
+                <a:fillRect/>
+              </a:stretch>
+            </p:blipFill>
+            <p:spPr bwMode="auto">
+              <a:xfrm>
+                <a:off x="-202414" y="1193501"/>
+                <a:ext cx="1155980" cy="1155980"/>
+              </a:xfrm>
+              <a:prstGeom prst="rect">
+                <a:avLst/>
+              </a:prstGeom>
+              <a:noFill/>
+              <a:extLst>
+                <a:ext uri="{909E8E84-426E-40DD-AFC4-6F175D3DCCD1}">
+                  <a14:hiddenFill xmlns:a14="http://schemas.microsoft.com/office/drawing/2010/main">
+                    <a:solidFill>
+                      <a:srgbClr val="FFFFFF"/>
+                    </a:solidFill>
+                  </a14:hiddenFill>
+                </a:ext>
+              </a:extLst>
+            </p:spPr>
+          </p:pic>
+          <p:pic>
+            <p:nvPicPr>
+              <p:cNvPr id="38" name="Рисунок 37" descr="Изображение выглядит как Графика, Шрифт, логотип, текст&#10;&#10;Содержимое, созданное искусственным интеллектом, может быть неверным.">
+                <a:extLst>
+                  <a:ext uri="{FF2B5EF4-FFF2-40B4-BE49-F238E27FC236}">
+                    <a16:creationId xmlns:a16="http://schemas.microsoft.com/office/drawing/2014/main" id="{E684F69C-F7DD-4E54-5DB0-8B1B8D82D82C}"/>
+                  </a:ext>
+                </a:extLst>
+              </p:cNvPr>
+              <p:cNvPicPr>
+                <a:picLocks noChangeAspect="1"/>
+              </p:cNvPicPr>
+              <p:nvPr/>
+            </p:nvPicPr>
+            <p:blipFill>
+              <a:blip r:embed="rId23">
+                <a:extLst>
+                  <a:ext uri="{28A0092B-C50C-407E-A947-70E740481C1C}">
+                    <a14:useLocalDpi xmlns:a14="http://schemas.microsoft.com/office/drawing/2010/main" val="0"/>
+                  </a:ext>
+                </a:extLst>
+              </a:blip>
+              <a:stretch>
+                <a:fillRect/>
+              </a:stretch>
+            </p:blipFill>
+            <p:spPr>
+              <a:xfrm>
+                <a:off x="1841763" y="1308947"/>
+                <a:ext cx="961746" cy="961746"/>
+              </a:xfrm>
+              <a:prstGeom prst="rect">
+                <a:avLst/>
+              </a:prstGeom>
+            </p:spPr>
+          </p:pic>
+        </p:grpSp>
+        <p:sp>
+          <p:nvSpPr>
+            <p:cNvPr id="37" name="TextBox 36">
+              <a:extLst>
+                <a:ext uri="{FF2B5EF4-FFF2-40B4-BE49-F238E27FC236}">
+                  <a16:creationId xmlns:a16="http://schemas.microsoft.com/office/drawing/2014/main" id="{C848CE6F-7A09-BC5B-B7C2-A0087E126D91}"/>
+                </a:ext>
+              </a:extLst>
+            </p:cNvPr>
+            <p:cNvSpPr txBox="1"/>
+            <p:nvPr/>
+          </p:nvSpPr>
+          <p:spPr>
+            <a:xfrm>
+              <a:off x="126238" y="2043676"/>
+              <a:ext cx="4397800" cy="400110"/>
+            </a:xfrm>
+            <a:prstGeom prst="rect">
+              <a:avLst/>
+            </a:prstGeom>
+            <a:noFill/>
+          </p:spPr>
+          <p:txBody>
+            <a:bodyPr wrap="square" rtlCol="0">
+              <a:spAutoFit/>
+            </a:bodyPr>
+            <a:lstStyle/>
+            <a:p>
+              <a:pPr algn="ctr"/>
+              <a:r>
+                <a:rPr lang="ru-RU" sz="2000" dirty="0">
+                  <a:latin typeface="Comfortaa Medium" pitchFamily="2" charset="0"/>
+                </a:rPr>
+                <a:t>БАЗА ДАННЫХ</a:t>
+              </a:r>
+            </a:p>
+          </p:txBody>
+        </p:sp>
+      </p:grpSp>
+      <p:grpSp>
+        <p:nvGrpSpPr>
+          <p:cNvPr id="41" name="Группа 40">
+            <a:extLst>
+              <a:ext uri="{FF2B5EF4-FFF2-40B4-BE49-F238E27FC236}">
+                <a16:creationId xmlns:a16="http://schemas.microsoft.com/office/drawing/2014/main" id="{12874DC2-8EEB-DDB3-BD02-DA51787FA8B5}"/>
+              </a:ext>
+            </a:extLst>
+          </p:cNvPr>
+          <p:cNvGrpSpPr/>
+          <p:nvPr/>
+        </p:nvGrpSpPr>
+        <p:grpSpPr>
+          <a:xfrm>
+            <a:off x="861467" y="3399222"/>
+            <a:ext cx="4397802" cy="3131582"/>
+            <a:chOff x="2463106" y="3150091"/>
+            <a:chExt cx="4397802" cy="3131582"/>
+          </a:xfrm>
+        </p:grpSpPr>
+        <p:grpSp>
+          <p:nvGrpSpPr>
+            <p:cNvPr id="32" name="Группа 31">
+              <a:extLst>
+                <a:ext uri="{FF2B5EF4-FFF2-40B4-BE49-F238E27FC236}">
+                  <a16:creationId xmlns:a16="http://schemas.microsoft.com/office/drawing/2014/main" id="{70EF6810-FC94-119D-00BB-260915AF2587}"/>
+                </a:ext>
+              </a:extLst>
+            </p:cNvPr>
+            <p:cNvGrpSpPr/>
+            <p:nvPr/>
+          </p:nvGrpSpPr>
+          <p:grpSpPr>
+            <a:xfrm>
+              <a:off x="2463107" y="3150091"/>
+              <a:ext cx="4397801" cy="3131582"/>
+              <a:chOff x="-752666" y="3101899"/>
+              <a:chExt cx="4397801" cy="3131582"/>
+            </a:xfrm>
+          </p:grpSpPr>
+          <p:sp>
+            <p:nvSpPr>
+              <p:cNvPr id="3" name="Прямоугольник: скругленные углы 2">
+                <a:extLst>
+                  <a:ext uri="{FF2B5EF4-FFF2-40B4-BE49-F238E27FC236}">
+                    <a16:creationId xmlns:a16="http://schemas.microsoft.com/office/drawing/2014/main" id="{FFFD35EF-466C-137B-737B-94D755C50971}"/>
+                  </a:ext>
+                </a:extLst>
+              </p:cNvPr>
+              <p:cNvSpPr/>
+              <p:nvPr/>
+            </p:nvSpPr>
+            <p:spPr>
+              <a:xfrm>
+                <a:off x="-752666" y="3101899"/>
+                <a:ext cx="4397801" cy="3131582"/>
+              </a:xfrm>
+              <a:prstGeom prst="roundRect">
+                <a:avLst>
+                  <a:gd name="adj" fmla="val 4689"/>
+                </a:avLst>
+              </a:prstGeom>
+              <a:solidFill>
+                <a:schemeClr val="bg1"/>
+              </a:solidFill>
+              <a:ln>
+                <a:solidFill>
+                  <a:schemeClr val="bg1"/>
+                </a:solidFill>
+              </a:ln>
+            </p:spPr>
+            <p:style>
+              <a:lnRef idx="2">
+                <a:schemeClr val="accent1">
+                  <a:shade val="15000"/>
+                </a:schemeClr>
+              </a:lnRef>
+              <a:fillRef idx="1">
+                <a:schemeClr val="accent1"/>
+              </a:fillRef>
+              <a:effectRef idx="0">
+                <a:schemeClr val="accent1"/>
+              </a:effectRef>
+              <a:fontRef idx="minor">
+                <a:schemeClr val="lt1"/>
+              </a:fontRef>
+            </p:style>
+            <p:txBody>
+              <a:bodyPr rtlCol="0" anchor="ctr"/>
+              <a:lstStyle/>
+              <a:p>
+                <a:pPr algn="ctr"/>
+                <a:endParaRPr lang="ru-RU" dirty="0"/>
+              </a:p>
+            </p:txBody>
+          </p:sp>
+          <p:grpSp>
+            <p:nvGrpSpPr>
+              <p:cNvPr id="27" name="Группа 26">
+                <a:extLst>
+                  <a:ext uri="{FF2B5EF4-FFF2-40B4-BE49-F238E27FC236}">
+                    <a16:creationId xmlns:a16="http://schemas.microsoft.com/office/drawing/2014/main" id="{C47C3A26-EF4B-A444-AC2D-B8C06BB901A4}"/>
+                  </a:ext>
+                </a:extLst>
+              </p:cNvPr>
+              <p:cNvGrpSpPr/>
+              <p:nvPr/>
+            </p:nvGrpSpPr>
+            <p:grpSpPr>
+              <a:xfrm>
+                <a:off x="-179285" y="3791660"/>
+                <a:ext cx="3104011" cy="2309583"/>
+                <a:chOff x="2313833" y="1233487"/>
+                <a:chExt cx="3104011" cy="2309583"/>
+              </a:xfrm>
+            </p:grpSpPr>
+            <p:pic>
+              <p:nvPicPr>
+                <p:cNvPr id="9" name="Рисунок 8">
+                  <a:extLst>
+                    <a:ext uri="{FF2B5EF4-FFF2-40B4-BE49-F238E27FC236}">
+                      <a16:creationId xmlns:a16="http://schemas.microsoft.com/office/drawing/2014/main" id="{F8F6AFAB-8690-7443-E42D-BC76C4EADAE1}"/>
+                    </a:ext>
+                  </a:extLst>
+                </p:cNvPr>
+                <p:cNvPicPr>
+                  <a:picLocks noChangeAspect="1"/>
+                </p:cNvPicPr>
+                <p:nvPr/>
+              </p:nvPicPr>
+              <p:blipFill>
+                <a:blip r:embed="rId24">
+                  <a:extLst>
+                    <a:ext uri="{96DAC541-7B7A-43D3-8B79-37D633B846F1}">
+                      <asvg:svgBlip xmlns:asvg="http://schemas.microsoft.com/office/drawing/2016/SVG/main" r:embed="rId25"/>
+                    </a:ext>
+                  </a:extLst>
+                </a:blip>
+                <a:srcRect l="-9144" t="-3130" r="-6877" b="-1"/>
+                <a:stretch>
+                  <a:fillRect/>
+                </a:stretch>
+              </p:blipFill>
+              <p:spPr>
+                <a:xfrm>
+                  <a:off x="4367980" y="1268574"/>
+                  <a:ext cx="1049864" cy="1049862"/>
+                </a:xfrm>
+                <a:prstGeom prst="rect">
+                  <a:avLst/>
+                </a:prstGeom>
+              </p:spPr>
+            </p:pic>
+            <p:pic>
+              <p:nvPicPr>
+                <p:cNvPr id="33" name="Рисунок 32" descr="Изображение выглядит как круг, Графика, символ, снимок экрана&#10;&#10;Содержимое, созданное искусственным интеллектом, может быть неверным.">
+                  <a:extLst>
+                    <a:ext uri="{FF2B5EF4-FFF2-40B4-BE49-F238E27FC236}">
+                      <a16:creationId xmlns:a16="http://schemas.microsoft.com/office/drawing/2014/main" id="{FF0BB5BA-7288-0AC6-B572-35C37F293719}"/>
+                    </a:ext>
+                  </a:extLst>
+                </p:cNvPr>
+                <p:cNvPicPr>
+                  <a:picLocks noChangeAspect="1"/>
+                </p:cNvPicPr>
+                <p:nvPr/>
+              </p:nvPicPr>
+              <p:blipFill>
+                <a:blip r:embed="rId26">
+                  <a:extLst>
+                    <a:ext uri="{28A0092B-C50C-407E-A947-70E740481C1C}">
+                      <a14:useLocalDpi xmlns:a14="http://schemas.microsoft.com/office/drawing/2010/main" val="0"/>
+                    </a:ext>
+                  </a:extLst>
+                </a:blip>
+                <a:stretch>
+                  <a:fillRect/>
+                </a:stretch>
+              </p:blipFill>
+              <p:spPr>
+                <a:xfrm>
+                  <a:off x="4456098" y="2552755"/>
+                  <a:ext cx="961746" cy="961746"/>
+                </a:xfrm>
+                <a:prstGeom prst="rect">
+                  <a:avLst/>
+                </a:prstGeom>
+              </p:spPr>
+            </p:pic>
+            <p:pic>
+              <p:nvPicPr>
+                <p:cNvPr id="35" name="Рисунок 34" descr="Изображение выглядит как круг, Графика, снимок экрана, Шрифт&#10;&#10;Содержимое, созданное искусственным интеллектом, может быть неверным.">
+                  <a:extLst>
+                    <a:ext uri="{FF2B5EF4-FFF2-40B4-BE49-F238E27FC236}">
+                      <a16:creationId xmlns:a16="http://schemas.microsoft.com/office/drawing/2014/main" id="{1626EC0B-86EB-9FF7-E192-0F4CD67A2FE2}"/>
+                    </a:ext>
+                  </a:extLst>
+                </p:cNvPr>
+                <p:cNvPicPr>
+                  <a:picLocks noChangeAspect="1"/>
+                </p:cNvPicPr>
+                <p:nvPr/>
+              </p:nvPicPr>
+              <p:blipFill>
+                <a:blip r:embed="rId27">
+                  <a:extLst>
+                    <a:ext uri="{28A0092B-C50C-407E-A947-70E740481C1C}">
+                      <a14:useLocalDpi xmlns:a14="http://schemas.microsoft.com/office/drawing/2010/main" val="0"/>
+                    </a:ext>
+                  </a:extLst>
+                </a:blip>
+                <a:stretch>
+                  <a:fillRect/>
+                </a:stretch>
+              </p:blipFill>
+              <p:spPr>
+                <a:xfrm>
+                  <a:off x="2411921" y="2601986"/>
+                  <a:ext cx="941084" cy="941084"/>
+                </a:xfrm>
+                <a:prstGeom prst="rect">
+                  <a:avLst/>
+                </a:prstGeom>
+              </p:spPr>
+            </p:pic>
+            <p:pic>
+              <p:nvPicPr>
+                <p:cNvPr id="1054" name="Picture 30">
+                  <a:extLst>
+                    <a:ext uri="{FF2B5EF4-FFF2-40B4-BE49-F238E27FC236}">
+                      <a16:creationId xmlns:a16="http://schemas.microsoft.com/office/drawing/2014/main" id="{793F3BB0-07CE-CCE9-EAFE-6988999AA4AE}"/>
+                    </a:ext>
+                  </a:extLst>
+                </p:cNvPr>
+                <p:cNvPicPr>
+                  <a:picLocks noChangeAspect="1" noChangeArrowheads="1"/>
+                </p:cNvPicPr>
+                <p:nvPr/>
+              </p:nvPicPr>
+              <p:blipFill>
+                <a:blip r:embed="rId28">
+                  <a:extLst>
+                    <a:ext uri="{28A0092B-C50C-407E-A947-70E740481C1C}">
+                      <a14:useLocalDpi xmlns:a14="http://schemas.microsoft.com/office/drawing/2010/main" val="0"/>
+                    </a:ext>
+                  </a:extLst>
+                </a:blip>
+                <a:srcRect/>
+                <a:stretch>
+                  <a:fillRect/>
+                </a:stretch>
+              </p:blipFill>
+              <p:spPr bwMode="auto">
+                <a:xfrm>
+                  <a:off x="2313833" y="1233487"/>
+                  <a:ext cx="1155980" cy="1155980"/>
+                </a:xfrm>
+                <a:prstGeom prst="rect">
+                  <a:avLst/>
+                </a:prstGeom>
+                <a:noFill/>
+                <a:extLst>
+                  <a:ext uri="{909E8E84-426E-40DD-AFC4-6F175D3DCCD1}">
+                    <a14:hiddenFill xmlns:a14="http://schemas.microsoft.com/office/drawing/2010/main">
+                      <a:solidFill>
+                        <a:srgbClr val="FFFFFF"/>
+                      </a:solidFill>
+                    </a14:hiddenFill>
+                  </a:ext>
+                </a:extLst>
+              </p:spPr>
+            </p:pic>
+          </p:grpSp>
+        </p:grpSp>
+        <p:sp>
+          <p:nvSpPr>
+            <p:cNvPr id="40" name="TextBox 39">
+              <a:extLst>
+                <a:ext uri="{FF2B5EF4-FFF2-40B4-BE49-F238E27FC236}">
+                  <a16:creationId xmlns:a16="http://schemas.microsoft.com/office/drawing/2014/main" id="{F41D9DA0-18FA-EC91-9647-DCB69DC4464F}"/>
+                </a:ext>
+              </a:extLst>
+            </p:cNvPr>
+            <p:cNvSpPr txBox="1"/>
+            <p:nvPr/>
+          </p:nvSpPr>
+          <p:spPr>
+            <a:xfrm>
+              <a:off x="2463106" y="3330251"/>
+              <a:ext cx="4397799" cy="400110"/>
+            </a:xfrm>
+            <a:prstGeom prst="rect">
+              <a:avLst/>
+            </a:prstGeom>
+            <a:noFill/>
+          </p:spPr>
+          <p:txBody>
+            <a:bodyPr wrap="square" rtlCol="0">
+              <a:spAutoFit/>
+            </a:bodyPr>
+            <a:lstStyle/>
+            <a:p>
+              <a:pPr algn="ctr"/>
+              <a:r>
+                <a:rPr lang="en-US" sz="2000" dirty="0">
+                  <a:latin typeface="Comfortaa Medium" pitchFamily="2" charset="0"/>
+                </a:rPr>
+                <a:t>API</a:t>
+              </a:r>
+              <a:endParaRPr lang="ru-RU" sz="2000" dirty="0">
+                <a:latin typeface="Comfortaa Medium" pitchFamily="2" charset="0"/>
+              </a:endParaRPr>
+            </a:p>
+          </p:txBody>
+        </p:sp>
+      </p:grpSp>
+      <p:sp>
+        <p:nvSpPr>
+          <p:cNvPr id="46" name="TextBox 45">
+            <a:extLst>
+              <a:ext uri="{FF2B5EF4-FFF2-40B4-BE49-F238E27FC236}">
+                <a16:creationId xmlns:a16="http://schemas.microsoft.com/office/drawing/2014/main" id="{95390C72-8E8A-9299-2558-5AF9300071CA}"/>
+              </a:ext>
+            </a:extLst>
+          </p:cNvPr>
+          <p:cNvSpPr txBox="1"/>
+          <p:nvPr/>
+        </p:nvSpPr>
+        <p:spPr>
+          <a:xfrm>
+            <a:off x="5559092" y="3555621"/>
+            <a:ext cx="6508537" cy="400110"/>
+          </a:xfrm>
+          <a:prstGeom prst="rect">
+            <a:avLst/>
+          </a:prstGeom>
+          <a:noFill/>
+        </p:spPr>
+        <p:txBody>
+          <a:bodyPr wrap="square" rtlCol="0">
+            <a:spAutoFit/>
+          </a:bodyPr>
+          <a:lstStyle/>
+          <a:p>
+            <a:pPr algn="ctr"/>
+            <a:r>
+              <a:rPr lang="ru-RU" sz="2000" dirty="0">
+                <a:latin typeface="Comfortaa Medium" pitchFamily="2" charset="0"/>
+              </a:rPr>
+              <a:t>СЕРВЕР</a:t>
+            </a:r>
+          </a:p>
+        </p:txBody>
+      </p:sp>
+      <p:sp>
+        <p:nvSpPr>
+          <p:cNvPr id="47" name="TextBox 46">
+            <a:extLst>
+              <a:ext uri="{FF2B5EF4-FFF2-40B4-BE49-F238E27FC236}">
+                <a16:creationId xmlns:a16="http://schemas.microsoft.com/office/drawing/2014/main" id="{03D7BBB8-DDAD-B9CC-2D1A-CA1E2D917DCE}"/>
+              </a:ext>
+            </a:extLst>
+          </p:cNvPr>
+          <p:cNvSpPr txBox="1"/>
+          <p:nvPr/>
+        </p:nvSpPr>
+        <p:spPr>
+          <a:xfrm>
+            <a:off x="5559092" y="1425807"/>
+            <a:ext cx="6508537" cy="400110"/>
+          </a:xfrm>
+          <a:prstGeom prst="rect">
+            <a:avLst/>
+          </a:prstGeom>
+          <a:noFill/>
+        </p:spPr>
+        <p:txBody>
+          <a:bodyPr wrap="square" rtlCol="0">
+            <a:spAutoFit/>
+          </a:bodyPr>
+          <a:lstStyle/>
+          <a:p>
+            <a:pPr algn="ctr"/>
+            <a:r>
+              <a:rPr lang="en-US" sz="2000" dirty="0">
+                <a:latin typeface="Comfortaa Medium" pitchFamily="2" charset="0"/>
+              </a:rPr>
+              <a:t>FRONTEND</a:t>
+            </a:r>
+            <a:endParaRPr lang="ru-RU" sz="2000" dirty="0">
+              <a:latin typeface="Comfortaa Medium" pitchFamily="2" charset="0"/>
+            </a:endParaRPr>
           </a:p>
         </p:txBody>
       </p:sp>
@@ -14056,8 +16953,23 @@
                   </a:solidFill>
                   <a:latin typeface="Comfortaa Medium" pitchFamily="2" charset="0"/>
                 </a:rPr>
-                <a:t>Базы данных</a:t>
+                <a:t>База данных </a:t>
               </a:r>
+              <a:r>
+                <a:rPr lang="en-US" dirty="0">
+                  <a:solidFill>
+                    <a:schemeClr val="tx1"/>
+                  </a:solidFill>
+                  <a:latin typeface="Comfortaa Medium" pitchFamily="2" charset="0"/>
+                </a:rPr>
+                <a:t>MySQL</a:t>
+              </a:r>
+              <a:endParaRPr lang="ru-RU" dirty="0">
+                <a:solidFill>
+                  <a:schemeClr val="tx1"/>
+                </a:solidFill>
+                <a:latin typeface="Comfortaa Medium" pitchFamily="2" charset="0"/>
+              </a:endParaRPr>
             </a:p>
           </p:txBody>
         </p:sp>
